--- a/Lec_1_Модуль 1_1_Слайд-конспект.pptx
+++ b/Lec_1_Модуль 1_1_Слайд-конспект.pptx
@@ -17,6 +17,7 @@
     <p:sldId id="265" r:id="rId11"/>
     <p:sldId id="266" r:id="rId12"/>
     <p:sldId id="267" r:id="rId13"/>
+    <p:sldId id="268" r:id="rId14"/>
   </p:sldIdLst>
   <p:sldSz cx="9144000" cy="5143500" type="screen16x9"/>
   <p:notesSz cx="6858000" cy="9144000"/>
@@ -174,8 +175,8 @@
         </p:blipFill>
         <p:spPr>
           <a:xfrm>
-            <a:off x="2094975" y="118548"/>
-            <a:ext cx="4332918" cy="4379633"/>
+            <a:off x="160158" y="-16565"/>
+            <a:ext cx="1840921" cy="1860769"/>
           </a:xfrm>
           <a:prstGeom prst="rect">
             <a:avLst/>
@@ -203,7 +204,7 @@
           <a:lstStyle/>
           <a:p>
             <a:r>
-              <a:rPr lang="en-US"/>
+              <a:rPr lang="en-US" dirty="0"/>
               <a:t>Click to edit Master title style</a:t>
             </a:r>
           </a:p>
@@ -321,7 +322,7 @@
           </a:lstStyle>
           <a:p>
             <a:r>
-              <a:rPr lang="en-US"/>
+              <a:rPr lang="en-US" dirty="0"/>
               <a:t>Click to edit Master subtitle style</a:t>
             </a:r>
           </a:p>
@@ -1174,8 +1175,8 @@
         </p:blipFill>
         <p:spPr>
           <a:xfrm>
-            <a:off x="2094975" y="118548"/>
-            <a:ext cx="4332918" cy="4379633"/>
+            <a:off x="246296" y="75480"/>
+            <a:ext cx="1787912" cy="1807188"/>
           </a:xfrm>
           <a:prstGeom prst="rect">
             <a:avLst/>
@@ -2704,7 +2705,7 @@
         <p:spPr>
           <a:xfrm>
             <a:off x="457200" y="205979"/>
-            <a:ext cx="7433733" cy="857250"/>
+            <a:ext cx="7433733" cy="459709"/>
           </a:xfrm>
           <a:prstGeom prst="rect">
             <a:avLst/>
@@ -2735,8 +2736,8 @@
         </p:nvSpPr>
         <p:spPr>
           <a:xfrm>
-            <a:off x="457200" y="1200151"/>
-            <a:ext cx="8229600" cy="3394472"/>
+            <a:off x="457200" y="795130"/>
+            <a:ext cx="8229600" cy="3799493"/>
           </a:xfrm>
           <a:prstGeom prst="rect">
             <a:avLst/>
@@ -2961,7 +2962,7 @@
           <a:spcPct val="0"/>
         </a:spcBef>
         <a:buNone/>
-        <a:defRPr sz="2800" kern="1200">
+        <a:defRPr sz="2400" kern="1200">
           <a:solidFill>
             <a:schemeClr val="tx1"/>
           </a:solidFill>
@@ -2978,7 +2979,7 @@
         </a:spcBef>
         <a:buFont typeface="Arial"/>
         <a:buChar char="•"/>
-        <a:defRPr sz="2400" kern="1200">
+        <a:defRPr sz="2000" kern="1200">
           <a:solidFill>
             <a:schemeClr val="tx1"/>
           </a:solidFill>
@@ -2993,7 +2994,7 @@
         </a:spcBef>
         <a:buFont typeface="Arial"/>
         <a:buChar char="–"/>
-        <a:defRPr sz="2100" kern="1200">
+        <a:defRPr sz="2000" kern="1200">
           <a:solidFill>
             <a:schemeClr val="tx1"/>
           </a:solidFill>
@@ -3008,7 +3009,7 @@
         </a:spcBef>
         <a:buFont typeface="Arial"/>
         <a:buChar char="•"/>
-        <a:defRPr sz="1800" kern="1200">
+        <a:defRPr sz="1600" kern="1200">
           <a:solidFill>
             <a:schemeClr val="tx1"/>
           </a:solidFill>
@@ -3023,7 +3024,7 @@
         </a:spcBef>
         <a:buFont typeface="Arial"/>
         <a:buChar char="–"/>
-        <a:defRPr sz="1500" kern="1200">
+        <a:defRPr sz="1400" kern="1200">
           <a:solidFill>
             <a:schemeClr val="tx1"/>
           </a:solidFill>
@@ -3038,7 +3039,7 @@
         </a:spcBef>
         <a:buFont typeface="Arial"/>
         <a:buChar char="»"/>
-        <a:defRPr sz="1500" kern="1200">
+        <a:defRPr sz="1400" kern="1200">
           <a:solidFill>
             <a:schemeClr val="tx1"/>
           </a:solidFill>
@@ -3231,7 +3232,7 @@
             <a:spLocks noGrp="1"/>
           </p:cNvSpPr>
           <p:nvPr>
-            <p:ph type="title"/>
+            <p:ph type="ctrTitle"/>
           </p:nvPr>
         </p:nvSpPr>
         <p:spPr/>
@@ -3255,13 +3256,13 @@
             <a:spLocks noGrp="1"/>
           </p:cNvSpPr>
           <p:nvPr>
-            <p:ph type="body" idx="1"/>
+            <p:ph type="subTitle" idx="1"/>
           </p:nvPr>
         </p:nvSpPr>
         <p:spPr/>
         <p:txBody>
           <a:bodyPr>
-            <a:normAutofit/>
+            <a:normAutofit fontScale="85000" lnSpcReduction="20000"/>
           </a:bodyPr>
           <a:lstStyle/>
           <a:p>
@@ -3347,8 +3348,8 @@
           </p:nvPr>
         </p:nvGraphicFramePr>
         <p:xfrm>
-          <a:off x="457200" y="1193800"/>
-          <a:ext cx="8229600" cy="2080260"/>
+          <a:off x="457200" y="787400"/>
+          <a:ext cx="8229600" cy="3797300"/>
         </p:xfrm>
         <a:graphic>
           <a:graphicData uri="http://schemas.openxmlformats.org/drawingml/2006/table">
@@ -3774,9 +3775,143 @@
               <a:buNone/>
             </a:pPr>
             <a:r>
-              <a:rPr dirty="0" err="1"/>
               <a:t>Итог</a:t>
             </a:r>
+          </a:p>
+        </p:txBody>
+      </p:sp>
+      <p:sp>
+        <p:nvSpPr>
+          <p:cNvPr id="3" name="Content Placeholder 2"/>
+          <p:cNvSpPr>
+            <a:spLocks noGrp="1"/>
+          </p:cNvSpPr>
+          <p:nvPr>
+            <p:ph idx="1"/>
+          </p:nvPr>
+        </p:nvSpPr>
+        <p:spPr/>
+        <p:txBody>
+          <a:bodyPr/>
+          <a:lstStyle/>
+          <a:p>
+            <a:pPr marL="0" lvl="0" indent="0">
+              <a:buNone/>
+            </a:pPr>
+            <a:r>
+              <a:rPr b="1"/>
+              <a:t>Профессиональный навык</a:t>
+            </a:r>
+          </a:p>
+          <a:p>
+            <a:pPr marL="0" lvl="0" indent="0">
+              <a:buNone/>
+            </a:pPr>
+            <a:r>
+              <a:t>Не «найти документ», а установить:</a:t>
+            </a:r>
+          </a:p>
+          <a:p>
+            <a:pPr lvl="0"/>
+            <a:r>
+              <a:t>основание</a:t>
+            </a:r>
+          </a:p>
+          <a:p>
+            <a:pPr lvl="0"/>
+            <a:r>
+              <a:t>применимость</a:t>
+            </a:r>
+          </a:p>
+          <a:p>
+            <a:pPr lvl="0"/>
+            <a:r>
+              <a:t>решение</a:t>
+            </a:r>
+          </a:p>
+          <a:p>
+            <a:pPr lvl="0"/>
+            <a:r>
+              <a:t>доказательство</a:t>
+            </a:r>
+          </a:p>
+          <a:p>
+            <a:pPr lvl="0"/>
+            <a:r>
+              <a:t>ограничение</a:t>
+            </a:r>
+          </a:p>
+          <a:p>
+            <a:pPr lvl="0"/>
+            <a:r>
+              <a:t>пересмотр</a:t>
+            </a:r>
+          </a:p>
+          <a:p>
+            <a:pPr marL="0" lvl="0" indent="0">
+              <a:buNone/>
+            </a:pPr>
+            <a:r>
+              <a:t>Эта последовательность будет использоваться во всех следующих модулях курса.</a:t>
+            </a:r>
+          </a:p>
+        </p:txBody>
+      </p:sp>
+    </p:spTree>
+  </p:cSld>
+  <p:clrMapOvr>
+    <a:masterClrMapping/>
+  </p:clrMapOvr>
+</p:sld>
+</file>
+
+<file path=ppt/slides/slide13.xml><?xml version="1.0" encoding="utf-8"?>
+<p:sld xmlns:a="http://schemas.openxmlformats.org/drawingml/2006/main" xmlns:r="http://schemas.openxmlformats.org/officeDocument/2006/relationships" xmlns:p="http://schemas.openxmlformats.org/presentationml/2006/main">
+  <p:cSld>
+    <p:spTree>
+      <p:nvGrpSpPr>
+        <p:cNvPr id="1" name=""/>
+        <p:cNvGrpSpPr/>
+        <p:nvPr/>
+      </p:nvGrpSpPr>
+      <p:grpSpPr>
+        <a:xfrm>
+          <a:off x="0" y="0"/>
+          <a:ext cx="0" cy="0"/>
+          <a:chOff x="0" y="0"/>
+          <a:chExt cx="0" cy="0"/>
+        </a:xfrm>
+      </p:grpSpPr>
+      <p:sp>
+        <p:nvSpPr>
+          <p:cNvPr id="2" name="Title 1"/>
+          <p:cNvSpPr>
+            <a:spLocks noGrp="1"/>
+          </p:cNvSpPr>
+          <p:nvPr>
+            <p:ph type="title"/>
+          </p:nvPr>
+        </p:nvSpPr>
+        <p:spPr/>
+        <p:txBody>
+          <a:bodyPr/>
+          <a:lstStyle/>
+          <a:p>
+            <a:pPr marL="0" lvl="0" indent="0">
+              <a:buNone/>
+            </a:pPr>
+            <a:r>
+              <a:rPr dirty="0" err="1"/>
+              <a:t>Список</a:t>
+            </a:r>
+            <a:r>
+              <a:rPr dirty="0"/>
+              <a:t> </a:t>
+            </a:r>
+            <a:r>
+              <a:rPr dirty="0" err="1"/>
+              <a:t>литературы</a:t>
+            </a:r>
             <a:endParaRPr dirty="0"/>
           </a:p>
         </p:txBody>
@@ -3794,7 +3929,7 @@
         <p:spPr/>
         <p:txBody>
           <a:bodyPr>
-            <a:normAutofit fontScale="92500" lnSpcReduction="10000"/>
+            <a:normAutofit fontScale="62500" lnSpcReduction="20000"/>
           </a:bodyPr>
           <a:lstStyle/>
           <a:p>
@@ -3802,73 +3937,576 @@
               <a:buNone/>
             </a:pPr>
             <a:r>
-              <a:rPr lang="ru-RU" b="1" dirty="0"/>
-              <a:t>Не «найти документ», а установить:</a:t>
-            </a:r>
-          </a:p>
-          <a:p>
-            <a:pPr lvl="0"/>
-            <a:r>
-              <a:rPr dirty="0" err="1"/>
-              <a:t>основание</a:t>
-            </a:r>
-            <a:endParaRPr dirty="0"/>
-          </a:p>
-          <a:p>
-            <a:pPr lvl="0"/>
-            <a:r>
-              <a:rPr dirty="0" err="1"/>
-              <a:t>применимость</a:t>
-            </a:r>
-            <a:endParaRPr dirty="0"/>
-          </a:p>
-          <a:p>
-            <a:pPr lvl="0"/>
-            <a:r>
-              <a:rPr dirty="0" err="1"/>
-              <a:t>решение</a:t>
-            </a:r>
-            <a:endParaRPr dirty="0"/>
-          </a:p>
-          <a:p>
-            <a:pPr lvl="0"/>
-            <a:r>
-              <a:rPr dirty="0" err="1"/>
-              <a:t>доказательство</a:t>
-            </a:r>
-            <a:endParaRPr dirty="0"/>
-          </a:p>
-          <a:p>
-            <a:pPr lvl="0"/>
-            <a:r>
-              <a:rPr dirty="0" err="1"/>
-              <a:t>ограничение</a:t>
-            </a:r>
-            <a:endParaRPr dirty="0"/>
-          </a:p>
-          <a:p>
-            <a:pPr lvl="0"/>
-            <a:r>
-              <a:rPr dirty="0" err="1"/>
-              <a:t>пересмотр</a:t>
-            </a:r>
-            <a:endParaRPr dirty="0"/>
+              <a:rPr b="1" dirty="0" err="1"/>
+              <a:t>Основные</a:t>
+            </a:r>
+            <a:r>
+              <a:rPr b="1" dirty="0"/>
+              <a:t> </a:t>
+            </a:r>
+            <a:r>
+              <a:rPr b="1" dirty="0" err="1"/>
+              <a:t>источники</a:t>
+            </a:r>
+            <a:endParaRPr b="1" dirty="0"/>
+          </a:p>
+          <a:p>
+            <a:pPr marL="342900" lvl="0" indent="-342900">
+              <a:buAutoNum type="arabicPeriod"/>
+            </a:pPr>
+            <a:r>
+              <a:rPr dirty="0" err="1"/>
+              <a:t>Федеральный</a:t>
+            </a:r>
+            <a:r>
+              <a:rPr dirty="0"/>
+              <a:t> </a:t>
+            </a:r>
+            <a:r>
+              <a:rPr dirty="0" err="1"/>
+              <a:t>закон</a:t>
+            </a:r>
+            <a:r>
+              <a:rPr dirty="0"/>
+              <a:t> </a:t>
+            </a:r>
+            <a:r>
+              <a:rPr dirty="0" err="1"/>
+              <a:t>от</a:t>
+            </a:r>
+            <a:r>
+              <a:rPr dirty="0"/>
+              <a:t> 27.12.2002 №184-ФЗ «О </a:t>
+            </a:r>
+            <a:r>
+              <a:rPr dirty="0" err="1"/>
+              <a:t>техническом</a:t>
+            </a:r>
+            <a:r>
+              <a:rPr dirty="0"/>
+              <a:t> </a:t>
+            </a:r>
+            <a:r>
+              <a:rPr dirty="0" err="1"/>
+              <a:t>регулировании</a:t>
+            </a:r>
+            <a:r>
+              <a:rPr dirty="0"/>
+              <a:t>». </a:t>
+            </a:r>
+            <a:r>
+              <a:rPr dirty="0" err="1"/>
+              <a:t>Официальное</a:t>
+            </a:r>
+            <a:r>
+              <a:rPr dirty="0"/>
+              <a:t> </a:t>
+            </a:r>
+            <a:r>
+              <a:rPr dirty="0" err="1"/>
+              <a:t>опубликование</a:t>
+            </a:r>
+            <a:r>
+              <a:rPr dirty="0"/>
+              <a:t>: </a:t>
+            </a:r>
+            <a:r>
+              <a:rPr dirty="0">
+                <a:hlinkClick r:id="rId2"/>
+              </a:rPr>
+              <a:t>http://publication.pravo.gov.ru/Document/View/0001200212300020</a:t>
+            </a:r>
+            <a:r>
+              <a:rPr dirty="0"/>
+              <a:t>.</a:t>
+            </a:r>
+          </a:p>
+          <a:p>
+            <a:pPr marL="342900" lvl="0" indent="-342900">
+              <a:buAutoNum type="arabicPeriod"/>
+            </a:pPr>
+            <a:r>
+              <a:rPr dirty="0" err="1"/>
+              <a:t>Федеральный</a:t>
+            </a:r>
+            <a:r>
+              <a:rPr dirty="0"/>
+              <a:t> </a:t>
+            </a:r>
+            <a:r>
+              <a:rPr dirty="0" err="1"/>
+              <a:t>закон</a:t>
+            </a:r>
+            <a:r>
+              <a:rPr dirty="0"/>
+              <a:t> </a:t>
+            </a:r>
+            <a:r>
+              <a:rPr dirty="0" err="1"/>
+              <a:t>от</a:t>
+            </a:r>
+            <a:r>
+              <a:rPr dirty="0"/>
+              <a:t> 29.06.2015 №162-ФЗ «О </a:t>
+            </a:r>
+            <a:r>
+              <a:rPr dirty="0" err="1"/>
+              <a:t>стандартизации</a:t>
+            </a:r>
+            <a:r>
+              <a:rPr dirty="0"/>
+              <a:t> в </a:t>
+            </a:r>
+            <a:r>
+              <a:rPr dirty="0" err="1"/>
+              <a:t>Российской</a:t>
+            </a:r>
+            <a:r>
+              <a:rPr dirty="0"/>
+              <a:t> </a:t>
+            </a:r>
+            <a:r>
+              <a:rPr dirty="0" err="1"/>
+              <a:t>Федерации</a:t>
+            </a:r>
+            <a:r>
+              <a:rPr dirty="0"/>
+              <a:t>». </a:t>
+            </a:r>
+            <a:r>
+              <a:rPr dirty="0" err="1"/>
+              <a:t>Официальное</a:t>
+            </a:r>
+            <a:r>
+              <a:rPr dirty="0"/>
+              <a:t> </a:t>
+            </a:r>
+            <a:r>
+              <a:rPr dirty="0" err="1"/>
+              <a:t>опубликование</a:t>
+            </a:r>
+            <a:r>
+              <a:rPr dirty="0"/>
+              <a:t>: </a:t>
+            </a:r>
+            <a:r>
+              <a:rPr dirty="0">
+                <a:hlinkClick r:id="rId3"/>
+              </a:rPr>
+              <a:t>http://publication.pravo.gov.ru/Document/View/0001201506300012</a:t>
+            </a:r>
+            <a:r>
+              <a:rPr dirty="0"/>
+              <a:t>.</a:t>
+            </a:r>
+          </a:p>
+          <a:p>
+            <a:pPr marL="342900" lvl="0" indent="-342900">
+              <a:buAutoNum type="arabicPeriod"/>
+            </a:pPr>
+            <a:r>
+              <a:rPr dirty="0" err="1"/>
+              <a:t>Федеральный</a:t>
+            </a:r>
+            <a:r>
+              <a:rPr dirty="0"/>
+              <a:t> </a:t>
+            </a:r>
+            <a:r>
+              <a:rPr dirty="0" err="1"/>
+              <a:t>закон</a:t>
+            </a:r>
+            <a:r>
+              <a:rPr dirty="0"/>
+              <a:t> </a:t>
+            </a:r>
+            <a:r>
+              <a:rPr dirty="0" err="1"/>
+              <a:t>от</a:t>
+            </a:r>
+            <a:r>
+              <a:rPr dirty="0"/>
+              <a:t> 28.12.2013 №412-ФЗ «</a:t>
+            </a:r>
+            <a:r>
+              <a:rPr dirty="0" err="1"/>
+              <a:t>Об</a:t>
+            </a:r>
+            <a:r>
+              <a:rPr dirty="0"/>
+              <a:t> </a:t>
+            </a:r>
+            <a:r>
+              <a:rPr dirty="0" err="1"/>
+              <a:t>аккредитации</a:t>
+            </a:r>
+            <a:r>
+              <a:rPr dirty="0"/>
+              <a:t> в </a:t>
+            </a:r>
+            <a:r>
+              <a:rPr dirty="0" err="1"/>
+              <a:t>национальной</a:t>
+            </a:r>
+            <a:r>
+              <a:rPr dirty="0"/>
+              <a:t> </a:t>
+            </a:r>
+            <a:r>
+              <a:rPr dirty="0" err="1"/>
+              <a:t>системе</a:t>
+            </a:r>
+            <a:r>
+              <a:rPr dirty="0"/>
+              <a:t> </a:t>
+            </a:r>
+            <a:r>
+              <a:rPr dirty="0" err="1"/>
+              <a:t>аккредитации</a:t>
+            </a:r>
+            <a:r>
+              <a:rPr dirty="0"/>
+              <a:t>». </a:t>
+            </a:r>
+            <a:r>
+              <a:rPr dirty="0" err="1"/>
+              <a:t>Официальное</a:t>
+            </a:r>
+            <a:r>
+              <a:rPr dirty="0"/>
+              <a:t> </a:t>
+            </a:r>
+            <a:r>
+              <a:rPr dirty="0" err="1"/>
+              <a:t>опубликование</a:t>
+            </a:r>
+            <a:r>
+              <a:rPr dirty="0"/>
+              <a:t>: </a:t>
+            </a:r>
+            <a:r>
+              <a:rPr dirty="0">
+                <a:hlinkClick r:id="rId4"/>
+              </a:rPr>
+              <a:t>http://publication.pravo.gov.ru/Document/View/0001201312280035</a:t>
+            </a:r>
+            <a:r>
+              <a:rPr dirty="0"/>
+              <a:t>.</a:t>
+            </a:r>
+          </a:p>
+          <a:p>
+            <a:pPr marL="342900" lvl="0" indent="-342900">
+              <a:buAutoNum type="arabicPeriod"/>
+            </a:pPr>
+            <a:r>
+              <a:rPr dirty="0" err="1"/>
+              <a:t>Федеральный</a:t>
+            </a:r>
+            <a:r>
+              <a:rPr dirty="0"/>
+              <a:t> </a:t>
+            </a:r>
+            <a:r>
+              <a:rPr dirty="0" err="1"/>
+              <a:t>закон</a:t>
+            </a:r>
+            <a:r>
+              <a:rPr dirty="0"/>
+              <a:t> </a:t>
+            </a:r>
+            <a:r>
+              <a:rPr dirty="0" err="1"/>
+              <a:t>от</a:t>
+            </a:r>
+            <a:r>
+              <a:rPr dirty="0"/>
+              <a:t> 26.06.2008 №102-ФЗ «</a:t>
+            </a:r>
+            <a:r>
+              <a:rPr dirty="0" err="1"/>
+              <a:t>Об</a:t>
+            </a:r>
+            <a:r>
+              <a:rPr dirty="0"/>
+              <a:t> </a:t>
+            </a:r>
+            <a:r>
+              <a:rPr dirty="0" err="1"/>
+              <a:t>обеспечении</a:t>
+            </a:r>
+            <a:r>
+              <a:rPr dirty="0"/>
+              <a:t> </a:t>
+            </a:r>
+            <a:r>
+              <a:rPr dirty="0" err="1"/>
+              <a:t>единства</a:t>
+            </a:r>
+            <a:r>
+              <a:rPr dirty="0"/>
+              <a:t> </a:t>
+            </a:r>
+            <a:r>
+              <a:rPr dirty="0" err="1"/>
+              <a:t>измерений</a:t>
+            </a:r>
+            <a:r>
+              <a:rPr dirty="0"/>
+              <a:t>». </a:t>
+            </a:r>
+            <a:r>
+              <a:rPr dirty="0" err="1"/>
+              <a:t>Официальное</a:t>
+            </a:r>
+            <a:r>
+              <a:rPr dirty="0"/>
+              <a:t> </a:t>
+            </a:r>
+            <a:r>
+              <a:rPr dirty="0" err="1"/>
+              <a:t>опубликование</a:t>
+            </a:r>
+            <a:r>
+              <a:rPr dirty="0"/>
+              <a:t>: </a:t>
+            </a:r>
+            <a:r>
+              <a:rPr dirty="0">
+                <a:hlinkClick r:id="rId5"/>
+              </a:rPr>
+              <a:t>http://publication.pravo.gov.ru/Document/View/0001200806270001</a:t>
+            </a:r>
+            <a:r>
+              <a:rPr dirty="0"/>
+              <a:t>.</a:t>
+            </a:r>
+          </a:p>
+          <a:p>
+            <a:pPr marL="342900" lvl="0" indent="-342900">
+              <a:buAutoNum type="arabicPeriod"/>
+            </a:pPr>
+            <a:r>
+              <a:rPr dirty="0" err="1"/>
+              <a:t>Федеральный</a:t>
+            </a:r>
+            <a:r>
+              <a:rPr dirty="0"/>
+              <a:t> </a:t>
+            </a:r>
+            <a:r>
+              <a:rPr dirty="0" err="1"/>
+              <a:t>закон</a:t>
+            </a:r>
+            <a:r>
+              <a:rPr dirty="0"/>
+              <a:t> </a:t>
+            </a:r>
+            <a:r>
+              <a:rPr dirty="0" err="1"/>
+              <a:t>от</a:t>
+            </a:r>
+            <a:r>
+              <a:rPr dirty="0"/>
+              <a:t> 26.07.2017 №187-ФЗ «О </a:t>
+            </a:r>
+            <a:r>
+              <a:rPr dirty="0" err="1"/>
+              <a:t>безопасности</a:t>
+            </a:r>
+            <a:r>
+              <a:rPr dirty="0"/>
+              <a:t> </a:t>
+            </a:r>
+            <a:r>
+              <a:rPr dirty="0" err="1"/>
+              <a:t>критической</a:t>
+            </a:r>
+            <a:r>
+              <a:rPr dirty="0"/>
+              <a:t> </a:t>
+            </a:r>
+            <a:r>
+              <a:rPr dirty="0" err="1"/>
+              <a:t>информационной</a:t>
+            </a:r>
+            <a:r>
+              <a:rPr dirty="0"/>
+              <a:t> </a:t>
+            </a:r>
+            <a:r>
+              <a:rPr dirty="0" err="1"/>
+              <a:t>инфраструктуры</a:t>
+            </a:r>
+            <a:r>
+              <a:rPr dirty="0"/>
+              <a:t> </a:t>
+            </a:r>
+            <a:r>
+              <a:rPr dirty="0" err="1"/>
+              <a:t>Российской</a:t>
+            </a:r>
+            <a:r>
+              <a:rPr dirty="0"/>
+              <a:t> </a:t>
+            </a:r>
+            <a:r>
+              <a:rPr dirty="0" err="1"/>
+              <a:t>Федерации</a:t>
+            </a:r>
+            <a:r>
+              <a:rPr dirty="0"/>
+              <a:t>». </a:t>
+            </a:r>
+            <a:r>
+              <a:rPr dirty="0" err="1"/>
+              <a:t>Официальное</a:t>
+            </a:r>
+            <a:r>
+              <a:rPr dirty="0"/>
+              <a:t> </a:t>
+            </a:r>
+            <a:r>
+              <a:rPr dirty="0" err="1"/>
+              <a:t>опубликование</a:t>
+            </a:r>
+            <a:r>
+              <a:rPr dirty="0"/>
+              <a:t>: </a:t>
+            </a:r>
+            <a:r>
+              <a:rPr dirty="0">
+                <a:hlinkClick r:id="rId6"/>
+              </a:rPr>
+              <a:t>http://publication.pravo.gov.ru/Document/View/0001201707260023</a:t>
+            </a:r>
+            <a:r>
+              <a:rPr dirty="0"/>
+              <a:t>.</a:t>
+            </a:r>
+          </a:p>
+          <a:p>
+            <a:pPr marL="342900" lvl="0" indent="-342900">
+              <a:buAutoNum type="arabicPeriod"/>
+            </a:pPr>
+            <a:r>
+              <a:rPr dirty="0" err="1"/>
+              <a:t>Официальный</a:t>
+            </a:r>
+            <a:r>
+              <a:rPr dirty="0"/>
+              <a:t> </a:t>
+            </a:r>
+            <a:r>
+              <a:rPr dirty="0" err="1"/>
+              <a:t>интернет-портал</a:t>
+            </a:r>
+            <a:r>
+              <a:rPr dirty="0"/>
+              <a:t> </a:t>
+            </a:r>
+            <a:r>
+              <a:rPr dirty="0" err="1"/>
+              <a:t>правовой</a:t>
+            </a:r>
+            <a:r>
+              <a:rPr dirty="0"/>
+              <a:t> </a:t>
+            </a:r>
+            <a:r>
+              <a:rPr dirty="0" err="1"/>
+              <a:t>информации</a:t>
+            </a:r>
+            <a:r>
+              <a:rPr dirty="0"/>
+              <a:t>: </a:t>
+            </a:r>
+            <a:r>
+              <a:rPr dirty="0">
+                <a:hlinkClick r:id="rId7"/>
+              </a:rPr>
+              <a:t>http://publication.pravo.gov.ru/</a:t>
+            </a:r>
+            <a:r>
+              <a:rPr dirty="0"/>
+              <a:t>.</a:t>
+            </a:r>
+          </a:p>
+          <a:p>
+            <a:pPr marL="342900" lvl="0" indent="-342900">
+              <a:buAutoNum type="arabicPeriod"/>
+            </a:pPr>
+            <a:r>
+              <a:rPr dirty="0" err="1"/>
+              <a:t>Росстандарт</a:t>
+            </a:r>
+            <a:r>
+              <a:rPr dirty="0"/>
+              <a:t>: </a:t>
+            </a:r>
+            <a:r>
+              <a:rPr dirty="0">
+                <a:hlinkClick r:id="rId8"/>
+              </a:rPr>
+              <a:t>https://www.rst.gov.ru/</a:t>
+            </a:r>
+            <a:r>
+              <a:rPr dirty="0"/>
+              <a:t>.</a:t>
+            </a:r>
+          </a:p>
+          <a:p>
+            <a:pPr marL="342900" lvl="0" indent="-342900">
+              <a:buAutoNum type="arabicPeriod"/>
+            </a:pPr>
+            <a:r>
+              <a:rPr dirty="0" err="1"/>
+              <a:t>Росаккредитация</a:t>
+            </a:r>
+            <a:r>
+              <a:rPr dirty="0"/>
+              <a:t>: </a:t>
+            </a:r>
+            <a:r>
+              <a:rPr dirty="0">
+                <a:hlinkClick r:id="rId9"/>
+              </a:rPr>
+              <a:t>https://fsa.gov.ru/</a:t>
+            </a:r>
+            <a:r>
+              <a:rPr dirty="0"/>
+              <a:t>.</a:t>
+            </a:r>
           </a:p>
           <a:p>
             <a:pPr marL="0" lvl="0" indent="0">
               <a:buNone/>
             </a:pPr>
             <a:r>
-              <a:rPr dirty="0" err="1"/>
-              <a:t>Эта</a:t>
-            </a:r>
-            <a:r>
-              <a:rPr dirty="0"/>
+              <a:rPr b="1" dirty="0" err="1"/>
+              <a:t>Связанные</a:t>
+            </a:r>
+            <a:r>
+              <a:rPr b="1" dirty="0"/>
               <a:t> </a:t>
             </a:r>
             <a:r>
-              <a:rPr dirty="0" err="1"/>
-              <a:t>последовательность</a:t>
+              <a:rPr b="1" dirty="0" err="1"/>
+              <a:t>источники</a:t>
+            </a:r>
+            <a:endParaRPr b="1" dirty="0"/>
+          </a:p>
+          <a:p>
+            <a:pPr marL="342900" lvl="0" indent="-342900">
+              <a:buAutoNum type="arabicPeriod" startAt="9"/>
+            </a:pPr>
+            <a:r>
+              <a:rPr dirty="0"/>
+              <a:t>ГОСТ Р ИСО/МЭК 17025. </a:t>
+            </a:r>
+            <a:r>
+              <a:rPr dirty="0" err="1"/>
+              <a:t>Общие</a:t>
             </a:r>
             <a:r>
               <a:rPr dirty="0"/>
@@ -3876,7 +4514,15 @@
             </a:r>
             <a:r>
               <a:rPr dirty="0" err="1"/>
-              <a:t>будет</a:t>
+              <a:t>требования</a:t>
+            </a:r>
+            <a:r>
+              <a:rPr dirty="0"/>
+              <a:t> к </a:t>
+            </a:r>
+            <a:r>
+              <a:rPr dirty="0" err="1"/>
+              <a:t>компетентности</a:t>
             </a:r>
             <a:r>
               <a:rPr dirty="0"/>
@@ -3884,7 +4530,15 @@
             </a:r>
             <a:r>
               <a:rPr dirty="0" err="1"/>
-              <a:t>использоваться</a:t>
+              <a:t>испытательных</a:t>
+            </a:r>
+            <a:r>
+              <a:rPr dirty="0"/>
+              <a:t> и </a:t>
+            </a:r>
+            <a:r>
+              <a:rPr dirty="0" err="1"/>
+              <a:t>калибровочных</a:t>
             </a:r>
             <a:r>
               <a:rPr dirty="0"/>
@@ -3892,7 +4546,24 @@
             </a:r>
             <a:r>
               <a:rPr dirty="0" err="1"/>
-              <a:t>во</a:t>
+              <a:t>лабораторий</a:t>
+            </a:r>
+            <a:r>
+              <a:rPr dirty="0"/>
+              <a:t>.</a:t>
+            </a:r>
+          </a:p>
+          <a:p>
+            <a:pPr marL="342900" lvl="0" indent="-342900">
+              <a:buAutoNum type="arabicPeriod" startAt="9"/>
+            </a:pPr>
+            <a:r>
+              <a:rPr dirty="0"/>
+              <a:t>ГОСТ Р ИСО/МЭК 17065. </a:t>
+            </a:r>
+            <a:r>
+              <a:rPr dirty="0" err="1"/>
+              <a:t>Оценка</a:t>
             </a:r>
             <a:r>
               <a:rPr dirty="0"/>
@@ -3900,7 +4571,23 @@
             </a:r>
             <a:r>
               <a:rPr dirty="0" err="1"/>
-              <a:t>всех</a:t>
+              <a:t>соответствия</a:t>
+            </a:r>
+            <a:r>
+              <a:rPr dirty="0"/>
+              <a:t>. </a:t>
+            </a:r>
+            <a:r>
+              <a:rPr dirty="0" err="1"/>
+              <a:t>Требования</a:t>
+            </a:r>
+            <a:r>
+              <a:rPr dirty="0"/>
+              <a:t> к </a:t>
+            </a:r>
+            <a:r>
+              <a:rPr dirty="0" err="1"/>
+              <a:t>органам</a:t>
             </a:r>
             <a:r>
               <a:rPr dirty="0"/>
@@ -3908,7 +4595,7 @@
             </a:r>
             <a:r>
               <a:rPr dirty="0" err="1"/>
-              <a:t>следующих</a:t>
+              <a:t>по</a:t>
             </a:r>
             <a:r>
               <a:rPr dirty="0"/>
@@ -3916,7 +4603,7 @@
             </a:r>
             <a:r>
               <a:rPr dirty="0" err="1"/>
-              <a:t>модулях</a:t>
+              <a:t>сертификации</a:t>
             </a:r>
             <a:r>
               <a:rPr dirty="0"/>
@@ -3924,7 +4611,23 @@
             </a:r>
             <a:r>
               <a:rPr dirty="0" err="1"/>
-              <a:t>курса</a:t>
+              <a:t>продукции</a:t>
+            </a:r>
+            <a:r>
+              <a:rPr dirty="0"/>
+              <a:t>, </a:t>
+            </a:r>
+            <a:r>
+              <a:rPr dirty="0" err="1"/>
+              <a:t>процессов</a:t>
+            </a:r>
+            <a:r>
+              <a:rPr dirty="0"/>
+              <a:t> и </a:t>
+            </a:r>
+            <a:r>
+              <a:rPr dirty="0" err="1"/>
+              <a:t>услуг</a:t>
             </a:r>
             <a:r>
               <a:rPr dirty="0"/>
@@ -4113,8 +4816,8 @@
           </p:nvPr>
         </p:nvGraphicFramePr>
         <p:xfrm>
-          <a:off x="457200" y="1193800"/>
-          <a:ext cx="8229600" cy="1988820"/>
+          <a:off x="457200" y="787400"/>
+          <a:ext cx="8229600" cy="2717800"/>
         </p:xfrm>
         <a:graphic>
           <a:graphicData uri="http://schemas.openxmlformats.org/drawingml/2006/table">
@@ -4376,8 +5079,8 @@
         </p:nvSpPr>
         <p:spPr>
           <a:xfrm>
-            <a:off x="457200" y="3733800"/>
-            <a:ext cx="8229600" cy="723900"/>
+            <a:off x="457200" y="3632200"/>
+            <a:ext cx="8229600" cy="825500"/>
           </a:xfrm>
         </p:spPr>
         <p:txBody>
@@ -4551,8 +5254,8 @@
           </p:nvPr>
         </p:nvGraphicFramePr>
         <p:xfrm>
-          <a:off x="457200" y="1193800"/>
-          <a:ext cx="8229600" cy="1600200"/>
+          <a:off x="457200" y="787400"/>
+          <a:ext cx="8229600" cy="2400300"/>
         </p:xfrm>
         <a:graphic>
           <a:graphicData uri="http://schemas.openxmlformats.org/drawingml/2006/table">
@@ -4740,8 +5443,8 @@
         </p:nvSpPr>
         <p:spPr>
           <a:xfrm>
-            <a:off x="457200" y="3454400"/>
-            <a:ext cx="8229600" cy="1003300"/>
+            <a:off x="457200" y="3314700"/>
+            <a:ext cx="8229600" cy="1143000"/>
           </a:xfrm>
         </p:spPr>
         <p:txBody>
@@ -5004,18 +5707,8 @@
               <a:buNone/>
             </a:pPr>
             <a:r>
-              <a:rPr dirty="0" err="1"/>
-              <a:t>Аккредитация</a:t>
-            </a:r>
-            <a:r>
-              <a:rPr dirty="0"/>
-              <a:t> и </a:t>
-            </a:r>
-            <a:r>
-              <a:rPr dirty="0" err="1"/>
-              <a:t>испытания</a:t>
-            </a:r>
-            <a:endParaRPr dirty="0"/>
+              <a:t>Аккредитация и испытания</a:t>
+            </a:r>
           </a:p>
         </p:txBody>
       </p:sp>
@@ -5031,77 +5724,14 @@
         </p:nvSpPr>
         <p:spPr/>
         <p:txBody>
-          <a:bodyPr>
-            <a:normAutofit fontScale="85000" lnSpcReduction="10000"/>
-          </a:bodyPr>
+          <a:bodyPr/>
           <a:lstStyle/>
           <a:p>
             <a:pPr marL="0" lvl="0" indent="0">
               <a:buNone/>
             </a:pPr>
             <a:r>
-              <a:rPr dirty="0" err="1"/>
-              <a:t>Аккредитация</a:t>
-            </a:r>
-            <a:r>
-              <a:rPr dirty="0"/>
-              <a:t> </a:t>
-            </a:r>
-            <a:r>
-              <a:rPr dirty="0" err="1"/>
-              <a:t>подтверждает</a:t>
-            </a:r>
-            <a:r>
-              <a:rPr dirty="0"/>
-              <a:t> </a:t>
-            </a:r>
-            <a:r>
-              <a:rPr dirty="0" err="1"/>
-              <a:t>компетентность</a:t>
-            </a:r>
-            <a:r>
-              <a:rPr dirty="0"/>
-              <a:t> </a:t>
-            </a:r>
-            <a:r>
-              <a:rPr dirty="0" err="1"/>
-              <a:t>участника</a:t>
-            </a:r>
-            <a:r>
-              <a:rPr dirty="0"/>
-              <a:t> </a:t>
-            </a:r>
-            <a:r>
-              <a:rPr dirty="0" err="1"/>
-              <a:t>выполнять</a:t>
-            </a:r>
-            <a:r>
-              <a:rPr dirty="0"/>
-              <a:t> </a:t>
-            </a:r>
-            <a:r>
-              <a:rPr dirty="0" err="1"/>
-              <a:t>работы</a:t>
-            </a:r>
-            <a:r>
-              <a:rPr dirty="0"/>
-              <a:t> в </a:t>
-            </a:r>
-            <a:r>
-              <a:rPr dirty="0" err="1"/>
-              <a:t>определённой</a:t>
-            </a:r>
-            <a:r>
-              <a:rPr dirty="0"/>
-              <a:t> </a:t>
-            </a:r>
-            <a:r>
-              <a:rPr dirty="0" err="1"/>
-              <a:t>области</a:t>
-            </a:r>
-            <a:r>
-              <a:rPr dirty="0"/>
-              <a:t>.</a:t>
+              <a:t>Аккредитация подтверждает компетентность участника выполнять работы в определённой области.</a:t>
             </a:r>
           </a:p>
           <a:p>
@@ -5109,183 +5739,37 @@
               <a:buNone/>
             </a:pPr>
             <a:r>
-              <a:rPr dirty="0" err="1"/>
-              <a:t>При</a:t>
-            </a:r>
-            <a:r>
-              <a:rPr dirty="0"/>
-              <a:t> </a:t>
-            </a:r>
-            <a:r>
-              <a:rPr dirty="0" err="1"/>
-              <a:t>оценке</a:t>
-            </a:r>
-            <a:r>
-              <a:rPr dirty="0"/>
-              <a:t> </a:t>
-            </a:r>
-            <a:r>
-              <a:rPr dirty="0" err="1"/>
-              <a:t>испытаний</a:t>
-            </a:r>
-            <a:r>
-              <a:rPr dirty="0"/>
-              <a:t> </a:t>
-            </a:r>
-            <a:r>
-              <a:rPr dirty="0" err="1"/>
-              <a:t>уточняют</a:t>
-            </a:r>
-            <a:r>
-              <a:rPr dirty="0"/>
-              <a:t>:</a:t>
+              <a:t>При оценке испытаний уточняют:</a:t>
             </a:r>
           </a:p>
           <a:p>
             <a:pPr lvl="0"/>
             <a:r>
-              <a:rPr dirty="0" err="1"/>
-              <a:t>кто</a:t>
-            </a:r>
-            <a:r>
-              <a:rPr dirty="0"/>
-              <a:t> </a:t>
-            </a:r>
-            <a:r>
-              <a:rPr dirty="0" err="1"/>
-              <a:t>выполнил</a:t>
-            </a:r>
-            <a:r>
-              <a:rPr dirty="0"/>
-              <a:t> </a:t>
-            </a:r>
-            <a:r>
-              <a:rPr dirty="0" err="1"/>
-              <a:t>работу</a:t>
-            </a:r>
-            <a:r>
-              <a:rPr dirty="0"/>
-              <a:t>;</a:t>
+              <a:t>кто выполнил работу;</a:t>
             </a:r>
           </a:p>
           <a:p>
             <a:pPr lvl="0"/>
             <a:r>
-              <a:rPr dirty="0"/>
-              <a:t>в </a:t>
-            </a:r>
-            <a:r>
-              <a:rPr dirty="0" err="1"/>
-              <a:t>какой</a:t>
-            </a:r>
-            <a:r>
-              <a:rPr dirty="0"/>
-              <a:t> </a:t>
-            </a:r>
-            <a:r>
-              <a:rPr dirty="0" err="1"/>
-              <a:t>области</a:t>
-            </a:r>
-            <a:r>
-              <a:rPr dirty="0"/>
-              <a:t> </a:t>
-            </a:r>
-            <a:r>
-              <a:rPr dirty="0" err="1"/>
-              <a:t>компетентности</a:t>
-            </a:r>
-            <a:r>
-              <a:rPr dirty="0"/>
-              <a:t>;</a:t>
+              <a:t>в какой области компетентности;</a:t>
             </a:r>
           </a:p>
           <a:p>
             <a:pPr lvl="0"/>
             <a:r>
-              <a:rPr dirty="0" err="1"/>
-              <a:t>по</a:t>
-            </a:r>
-            <a:r>
-              <a:rPr dirty="0"/>
-              <a:t> </a:t>
-            </a:r>
-            <a:r>
-              <a:rPr dirty="0" err="1"/>
-              <a:t>какой</a:t>
-            </a:r>
-            <a:r>
-              <a:rPr dirty="0"/>
-              <a:t> </a:t>
-            </a:r>
-            <a:r>
-              <a:rPr dirty="0" err="1"/>
-              <a:t>методике</a:t>
-            </a:r>
-            <a:r>
-              <a:rPr dirty="0"/>
-              <a:t>;</a:t>
+              <a:t>по какой методике;</a:t>
             </a:r>
           </a:p>
           <a:p>
             <a:pPr lvl="0"/>
             <a:r>
-              <a:rPr dirty="0" err="1"/>
-              <a:t>какие</a:t>
-            </a:r>
-            <a:r>
-              <a:rPr dirty="0"/>
-              <a:t> </a:t>
-            </a:r>
-            <a:r>
-              <a:rPr dirty="0" err="1"/>
-              <a:t>средства</a:t>
-            </a:r>
-            <a:r>
-              <a:rPr dirty="0"/>
-              <a:t> и </a:t>
-            </a:r>
-            <a:r>
-              <a:rPr dirty="0" err="1"/>
-              <a:t>данные</a:t>
-            </a:r>
-            <a:r>
-              <a:rPr dirty="0"/>
-              <a:t> </a:t>
-            </a:r>
-            <a:r>
-              <a:rPr dirty="0" err="1"/>
-              <a:t>использованы</a:t>
-            </a:r>
-            <a:r>
-              <a:rPr dirty="0"/>
-              <a:t>;</a:t>
+              <a:t>какие средства и данные использованы;</a:t>
             </a:r>
           </a:p>
           <a:p>
             <a:pPr lvl="0"/>
             <a:r>
-              <a:rPr dirty="0" err="1"/>
-              <a:t>каковы</a:t>
-            </a:r>
-            <a:r>
-              <a:rPr dirty="0"/>
-              <a:t> </a:t>
-            </a:r>
-            <a:r>
-              <a:rPr dirty="0" err="1"/>
-              <a:t>ограничения</a:t>
-            </a:r>
-            <a:r>
-              <a:rPr dirty="0"/>
-              <a:t> </a:t>
-            </a:r>
-            <a:r>
-              <a:rPr dirty="0" err="1"/>
-              <a:t>результата</a:t>
-            </a:r>
-            <a:r>
-              <a:rPr dirty="0"/>
-              <a:t>.</a:t>
+              <a:t>каковы ограничения результата.</a:t>
             </a:r>
           </a:p>
           <a:p>
@@ -5293,108 +5777,7 @@
               <a:buNone/>
             </a:pPr>
             <a:r>
-              <a:rPr dirty="0" err="1"/>
-              <a:t>Статус</a:t>
-            </a:r>
-            <a:r>
-              <a:rPr dirty="0"/>
-              <a:t> </a:t>
-            </a:r>
-            <a:r>
-              <a:rPr dirty="0" err="1"/>
-              <a:t>участника</a:t>
-            </a:r>
-            <a:r>
-              <a:rPr dirty="0"/>
-              <a:t> </a:t>
-            </a:r>
-            <a:r>
-              <a:rPr dirty="0" err="1"/>
-              <a:t>конкретной</a:t>
-            </a:r>
-            <a:r>
-              <a:rPr dirty="0"/>
-              <a:t> </a:t>
-            </a:r>
-            <a:r>
-              <a:rPr dirty="0" err="1"/>
-              <a:t>добровольной</a:t>
-            </a:r>
-            <a:r>
-              <a:rPr dirty="0"/>
-              <a:t> </a:t>
-            </a:r>
-            <a:r>
-              <a:rPr dirty="0" err="1"/>
-              <a:t>системы</a:t>
-            </a:r>
-            <a:r>
-              <a:rPr dirty="0"/>
-              <a:t> </a:t>
-            </a:r>
-            <a:r>
-              <a:rPr dirty="0" err="1"/>
-              <a:t>подтверждения</a:t>
-            </a:r>
-            <a:r>
-              <a:rPr dirty="0"/>
-              <a:t> </a:t>
-            </a:r>
-            <a:r>
-              <a:rPr dirty="0" err="1"/>
-              <a:t>соответствия</a:t>
-            </a:r>
-            <a:r>
-              <a:rPr dirty="0"/>
-              <a:t> </a:t>
-            </a:r>
-            <a:r>
-              <a:rPr dirty="0" err="1"/>
-              <a:t>проверяют</a:t>
-            </a:r>
-            <a:r>
-              <a:rPr dirty="0"/>
-              <a:t> </a:t>
-            </a:r>
-            <a:r>
-              <a:rPr dirty="0" err="1"/>
-              <a:t>по</a:t>
-            </a:r>
-            <a:r>
-              <a:rPr dirty="0"/>
-              <a:t> </a:t>
-            </a:r>
-            <a:r>
-              <a:rPr dirty="0" err="1"/>
-              <a:t>её</a:t>
-            </a:r>
-            <a:r>
-              <a:rPr dirty="0"/>
-              <a:t> </a:t>
-            </a:r>
-            <a:r>
-              <a:rPr dirty="0" err="1"/>
-              <a:t>правилам</a:t>
-            </a:r>
-            <a:r>
-              <a:rPr dirty="0"/>
-              <a:t> и </a:t>
-            </a:r>
-            <a:r>
-              <a:rPr dirty="0" err="1"/>
-              <a:t>применимым</a:t>
-            </a:r>
-            <a:r>
-              <a:rPr dirty="0"/>
-              <a:t> </a:t>
-            </a:r>
-            <a:r>
-              <a:rPr dirty="0" err="1"/>
-              <a:t>требованиям</a:t>
-            </a:r>
-            <a:r>
-              <a:rPr dirty="0"/>
-              <a:t>.</a:t>
+              <a:t>Статус участника конкретной добровольной системы подтверждения соответствия проверяют по её правилам и применимым требованиям.</a:t>
             </a:r>
           </a:p>
         </p:txBody>
@@ -5443,18 +5826,8 @@
               <a:buNone/>
             </a:pPr>
             <a:r>
-              <a:rPr dirty="0" err="1"/>
-              <a:t>Роль</a:t>
-            </a:r>
-            <a:r>
-              <a:rPr dirty="0"/>
-              <a:t> </a:t>
-            </a:r>
-            <a:r>
-              <a:rPr dirty="0" err="1"/>
-              <a:t>стандартизации</a:t>
-            </a:r>
-            <a:endParaRPr dirty="0"/>
+              <a:t>Роль стандартизации</a:t>
+            </a:r>
           </a:p>
         </p:txBody>
       </p:sp>

--- a/Lec_1_Модуль 1_1_Слайд-конспект.pptx
+++ b/Lec_1_Модуль 1_1_Слайд-конспект.pptx
@@ -3262,7 +3262,7 @@
         <p:spPr/>
         <p:txBody>
           <a:bodyPr>
-            <a:normAutofit fontScale="85000" lnSpcReduction="20000"/>
+            <a:normAutofit fontScale="70000" lnSpcReduction="20000"/>
           </a:bodyPr>
           <a:lstStyle/>
           <a:p>
@@ -3284,6 +3284,14 @@
             <a:r>
               <a:rPr b="1"/>
               <a:t>Техническое регулирование: как читать требования и подтверждать решения</a:t>
+            </a:r>
+          </a:p>
+          <a:p>
+            <a:pPr marL="0" lvl="0" indent="0">
+              <a:buNone/>
+            </a:pPr>
+            <a:r>
+              <a:t>(Лекции 32 часа, практ занятия 32 часа)</a:t>
             </a:r>
           </a:p>
         </p:txBody>
@@ -3349,7 +3357,7 @@
         </p:nvGraphicFramePr>
         <p:xfrm>
           <a:off x="457200" y="787400"/>
-          <a:ext cx="8229600" cy="3797300"/>
+          <a:ext cx="8229600" cy="2080260"/>
         </p:xfrm>
         <a:graphic>
           <a:graphicData uri="http://schemas.openxmlformats.org/drawingml/2006/table">
@@ -3800,7 +3808,43 @@
             </a:pPr>
             <a:r>
               <a:rPr b="1"/>
-              <a:t>Профессиональный навык</a:t>
+              <a:t>Не «найти документ», а установить:</a:t>
+            </a:r>
+          </a:p>
+          <a:p>
+            <a:pPr lvl="0"/>
+            <a:r>
+              <a:t>основание</a:t>
+            </a:r>
+          </a:p>
+          <a:p>
+            <a:pPr lvl="0"/>
+            <a:r>
+              <a:t>применимость</a:t>
+            </a:r>
+          </a:p>
+          <a:p>
+            <a:pPr lvl="0"/>
+            <a:r>
+              <a:t>решение</a:t>
+            </a:r>
+          </a:p>
+          <a:p>
+            <a:pPr lvl="0"/>
+            <a:r>
+              <a:t>доказательство</a:t>
+            </a:r>
+          </a:p>
+          <a:p>
+            <a:pPr lvl="0"/>
+            <a:r>
+              <a:t>ограничение</a:t>
+            </a:r>
+          </a:p>
+          <a:p>
+            <a:pPr lvl="0"/>
+            <a:r>
+              <a:t>пересмотр</a:t>
             </a:r>
           </a:p>
           <a:p>
@@ -3808,51 +3852,13 @@
               <a:buNone/>
             </a:pPr>
             <a:r>
-              <a:t>Не «найти документ», а установить:</a:t>
-            </a:r>
-          </a:p>
-          <a:p>
-            <a:pPr lvl="0"/>
-            <a:r>
-              <a:t>основание</a:t>
-            </a:r>
-          </a:p>
-          <a:p>
-            <a:pPr lvl="0"/>
-            <a:r>
-              <a:t>применимость</a:t>
-            </a:r>
-          </a:p>
-          <a:p>
-            <a:pPr lvl="0"/>
-            <a:r>
-              <a:t>решение</a:t>
-            </a:r>
-          </a:p>
-          <a:p>
-            <a:pPr lvl="0"/>
-            <a:r>
-              <a:t>доказательство</a:t>
-            </a:r>
-          </a:p>
-          <a:p>
-            <a:pPr lvl="0"/>
-            <a:r>
-              <a:t>ограничение</a:t>
-            </a:r>
-          </a:p>
-          <a:p>
-            <a:pPr lvl="0"/>
-            <a:r>
-              <a:t>пересмотр</a:t>
-            </a:r>
-          </a:p>
-          <a:p>
-            <a:pPr marL="0" lvl="0" indent="0">
-              <a:buNone/>
-            </a:pPr>
-            <a:r>
-              <a:t>Эта последовательность будет использоваться во всех следующих модулях курса.</a:t>
+              <a:t>Вопросы к лекции </a:t>
+            </a:r>
+            <a:r>
+              <a:rPr>
+                <a:hlinkClick r:id="rId2"/>
+              </a:rPr>
+              <a:t>https://github.com/arasskazov/IFTIS-KII-2026/blob/main/Lec_1/L1_questionnarie.md</a:t>
             </a:r>
           </a:p>
         </p:txBody>
@@ -3901,18 +3907,8 @@
               <a:buNone/>
             </a:pPr>
             <a:r>
-              <a:rPr dirty="0" err="1"/>
-              <a:t>Список</a:t>
-            </a:r>
-            <a:r>
-              <a:rPr dirty="0"/>
-              <a:t> </a:t>
-            </a:r>
-            <a:r>
-              <a:rPr dirty="0" err="1"/>
-              <a:t>литературы</a:t>
-            </a:r>
-            <a:endParaRPr dirty="0"/>
+              <a:t>Список литературы</a:t>
+            </a:r>
           </a:p>
         </p:txBody>
       </p:sp>
@@ -4817,7 +4813,7 @@
         </p:nvGraphicFramePr>
         <p:xfrm>
           <a:off x="457200" y="787400"/>
-          <a:ext cx="8229600" cy="2717800"/>
+          <a:ext cx="8229600" cy="1988820"/>
         </p:xfrm>
         <a:graphic>
           <a:graphicData uri="http://schemas.openxmlformats.org/drawingml/2006/table">
@@ -5255,7 +5251,7 @@
         </p:nvGraphicFramePr>
         <p:xfrm>
           <a:off x="457200" y="787400"/>
-          <a:ext cx="8229600" cy="2400300"/>
+          <a:ext cx="8229600" cy="1600200"/>
         </p:xfrm>
         <a:graphic>
           <a:graphicData uri="http://schemas.openxmlformats.org/drawingml/2006/table">

--- a/Lec_1_Модуль 1_1_Слайд-конспект.pptx
+++ b/Lec_1_Модуль 1_1_Слайд-конспект.pptx
@@ -1,6 +1,6 @@
 
 <file path=ppt/presentation.xml><?xml version="1.0" encoding="utf-8"?>
-<p:presentation xmlns:a="http://schemas.openxmlformats.org/drawingml/2006/main" xmlns:r="http://schemas.openxmlformats.org/officeDocument/2006/relationships" xmlns:p="http://schemas.openxmlformats.org/presentationml/2006/main" saveSubsetFonts="1" autoCompressPictures="0">
+<p:presentation xmlns:a="http://schemas.openxmlformats.org/drawingml/2006/main" xmlns:p="http://schemas.openxmlformats.org/presentationml/2006/main" xmlns:r="http://schemas.openxmlformats.org/officeDocument/2006/relationships" autoCompressPictures="0" saveSubsetFonts="1">
   <p:sldMasterIdLst>
     <p:sldMasterId id="2147483648" r:id="rId1"/>
   </p:sldMasterIdLst>
@@ -18,6 +18,27 @@
     <p:sldId id="266" r:id="rId12"/>
     <p:sldId id="267" r:id="rId13"/>
     <p:sldId id="268" r:id="rId14"/>
+    <p:sldId id="269" r:id="rId15"/>
+    <p:sldId id="270" r:id="rId16"/>
+    <p:sldId id="271" r:id="rId17"/>
+    <p:sldId id="272" r:id="rId18"/>
+    <p:sldId id="273" r:id="rId19"/>
+    <p:sldId id="274" r:id="rId20"/>
+    <p:sldId id="275" r:id="rId21"/>
+    <p:sldId id="276" r:id="rId22"/>
+    <p:sldId id="277" r:id="rId23"/>
+    <p:sldId id="278" r:id="rId24"/>
+    <p:sldId id="279" r:id="rId25"/>
+    <p:sldId id="280" r:id="rId26"/>
+    <p:sldId id="281" r:id="rId27"/>
+    <p:sldId id="282" r:id="rId28"/>
+    <p:sldId id="283" r:id="rId29"/>
+    <p:sldId id="284" r:id="rId30"/>
+    <p:sldId id="285" r:id="rId31"/>
+    <p:sldId id="286" r:id="rId32"/>
+    <p:sldId id="287" r:id="rId33"/>
+    <p:sldId id="288" r:id="rId34"/>
+    <p:sldId id="289" r:id="rId35"/>
   </p:sldIdLst>
   <p:sldSz cx="9144000" cy="5143500" type="screen16x9"/>
   <p:notesSz cx="6858000" cy="9144000"/>
@@ -25,8 +46,8 @@
     <a:defPPr>
       <a:defRPr lang="en-US"/>
     </a:defPPr>
-    <a:lvl1pPr marL="0" algn="l" defTabSz="457200" rtl="0" eaLnBrk="1" latinLnBrk="0" hangingPunct="1">
-      <a:defRPr sz="1800" kern="1200">
+    <a:lvl1pPr algn="l" defTabSz="457200" eaLnBrk="1" hangingPunct="1" latinLnBrk="0" marL="0" rtl="0">
+      <a:defRPr kern="1200" sz="1800">
         <a:solidFill>
           <a:schemeClr val="tx1"/>
         </a:solidFill>
@@ -35,8 +56,8 @@
         <a:cs typeface="+mn-cs"/>
       </a:defRPr>
     </a:lvl1pPr>
-    <a:lvl2pPr marL="457200" algn="l" defTabSz="457200" rtl="0" eaLnBrk="1" latinLnBrk="0" hangingPunct="1">
-      <a:defRPr sz="1800" kern="1200">
+    <a:lvl2pPr algn="l" defTabSz="457200" eaLnBrk="1" hangingPunct="1" latinLnBrk="0" marL="457200" rtl="0">
+      <a:defRPr kern="1200" sz="1800">
         <a:solidFill>
           <a:schemeClr val="tx1"/>
         </a:solidFill>
@@ -45,8 +66,8 @@
         <a:cs typeface="+mn-cs"/>
       </a:defRPr>
     </a:lvl2pPr>
-    <a:lvl3pPr marL="914400" algn="l" defTabSz="457200" rtl="0" eaLnBrk="1" latinLnBrk="0" hangingPunct="1">
-      <a:defRPr sz="1800" kern="1200">
+    <a:lvl3pPr algn="l" defTabSz="457200" eaLnBrk="1" hangingPunct="1" latinLnBrk="0" marL="914400" rtl="0">
+      <a:defRPr kern="1200" sz="1800">
         <a:solidFill>
           <a:schemeClr val="tx1"/>
         </a:solidFill>
@@ -55,8 +76,8 @@
         <a:cs typeface="+mn-cs"/>
       </a:defRPr>
     </a:lvl3pPr>
-    <a:lvl4pPr marL="1371600" algn="l" defTabSz="457200" rtl="0" eaLnBrk="1" latinLnBrk="0" hangingPunct="1">
-      <a:defRPr sz="1800" kern="1200">
+    <a:lvl4pPr algn="l" defTabSz="457200" eaLnBrk="1" hangingPunct="1" latinLnBrk="0" marL="1371600" rtl="0">
+      <a:defRPr kern="1200" sz="1800">
         <a:solidFill>
           <a:schemeClr val="tx1"/>
         </a:solidFill>
@@ -65,8 +86,8 @@
         <a:cs typeface="+mn-cs"/>
       </a:defRPr>
     </a:lvl4pPr>
-    <a:lvl5pPr marL="1828800" algn="l" defTabSz="457200" rtl="0" eaLnBrk="1" latinLnBrk="0" hangingPunct="1">
-      <a:defRPr sz="1800" kern="1200">
+    <a:lvl5pPr algn="l" defTabSz="457200" eaLnBrk="1" hangingPunct="1" latinLnBrk="0" marL="1828800" rtl="0">
+      <a:defRPr kern="1200" sz="1800">
         <a:solidFill>
           <a:schemeClr val="tx1"/>
         </a:solidFill>
@@ -75,8 +96,8 @@
         <a:cs typeface="+mn-cs"/>
       </a:defRPr>
     </a:lvl5pPr>
-    <a:lvl6pPr marL="2286000" algn="l" defTabSz="457200" rtl="0" eaLnBrk="1" latinLnBrk="0" hangingPunct="1">
-      <a:defRPr sz="1800" kern="1200">
+    <a:lvl6pPr algn="l" defTabSz="457200" eaLnBrk="1" hangingPunct="1" latinLnBrk="0" marL="2286000" rtl="0">
+      <a:defRPr kern="1200" sz="1800">
         <a:solidFill>
           <a:schemeClr val="tx1"/>
         </a:solidFill>
@@ -85,8 +106,8 @@
         <a:cs typeface="+mn-cs"/>
       </a:defRPr>
     </a:lvl6pPr>
-    <a:lvl7pPr marL="2743200" algn="l" defTabSz="457200" rtl="0" eaLnBrk="1" latinLnBrk="0" hangingPunct="1">
-      <a:defRPr sz="1800" kern="1200">
+    <a:lvl7pPr algn="l" defTabSz="457200" eaLnBrk="1" hangingPunct="1" latinLnBrk="0" marL="2743200" rtl="0">
+      <a:defRPr kern="1200" sz="1800">
         <a:solidFill>
           <a:schemeClr val="tx1"/>
         </a:solidFill>
@@ -95,8 +116,8 @@
         <a:cs typeface="+mn-cs"/>
       </a:defRPr>
     </a:lvl7pPr>
-    <a:lvl8pPr marL="3200400" algn="l" defTabSz="457200" rtl="0" eaLnBrk="1" latinLnBrk="0" hangingPunct="1">
-      <a:defRPr sz="1800" kern="1200">
+    <a:lvl8pPr algn="l" defTabSz="457200" eaLnBrk="1" hangingPunct="1" latinLnBrk="0" marL="3200400" rtl="0">
+      <a:defRPr kern="1200" sz="1800">
         <a:solidFill>
           <a:schemeClr val="tx1"/>
         </a:solidFill>
@@ -105,8 +126,8 @@
         <a:cs typeface="+mn-cs"/>
       </a:defRPr>
     </a:lvl8pPr>
-    <a:lvl9pPr marL="3657600" algn="l" defTabSz="457200" rtl="0" eaLnBrk="1" latinLnBrk="0" hangingPunct="1">
-      <a:defRPr sz="1800" kern="1200">
+    <a:lvl9pPr algn="l" defTabSz="457200" eaLnBrk="1" hangingPunct="1" latinLnBrk="0" marL="3657600" rtl="0">
+      <a:defRPr kern="1200" sz="1800">
         <a:solidFill>
           <a:schemeClr val="tx1"/>
         </a:solidFill>
@@ -2671,7 +2692,7 @@
 </file>
 
 <file path=ppt/slideMasters/slideMaster1.xml><?xml version="1.0" encoding="utf-8"?>
-<p:sldMaster xmlns:a="http://schemas.openxmlformats.org/drawingml/2006/main" xmlns:r="http://schemas.openxmlformats.org/officeDocument/2006/relationships" xmlns:p="http://schemas.openxmlformats.org/presentationml/2006/main">
+<p:sldMaster xmlns:a="http://schemas.openxmlformats.org/drawingml/2006/main" xmlns:p="http://schemas.openxmlformats.org/presentationml/2006/main" xmlns:r="http://schemas.openxmlformats.org/officeDocument/2006/relationships">
   <p:cSld>
     <p:bg>
       <p:bgRef idx="1001">
@@ -2712,13 +2733,13 @@
           </a:prstGeom>
         </p:spPr>
         <p:txBody>
-          <a:bodyPr vert="horz" lIns="91440" tIns="45720" rIns="91440" bIns="45720" rtlCol="0" anchor="ctr">
+          <a:bodyPr anchor="ctr" bIns="45720" lIns="91440" rIns="91440" rtlCol="0" tIns="45720" vert="horz">
             <a:normAutofit/>
           </a:bodyPr>
           <a:lstStyle/>
           <a:p>
             <a:r>
-              <a:rPr lang="en-US" dirty="0"/>
+              <a:rPr dirty="0" lang="en-US"/>
               <a:t>Click to edit Master title style</a:t>
             </a:r>
           </a:p>
@@ -2731,7 +2752,7 @@
             <a:spLocks noGrp="1"/>
           </p:cNvSpPr>
           <p:nvPr>
-            <p:ph type="body" idx="1"/>
+            <p:ph idx="1" type="body"/>
           </p:nvPr>
         </p:nvSpPr>
         <p:spPr>
@@ -2744,42 +2765,42 @@
           </a:prstGeom>
         </p:spPr>
         <p:txBody>
-          <a:bodyPr vert="horz" lIns="91440" tIns="45720" rIns="91440" bIns="45720" rtlCol="0">
+          <a:bodyPr bIns="45720" lIns="91440" rIns="91440" rtlCol="0" tIns="45720" vert="horz">
             <a:normAutofit/>
           </a:bodyPr>
           <a:lstStyle/>
           <a:p>
             <a:pPr lvl="0"/>
             <a:r>
-              <a:rPr lang="en-US" dirty="0"/>
+              <a:rPr dirty="0" lang="en-US"/>
               <a:t>Click to edit Master text styles</a:t>
             </a:r>
           </a:p>
           <a:p>
             <a:pPr lvl="1"/>
             <a:r>
-              <a:rPr lang="en-US" dirty="0"/>
+              <a:rPr dirty="0" lang="en-US"/>
               <a:t>Second level</a:t>
             </a:r>
           </a:p>
           <a:p>
             <a:pPr lvl="2"/>
             <a:r>
-              <a:rPr lang="en-US" dirty="0"/>
+              <a:rPr dirty="0" lang="en-US"/>
               <a:t>Third level</a:t>
             </a:r>
           </a:p>
           <a:p>
             <a:pPr lvl="3"/>
             <a:r>
-              <a:rPr lang="en-US" dirty="0"/>
+              <a:rPr dirty="0" lang="en-US"/>
               <a:t>Fourth level</a:t>
             </a:r>
           </a:p>
           <a:p>
             <a:pPr lvl="4"/>
             <a:r>
-              <a:rPr lang="en-US" dirty="0"/>
+              <a:rPr dirty="0" lang="en-US"/>
               <a:t>Fifth level</a:t>
             </a:r>
           </a:p>
@@ -2792,7 +2813,7 @@
             <a:spLocks noGrp="1"/>
           </p:cNvSpPr>
           <p:nvPr>
-            <p:ph type="dt" sz="half" idx="2"/>
+            <p:ph idx="2" sz="half" type="dt"/>
           </p:nvPr>
         </p:nvSpPr>
         <p:spPr>
@@ -2805,7 +2826,7 @@
           </a:prstGeom>
         </p:spPr>
         <p:txBody>
-          <a:bodyPr vert="horz" lIns="91440" tIns="45720" rIns="91440" bIns="45720" rtlCol="0" anchor="ctr"/>
+          <a:bodyPr anchor="ctr" bIns="45720" lIns="91440" rIns="91440" rtlCol="0" tIns="45720" vert="horz"/>
           <a:lstStyle>
             <a:lvl1pPr algn="l">
               <a:defRPr sz="900">
@@ -2833,7 +2854,7 @@
             <a:spLocks noGrp="1"/>
           </p:cNvSpPr>
           <p:nvPr>
-            <p:ph type="ftr" sz="quarter" idx="3"/>
+            <p:ph idx="3" sz="quarter" type="ftr"/>
           </p:nvPr>
         </p:nvSpPr>
         <p:spPr>
@@ -2846,7 +2867,7 @@
           </a:prstGeom>
         </p:spPr>
         <p:txBody>
-          <a:bodyPr vert="horz" lIns="91440" tIns="45720" rIns="91440" bIns="45720" rtlCol="0" anchor="ctr"/>
+          <a:bodyPr anchor="ctr" bIns="45720" lIns="91440" rIns="91440" rtlCol="0" tIns="45720" vert="horz"/>
           <a:lstStyle>
             <a:lvl1pPr algn="ctr">
               <a:defRPr sz="900">
@@ -2870,7 +2891,7 @@
             <a:spLocks noGrp="1"/>
           </p:cNvSpPr>
           <p:nvPr>
-            <p:ph type="sldNum" sz="quarter" idx="4"/>
+            <p:ph idx="4" sz="quarter" type="sldNum"/>
           </p:nvPr>
         </p:nvSpPr>
         <p:spPr>
@@ -2883,7 +2904,7 @@
           </a:prstGeom>
         </p:spPr>
         <p:txBody>
-          <a:bodyPr vert="horz" lIns="91440" tIns="45720" rIns="91440" bIns="45720" rtlCol="0" anchor="ctr"/>
+          <a:bodyPr anchor="ctr" bIns="45720" lIns="91440" rIns="91440" rtlCol="0" tIns="45720" vert="horz"/>
           <a:lstStyle>
             <a:lvl1pPr algn="r">
               <a:defRPr sz="900">
@@ -2906,7 +2927,7 @@
       </p:sp>
       <p:pic>
         <p:nvPicPr>
-          <p:cNvPr id="7" name="Image 1" descr="/mnt/data/asset_icons/image3.png">
+          <p:cNvPr descr="/mnt/data/asset_icons/image3.png" id="7" name="Image 1">
             <a:extLst>
               <a:ext uri="{FF2B5EF4-FFF2-40B4-BE49-F238E27FC236}">
                 <a16:creationId xmlns:a16="http://schemas.microsoft.com/office/drawing/2014/main" id="{07B1F67F-77AB-4D11-A16B-35A1040E62AB}"/>
@@ -2941,7 +2962,7 @@
       </p:ext>
     </p:extLst>
   </p:cSld>
-  <p:clrMap bg1="lt1" tx1="dk1" bg2="lt2" tx2="dk2" accent1="accent1" accent2="accent2" accent3="accent3" accent4="accent4" accent5="accent5" accent6="accent6" hlink="hlink" folHlink="folHlink"/>
+  <p:clrMap accent1="accent1" accent2="accent2" accent3="accent3" accent4="accent4" accent5="accent5" accent6="accent6" bg1="lt1" bg2="lt2" folHlink="folHlink" hlink="hlink" tx1="dk1" tx2="dk2"/>
   <p:sldLayoutIdLst>
     <p:sldLayoutId id="2147483649" r:id="rId1"/>
     <p:sldLayoutId id="2147483650" r:id="rId2"/>
@@ -2957,12 +2978,12 @@
   </p:sldLayoutIdLst>
   <p:txStyles>
     <p:titleStyle>
-      <a:lvl1pPr algn="ctr" defTabSz="342900" rtl="0" eaLnBrk="1" latinLnBrk="0" hangingPunct="1">
+      <a:lvl1pPr algn="ctr" defTabSz="342900" eaLnBrk="1" hangingPunct="1" latinLnBrk="0" rtl="0">
         <a:spcBef>
           <a:spcPct val="0"/>
         </a:spcBef>
         <a:buNone/>
-        <a:defRPr sz="2400" kern="1200">
+        <a:defRPr kern="1200" sz="2400">
           <a:solidFill>
             <a:schemeClr val="tx1"/>
           </a:solidFill>
@@ -2973,13 +2994,13 @@
       </a:lvl1pPr>
     </p:titleStyle>
     <p:bodyStyle>
-      <a:lvl1pPr marL="342900" indent="-342900" algn="l" defTabSz="342900" rtl="0" eaLnBrk="1" latinLnBrk="0" hangingPunct="1">
+      <a:lvl1pPr algn="l" defTabSz="342900" eaLnBrk="1" hangingPunct="1" indent="-342900" latinLnBrk="0" marL="342900" rtl="0">
         <a:spcBef>
           <a:spcPct val="20000"/>
         </a:spcBef>
         <a:buFont typeface="Arial"/>
         <a:buChar char="•"/>
-        <a:defRPr sz="2000" kern="1200">
+        <a:defRPr kern="1200" sz="2000">
           <a:solidFill>
             <a:schemeClr val="tx1"/>
           </a:solidFill>
@@ -2988,13 +3009,13 @@
           <a:cs typeface="+mn-cs"/>
         </a:defRPr>
       </a:lvl1pPr>
-      <a:lvl2pPr marL="685800" indent="-342900" algn="l" defTabSz="342900" rtl="0" eaLnBrk="1" latinLnBrk="0" hangingPunct="1">
+      <a:lvl2pPr algn="l" defTabSz="342900" eaLnBrk="1" hangingPunct="1" indent="-342900" latinLnBrk="0" marL="685800" rtl="0">
         <a:spcBef>
           <a:spcPct val="20000"/>
         </a:spcBef>
         <a:buFont typeface="Arial"/>
         <a:buChar char="–"/>
-        <a:defRPr sz="2000" kern="1200">
+        <a:defRPr kern="1200" sz="2000">
           <a:solidFill>
             <a:schemeClr val="tx1"/>
           </a:solidFill>
@@ -3003,13 +3024,13 @@
           <a:cs typeface="+mn-cs"/>
         </a:defRPr>
       </a:lvl2pPr>
-      <a:lvl3pPr marL="1028700" indent="-342900" algn="l" defTabSz="342900" rtl="0" eaLnBrk="1" latinLnBrk="0" hangingPunct="1">
+      <a:lvl3pPr algn="l" defTabSz="342900" eaLnBrk="1" hangingPunct="1" indent="-342900" latinLnBrk="0" marL="1028700" rtl="0">
         <a:spcBef>
           <a:spcPct val="20000"/>
         </a:spcBef>
         <a:buFont typeface="Arial"/>
         <a:buChar char="•"/>
-        <a:defRPr sz="1600" kern="1200">
+        <a:defRPr kern="1200" sz="1600">
           <a:solidFill>
             <a:schemeClr val="tx1"/>
           </a:solidFill>
@@ -3018,13 +3039,13 @@
           <a:cs typeface="+mn-cs"/>
         </a:defRPr>
       </a:lvl3pPr>
-      <a:lvl4pPr marL="1371600" indent="-342900" algn="l" defTabSz="342900" rtl="0" eaLnBrk="1" latinLnBrk="0" hangingPunct="1">
+      <a:lvl4pPr algn="l" defTabSz="342900" eaLnBrk="1" hangingPunct="1" indent="-342900" latinLnBrk="0" marL="1371600" rtl="0">
         <a:spcBef>
           <a:spcPct val="20000"/>
         </a:spcBef>
         <a:buFont typeface="Arial"/>
         <a:buChar char="–"/>
-        <a:defRPr sz="1400" kern="1200">
+        <a:defRPr kern="1200" sz="1400">
           <a:solidFill>
             <a:schemeClr val="tx1"/>
           </a:solidFill>
@@ -3033,13 +3054,13 @@
           <a:cs typeface="+mn-cs"/>
         </a:defRPr>
       </a:lvl4pPr>
-      <a:lvl5pPr marL="1714500" indent="-342900" algn="l" defTabSz="342900" rtl="0" eaLnBrk="1" latinLnBrk="0" hangingPunct="1">
+      <a:lvl5pPr algn="l" defTabSz="342900" eaLnBrk="1" hangingPunct="1" indent="-342900" latinLnBrk="0" marL="1714500" rtl="0">
         <a:spcBef>
           <a:spcPct val="20000"/>
         </a:spcBef>
         <a:buFont typeface="Arial"/>
         <a:buChar char="»"/>
-        <a:defRPr sz="1400" kern="1200">
+        <a:defRPr kern="1200" sz="1400">
           <a:solidFill>
             <a:schemeClr val="tx1"/>
           </a:solidFill>
@@ -3048,13 +3069,13 @@
           <a:cs typeface="+mn-cs"/>
         </a:defRPr>
       </a:lvl5pPr>
-      <a:lvl6pPr marL="2057400" indent="-342900" algn="l" defTabSz="342900" rtl="0" eaLnBrk="1" latinLnBrk="0" hangingPunct="1">
+      <a:lvl6pPr algn="l" defTabSz="342900" eaLnBrk="1" hangingPunct="1" indent="-342900" latinLnBrk="0" marL="2057400" rtl="0">
         <a:spcBef>
           <a:spcPct val="20000"/>
         </a:spcBef>
         <a:buFont typeface="Arial"/>
         <a:buChar char="•"/>
-        <a:defRPr sz="1500" kern="1200">
+        <a:defRPr kern="1200" sz="1500">
           <a:solidFill>
             <a:schemeClr val="tx1"/>
           </a:solidFill>
@@ -3063,13 +3084,13 @@
           <a:cs typeface="+mn-cs"/>
         </a:defRPr>
       </a:lvl6pPr>
-      <a:lvl7pPr marL="2400300" indent="-342900" algn="l" defTabSz="342900" rtl="0" eaLnBrk="1" latinLnBrk="0" hangingPunct="1">
+      <a:lvl7pPr algn="l" defTabSz="342900" eaLnBrk="1" hangingPunct="1" indent="-342900" latinLnBrk="0" marL="2400300" rtl="0">
         <a:spcBef>
           <a:spcPct val="20000"/>
         </a:spcBef>
         <a:buFont typeface="Arial"/>
         <a:buChar char="•"/>
-        <a:defRPr sz="1500" kern="1200">
+        <a:defRPr kern="1200" sz="1500">
           <a:solidFill>
             <a:schemeClr val="tx1"/>
           </a:solidFill>
@@ -3078,13 +3099,13 @@
           <a:cs typeface="+mn-cs"/>
         </a:defRPr>
       </a:lvl7pPr>
-      <a:lvl8pPr marL="2743200" indent="-342900" algn="l" defTabSz="342900" rtl="0" eaLnBrk="1" latinLnBrk="0" hangingPunct="1">
+      <a:lvl8pPr algn="l" defTabSz="342900" eaLnBrk="1" hangingPunct="1" indent="-342900" latinLnBrk="0" marL="2743200" rtl="0">
         <a:spcBef>
           <a:spcPct val="20000"/>
         </a:spcBef>
         <a:buFont typeface="Arial"/>
         <a:buChar char="•"/>
-        <a:defRPr sz="1500" kern="1200">
+        <a:defRPr kern="1200" sz="1500">
           <a:solidFill>
             <a:schemeClr val="tx1"/>
           </a:solidFill>
@@ -3093,13 +3114,13 @@
           <a:cs typeface="+mn-cs"/>
         </a:defRPr>
       </a:lvl8pPr>
-      <a:lvl9pPr marL="3086100" indent="-342900" algn="l" defTabSz="342900" rtl="0" eaLnBrk="1" latinLnBrk="0" hangingPunct="1">
+      <a:lvl9pPr algn="l" defTabSz="342900" eaLnBrk="1" hangingPunct="1" indent="-342900" latinLnBrk="0" marL="3086100" rtl="0">
         <a:spcBef>
           <a:spcPct val="20000"/>
         </a:spcBef>
         <a:buFont typeface="Arial"/>
         <a:buChar char="•"/>
-        <a:defRPr sz="1500" kern="1200">
+        <a:defRPr kern="1200" sz="1500">
           <a:solidFill>
             <a:schemeClr val="tx1"/>
           </a:solidFill>
@@ -3113,8 +3134,8 @@
       <a:defPPr>
         <a:defRPr lang="en-US"/>
       </a:defPPr>
-      <a:lvl1pPr marL="0" algn="l" defTabSz="342900" rtl="0" eaLnBrk="1" latinLnBrk="0" hangingPunct="1">
-        <a:defRPr sz="1350" kern="1200">
+      <a:lvl1pPr algn="l" defTabSz="342900" eaLnBrk="1" hangingPunct="1" latinLnBrk="0" marL="0" rtl="0">
+        <a:defRPr kern="1200" sz="1350">
           <a:solidFill>
             <a:schemeClr val="tx1"/>
           </a:solidFill>
@@ -3123,8 +3144,8 @@
           <a:cs typeface="+mn-cs"/>
         </a:defRPr>
       </a:lvl1pPr>
-      <a:lvl2pPr marL="342900" algn="l" defTabSz="342900" rtl="0" eaLnBrk="1" latinLnBrk="0" hangingPunct="1">
-        <a:defRPr sz="1350" kern="1200">
+      <a:lvl2pPr algn="l" defTabSz="342900" eaLnBrk="1" hangingPunct="1" latinLnBrk="0" marL="342900" rtl="0">
+        <a:defRPr kern="1200" sz="1350">
           <a:solidFill>
             <a:schemeClr val="tx1"/>
           </a:solidFill>
@@ -3133,8 +3154,8 @@
           <a:cs typeface="+mn-cs"/>
         </a:defRPr>
       </a:lvl2pPr>
-      <a:lvl3pPr marL="685800" algn="l" defTabSz="342900" rtl="0" eaLnBrk="1" latinLnBrk="0" hangingPunct="1">
-        <a:defRPr sz="1350" kern="1200">
+      <a:lvl3pPr algn="l" defTabSz="342900" eaLnBrk="1" hangingPunct="1" latinLnBrk="0" marL="685800" rtl="0">
+        <a:defRPr kern="1200" sz="1350">
           <a:solidFill>
             <a:schemeClr val="tx1"/>
           </a:solidFill>
@@ -3143,8 +3164,8 @@
           <a:cs typeface="+mn-cs"/>
         </a:defRPr>
       </a:lvl3pPr>
-      <a:lvl4pPr marL="1028700" algn="l" defTabSz="342900" rtl="0" eaLnBrk="1" latinLnBrk="0" hangingPunct="1">
-        <a:defRPr sz="1350" kern="1200">
+      <a:lvl4pPr algn="l" defTabSz="342900" eaLnBrk="1" hangingPunct="1" latinLnBrk="0" marL="1028700" rtl="0">
+        <a:defRPr kern="1200" sz="1350">
           <a:solidFill>
             <a:schemeClr val="tx1"/>
           </a:solidFill>
@@ -3153,8 +3174,8 @@
           <a:cs typeface="+mn-cs"/>
         </a:defRPr>
       </a:lvl4pPr>
-      <a:lvl5pPr marL="1371600" algn="l" defTabSz="342900" rtl="0" eaLnBrk="1" latinLnBrk="0" hangingPunct="1">
-        <a:defRPr sz="1350" kern="1200">
+      <a:lvl5pPr algn="l" defTabSz="342900" eaLnBrk="1" hangingPunct="1" latinLnBrk="0" marL="1371600" rtl="0">
+        <a:defRPr kern="1200" sz="1350">
           <a:solidFill>
             <a:schemeClr val="tx1"/>
           </a:solidFill>
@@ -3163,8 +3184,8 @@
           <a:cs typeface="+mn-cs"/>
         </a:defRPr>
       </a:lvl5pPr>
-      <a:lvl6pPr marL="1714500" algn="l" defTabSz="342900" rtl="0" eaLnBrk="1" latinLnBrk="0" hangingPunct="1">
-        <a:defRPr sz="1350" kern="1200">
+      <a:lvl6pPr algn="l" defTabSz="342900" eaLnBrk="1" hangingPunct="1" latinLnBrk="0" marL="1714500" rtl="0">
+        <a:defRPr kern="1200" sz="1350">
           <a:solidFill>
             <a:schemeClr val="tx1"/>
           </a:solidFill>
@@ -3173,8 +3194,8 @@
           <a:cs typeface="+mn-cs"/>
         </a:defRPr>
       </a:lvl6pPr>
-      <a:lvl7pPr marL="2057400" algn="l" defTabSz="342900" rtl="0" eaLnBrk="1" latinLnBrk="0" hangingPunct="1">
-        <a:defRPr sz="1350" kern="1200">
+      <a:lvl7pPr algn="l" defTabSz="342900" eaLnBrk="1" hangingPunct="1" latinLnBrk="0" marL="2057400" rtl="0">
+        <a:defRPr kern="1200" sz="1350">
           <a:solidFill>
             <a:schemeClr val="tx1"/>
           </a:solidFill>
@@ -3183,8 +3204,8 @@
           <a:cs typeface="+mn-cs"/>
         </a:defRPr>
       </a:lvl7pPr>
-      <a:lvl8pPr marL="2400300" algn="l" defTabSz="342900" rtl="0" eaLnBrk="1" latinLnBrk="0" hangingPunct="1">
-        <a:defRPr sz="1350" kern="1200">
+      <a:lvl8pPr algn="l" defTabSz="342900" eaLnBrk="1" hangingPunct="1" latinLnBrk="0" marL="2400300" rtl="0">
+        <a:defRPr kern="1200" sz="1350">
           <a:solidFill>
             <a:schemeClr val="tx1"/>
           </a:solidFill>
@@ -3193,8 +3214,8 @@
           <a:cs typeface="+mn-cs"/>
         </a:defRPr>
       </a:lvl8pPr>
-      <a:lvl9pPr marL="2743200" algn="l" defTabSz="342900" rtl="0" eaLnBrk="1" latinLnBrk="0" hangingPunct="1">
-        <a:defRPr sz="1350" kern="1200">
+      <a:lvl9pPr algn="l" defTabSz="342900" eaLnBrk="1" hangingPunct="1" latinLnBrk="0" marL="2743200" rtl="0">
+        <a:defRPr kern="1200" sz="1350">
           <a:solidFill>
             <a:schemeClr val="tx1"/>
           </a:solidFill>
@@ -3232,18 +3253,19 @@
             <a:spLocks noGrp="1"/>
           </p:cNvSpPr>
           <p:nvPr>
-            <p:ph type="ctrTitle"/>
-          </p:nvPr>
-        </p:nvSpPr>
-        <p:spPr/>
-        <p:txBody>
-          <a:bodyPr/>
-          <a:lstStyle/>
-          <a:p>
-            <a:pPr marL="0" lvl="0" indent="0">
-              <a:buNone/>
-            </a:pPr>
-            <a:r>
+            <p:ph type="title"/>
+          </p:nvPr>
+        </p:nvSpPr>
+        <p:spPr/>
+        <p:txBody>
+          <a:bodyPr/>
+          <a:lstStyle/>
+          <a:p>
+            <a:pPr lvl="0" indent="0" marL="0">
+              <a:buNone/>
+            </a:pPr>
+            <a:r>
+              <a:rPr/>
               <a:t>Лекция 1</a:t>
             </a:r>
           </a:p>
@@ -3256,17 +3278,15 @@
             <a:spLocks noGrp="1"/>
           </p:cNvSpPr>
           <p:nvPr>
-            <p:ph type="subTitle" idx="1"/>
-          </p:nvPr>
-        </p:nvSpPr>
-        <p:spPr/>
-        <p:txBody>
-          <a:bodyPr>
-            <a:normAutofit fontScale="70000" lnSpcReduction="20000"/>
-          </a:bodyPr>
-          <a:lstStyle/>
-          <a:p>
-            <a:pPr marL="0" lvl="0" indent="0">
+            <p:ph idx="1"/>
+          </p:nvPr>
+        </p:nvSpPr>
+        <p:spPr/>
+        <p:txBody>
+          <a:bodyPr/>
+          <a:lstStyle/>
+          <a:p>
+            <a:pPr lvl="0" indent="0" marL="0">
               <a:buNone/>
             </a:pPr>
             <a:r>
@@ -3275,7 +3295,7 @@
             </a:r>
           </a:p>
           <a:p>
-            <a:pPr marL="0" lvl="0" indent="0">
+            <a:pPr lvl="0" indent="0" marL="0">
               <a:spcBef>
                 <a:spcPts val="3000"/>
               </a:spcBef>
@@ -3287,10 +3307,11 @@
             </a:r>
           </a:p>
           <a:p>
-            <a:pPr marL="0" lvl="0" indent="0">
-              <a:buNone/>
-            </a:pPr>
-            <a:r>
+            <a:pPr lvl="0" indent="0" marL="0">
+              <a:buNone/>
+            </a:pPr>
+            <a:r>
+              <a:rPr/>
               <a:t>(Лекции 32 часа, практ занятия 32 часа)</a:t>
             </a:r>
           </a:p>
@@ -3298,9 +3319,6 @@
       </p:sp>
     </p:spTree>
   </p:cSld>
-  <p:clrMapOvr>
-    <a:masterClrMapping/>
-  </p:clrMapOvr>
 </p:sld>
 </file>
 
@@ -3336,11 +3354,42 @@
           <a:bodyPr/>
           <a:lstStyle/>
           <a:p>
-            <a:pPr marL="0" lvl="0" indent="0">
-              <a:buNone/>
-            </a:pPr>
-            <a:r>
-              <a:t>Рабочая карточка решения</a:t>
+            <a:pPr lvl="0" indent="0" marL="0">
+              <a:buNone/>
+            </a:pPr>
+            <a:r>
+              <a:rPr/>
+              <a:t>Глоссарий (1)</a:t>
+            </a:r>
+          </a:p>
+        </p:txBody>
+      </p:sp>
+      <p:sp>
+        <p:nvSpPr>
+          <p:cNvPr id="3" name="Content Placeholder 2"/>
+          <p:cNvSpPr>
+            <a:spLocks noGrp="1"/>
+          </p:cNvSpPr>
+          <p:nvPr>
+            <p:ph idx="1"/>
+          </p:nvPr>
+        </p:nvSpPr>
+        <p:spPr>
+          <a:xfrm>
+            <a:off x="457200" y="787400"/>
+            <a:ext cx="8229600" cy="635000"/>
+          </a:xfrm>
+        </p:spPr>
+        <p:txBody>
+          <a:bodyPr/>
+          <a:lstStyle/>
+          <a:p>
+            <a:pPr lvl="0" indent="0" marL="0">
+              <a:buNone/>
+            </a:pPr>
+            <a:r>
+              <a:rPr b="1"/>
+              <a:t>Регулирование и стандартизация</a:t>
             </a:r>
           </a:p>
         </p:txBody>
@@ -3356,8 +3405,8 @@
           </p:nvPr>
         </p:nvGraphicFramePr>
         <p:xfrm>
-          <a:off x="457200" y="787400"/>
-          <a:ext cx="8229600" cy="2080260"/>
+          <a:off x="457200" y="1549400"/>
+          <a:ext cx="8229600" cy="2146300"/>
         </p:xfrm>
         <a:graphic>
           <a:graphicData uri="http://schemas.openxmlformats.org/drawingml/2006/table">
@@ -3366,20 +3415,8 @@
                 <a:tableStyleId>{5C22544A-7EE6-4342-B048-85BDC9FD1C3A}</a:tableStyleId>
               </a:tblPr>
               <a:tblGrid>
-                <a:gridCol w="4114800">
-                  <a:extLst>
-                    <a:ext uri="{9D8B030D-6E8A-4147-A177-3AD203B41FA5}">
-                      <a16:colId xmlns:a16="http://schemas.microsoft.com/office/drawing/2014/main" val="20000"/>
-                    </a:ext>
-                  </a:extLst>
-                </a:gridCol>
-                <a:gridCol w="4114800">
-                  <a:extLst>
-                    <a:ext uri="{9D8B030D-6E8A-4147-A177-3AD203B41FA5}">
-                      <a16:colId xmlns:a16="http://schemas.microsoft.com/office/drawing/2014/main" val="20001"/>
-                    </a:ext>
-                  </a:extLst>
-                </a:gridCol>
+                <a:gridCol w="4114800"/>
+                <a:gridCol w="4114800"/>
               </a:tblGrid>
               <a:tr h="0">
                 <a:tc>
@@ -3387,11 +3424,12 @@
                     <a:bodyPr/>
                     <a:lstStyle/>
                     <a:p>
-                      <a:pPr marL="0" lvl="0" indent="0">
-                        <a:buNone/>
-                      </a:pPr>
-                      <a:r>
-                        <a:t>Поле</a:t>
+                      <a:pPr lvl="0" indent="0" marL="0">
+                        <a:buNone/>
+                      </a:pPr>
+                      <a:r>
+                        <a:rPr/>
+                        <a:t>Понятие</a:t>
                       </a:r>
                     </a:p>
                   </a:txBody>
@@ -3402,21 +3440,17 @@
                     <a:bodyPr/>
                     <a:lstStyle/>
                     <a:p>
-                      <a:pPr marL="0" lvl="0" indent="0">
-                        <a:buNone/>
-                      </a:pPr>
-                      <a:r>
-                        <a:t>Что фиксировать</a:t>
+                      <a:pPr lvl="0" indent="0" marL="0">
+                        <a:buNone/>
+                      </a:pPr>
+                      <a:r>
+                        <a:rPr/>
+                        <a:t>Смысл</a:t>
                       </a:r>
                     </a:p>
                   </a:txBody>
                   <a:tcPr/>
                 </a:tc>
-                <a:extLst>
-                  <a:ext uri="{0D108BD9-81ED-4DB2-BD59-A6C34878D82A}">
-                    <a16:rowId xmlns:a16="http://schemas.microsoft.com/office/drawing/2014/main" val="10000"/>
-                  </a:ext>
-                </a:extLst>
               </a:tr>
               <a:tr h="0">
                 <a:tc>
@@ -3424,36 +3458,31 @@
                     <a:bodyPr/>
                     <a:lstStyle/>
                     <a:p>
-                      <a:pPr marL="0" lvl="0" indent="0">
-                        <a:buNone/>
-                      </a:pPr>
-                      <a:r>
-                        <a:t>Решение</a:t>
-                      </a:r>
-                    </a:p>
-                  </a:txBody>
-                  <a:tcPr/>
-                </a:tc>
-                <a:tc>
-                  <a:txBody>
-                    <a:bodyPr/>
-                    <a:lstStyle/>
-                    <a:p>
-                      <a:pPr marL="0" lvl="0" indent="0">
-                        <a:buNone/>
-                      </a:pPr>
-                      <a:r>
-                        <a:t>что планируется или выполнено</a:t>
-                      </a:r>
-                    </a:p>
-                  </a:txBody>
-                  <a:tcPr/>
-                </a:tc>
-                <a:extLst>
-                  <a:ext uri="{0D108BD9-81ED-4DB2-BD59-A6C34878D82A}">
-                    <a16:rowId xmlns:a16="http://schemas.microsoft.com/office/drawing/2014/main" val="10001"/>
-                  </a:ext>
-                </a:extLst>
+                      <a:pPr lvl="0" indent="0" marL="0">
+                        <a:buNone/>
+                      </a:pPr>
+                      <a:r>
+                        <a:rPr/>
+                        <a:t>Технический регламент</a:t>
+                      </a:r>
+                    </a:p>
+                  </a:txBody>
+                </a:tc>
+                <a:tc>
+                  <a:txBody>
+                    <a:bodyPr/>
+                    <a:lstStyle/>
+                    <a:p>
+                      <a:pPr lvl="0" indent="0" marL="0">
+                        <a:buNone/>
+                      </a:pPr>
+                      <a:r>
+                        <a:rPr/>
+                        <a:t>обязательные требования в сфере, предусмотренной законом</a:t>
+                      </a:r>
+                    </a:p>
+                  </a:txBody>
+                </a:tc>
               </a:tr>
               <a:tr h="0">
                 <a:tc>
@@ -3461,36 +3490,31 @@
                     <a:bodyPr/>
                     <a:lstStyle/>
                     <a:p>
-                      <a:pPr marL="0" lvl="0" indent="0">
-                        <a:buNone/>
-                      </a:pPr>
-                      <a:r>
-                        <a:t>Основание</a:t>
-                      </a:r>
-                    </a:p>
-                  </a:txBody>
-                  <a:tcPr/>
-                </a:tc>
-                <a:tc>
-                  <a:txBody>
-                    <a:bodyPr/>
-                    <a:lstStyle/>
-                    <a:p>
-                      <a:pPr marL="0" lvl="0" indent="0">
-                        <a:buNone/>
-                      </a:pPr>
-                      <a:r>
-                        <a:t>норма, договор, риск или внутреннее правило</a:t>
-                      </a:r>
-                    </a:p>
-                  </a:txBody>
-                  <a:tcPr/>
-                </a:tc>
-                <a:extLst>
-                  <a:ext uri="{0D108BD9-81ED-4DB2-BD59-A6C34878D82A}">
-                    <a16:rowId xmlns:a16="http://schemas.microsoft.com/office/drawing/2014/main" val="10002"/>
-                  </a:ext>
-                </a:extLst>
+                      <a:pPr lvl="0" indent="0" marL="0">
+                        <a:buNone/>
+                      </a:pPr>
+                      <a:r>
+                        <a:rPr/>
+                        <a:t>Документ по стандартизации</a:t>
+                      </a:r>
+                    </a:p>
+                  </a:txBody>
+                </a:tc>
+                <a:tc>
+                  <a:txBody>
+                    <a:bodyPr/>
+                    <a:lstStyle/>
+                    <a:p>
+                      <a:pPr lvl="0" indent="0" marL="0">
+                        <a:buNone/>
+                      </a:pPr>
+                      <a:r>
+                        <a:rPr/>
+                        <a:t>в общем случае добровольное многократное использование</a:t>
+                      </a:r>
+                    </a:p>
+                  </a:txBody>
+                </a:tc>
               </a:tr>
               <a:tr h="0">
                 <a:tc>
@@ -3498,36 +3522,31 @@
                     <a:bodyPr/>
                     <a:lstStyle/>
                     <a:p>
-                      <a:pPr marL="0" lvl="0" indent="0">
-                        <a:buNone/>
-                      </a:pPr>
-                      <a:r>
-                        <a:t>Граница</a:t>
-                      </a:r>
-                    </a:p>
-                  </a:txBody>
-                  <a:tcPr/>
-                </a:tc>
-                <a:tc>
-                  <a:txBody>
-                    <a:bodyPr/>
-                    <a:lstStyle/>
-                    <a:p>
-                      <a:pPr marL="0" lvl="0" indent="0">
-                        <a:buNone/>
-                      </a:pPr>
-                      <a:r>
-                        <a:t>объект, компонент, процесс, версия</a:t>
-                      </a:r>
-                    </a:p>
-                  </a:txBody>
-                  <a:tcPr/>
-                </a:tc>
-                <a:extLst>
-                  <a:ext uri="{0D108BD9-81ED-4DB2-BD59-A6C34878D82A}">
-                    <a16:rowId xmlns:a16="http://schemas.microsoft.com/office/drawing/2014/main" val="10003"/>
-                  </a:ext>
-                </a:extLst>
+                      <a:pPr lvl="0" indent="0" marL="0">
+                        <a:buNone/>
+                      </a:pPr>
+                      <a:r>
+                        <a:rPr/>
+                        <a:t>Национальный стандарт</a:t>
+                      </a:r>
+                    </a:p>
+                  </a:txBody>
+                </a:tc>
+                <a:tc>
+                  <a:txBody>
+                    <a:bodyPr/>
+                    <a:lstStyle/>
+                    <a:p>
+                      <a:pPr lvl="0" indent="0" marL="0">
+                        <a:buNone/>
+                      </a:pPr>
+                      <a:r>
+                        <a:rPr/>
+                        <a:t>утверждён национальным органом по стандартизации</a:t>
+                      </a:r>
+                    </a:p>
+                  </a:txBody>
+                </a:tc>
               </a:tr>
               <a:tr h="0">
                 <a:tc>
@@ -3535,36 +3554,31 @@
                     <a:bodyPr/>
                     <a:lstStyle/>
                     <a:p>
-                      <a:pPr marL="0" lvl="0" indent="0">
-                        <a:buNone/>
-                      </a:pPr>
-                      <a:r>
-                        <a:t>Доказательство</a:t>
-                      </a:r>
-                    </a:p>
-                  </a:txBody>
-                  <a:tcPr/>
-                </a:tc>
-                <a:tc>
-                  <a:txBody>
-                    <a:bodyPr/>
-                    <a:lstStyle/>
-                    <a:p>
-                      <a:pPr marL="0" lvl="0" indent="0">
-                        <a:buNone/>
-                      </a:pPr>
-                      <a:r>
-                        <a:t>акт, протокол, журнал, схема, сертификат</a:t>
-                      </a:r>
-                    </a:p>
-                  </a:txBody>
-                  <a:tcPr/>
-                </a:tc>
-                <a:extLst>
-                  <a:ext uri="{0D108BD9-81ED-4DB2-BD59-A6C34878D82A}">
-                    <a16:rowId xmlns:a16="http://schemas.microsoft.com/office/drawing/2014/main" val="10004"/>
-                  </a:ext>
-                </a:extLst>
+                      <a:pPr lvl="0" indent="0" marL="0">
+                        <a:buNone/>
+                      </a:pPr>
+                      <a:r>
+                        <a:rPr/>
+                        <a:t>ПНСТ</a:t>
+                      </a:r>
+                    </a:p>
+                  </a:txBody>
+                </a:tc>
+                <a:tc>
+                  <a:txBody>
+                    <a:bodyPr/>
+                    <a:lstStyle/>
+                    <a:p>
+                      <a:pPr lvl="0" indent="0" marL="0">
+                        <a:buNone/>
+                      </a:pPr>
+                      <a:r>
+                        <a:rPr/>
+                        <a:t>документ для апробации, срок — не более трёх лет</a:t>
+                      </a:r>
+                    </a:p>
+                  </a:txBody>
+                </a:tc>
               </a:tr>
               <a:tr h="0">
                 <a:tc>
@@ -3572,83 +3586,68 @@
                     <a:bodyPr/>
                     <a:lstStyle/>
                     <a:p>
-                      <a:pPr marL="0" lvl="0" indent="0">
-                        <a:buNone/>
-                      </a:pPr>
-                      <a:r>
-                        <a:t>Ограничение</a:t>
-                      </a:r>
-                    </a:p>
-                  </a:txBody>
-                  <a:tcPr/>
-                </a:tc>
-                <a:tc>
-                  <a:txBody>
-                    <a:bodyPr/>
-                    <a:lstStyle/>
-                    <a:p>
-                      <a:pPr marL="0" lvl="0" indent="0">
-                        <a:buNone/>
-                      </a:pPr>
-                      <a:r>
-                        <a:t>чего доказательство не подтверждает</a:t>
-                      </a:r>
-                    </a:p>
-                  </a:txBody>
-                  <a:tcPr/>
-                </a:tc>
-                <a:extLst>
-                  <a:ext uri="{0D108BD9-81ED-4DB2-BD59-A6C34878D82A}">
-                    <a16:rowId xmlns:a16="http://schemas.microsoft.com/office/drawing/2014/main" val="10005"/>
-                  </a:ext>
-                </a:extLst>
-              </a:tr>
-              <a:tr h="0">
-                <a:tc>
-                  <a:txBody>
-                    <a:bodyPr/>
-                    <a:lstStyle/>
-                    <a:p>
-                      <a:pPr marL="0" lvl="0" indent="0">
-                        <a:buNone/>
-                      </a:pPr>
-                      <a:r>
-                        <a:t>Пересмотр</a:t>
-                      </a:r>
-                    </a:p>
-                  </a:txBody>
-                  <a:tcPr/>
-                </a:tc>
-                <a:tc>
-                  <a:txBody>
-                    <a:bodyPr/>
-                    <a:lstStyle/>
-                    <a:p>
-                      <a:pPr marL="0" lvl="0" indent="0">
-                        <a:buNone/>
-                      </a:pPr>
-                      <a:r>
-                        <a:t>событие, владелец и срок проверки</a:t>
-                      </a:r>
-                    </a:p>
-                  </a:txBody>
-                  <a:tcPr/>
-                </a:tc>
-                <a:extLst>
-                  <a:ext uri="{0D108BD9-81ED-4DB2-BD59-A6C34878D82A}">
-                    <a16:rowId xmlns:a16="http://schemas.microsoft.com/office/drawing/2014/main" val="10006"/>
-                  </a:ext>
-                </a:extLst>
+                      <a:pPr lvl="0" indent="0" marL="0">
+                        <a:buNone/>
+                      </a:pPr>
+                      <a:r>
+                        <a:rPr/>
+                        <a:t>Стандарт организации</a:t>
+                      </a:r>
+                    </a:p>
+                  </a:txBody>
+                </a:tc>
+                <a:tc>
+                  <a:txBody>
+                    <a:bodyPr/>
+                    <a:lstStyle/>
+                    <a:p>
+                      <a:pPr lvl="0" indent="0" marL="0">
+                        <a:buNone/>
+                      </a:pPr>
+                      <a:r>
+                        <a:rPr/>
+                        <a:t>утверждает организация для своих нужд</a:t>
+                      </a:r>
+                    </a:p>
+                  </a:txBody>
+                </a:tc>
               </a:tr>
             </a:tbl>
           </a:graphicData>
         </a:graphic>
       </p:graphicFrame>
+      <p:sp>
+        <p:nvSpPr>
+          <p:cNvPr id="3" name="Content Placeholder 2"/>
+          <p:cNvSpPr>
+            <a:spLocks noGrp="1"/>
+          </p:cNvSpPr>
+          <p:nvPr>
+            <p:ph idx="1"/>
+          </p:nvPr>
+        </p:nvSpPr>
+        <p:spPr>
+          <a:xfrm>
+            <a:off x="457200" y="3822700"/>
+            <a:ext cx="8229600" cy="635000"/>
+          </a:xfrm>
+        </p:spPr>
+        <p:txBody>
+          <a:bodyPr/>
+          <a:lstStyle/>
+          <a:p>
+            <a:pPr lvl="0" indent="0" marL="0">
+              <a:buNone/>
+            </a:pPr>
+            <a:r>
+              <a:rPr/>
+              <a:t>Формулировки учебные; точные определения — в тексте закона.</a:t>
+            </a:r>
+          </a:p>
+        </p:txBody>
+      </p:sp>
     </p:spTree>
   </p:cSld>
-  <p:clrMapOvr>
-    <a:masterClrMapping/>
-  </p:clrMapOvr>
 </p:sld>
 </file>
 
@@ -3684,11 +3683,12 @@
           <a:bodyPr/>
           <a:lstStyle/>
           <a:p>
-            <a:pPr marL="0" lvl="0" indent="0">
-              <a:buNone/>
-            </a:pPr>
-            <a:r>
-              <a:t>Связь с курсом</a:t>
+            <a:pPr lvl="0" indent="0" marL="0">
+              <a:buNone/>
+            </a:pPr>
+            <a:r>
+              <a:rPr/>
+              <a:t>Глоссарий (2)</a:t>
             </a:r>
           </a:p>
         </p:txBody>
@@ -3703,47 +3703,282 @@
             <p:ph idx="1"/>
           </p:nvPr>
         </p:nvSpPr>
-        <p:spPr/>
-        <p:txBody>
-          <a:bodyPr/>
-          <a:lstStyle/>
-          <a:p>
-            <a:pPr lvl="0"/>
-            <a:r>
-              <a:t>Лекция 2: применимость требований начинается с определения субъекта и объекта КИИ.</a:t>
-            </a:r>
-          </a:p>
-          <a:p>
-            <a:pPr lvl="0"/>
-            <a:r>
-              <a:t>Лекции 3–11: решения о категорировании, защите и реагировании требуют доказательств выполнения.</a:t>
-            </a:r>
-          </a:p>
-          <a:p>
-            <a:pPr lvl="0"/>
-            <a:r>
-              <a:t>Лекция 13: стандарты и ПНСТ для доверенных ПАК.</a:t>
-            </a:r>
-          </a:p>
-          <a:p>
-            <a:pPr lvl="0"/>
-            <a:r>
-              <a:t>Лекция 14: оценка соответствия и границы сертификата.</a:t>
-            </a:r>
-          </a:p>
-          <a:p>
-            <a:pPr lvl="0"/>
-            <a:r>
-              <a:t>Лекции 15–16: доказательная база, корректирующие меры и цикл улучшений.</a:t>
-            </a:r>
-          </a:p>
-        </p:txBody>
-      </p:sp>
+        <p:spPr>
+          <a:xfrm>
+            <a:off x="457200" y="787400"/>
+            <a:ext cx="8229600" cy="711200"/>
+          </a:xfrm>
+        </p:spPr>
+        <p:txBody>
+          <a:bodyPr/>
+          <a:lstStyle/>
+          <a:p>
+            <a:pPr lvl="0" indent="0" marL="0">
+              <a:buNone/>
+            </a:pPr>
+            <a:r>
+              <a:rPr b="1"/>
+              <a:t>Оценка соответствия и доказательства</a:t>
+            </a:r>
+          </a:p>
+        </p:txBody>
+      </p:sp>
+      <p:graphicFrame>
+        <p:nvGraphicFramePr>
+          <p:cNvPr id="6" name="Content Placeholder 5"/>
+          <p:cNvGraphicFramePr>
+            <a:graphicFrameLocks noGrp="1"/>
+          </p:cNvGraphicFramePr>
+          <p:nvPr>
+            <p:ph idx="1"/>
+          </p:nvPr>
+        </p:nvGraphicFramePr>
+        <p:xfrm>
+          <a:off x="457200" y="1625600"/>
+          <a:ext cx="8229600" cy="2832100"/>
+        </p:xfrm>
+        <a:graphic>
+          <a:graphicData uri="http://schemas.openxmlformats.org/drawingml/2006/table">
+            <a:tbl>
+              <a:tblPr firstRow="1" bandRow="1">
+                <a:tableStyleId>{5C22544A-7EE6-4342-B048-85BDC9FD1C3A}</a:tableStyleId>
+              </a:tblPr>
+              <a:tblGrid>
+                <a:gridCol w="4114800"/>
+                <a:gridCol w="4114800"/>
+              </a:tblGrid>
+              <a:tr h="0">
+                <a:tc>
+                  <a:txBody>
+                    <a:bodyPr/>
+                    <a:lstStyle/>
+                    <a:p>
+                      <a:pPr lvl="0" indent="0" marL="0">
+                        <a:buNone/>
+                      </a:pPr>
+                      <a:r>
+                        <a:rPr/>
+                        <a:t>Понятие</a:t>
+                      </a:r>
+                    </a:p>
+                  </a:txBody>
+                  <a:tcPr/>
+                </a:tc>
+                <a:tc>
+                  <a:txBody>
+                    <a:bodyPr/>
+                    <a:lstStyle/>
+                    <a:p>
+                      <a:pPr lvl="0" indent="0" marL="0">
+                        <a:buNone/>
+                      </a:pPr>
+                      <a:r>
+                        <a:rPr/>
+                        <a:t>Смысл</a:t>
+                      </a:r>
+                    </a:p>
+                  </a:txBody>
+                  <a:tcPr/>
+                </a:tc>
+              </a:tr>
+              <a:tr h="0">
+                <a:tc>
+                  <a:txBody>
+                    <a:bodyPr/>
+                    <a:lstStyle/>
+                    <a:p>
+                      <a:pPr lvl="0" indent="0" marL="0">
+                        <a:buNone/>
+                      </a:pPr>
+                      <a:r>
+                        <a:rPr/>
+                        <a:t>Подтверждение соответствия</a:t>
+                      </a:r>
+                    </a:p>
+                  </a:txBody>
+                </a:tc>
+                <a:tc>
+                  <a:txBody>
+                    <a:bodyPr/>
+                    <a:lstStyle/>
+                    <a:p>
+                      <a:pPr lvl="0" indent="0" marL="0">
+                        <a:buNone/>
+                      </a:pPr>
+                      <a:r>
+                        <a:rPr/>
+                        <a:t>документальное удостоверение соответствия</a:t>
+                      </a:r>
+                    </a:p>
+                  </a:txBody>
+                </a:tc>
+              </a:tr>
+              <a:tr h="0">
+                <a:tc>
+                  <a:txBody>
+                    <a:bodyPr/>
+                    <a:lstStyle/>
+                    <a:p>
+                      <a:pPr lvl="0" indent="0" marL="0">
+                        <a:buNone/>
+                      </a:pPr>
+                      <a:r>
+                        <a:rPr/>
+                        <a:t>Декларирование</a:t>
+                      </a:r>
+                    </a:p>
+                  </a:txBody>
+                </a:tc>
+                <a:tc>
+                  <a:txBody>
+                    <a:bodyPr/>
+                    <a:lstStyle/>
+                    <a:p>
+                      <a:pPr lvl="0" indent="0" marL="0">
+                        <a:buNone/>
+                      </a:pPr>
+                      <a:r>
+                        <a:rPr/>
+                        <a:t>заявитель сам принимает декларацию</a:t>
+                      </a:r>
+                    </a:p>
+                  </a:txBody>
+                </a:tc>
+              </a:tr>
+              <a:tr h="0">
+                <a:tc>
+                  <a:txBody>
+                    <a:bodyPr/>
+                    <a:lstStyle/>
+                    <a:p>
+                      <a:pPr lvl="0" indent="0" marL="0">
+                        <a:buNone/>
+                      </a:pPr>
+                      <a:r>
+                        <a:rPr/>
+                        <a:t>Обязательная сертификация</a:t>
+                      </a:r>
+                    </a:p>
+                  </a:txBody>
+                </a:tc>
+                <a:tc>
+                  <a:txBody>
+                    <a:bodyPr/>
+                    <a:lstStyle/>
+                    <a:p>
+                      <a:pPr lvl="0" indent="0" marL="0">
+                        <a:buNone/>
+                      </a:pPr>
+                      <a:r>
+                        <a:rPr/>
+                        <a:t>с участием органа по сертификации</a:t>
+                      </a:r>
+                    </a:p>
+                  </a:txBody>
+                </a:tc>
+              </a:tr>
+              <a:tr h="0">
+                <a:tc>
+                  <a:txBody>
+                    <a:bodyPr/>
+                    <a:lstStyle/>
+                    <a:p>
+                      <a:pPr lvl="0" indent="0" marL="0">
+                        <a:buNone/>
+                      </a:pPr>
+                      <a:r>
+                        <a:rPr/>
+                        <a:t>Аккредитация</a:t>
+                      </a:r>
+                    </a:p>
+                  </a:txBody>
+                </a:tc>
+                <a:tc>
+                  <a:txBody>
+                    <a:bodyPr/>
+                    <a:lstStyle/>
+                    <a:p>
+                      <a:pPr lvl="0" indent="0" marL="0">
+                        <a:buNone/>
+                      </a:pPr>
+                      <a:r>
+                        <a:rPr/>
+                        <a:t>подтверждение компетентности в области</a:t>
+                      </a:r>
+                    </a:p>
+                  </a:txBody>
+                </a:tc>
+              </a:tr>
+              <a:tr h="0">
+                <a:tc>
+                  <a:txBody>
+                    <a:bodyPr/>
+                    <a:lstStyle/>
+                    <a:p>
+                      <a:pPr lvl="0" indent="0" marL="0">
+                        <a:buNone/>
+                      </a:pPr>
+                      <a:r>
+                        <a:rPr/>
+                        <a:t>Испытание</a:t>
+                      </a:r>
+                    </a:p>
+                  </a:txBody>
+                </a:tc>
+                <a:tc>
+                  <a:txBody>
+                    <a:bodyPr/>
+                    <a:lstStyle/>
+                    <a:p>
+                      <a:pPr lvl="0" indent="0" marL="0">
+                        <a:buNone/>
+                      </a:pPr>
+                      <a:r>
+                        <a:rPr/>
+                        <a:t>определение характеристик по методике</a:t>
+                      </a:r>
+                    </a:p>
+                  </a:txBody>
+                </a:tc>
+              </a:tr>
+              <a:tr h="0">
+                <a:tc>
+                  <a:txBody>
+                    <a:bodyPr/>
+                    <a:lstStyle/>
+                    <a:p>
+                      <a:pPr lvl="0" indent="0" marL="0">
+                        <a:buNone/>
+                      </a:pPr>
+                      <a:r>
+                        <a:rPr/>
+                        <a:t>Доказательство</a:t>
+                      </a:r>
+                    </a:p>
+                  </a:txBody>
+                </a:tc>
+                <a:tc>
+                  <a:txBody>
+                    <a:bodyPr/>
+                    <a:lstStyle/>
+                    <a:p>
+                      <a:pPr lvl="0" indent="0" marL="0">
+                        <a:buNone/>
+                      </a:pPr>
+                      <a:r>
+                        <a:rPr/>
+                        <a:t>документированный факт, на который опирается вывод</a:t>
+                      </a:r>
+                    </a:p>
+                  </a:txBody>
+                </a:tc>
+              </a:tr>
+            </a:tbl>
+          </a:graphicData>
+        </a:graphic>
+      </p:graphicFrame>
     </p:spTree>
   </p:cSld>
-  <p:clrMapOvr>
-    <a:masterClrMapping/>
-  </p:clrMapOvr>
 </p:sld>
 </file>
 
@@ -3779,15 +4014,422 @@
           <a:bodyPr/>
           <a:lstStyle/>
           <a:p>
-            <a:pPr marL="0" lvl="0" indent="0">
-              <a:buNone/>
-            </a:pPr>
-            <a:r>
-              <a:t>Итог</a:t>
-            </a:r>
-          </a:p>
-        </p:txBody>
-      </p:sp>
+            <a:pPr lvl="0" indent="0" marL="0">
+              <a:buNone/>
+            </a:pPr>
+            <a:r>
+              <a:rPr/>
+              <a:t>Регламент, стандарт, ПНСТ</a:t>
+            </a:r>
+          </a:p>
+        </p:txBody>
+      </p:sp>
+      <p:graphicFrame>
+        <p:nvGraphicFramePr>
+          <p:cNvPr id="6" name="Content Placeholder 5"/>
+          <p:cNvGraphicFramePr>
+            <a:graphicFrameLocks noGrp="1"/>
+          </p:cNvGraphicFramePr>
+          <p:nvPr>
+            <p:ph idx="1"/>
+          </p:nvPr>
+        </p:nvGraphicFramePr>
+        <p:xfrm>
+          <a:off x="457200" y="787400"/>
+          <a:ext cx="8229600" cy="2717800"/>
+        </p:xfrm>
+        <a:graphic>
+          <a:graphicData uri="http://schemas.openxmlformats.org/drawingml/2006/table">
+            <a:tbl>
+              <a:tblPr firstRow="1" bandRow="1">
+                <a:tableStyleId>{5C22544A-7EE6-4342-B048-85BDC9FD1C3A}</a:tableStyleId>
+              </a:tblPr>
+              <a:tblGrid>
+                <a:gridCol w="2057400"/>
+                <a:gridCol w="2057400"/>
+                <a:gridCol w="2057400"/>
+                <a:gridCol w="2057400"/>
+              </a:tblGrid>
+              <a:tr h="0">
+                <a:tc>
+                  <a:txBody>
+                    <a:bodyPr/>
+                    <a:lstStyle/>
+                    <a:p>
+                      <a:pPr lvl="0" indent="0" marL="0">
+                        <a:buNone/>
+                      </a:pPr>
+                      <a:r>
+                        <a:rPr/>
+                        <a:t>Признак</a:t>
+                      </a:r>
+                    </a:p>
+                  </a:txBody>
+                  <a:tcPr/>
+                </a:tc>
+                <a:tc>
+                  <a:txBody>
+                    <a:bodyPr/>
+                    <a:lstStyle/>
+                    <a:p>
+                      <a:pPr lvl="0" indent="0" marL="0">
+                        <a:buNone/>
+                      </a:pPr>
+                      <a:r>
+                        <a:rPr/>
+                        <a:t>Регламент</a:t>
+                      </a:r>
+                    </a:p>
+                  </a:txBody>
+                  <a:tcPr/>
+                </a:tc>
+                <a:tc>
+                  <a:txBody>
+                    <a:bodyPr/>
+                    <a:lstStyle/>
+                    <a:p>
+                      <a:pPr lvl="0" indent="0" marL="0">
+                        <a:buNone/>
+                      </a:pPr>
+                      <a:r>
+                        <a:rPr/>
+                        <a:t>Нац. стандарт</a:t>
+                      </a:r>
+                    </a:p>
+                  </a:txBody>
+                  <a:tcPr/>
+                </a:tc>
+                <a:tc>
+                  <a:txBody>
+                    <a:bodyPr/>
+                    <a:lstStyle/>
+                    <a:p>
+                      <a:pPr lvl="0" indent="0" marL="0">
+                        <a:buNone/>
+                      </a:pPr>
+                      <a:r>
+                        <a:rPr/>
+                        <a:t>ПНСТ</a:t>
+                      </a:r>
+                    </a:p>
+                  </a:txBody>
+                  <a:tcPr/>
+                </a:tc>
+              </a:tr>
+              <a:tr h="0">
+                <a:tc>
+                  <a:txBody>
+                    <a:bodyPr/>
+                    <a:lstStyle/>
+                    <a:p>
+                      <a:pPr lvl="0" indent="0" marL="0">
+                        <a:buNone/>
+                      </a:pPr>
+                      <a:r>
+                        <a:rPr/>
+                        <a:t>Назначение</a:t>
+                      </a:r>
+                    </a:p>
+                  </a:txBody>
+                </a:tc>
+                <a:tc>
+                  <a:txBody>
+                    <a:bodyPr/>
+                    <a:lstStyle/>
+                    <a:p>
+                      <a:pPr lvl="0" indent="0" marL="0">
+                        <a:buNone/>
+                      </a:pPr>
+                      <a:r>
+                        <a:rPr/>
+                        <a:t>обязательные требования</a:t>
+                      </a:r>
+                    </a:p>
+                  </a:txBody>
+                </a:tc>
+                <a:tc>
+                  <a:txBody>
+                    <a:bodyPr/>
+                    <a:lstStyle/>
+                    <a:p>
+                      <a:pPr lvl="0" indent="0" marL="0">
+                        <a:buNone/>
+                      </a:pPr>
+                      <a:r>
+                        <a:rPr/>
+                        <a:t>согласованные характеристики, правила, методы</a:t>
+                      </a:r>
+                    </a:p>
+                  </a:txBody>
+                </a:tc>
+                <a:tc>
+                  <a:txBody>
+                    <a:bodyPr/>
+                    <a:lstStyle/>
+                    <a:p>
+                      <a:pPr lvl="0" indent="0" marL="0">
+                        <a:buNone/>
+                      </a:pPr>
+                      <a:r>
+                        <a:rPr/>
+                        <a:t>апробация до утверждения стандарта</a:t>
+                      </a:r>
+                    </a:p>
+                  </a:txBody>
+                </a:tc>
+              </a:tr>
+              <a:tr h="0">
+                <a:tc>
+                  <a:txBody>
+                    <a:bodyPr/>
+                    <a:lstStyle/>
+                    <a:p>
+                      <a:pPr lvl="0" indent="0" marL="0">
+                        <a:buNone/>
+                      </a:pPr>
+                      <a:r>
+                        <a:rPr/>
+                        <a:t>Обязательность</a:t>
+                      </a:r>
+                    </a:p>
+                  </a:txBody>
+                </a:tc>
+                <a:tc>
+                  <a:txBody>
+                    <a:bodyPr/>
+                    <a:lstStyle/>
+                    <a:p>
+                      <a:pPr lvl="0" indent="0" marL="0">
+                        <a:buNone/>
+                      </a:pPr>
+                      <a:r>
+                        <a:rPr/>
+                        <a:t>в сфере, заданной законом</a:t>
+                      </a:r>
+                    </a:p>
+                  </a:txBody>
+                </a:tc>
+                <a:tc>
+                  <a:txBody>
+                    <a:bodyPr/>
+                    <a:lstStyle/>
+                    <a:p>
+                      <a:pPr lvl="0" indent="0" marL="0">
+                        <a:buNone/>
+                      </a:pPr>
+                      <a:r>
+                        <a:rPr/>
+                        <a:t>в общем случае добровольный</a:t>
+                      </a:r>
+                    </a:p>
+                  </a:txBody>
+                </a:tc>
+                <a:tc>
+                  <a:txBody>
+                    <a:bodyPr/>
+                    <a:lstStyle/>
+                    <a:p>
+                      <a:pPr lvl="0" indent="0" marL="0">
+                        <a:buNone/>
+                      </a:pPr>
+                      <a:r>
+                        <a:rPr/>
+                        <a:t>в общем случае добровольный</a:t>
+                      </a:r>
+                    </a:p>
+                  </a:txBody>
+                </a:tc>
+              </a:tr>
+              <a:tr h="0">
+                <a:tc>
+                  <a:txBody>
+                    <a:bodyPr/>
+                    <a:lstStyle/>
+                    <a:p>
+                      <a:pPr lvl="0" indent="0" marL="0">
+                        <a:buNone/>
+                      </a:pPr>
+                      <a:r>
+                        <a:rPr/>
+                        <a:t>Срок действия</a:t>
+                      </a:r>
+                    </a:p>
+                  </a:txBody>
+                </a:tc>
+                <a:tc>
+                  <a:txBody>
+                    <a:bodyPr/>
+                    <a:lstStyle/>
+                    <a:p>
+                      <a:pPr lvl="0" indent="0" marL="0">
+                        <a:buNone/>
+                      </a:pPr>
+                      <a:r>
+                        <a:rPr/>
+                        <a:t>по акту и законодательству</a:t>
+                      </a:r>
+                    </a:p>
+                  </a:txBody>
+                </a:tc>
+                <a:tc>
+                  <a:txBody>
+                    <a:bodyPr/>
+                    <a:lstStyle/>
+                    <a:p>
+                      <a:pPr lvl="0" indent="0" marL="0">
+                        <a:buNone/>
+                      </a:pPr>
+                      <a:r>
+                        <a:rPr/>
+                        <a:t>как правило бессрочный, может быть отменён</a:t>
+                      </a:r>
+                    </a:p>
+                  </a:txBody>
+                </a:tc>
+                <a:tc>
+                  <a:txBody>
+                    <a:bodyPr/>
+                    <a:lstStyle/>
+                    <a:p>
+                      <a:pPr lvl="0" indent="0" marL="0">
+                        <a:buNone/>
+                      </a:pPr>
+                      <a:r>
+                        <a:rPr/>
+                        <a:t>не более трёх лет</a:t>
+                      </a:r>
+                    </a:p>
+                  </a:txBody>
+                </a:tc>
+              </a:tr>
+              <a:tr h="0">
+                <a:tc>
+                  <a:txBody>
+                    <a:bodyPr/>
+                    <a:lstStyle/>
+                    <a:p>
+                      <a:pPr lvl="0" indent="0" marL="0">
+                        <a:buNone/>
+                      </a:pPr>
+                      <a:r>
+                        <a:rPr/>
+                        <a:t>Кто утверждает</a:t>
+                      </a:r>
+                    </a:p>
+                  </a:txBody>
+                </a:tc>
+                <a:tc>
+                  <a:txBody>
+                    <a:bodyPr/>
+                    <a:lstStyle/>
+                    <a:p>
+                      <a:pPr lvl="0" indent="0" marL="0">
+                        <a:buNone/>
+                      </a:pPr>
+                      <a:r>
+                        <a:rPr/>
+                        <a:t>по законодательству</a:t>
+                      </a:r>
+                    </a:p>
+                  </a:txBody>
+                </a:tc>
+                <a:tc>
+                  <a:txBody>
+                    <a:bodyPr/>
+                    <a:lstStyle/>
+                    <a:p>
+                      <a:pPr lvl="0" indent="0" marL="0">
+                        <a:buNone/>
+                      </a:pPr>
+                      <a:r>
+                        <a:rPr/>
+                        <a:t>нац. орган по стандартизации</a:t>
+                      </a:r>
+                    </a:p>
+                  </a:txBody>
+                </a:tc>
+                <a:tc>
+                  <a:txBody>
+                    <a:bodyPr/>
+                    <a:lstStyle/>
+                    <a:p>
+                      <a:pPr lvl="0" indent="0" marL="0">
+                        <a:buNone/>
+                      </a:pPr>
+                      <a:r>
+                        <a:rPr/>
+                        <a:t>нац. орган по стандартизации</a:t>
+                      </a:r>
+                    </a:p>
+                  </a:txBody>
+                </a:tc>
+              </a:tr>
+              <a:tr h="0">
+                <a:tc>
+                  <a:txBody>
+                    <a:bodyPr/>
+                    <a:lstStyle/>
+                    <a:p>
+                      <a:pPr lvl="0" indent="0" marL="0">
+                        <a:buNone/>
+                      </a:pPr>
+                      <a:r>
+                        <a:rPr/>
+                        <a:t>Что проверить</a:t>
+                      </a:r>
+                    </a:p>
+                  </a:txBody>
+                </a:tc>
+                <a:tc>
+                  <a:txBody>
+                    <a:bodyPr/>
+                    <a:lstStyle/>
+                    <a:p>
+                      <a:pPr lvl="0" indent="0" marL="0">
+                        <a:buNone/>
+                      </a:pPr>
+                      <a:r>
+                        <a:rPr/>
+                        <a:t>сферу, объекты, переходные положения</a:t>
+                      </a:r>
+                    </a:p>
+                  </a:txBody>
+                </a:tc>
+                <a:tc>
+                  <a:txBody>
+                    <a:bodyPr/>
+                    <a:lstStyle/>
+                    <a:p>
+                      <a:pPr lvl="0" indent="0" marL="0">
+                        <a:buNone/>
+                      </a:pPr>
+                      <a:r>
+                        <a:rPr/>
+                        <a:t>редакцию, раздел, статус</a:t>
+                      </a:r>
+                    </a:p>
+                  </a:txBody>
+                </a:tc>
+                <a:tc>
+                  <a:txBody>
+                    <a:bodyPr/>
+                    <a:lstStyle/>
+                    <a:p>
+                      <a:pPr lvl="0" indent="0" marL="0">
+                        <a:buNone/>
+                      </a:pPr>
+                      <a:r>
+                        <a:rPr/>
+                        <a:t>дату введения, срок, статус</a:t>
+                      </a:r>
+                    </a:p>
+                  </a:txBody>
+                </a:tc>
+              </a:tr>
+            </a:tbl>
+          </a:graphicData>
+        </a:graphic>
+      </p:graphicFrame>
       <p:sp>
         <p:nvSpPr>
           <p:cNvPr id="3" name="Content Placeholder 2"/>
@@ -3798,76 +4440,28 @@
             <p:ph idx="1"/>
           </p:nvPr>
         </p:nvSpPr>
-        <p:spPr/>
-        <p:txBody>
-          <a:bodyPr/>
-          <a:lstStyle/>
-          <a:p>
-            <a:pPr marL="0" lvl="0" indent="0">
-              <a:buNone/>
-            </a:pPr>
-            <a:r>
-              <a:rPr b="1"/>
-              <a:t>Не «найти документ», а установить:</a:t>
-            </a:r>
-          </a:p>
-          <a:p>
-            <a:pPr lvl="0"/>
-            <a:r>
-              <a:t>основание</a:t>
-            </a:r>
-          </a:p>
-          <a:p>
-            <a:pPr lvl="0"/>
-            <a:r>
-              <a:t>применимость</a:t>
-            </a:r>
-          </a:p>
-          <a:p>
-            <a:pPr lvl="0"/>
-            <a:r>
-              <a:t>решение</a:t>
-            </a:r>
-          </a:p>
-          <a:p>
-            <a:pPr lvl="0"/>
-            <a:r>
-              <a:t>доказательство</a:t>
-            </a:r>
-          </a:p>
-          <a:p>
-            <a:pPr lvl="0"/>
-            <a:r>
-              <a:t>ограничение</a:t>
-            </a:r>
-          </a:p>
-          <a:p>
-            <a:pPr lvl="0"/>
-            <a:r>
-              <a:t>пересмотр</a:t>
-            </a:r>
-          </a:p>
-          <a:p>
-            <a:pPr marL="0" lvl="0" indent="0">
-              <a:buNone/>
-            </a:pPr>
-            <a:r>
-              <a:t>Вопросы к лекции </a:t>
-            </a:r>
-            <a:r>
-              <a:rPr>
-                <a:hlinkClick r:id="rId2"/>
-              </a:rPr>
-              <a:t>https://github.com/arasskazov/IFTIS-KII-2026/blob/main/Lec_1/L1_questionnarie.md</a:t>
+        <p:spPr>
+          <a:xfrm>
+            <a:off x="457200" y="3632200"/>
+            <a:ext cx="8229600" cy="825500"/>
+          </a:xfrm>
+        </p:spPr>
+        <p:txBody>
+          <a:bodyPr/>
+          <a:lstStyle/>
+          <a:p>
+            <a:pPr lvl="0" indent="0" marL="0">
+              <a:buNone/>
+            </a:pPr>
+            <a:r>
+              <a:rPr/>
+              <a:t>По названию нельзя определить обязательность: нужно найти её источник.</a:t>
             </a:r>
           </a:p>
         </p:txBody>
       </p:sp>
     </p:spTree>
   </p:cSld>
-  <p:clrMapOvr>
-    <a:masterClrMapping/>
-  </p:clrMapOvr>
 </p:sld>
 </file>
 
@@ -3903,11 +4497,12 @@
           <a:bodyPr/>
           <a:lstStyle/>
           <a:p>
-            <a:pPr marL="0" lvl="0" indent="0">
-              <a:buNone/>
-            </a:pPr>
-            <a:r>
-              <a:t>Список литературы</a:t>
+            <a:pPr lvl="0" indent="0" marL="0">
+              <a:buNone/>
+            </a:pPr>
+            <a:r>
+              <a:rPr/>
+              <a:t>Когда стандарт обязателен</a:t>
             </a:r>
           </a:p>
         </p:txBody>
@@ -3924,719 +4519,940 @@
         </p:nvSpPr>
         <p:spPr/>
         <p:txBody>
-          <a:bodyPr>
-            <a:normAutofit fontScale="62500" lnSpcReduction="20000"/>
-          </a:bodyPr>
-          <a:lstStyle/>
-          <a:p>
-            <a:pPr marL="0" lvl="0" indent="0">
-              <a:buNone/>
-            </a:pPr>
-            <a:r>
-              <a:rPr b="1" dirty="0" err="1"/>
-              <a:t>Основные</a:t>
-            </a:r>
-            <a:r>
-              <a:rPr b="1" dirty="0"/>
-              <a:t> </a:t>
-            </a:r>
-            <a:r>
-              <a:rPr b="1" dirty="0" err="1"/>
-              <a:t>источники</a:t>
-            </a:r>
-            <a:endParaRPr b="1" dirty="0"/>
-          </a:p>
-          <a:p>
-            <a:pPr marL="342900" lvl="0" indent="-342900">
+          <a:bodyPr/>
+          <a:lstStyle/>
+          <a:p>
+            <a:pPr lvl="0" indent="0" marL="0">
+              <a:buNone/>
+            </a:pPr>
+            <a:r>
+              <a:rPr b="1"/>
+              <a:t>Четыре пути «в работу»</a:t>
+            </a:r>
+          </a:p>
+          <a:p>
+            <a:pPr lvl="0" indent="-342900" marL="342900">
               <a:buAutoNum type="arabicPeriod"/>
             </a:pPr>
             <a:r>
-              <a:rPr dirty="0" err="1"/>
-              <a:t>Федеральный</a:t>
-            </a:r>
-            <a:r>
-              <a:rPr dirty="0"/>
-              <a:t> </a:t>
-            </a:r>
-            <a:r>
-              <a:rPr dirty="0" err="1"/>
-              <a:t>закон</a:t>
-            </a:r>
-            <a:r>
-              <a:rPr dirty="0"/>
-              <a:t> </a:t>
-            </a:r>
-            <a:r>
-              <a:rPr dirty="0" err="1"/>
-              <a:t>от</a:t>
-            </a:r>
-            <a:r>
-              <a:rPr dirty="0"/>
-              <a:t> 27.12.2002 №184-ФЗ «О </a:t>
-            </a:r>
-            <a:r>
-              <a:rPr dirty="0" err="1"/>
-              <a:t>техническом</a:t>
-            </a:r>
-            <a:r>
-              <a:rPr dirty="0"/>
-              <a:t> </a:t>
-            </a:r>
-            <a:r>
-              <a:rPr dirty="0" err="1"/>
-              <a:t>регулировании</a:t>
-            </a:r>
-            <a:r>
-              <a:rPr dirty="0"/>
-              <a:t>». </a:t>
-            </a:r>
-            <a:r>
-              <a:rPr dirty="0" err="1"/>
-              <a:t>Официальное</a:t>
-            </a:r>
-            <a:r>
-              <a:rPr dirty="0"/>
-              <a:t> </a:t>
-            </a:r>
-            <a:r>
-              <a:rPr dirty="0" err="1"/>
-              <a:t>опубликование</a:t>
-            </a:r>
-            <a:r>
-              <a:rPr dirty="0"/>
-              <a:t>: </a:t>
-            </a:r>
-            <a:r>
-              <a:rPr dirty="0">
-                <a:hlinkClick r:id="rId2"/>
-              </a:rPr>
-              <a:t>http://publication.pravo.gov.ru/Document/View/0001200212300020</a:t>
-            </a:r>
-            <a:r>
-              <a:rPr dirty="0"/>
-              <a:t>.</a:t>
-            </a:r>
-          </a:p>
-          <a:p>
-            <a:pPr marL="342900" lvl="0" indent="-342900">
+              <a:rPr/>
+              <a:t>Закон прямо требует применять документ.</a:t>
+            </a:r>
+          </a:p>
+          <a:p>
+            <a:pPr lvl="0" indent="-342900" marL="342900">
               <a:buAutoNum type="arabicPeriod"/>
             </a:pPr>
             <a:r>
-              <a:rPr dirty="0" err="1"/>
-              <a:t>Федеральный</a:t>
-            </a:r>
-            <a:r>
-              <a:rPr dirty="0"/>
-              <a:t> </a:t>
-            </a:r>
-            <a:r>
-              <a:rPr dirty="0" err="1"/>
-              <a:t>закон</a:t>
-            </a:r>
-            <a:r>
-              <a:rPr dirty="0"/>
-              <a:t> </a:t>
-            </a:r>
-            <a:r>
-              <a:rPr dirty="0" err="1"/>
-              <a:t>от</a:t>
-            </a:r>
-            <a:r>
-              <a:rPr dirty="0"/>
-              <a:t> 29.06.2015 №162-ФЗ «О </a:t>
-            </a:r>
-            <a:r>
-              <a:rPr dirty="0" err="1"/>
-              <a:t>стандартизации</a:t>
-            </a:r>
-            <a:r>
-              <a:rPr dirty="0"/>
-              <a:t> в </a:t>
-            </a:r>
-            <a:r>
-              <a:rPr dirty="0" err="1"/>
-              <a:t>Российской</a:t>
-            </a:r>
-            <a:r>
-              <a:rPr dirty="0"/>
-              <a:t> </a:t>
-            </a:r>
-            <a:r>
-              <a:rPr dirty="0" err="1"/>
-              <a:t>Федерации</a:t>
-            </a:r>
-            <a:r>
-              <a:rPr dirty="0"/>
-              <a:t>». </a:t>
-            </a:r>
-            <a:r>
-              <a:rPr dirty="0" err="1"/>
-              <a:t>Официальное</a:t>
-            </a:r>
-            <a:r>
-              <a:rPr dirty="0"/>
-              <a:t> </a:t>
-            </a:r>
-            <a:r>
-              <a:rPr dirty="0" err="1"/>
-              <a:t>опубликование</a:t>
-            </a:r>
-            <a:r>
-              <a:rPr dirty="0"/>
-              <a:t>: </a:t>
-            </a:r>
-            <a:r>
-              <a:rPr dirty="0">
-                <a:hlinkClick r:id="rId3"/>
-              </a:rPr>
-              <a:t>http://publication.pravo.gov.ru/Document/View/0001201506300012</a:t>
-            </a:r>
-            <a:r>
-              <a:rPr dirty="0"/>
-              <a:t>.</a:t>
-            </a:r>
-          </a:p>
-          <a:p>
-            <a:pPr marL="342900" lvl="0" indent="-342900">
+              <a:rPr/>
+              <a:t>Нормативный акт органа в пределах компетенции ссылается на стандарт.</a:t>
+            </a:r>
+          </a:p>
+          <a:p>
+            <a:pPr lvl="0" indent="-342900" marL="342900">
               <a:buAutoNum type="arabicPeriod"/>
             </a:pPr>
             <a:r>
-              <a:rPr dirty="0" err="1"/>
-              <a:t>Федеральный</a:t>
-            </a:r>
-            <a:r>
-              <a:rPr dirty="0"/>
-              <a:t> </a:t>
-            </a:r>
-            <a:r>
-              <a:rPr dirty="0" err="1"/>
-              <a:t>закон</a:t>
-            </a:r>
-            <a:r>
-              <a:rPr dirty="0"/>
-              <a:t> </a:t>
-            </a:r>
-            <a:r>
-              <a:rPr dirty="0" err="1"/>
-              <a:t>от</a:t>
-            </a:r>
-            <a:r>
-              <a:rPr dirty="0"/>
-              <a:t> 28.12.2013 №412-ФЗ «</a:t>
-            </a:r>
-            <a:r>
-              <a:rPr dirty="0" err="1"/>
-              <a:t>Об</a:t>
-            </a:r>
-            <a:r>
-              <a:rPr dirty="0"/>
-              <a:t> </a:t>
-            </a:r>
-            <a:r>
-              <a:rPr dirty="0" err="1"/>
-              <a:t>аккредитации</a:t>
-            </a:r>
-            <a:r>
-              <a:rPr dirty="0"/>
-              <a:t> в </a:t>
-            </a:r>
-            <a:r>
-              <a:rPr dirty="0" err="1"/>
-              <a:t>национальной</a:t>
-            </a:r>
-            <a:r>
-              <a:rPr dirty="0"/>
-              <a:t> </a:t>
-            </a:r>
-            <a:r>
-              <a:rPr dirty="0" err="1"/>
-              <a:t>системе</a:t>
-            </a:r>
-            <a:r>
-              <a:rPr dirty="0"/>
-              <a:t> </a:t>
-            </a:r>
-            <a:r>
-              <a:rPr dirty="0" err="1"/>
-              <a:t>аккредитации</a:t>
-            </a:r>
-            <a:r>
-              <a:rPr dirty="0"/>
-              <a:t>». </a:t>
-            </a:r>
-            <a:r>
-              <a:rPr dirty="0" err="1"/>
-              <a:t>Официальное</a:t>
-            </a:r>
-            <a:r>
-              <a:rPr dirty="0"/>
-              <a:t> </a:t>
-            </a:r>
-            <a:r>
-              <a:rPr dirty="0" err="1"/>
-              <a:t>опубликование</a:t>
-            </a:r>
-            <a:r>
-              <a:rPr dirty="0"/>
-              <a:t>: </a:t>
-            </a:r>
-            <a:r>
-              <a:rPr dirty="0">
-                <a:hlinkClick r:id="rId4"/>
-              </a:rPr>
-              <a:t>http://publication.pravo.gov.ru/Document/View/0001201312280035</a:t>
-            </a:r>
-            <a:r>
-              <a:rPr dirty="0"/>
-              <a:t>.</a:t>
-            </a:r>
-          </a:p>
-          <a:p>
-            <a:pPr marL="342900" lvl="0" indent="-342900">
+              <a:rPr/>
+              <a:t>Договор или закупка включают стандарт в условия.</a:t>
+            </a:r>
+          </a:p>
+          <a:p>
+            <a:pPr lvl="0" indent="-342900" marL="342900">
               <a:buAutoNum type="arabicPeriod"/>
             </a:pPr>
             <a:r>
-              <a:rPr dirty="0" err="1"/>
-              <a:t>Федеральный</a:t>
-            </a:r>
-            <a:r>
-              <a:rPr dirty="0"/>
-              <a:t> </a:t>
-            </a:r>
-            <a:r>
-              <a:rPr dirty="0" err="1"/>
-              <a:t>закон</a:t>
-            </a:r>
-            <a:r>
-              <a:rPr dirty="0"/>
-              <a:t> </a:t>
-            </a:r>
-            <a:r>
-              <a:rPr dirty="0" err="1"/>
-              <a:t>от</a:t>
-            </a:r>
-            <a:r>
-              <a:rPr dirty="0"/>
-              <a:t> 26.06.2008 №102-ФЗ «</a:t>
-            </a:r>
-            <a:r>
-              <a:rPr dirty="0" err="1"/>
-              <a:t>Об</a:t>
-            </a:r>
-            <a:r>
-              <a:rPr dirty="0"/>
-              <a:t> </a:t>
-            </a:r>
-            <a:r>
-              <a:rPr dirty="0" err="1"/>
-              <a:t>обеспечении</a:t>
-            </a:r>
-            <a:r>
-              <a:rPr dirty="0"/>
-              <a:t> </a:t>
-            </a:r>
-            <a:r>
-              <a:rPr dirty="0" err="1"/>
-              <a:t>единства</a:t>
-            </a:r>
-            <a:r>
-              <a:rPr dirty="0"/>
-              <a:t> </a:t>
-            </a:r>
-            <a:r>
-              <a:rPr dirty="0" err="1"/>
-              <a:t>измерений</a:t>
-            </a:r>
-            <a:r>
-              <a:rPr dirty="0"/>
-              <a:t>». </a:t>
-            </a:r>
-            <a:r>
-              <a:rPr dirty="0" err="1"/>
-              <a:t>Официальное</a:t>
-            </a:r>
-            <a:r>
-              <a:rPr dirty="0"/>
-              <a:t> </a:t>
-            </a:r>
-            <a:r>
-              <a:rPr dirty="0" err="1"/>
-              <a:t>опубликование</a:t>
-            </a:r>
-            <a:r>
-              <a:rPr dirty="0"/>
-              <a:t>: </a:t>
-            </a:r>
-            <a:r>
-              <a:rPr dirty="0">
-                <a:hlinkClick r:id="rId5"/>
-              </a:rPr>
-              <a:t>http://publication.pravo.gov.ru/Document/View/0001200806270001</a:t>
-            </a:r>
-            <a:r>
-              <a:rPr dirty="0"/>
-              <a:t>.</a:t>
-            </a:r>
-          </a:p>
-          <a:p>
-            <a:pPr marL="342900" lvl="0" indent="-342900">
-              <a:buAutoNum type="arabicPeriod"/>
-            </a:pPr>
-            <a:r>
-              <a:rPr dirty="0" err="1"/>
-              <a:t>Федеральный</a:t>
-            </a:r>
-            <a:r>
-              <a:rPr dirty="0"/>
-              <a:t> </a:t>
-            </a:r>
-            <a:r>
-              <a:rPr dirty="0" err="1"/>
-              <a:t>закон</a:t>
-            </a:r>
-            <a:r>
-              <a:rPr dirty="0"/>
-              <a:t> </a:t>
-            </a:r>
-            <a:r>
-              <a:rPr dirty="0" err="1"/>
-              <a:t>от</a:t>
-            </a:r>
-            <a:r>
-              <a:rPr dirty="0"/>
-              <a:t> 26.07.2017 №187-ФЗ «О </a:t>
-            </a:r>
-            <a:r>
-              <a:rPr dirty="0" err="1"/>
-              <a:t>безопасности</a:t>
-            </a:r>
-            <a:r>
-              <a:rPr dirty="0"/>
-              <a:t> </a:t>
-            </a:r>
-            <a:r>
-              <a:rPr dirty="0" err="1"/>
-              <a:t>критической</a:t>
-            </a:r>
-            <a:r>
-              <a:rPr dirty="0"/>
-              <a:t> </a:t>
-            </a:r>
-            <a:r>
-              <a:rPr dirty="0" err="1"/>
-              <a:t>информационной</a:t>
-            </a:r>
-            <a:r>
-              <a:rPr dirty="0"/>
-              <a:t> </a:t>
-            </a:r>
-            <a:r>
-              <a:rPr dirty="0" err="1"/>
-              <a:t>инфраструктуры</a:t>
-            </a:r>
-            <a:r>
-              <a:rPr dirty="0"/>
-              <a:t> </a:t>
-            </a:r>
-            <a:r>
-              <a:rPr dirty="0" err="1"/>
-              <a:t>Российской</a:t>
-            </a:r>
-            <a:r>
-              <a:rPr dirty="0"/>
-              <a:t> </a:t>
-            </a:r>
-            <a:r>
-              <a:rPr dirty="0" err="1"/>
-              <a:t>Федерации</a:t>
-            </a:r>
-            <a:r>
-              <a:rPr dirty="0"/>
-              <a:t>». </a:t>
-            </a:r>
-            <a:r>
-              <a:rPr dirty="0" err="1"/>
-              <a:t>Официальное</a:t>
-            </a:r>
-            <a:r>
-              <a:rPr dirty="0"/>
-              <a:t> </a:t>
-            </a:r>
-            <a:r>
-              <a:rPr dirty="0" err="1"/>
-              <a:t>опубликование</a:t>
-            </a:r>
-            <a:r>
-              <a:rPr dirty="0"/>
-              <a:t>: </a:t>
-            </a:r>
-            <a:r>
-              <a:rPr dirty="0">
-                <a:hlinkClick r:id="rId6"/>
-              </a:rPr>
-              <a:t>http://publication.pravo.gov.ru/Document/View/0001201707260023</a:t>
-            </a:r>
-            <a:r>
-              <a:rPr dirty="0"/>
-              <a:t>.</a:t>
-            </a:r>
-          </a:p>
-          <a:p>
-            <a:pPr marL="342900" lvl="0" indent="-342900">
-              <a:buAutoNum type="arabicPeriod"/>
-            </a:pPr>
-            <a:r>
-              <a:rPr dirty="0" err="1"/>
-              <a:t>Официальный</a:t>
-            </a:r>
-            <a:r>
-              <a:rPr dirty="0"/>
-              <a:t> </a:t>
-            </a:r>
-            <a:r>
-              <a:rPr dirty="0" err="1"/>
-              <a:t>интернет-портал</a:t>
-            </a:r>
-            <a:r>
-              <a:rPr dirty="0"/>
-              <a:t> </a:t>
-            </a:r>
-            <a:r>
-              <a:rPr dirty="0" err="1"/>
-              <a:t>правовой</a:t>
-            </a:r>
-            <a:r>
-              <a:rPr dirty="0"/>
-              <a:t> </a:t>
-            </a:r>
-            <a:r>
-              <a:rPr dirty="0" err="1"/>
-              <a:t>информации</a:t>
-            </a:r>
-            <a:r>
-              <a:rPr dirty="0"/>
-              <a:t>: </a:t>
-            </a:r>
-            <a:r>
-              <a:rPr dirty="0">
-                <a:hlinkClick r:id="rId7"/>
-              </a:rPr>
-              <a:t>http://publication.pravo.gov.ru/</a:t>
-            </a:r>
-            <a:r>
-              <a:rPr dirty="0"/>
-              <a:t>.</a:t>
-            </a:r>
-          </a:p>
-          <a:p>
-            <a:pPr marL="342900" lvl="0" indent="-342900">
-              <a:buAutoNum type="arabicPeriod"/>
-            </a:pPr>
-            <a:r>
-              <a:rPr dirty="0" err="1"/>
-              <a:t>Росстандарт</a:t>
-            </a:r>
-            <a:r>
-              <a:rPr dirty="0"/>
-              <a:t>: </a:t>
-            </a:r>
-            <a:r>
-              <a:rPr dirty="0">
-                <a:hlinkClick r:id="rId8"/>
-              </a:rPr>
-              <a:t>https://www.rst.gov.ru/</a:t>
-            </a:r>
-            <a:r>
-              <a:rPr dirty="0"/>
-              <a:t>.</a:t>
-            </a:r>
-          </a:p>
-          <a:p>
-            <a:pPr marL="342900" lvl="0" indent="-342900">
-              <a:buAutoNum type="arabicPeriod"/>
-            </a:pPr>
-            <a:r>
-              <a:rPr dirty="0" err="1"/>
-              <a:t>Росаккредитация</a:t>
-            </a:r>
-            <a:r>
-              <a:rPr dirty="0"/>
-              <a:t>: </a:t>
-            </a:r>
-            <a:r>
-              <a:rPr dirty="0">
-                <a:hlinkClick r:id="rId9"/>
-              </a:rPr>
-              <a:t>https://fsa.gov.ru/</a:t>
-            </a:r>
-            <a:r>
-              <a:rPr dirty="0"/>
-              <a:t>.</a:t>
-            </a:r>
-          </a:p>
-          <a:p>
-            <a:pPr marL="0" lvl="0" indent="0">
-              <a:buNone/>
-            </a:pPr>
-            <a:r>
-              <a:rPr b="1" dirty="0" err="1"/>
-              <a:t>Связанные</a:t>
-            </a:r>
-            <a:r>
-              <a:rPr b="1" dirty="0"/>
-              <a:t> </a:t>
-            </a:r>
-            <a:r>
-              <a:rPr b="1" dirty="0" err="1"/>
-              <a:t>источники</a:t>
-            </a:r>
-            <a:endParaRPr b="1" dirty="0"/>
-          </a:p>
-          <a:p>
-            <a:pPr marL="342900" lvl="0" indent="-342900">
-              <a:buAutoNum type="arabicPeriod" startAt="9"/>
-            </a:pPr>
-            <a:r>
-              <a:rPr dirty="0"/>
-              <a:t>ГОСТ Р ИСО/МЭК 17025. </a:t>
-            </a:r>
-            <a:r>
-              <a:rPr dirty="0" err="1"/>
-              <a:t>Общие</a:t>
-            </a:r>
-            <a:r>
-              <a:rPr dirty="0"/>
-              <a:t> </a:t>
-            </a:r>
-            <a:r>
-              <a:rPr dirty="0" err="1"/>
-              <a:t>требования</a:t>
-            </a:r>
-            <a:r>
-              <a:rPr dirty="0"/>
-              <a:t> к </a:t>
-            </a:r>
-            <a:r>
-              <a:rPr dirty="0" err="1"/>
-              <a:t>компетентности</a:t>
-            </a:r>
-            <a:r>
-              <a:rPr dirty="0"/>
-              <a:t> </a:t>
-            </a:r>
-            <a:r>
-              <a:rPr dirty="0" err="1"/>
-              <a:t>испытательных</a:t>
-            </a:r>
-            <a:r>
-              <a:rPr dirty="0"/>
-              <a:t> и </a:t>
-            </a:r>
-            <a:r>
-              <a:rPr dirty="0" err="1"/>
-              <a:t>калибровочных</a:t>
-            </a:r>
-            <a:r>
-              <a:rPr dirty="0"/>
-              <a:t> </a:t>
-            </a:r>
-            <a:r>
-              <a:rPr dirty="0" err="1"/>
-              <a:t>лабораторий</a:t>
-            </a:r>
-            <a:r>
-              <a:rPr dirty="0"/>
-              <a:t>.</a:t>
-            </a:r>
-          </a:p>
-          <a:p>
-            <a:pPr marL="342900" lvl="0" indent="-342900">
-              <a:buAutoNum type="arabicPeriod" startAt="9"/>
-            </a:pPr>
-            <a:r>
-              <a:rPr dirty="0"/>
-              <a:t>ГОСТ Р ИСО/МЭК 17065. </a:t>
-            </a:r>
-            <a:r>
-              <a:rPr dirty="0" err="1"/>
-              <a:t>Оценка</a:t>
-            </a:r>
-            <a:r>
-              <a:rPr dirty="0"/>
-              <a:t> </a:t>
-            </a:r>
-            <a:r>
-              <a:rPr dirty="0" err="1"/>
-              <a:t>соответствия</a:t>
-            </a:r>
-            <a:r>
-              <a:rPr dirty="0"/>
-              <a:t>. </a:t>
-            </a:r>
-            <a:r>
-              <a:rPr dirty="0" err="1"/>
-              <a:t>Требования</a:t>
-            </a:r>
-            <a:r>
-              <a:rPr dirty="0"/>
-              <a:t> к </a:t>
-            </a:r>
-            <a:r>
-              <a:rPr dirty="0" err="1"/>
-              <a:t>органам</a:t>
-            </a:r>
-            <a:r>
-              <a:rPr dirty="0"/>
-              <a:t> </a:t>
-            </a:r>
-            <a:r>
-              <a:rPr dirty="0" err="1"/>
-              <a:t>по</a:t>
-            </a:r>
-            <a:r>
-              <a:rPr dirty="0"/>
-              <a:t> </a:t>
-            </a:r>
-            <a:r>
-              <a:rPr dirty="0" err="1"/>
-              <a:t>сертификации</a:t>
-            </a:r>
-            <a:r>
-              <a:rPr dirty="0"/>
-              <a:t> </a:t>
-            </a:r>
-            <a:r>
-              <a:rPr dirty="0" err="1"/>
-              <a:t>продукции</a:t>
-            </a:r>
-            <a:r>
-              <a:rPr dirty="0"/>
-              <a:t>, </a:t>
-            </a:r>
-            <a:r>
-              <a:rPr dirty="0" err="1"/>
-              <a:t>процессов</a:t>
-            </a:r>
-            <a:r>
-              <a:rPr dirty="0"/>
-              <a:t> и </a:t>
-            </a:r>
-            <a:r>
-              <a:rPr dirty="0" err="1"/>
-              <a:t>услуг</a:t>
-            </a:r>
-            <a:r>
-              <a:rPr dirty="0"/>
-              <a:t>.</a:t>
+              <a:rPr/>
+              <a:t>Собственный выбор организации, закреплённый локальным актом.</a:t>
+            </a:r>
+          </a:p>
+          <a:p>
+            <a:pPr lvl="0" indent="0" marL="0">
+              <a:buNone/>
+            </a:pPr>
+            <a:r>
+              <a:rPr/>
+              <a:t>Всегда фиксируем номер, год, раздел и границы. «Применяем ГОСТ» — не основание.</a:t>
             </a:r>
           </a:p>
         </p:txBody>
       </p:sp>
     </p:spTree>
   </p:cSld>
-  <p:clrMapOvr>
-    <a:masterClrMapping/>
-  </p:clrMapOvr>
+</p:sld>
+</file>
+
+<file path=ppt/slides/slide14.xml><?xml version="1.0" encoding="utf-8"?>
+<p:sld xmlns:a="http://schemas.openxmlformats.org/drawingml/2006/main" xmlns:r="http://schemas.openxmlformats.org/officeDocument/2006/relationships" xmlns:p="http://schemas.openxmlformats.org/presentationml/2006/main">
+  <p:cSld>
+    <p:spTree>
+      <p:nvGrpSpPr>
+        <p:cNvPr id="1" name=""/>
+        <p:cNvGrpSpPr/>
+        <p:nvPr/>
+      </p:nvGrpSpPr>
+      <p:grpSpPr>
+        <a:xfrm>
+          <a:off x="0" y="0"/>
+          <a:ext cx="0" cy="0"/>
+          <a:chOff x="0" y="0"/>
+          <a:chExt cx="0" cy="0"/>
+        </a:xfrm>
+      </p:grpSpPr>
+      <p:sp>
+        <p:nvSpPr>
+          <p:cNvPr id="2" name="Title 1"/>
+          <p:cNvSpPr>
+            <a:spLocks noGrp="1"/>
+          </p:cNvSpPr>
+          <p:nvPr>
+            <p:ph type="title"/>
+          </p:nvPr>
+        </p:nvSpPr>
+        <p:spPr/>
+        <p:txBody>
+          <a:bodyPr/>
+          <a:lstStyle/>
+          <a:p>
+            <a:pPr lvl="0" indent="0" marL="0">
+              <a:buNone/>
+            </a:pPr>
+            <a:r>
+              <a:rPr/>
+              <a:t>Вопрос 3</a:t>
+            </a:r>
+          </a:p>
+        </p:txBody>
+      </p:sp>
+      <p:sp>
+        <p:nvSpPr>
+          <p:cNvPr id="3" name="Content Placeholder 2"/>
+          <p:cNvSpPr>
+            <a:spLocks noGrp="1"/>
+          </p:cNvSpPr>
+          <p:nvPr>
+            <p:ph idx="1"/>
+          </p:nvPr>
+        </p:nvSpPr>
+        <p:spPr/>
+        <p:txBody>
+          <a:bodyPr/>
+          <a:lstStyle/>
+          <a:p>
+            <a:pPr lvl="0" indent="0" marL="0">
+              <a:buNone/>
+            </a:pPr>
+            <a:r>
+              <a:rPr b="1"/>
+              <a:t>Откуда обязательность?</a:t>
+            </a:r>
+          </a:p>
+          <a:p>
+            <a:pPr lvl="0" indent="0" marL="0">
+              <a:buNone/>
+            </a:pPr>
+            <a:r>
+              <a:rPr/>
+              <a:t>В ТЗ на закупку написано: «оборудование должно соответствовать стандарту такому-то».</a:t>
+            </a:r>
+          </a:p>
+          <a:p>
+            <a:pPr lvl="0"/>
+            <a:r>
+              <a:rPr/>
+              <a:t>Откуда возникает обязательность: из закона или из договора?</a:t>
+            </a:r>
+          </a:p>
+          <a:p>
+            <a:pPr lvl="0"/>
+            <a:r>
+              <a:rPr/>
+              <a:t>Что изменится, если договор заключён не будет?</a:t>
+            </a:r>
+          </a:p>
+        </p:txBody>
+      </p:sp>
+    </p:spTree>
+  </p:cSld>
+</p:sld>
+</file>
+
+<file path=ppt/slides/slide15.xml><?xml version="1.0" encoding="utf-8"?>
+<p:sld xmlns:a="http://schemas.openxmlformats.org/drawingml/2006/main" xmlns:r="http://schemas.openxmlformats.org/officeDocument/2006/relationships" xmlns:p="http://schemas.openxmlformats.org/presentationml/2006/main">
+  <p:cSld>
+    <p:spTree>
+      <p:nvGrpSpPr>
+        <p:cNvPr id="1" name=""/>
+        <p:cNvGrpSpPr/>
+        <p:nvPr/>
+      </p:nvGrpSpPr>
+      <p:grpSpPr>
+        <a:xfrm>
+          <a:off x="0" y="0"/>
+          <a:ext cx="0" cy="0"/>
+          <a:chOff x="0" y="0"/>
+          <a:chExt cx="0" cy="0"/>
+        </a:xfrm>
+      </p:grpSpPr>
+      <p:sp>
+        <p:nvSpPr>
+          <p:cNvPr id="2" name="Title 1"/>
+          <p:cNvSpPr>
+            <a:spLocks noGrp="1"/>
+          </p:cNvSpPr>
+          <p:nvPr>
+            <p:ph type="title"/>
+          </p:nvPr>
+        </p:nvSpPr>
+        <p:spPr/>
+        <p:txBody>
+          <a:bodyPr/>
+          <a:lstStyle/>
+          <a:p>
+            <a:pPr lvl="0" indent="0" marL="0">
+              <a:buNone/>
+            </a:pPr>
+            <a:r>
+              <a:rPr/>
+              <a:t>ПНСТ и типичные ошибки</a:t>
+            </a:r>
+          </a:p>
+        </p:txBody>
+      </p:sp>
+      <p:sp>
+        <p:nvSpPr>
+          <p:cNvPr id="3" name="Content Placeholder 2"/>
+          <p:cNvSpPr>
+            <a:spLocks noGrp="1"/>
+          </p:cNvSpPr>
+          <p:nvPr>
+            <p:ph idx="1"/>
+          </p:nvPr>
+        </p:nvSpPr>
+        <p:spPr/>
+        <p:txBody>
+          <a:bodyPr/>
+          <a:lstStyle/>
+          <a:p>
+            <a:pPr lvl="0" indent="0" marL="0">
+              <a:buNone/>
+            </a:pPr>
+            <a:r>
+              <a:rPr b="1"/>
+              <a:t>ПНСТ: срок и статус</a:t>
+            </a:r>
+          </a:p>
+          <a:p>
+            <a:pPr lvl="0"/>
+            <a:r>
+              <a:rPr/>
+              <a:t>Не окончательный стандарт: может быть заменён, продлён или прекращён.</a:t>
+            </a:r>
+          </a:p>
+          <a:p>
+            <a:pPr lvl="0"/>
+            <a:r>
+              <a:rPr/>
+              <a:t>Ссылка в договоре требует номера, года и контроля срока.</a:t>
+            </a:r>
+          </a:p>
+          <a:p>
+            <a:pPr lvl="0"/>
+            <a:r>
+              <a:rPr/>
+              <a:t>Подробнее о стандартах для доверенных ПАК — лекция 13.</a:t>
+            </a:r>
+          </a:p>
+          <a:p>
+            <a:pPr lvl="0" indent="0" marL="0">
+              <a:buNone/>
+            </a:pPr>
+            <a:r>
+              <a:rPr/>
+              <a:t>Типичные ошибки:</a:t>
+            </a:r>
+          </a:p>
+          <a:p>
+            <a:pPr lvl="0"/>
+            <a:r>
+              <a:rPr/>
+              <a:t>считать стандарт обязательным «по умолчанию»;</a:t>
+            </a:r>
+          </a:p>
+          <a:p>
+            <a:pPr lvl="0"/>
+            <a:r>
+              <a:rPr/>
+              <a:t>считать необязательный стандарт ненужным;</a:t>
+            </a:r>
+          </a:p>
+          <a:p>
+            <a:pPr lvl="0"/>
+            <a:r>
+              <a:rPr/>
+              <a:t>ссылаться без номера, редакции и раздела;</a:t>
+            </a:r>
+          </a:p>
+          <a:p>
+            <a:pPr lvl="0"/>
+            <a:r>
+              <a:rPr/>
+              <a:t>подменять специальное требование общим стандартом.</a:t>
+            </a:r>
+          </a:p>
+        </p:txBody>
+      </p:sp>
+    </p:spTree>
+  </p:cSld>
+</p:sld>
+</file>
+
+<file path=ppt/slides/slide16.xml><?xml version="1.0" encoding="utf-8"?>
+<p:sld xmlns:a="http://schemas.openxmlformats.org/drawingml/2006/main" xmlns:r="http://schemas.openxmlformats.org/officeDocument/2006/relationships" xmlns:p="http://schemas.openxmlformats.org/presentationml/2006/main">
+  <p:cSld>
+    <p:spTree>
+      <p:nvGrpSpPr>
+        <p:cNvPr id="1" name=""/>
+        <p:cNvGrpSpPr/>
+        <p:nvPr/>
+      </p:nvGrpSpPr>
+      <p:grpSpPr>
+        <a:xfrm>
+          <a:off x="0" y="0"/>
+          <a:ext cx="0" cy="0"/>
+          <a:chOff x="0" y="0"/>
+          <a:chExt cx="0" cy="0"/>
+        </a:xfrm>
+      </p:grpSpPr>
+      <p:sp>
+        <p:nvSpPr>
+          <p:cNvPr id="2" name="Title 1"/>
+          <p:cNvSpPr>
+            <a:spLocks noGrp="1"/>
+          </p:cNvSpPr>
+          <p:nvPr>
+            <p:ph type="title"/>
+          </p:nvPr>
+        </p:nvSpPr>
+        <p:spPr/>
+        <p:txBody>
+          <a:bodyPr/>
+          <a:lstStyle/>
+          <a:p>
+            <a:pPr lvl="0" indent="0" marL="0">
+              <a:buNone/>
+            </a:pPr>
+            <a:r>
+              <a:rPr/>
+              <a:t>Подтверждение соответствия</a:t>
+            </a:r>
+          </a:p>
+        </p:txBody>
+      </p:sp>
+      <p:sp>
+        <p:nvSpPr>
+          <p:cNvPr id="3" name="Content Placeholder 2"/>
+          <p:cNvSpPr>
+            <a:spLocks noGrp="1"/>
+          </p:cNvSpPr>
+          <p:nvPr>
+            <p:ph idx="1"/>
+          </p:nvPr>
+        </p:nvSpPr>
+        <p:spPr/>
+        <p:txBody>
+          <a:bodyPr/>
+          <a:lstStyle/>
+          <a:p>
+            <a:pPr lvl="0" indent="0" marL="0">
+              <a:buNone/>
+            </a:pPr>
+            <a:r>
+              <a:rPr b="1"/>
+              <a:t>Не смешивать три конструкции</a:t>
+            </a:r>
+          </a:p>
+          <a:p>
+            <a:pPr lvl="0"/>
+            <a:r>
+              <a:rPr/>
+              <a:t>Обязательное подтверждение соответствия продукции: только в случаях, заданных техническим регламентом.</a:t>
+            </a:r>
+          </a:p>
+          <a:p>
+            <a:pPr lvl="0"/>
+            <a:r>
+              <a:rPr/>
+              <a:t>Добровольная сертификация: по инициативе заявителя и правилам соответствующей системы.</a:t>
+            </a:r>
+          </a:p>
+          <a:p>
+            <a:pPr lvl="0"/>
+            <a:r>
+              <a:rPr/>
+              <a:t>Обязательные требования к значимому объекту КИИ: специальный регуляторный контур, не тождественный обязательной сертификации продукции.</a:t>
+            </a:r>
+          </a:p>
+        </p:txBody>
+      </p:sp>
+    </p:spTree>
+  </p:cSld>
+</p:sld>
+</file>
+
+<file path=ppt/slides/slide17.xml><?xml version="1.0" encoding="utf-8"?>
+<p:sld xmlns:a="http://schemas.openxmlformats.org/drawingml/2006/main" xmlns:r="http://schemas.openxmlformats.org/officeDocument/2006/relationships" xmlns:p="http://schemas.openxmlformats.org/presentationml/2006/main">
+  <p:cSld>
+    <p:spTree>
+      <p:nvGrpSpPr>
+        <p:cNvPr id="1" name=""/>
+        <p:cNvGrpSpPr/>
+        <p:nvPr/>
+      </p:nvGrpSpPr>
+      <p:grpSpPr>
+        <a:xfrm>
+          <a:off x="0" y="0"/>
+          <a:ext cx="0" cy="0"/>
+          <a:chOff x="0" y="0"/>
+          <a:chExt cx="0" cy="0"/>
+        </a:xfrm>
+      </p:grpSpPr>
+      <p:sp>
+        <p:nvSpPr>
+          <p:cNvPr id="2" name="Title 1"/>
+          <p:cNvSpPr>
+            <a:spLocks noGrp="1"/>
+          </p:cNvSpPr>
+          <p:nvPr>
+            <p:ph type="title"/>
+          </p:nvPr>
+        </p:nvSpPr>
+        <p:spPr/>
+        <p:txBody>
+          <a:bodyPr/>
+          <a:lstStyle/>
+          <a:p>
+            <a:pPr lvl="0" indent="0" marL="0">
+              <a:buNone/>
+            </a:pPr>
+            <a:r>
+              <a:rPr/>
+              <a:t>Три конструкции: сводка</a:t>
+            </a:r>
+          </a:p>
+        </p:txBody>
+      </p:sp>
+      <p:graphicFrame>
+        <p:nvGraphicFramePr>
+          <p:cNvPr id="6" name="Content Placeholder 5"/>
+          <p:cNvGraphicFramePr>
+            <a:graphicFrameLocks noGrp="1"/>
+          </p:cNvGraphicFramePr>
+          <p:nvPr>
+            <p:ph idx="1"/>
+          </p:nvPr>
+        </p:nvGraphicFramePr>
+        <p:xfrm>
+          <a:off x="457200" y="787400"/>
+          <a:ext cx="8229600" cy="3797300"/>
+        </p:xfrm>
+        <a:graphic>
+          <a:graphicData uri="http://schemas.openxmlformats.org/drawingml/2006/table">
+            <a:tbl>
+              <a:tblPr firstRow="1" bandRow="1">
+                <a:tableStyleId>{5C22544A-7EE6-4342-B048-85BDC9FD1C3A}</a:tableStyleId>
+              </a:tblPr>
+              <a:tblGrid>
+                <a:gridCol w="2057400"/>
+                <a:gridCol w="2057400"/>
+                <a:gridCol w="2057400"/>
+                <a:gridCol w="2057400"/>
+              </a:tblGrid>
+              <a:tr h="0">
+                <a:tc>
+                  <a:txBody>
+                    <a:bodyPr/>
+                    <a:lstStyle/>
+                    <a:p>
+                      <a:pPr lvl="0" indent="0" marL="0">
+                        <a:buNone/>
+                      </a:pPr>
+                      <a:r>
+                        <a:rPr/>
+                        <a:t>Конструкция</a:t>
+                      </a:r>
+                    </a:p>
+                  </a:txBody>
+                  <a:tcPr/>
+                </a:tc>
+                <a:tc>
+                  <a:txBody>
+                    <a:bodyPr/>
+                    <a:lstStyle/>
+                    <a:p>
+                      <a:pPr lvl="0" indent="0" marL="0">
+                        <a:buNone/>
+                      </a:pPr>
+                      <a:r>
+                        <a:rPr/>
+                        <a:t>Откуда обязательность</a:t>
+                      </a:r>
+                    </a:p>
+                  </a:txBody>
+                  <a:tcPr/>
+                </a:tc>
+                <a:tc>
+                  <a:txBody>
+                    <a:bodyPr/>
+                    <a:lstStyle/>
+                    <a:p>
+                      <a:pPr lvl="0" indent="0" marL="0">
+                        <a:buNone/>
+                      </a:pPr>
+                      <a:r>
+                        <a:rPr/>
+                        <a:t>Что подтверждается</a:t>
+                      </a:r>
+                    </a:p>
+                  </a:txBody>
+                  <a:tcPr/>
+                </a:tc>
+                <a:tc>
+                  <a:txBody>
+                    <a:bodyPr/>
+                    <a:lstStyle/>
+                    <a:p>
+                      <a:pPr lvl="0" indent="0" marL="0">
+                        <a:buNone/>
+                      </a:pPr>
+                      <a:r>
+                        <a:rPr/>
+                        <a:t>Типичная ошибка</a:t>
+                      </a:r>
+                    </a:p>
+                  </a:txBody>
+                  <a:tcPr/>
+                </a:tc>
+              </a:tr>
+              <a:tr h="0">
+                <a:tc>
+                  <a:txBody>
+                    <a:bodyPr/>
+                    <a:lstStyle/>
+                    <a:p>
+                      <a:pPr lvl="0" indent="0" marL="0">
+                        <a:buNone/>
+                      </a:pPr>
+                      <a:r>
+                        <a:rPr/>
+                        <a:t>Обязательное подтверждение</a:t>
+                      </a:r>
+                    </a:p>
+                  </a:txBody>
+                </a:tc>
+                <a:tc>
+                  <a:txBody>
+                    <a:bodyPr/>
+                    <a:lstStyle/>
+                    <a:p>
+                      <a:pPr lvl="0" indent="0" marL="0">
+                        <a:buNone/>
+                      </a:pPr>
+                      <a:r>
+                        <a:rPr/>
+                        <a:t>технический регламент</a:t>
+                      </a:r>
+                    </a:p>
+                  </a:txBody>
+                </a:tc>
+                <a:tc>
+                  <a:txBody>
+                    <a:bodyPr/>
+                    <a:lstStyle/>
+                    <a:p>
+                      <a:pPr lvl="0" indent="0" marL="0">
+                        <a:buNone/>
+                      </a:pPr>
+                      <a:r>
+                        <a:rPr/>
+                        <a:t>соответствие продукции регламенту</a:t>
+                      </a:r>
+                    </a:p>
+                  </a:txBody>
+                </a:tc>
+                <a:tc>
+                  <a:txBody>
+                    <a:bodyPr/>
+                    <a:lstStyle/>
+                    <a:p>
+                      <a:pPr lvl="0" indent="0" marL="0">
+                        <a:buNone/>
+                      </a:pPr>
+                      <a:r>
+                        <a:rPr/>
+                        <a:t>применять к любым системам</a:t>
+                      </a:r>
+                    </a:p>
+                  </a:txBody>
+                </a:tc>
+              </a:tr>
+              <a:tr h="0">
+                <a:tc>
+                  <a:txBody>
+                    <a:bodyPr/>
+                    <a:lstStyle/>
+                    <a:p>
+                      <a:pPr lvl="0" indent="0" marL="0">
+                        <a:buNone/>
+                      </a:pPr>
+                      <a:r>
+                        <a:rPr/>
+                        <a:t>Добровольная сертификация</a:t>
+                      </a:r>
+                    </a:p>
+                  </a:txBody>
+                </a:tc>
+                <a:tc>
+                  <a:txBody>
+                    <a:bodyPr/>
+                    <a:lstStyle/>
+                    <a:p>
+                      <a:pPr lvl="0" indent="0" marL="0">
+                        <a:buNone/>
+                      </a:pPr>
+                      <a:r>
+                        <a:rPr/>
+                        <a:t>инициатива заявителя; договор</a:t>
+                      </a:r>
+                    </a:p>
+                  </a:txBody>
+                </a:tc>
+                <a:tc>
+                  <a:txBody>
+                    <a:bodyPr/>
+                    <a:lstStyle/>
+                    <a:p>
+                      <a:pPr lvl="0" indent="0" marL="0">
+                        <a:buNone/>
+                      </a:pPr>
+                      <a:r>
+                        <a:rPr/>
+                        <a:t>соответствие по правилам системы</a:t>
+                      </a:r>
+                    </a:p>
+                  </a:txBody>
+                </a:tc>
+                <a:tc>
+                  <a:txBody>
+                    <a:bodyPr/>
+                    <a:lstStyle/>
+                    <a:p>
+                      <a:pPr lvl="0" indent="0" marL="0">
+                        <a:buNone/>
+                      </a:pPr>
+                      <a:r>
+                        <a:rPr/>
+                        <a:t>считать сертификат универсальным разрешением</a:t>
+                      </a:r>
+                    </a:p>
+                  </a:txBody>
+                </a:tc>
+              </a:tr>
+              <a:tr h="0">
+                <a:tc>
+                  <a:txBody>
+                    <a:bodyPr/>
+                    <a:lstStyle/>
+                    <a:p>
+                      <a:pPr lvl="0" indent="0" marL="0">
+                        <a:buNone/>
+                      </a:pPr>
+                      <a:r>
+                        <a:rPr/>
+                        <a:t>Требования к значимому объекту КИИ</a:t>
+                      </a:r>
+                    </a:p>
+                  </a:txBody>
+                </a:tc>
+                <a:tc>
+                  <a:txBody>
+                    <a:bodyPr/>
+                    <a:lstStyle/>
+                    <a:p>
+                      <a:pPr lvl="0" indent="0" marL="0">
+                        <a:buNone/>
+                      </a:pPr>
+                      <a:r>
+                        <a:rPr/>
+                        <a:t>специальное регулирование КИИ</a:t>
+                      </a:r>
+                    </a:p>
+                  </a:txBody>
+                </a:tc>
+                <a:tc>
+                  <a:txBody>
+                    <a:bodyPr/>
+                    <a:lstStyle/>
+                    <a:p>
+                      <a:pPr lvl="0" indent="0" marL="0">
+                        <a:buNone/>
+                      </a:pPr>
+                      <a:r>
+                        <a:rPr/>
+                        <a:t>выполнение мер защиты применительно к объекту</a:t>
+                      </a:r>
+                    </a:p>
+                  </a:txBody>
+                </a:tc>
+                <a:tc>
+                  <a:txBody>
+                    <a:bodyPr/>
+                    <a:lstStyle/>
+                    <a:p>
+                      <a:pPr lvl="0" indent="0" marL="0">
+                        <a:buNone/>
+                      </a:pPr>
+                      <a:r>
+                        <a:rPr/>
+                        <a:t>считать, что сертификат продукта закрывает все требования</a:t>
+                      </a:r>
+                    </a:p>
+                  </a:txBody>
+                </a:tc>
+              </a:tr>
+            </a:tbl>
+          </a:graphicData>
+        </a:graphic>
+      </p:graphicFrame>
+    </p:spTree>
+  </p:cSld>
+</p:sld>
+</file>
+
+<file path=ppt/slides/slide18.xml><?xml version="1.0" encoding="utf-8"?>
+<p:sld xmlns:a="http://schemas.openxmlformats.org/drawingml/2006/main" xmlns:r="http://schemas.openxmlformats.org/officeDocument/2006/relationships" xmlns:p="http://schemas.openxmlformats.org/presentationml/2006/main">
+  <p:cSld>
+    <p:spTree>
+      <p:nvGrpSpPr>
+        <p:cNvPr id="1" name=""/>
+        <p:cNvGrpSpPr/>
+        <p:nvPr/>
+      </p:nvGrpSpPr>
+      <p:grpSpPr>
+        <a:xfrm>
+          <a:off x="0" y="0"/>
+          <a:ext cx="0" cy="0"/>
+          <a:chOff x="0" y="0"/>
+          <a:chExt cx="0" cy="0"/>
+        </a:xfrm>
+      </p:grpSpPr>
+      <p:sp>
+        <p:nvSpPr>
+          <p:cNvPr id="2" name="Title 1"/>
+          <p:cNvSpPr>
+            <a:spLocks noGrp="1"/>
+          </p:cNvSpPr>
+          <p:nvPr>
+            <p:ph type="title"/>
+          </p:nvPr>
+        </p:nvSpPr>
+        <p:spPr/>
+        <p:txBody>
+          <a:bodyPr/>
+          <a:lstStyle/>
+          <a:p>
+            <a:pPr lvl="0" indent="0" marL="0">
+              <a:buNone/>
+            </a:pPr>
+            <a:r>
+              <a:rPr/>
+              <a:t>Сертификат как доказательство</a:t>
+            </a:r>
+          </a:p>
+        </p:txBody>
+      </p:sp>
+      <p:sp>
+        <p:nvSpPr>
+          <p:cNvPr id="3" name="Content Placeholder 2"/>
+          <p:cNvSpPr>
+            <a:spLocks noGrp="1"/>
+          </p:cNvSpPr>
+          <p:nvPr>
+            <p:ph idx="1"/>
+          </p:nvPr>
+        </p:nvSpPr>
+        <p:spPr/>
+        <p:txBody>
+          <a:bodyPr/>
+          <a:lstStyle/>
+          <a:p>
+            <a:pPr lvl="0" indent="0" marL="0">
+              <a:buNone/>
+            </a:pPr>
+            <a:r>
+              <a:rPr/>
+              <a:t>Сертификат не является универсальным разрешением на использование продукта.</a:t>
+            </a:r>
+          </a:p>
+          <a:p>
+            <a:pPr lvl="0" indent="0" marL="0">
+              <a:buNone/>
+            </a:pPr>
+            <a:r>
+              <a:rPr/>
+              <a:t>Как читать сертификат:</a:t>
+            </a:r>
+          </a:p>
+          <a:p>
+            <a:pPr lvl="0"/>
+            <a:r>
+              <a:rPr/>
+              <a:t>что сертифицировано: продукт, версия, комплектация;</a:t>
+            </a:r>
+          </a:p>
+          <a:p>
+            <a:pPr lvl="0"/>
+            <a:r>
+              <a:rPr/>
+              <a:t>схема и требования;</a:t>
+            </a:r>
+          </a:p>
+          <a:p>
+            <a:pPr lvl="0"/>
+            <a:r>
+              <a:rPr/>
+              <a:t>срок и условия действия;</a:t>
+            </a:r>
+          </a:p>
+          <a:p>
+            <a:pPr lvl="0"/>
+            <a:r>
+              <a:rPr/>
+              <a:t>ограничения;</a:t>
+            </a:r>
+          </a:p>
+          <a:p>
+            <a:pPr lvl="0"/>
+            <a:r>
+              <a:rPr/>
+              <a:t>совпадает ли конфигурация с реально используемой.</a:t>
+            </a:r>
+          </a:p>
+          <a:p>
+            <a:pPr lvl="0" indent="0" marL="0">
+              <a:buNone/>
+            </a:pPr>
+            <a:r>
+              <a:rPr/>
+              <a:t>Дополнительно: есть ли обязательные требования к объекту КИИ.</a:t>
+            </a:r>
+          </a:p>
+        </p:txBody>
+      </p:sp>
+    </p:spTree>
+  </p:cSld>
+</p:sld>
+</file>
+
+<file path=ppt/slides/slide19.xml><?xml version="1.0" encoding="utf-8"?>
+<p:sld xmlns:a="http://schemas.openxmlformats.org/drawingml/2006/main" xmlns:r="http://schemas.openxmlformats.org/officeDocument/2006/relationships" xmlns:p="http://schemas.openxmlformats.org/presentationml/2006/main">
+  <p:cSld>
+    <p:spTree>
+      <p:nvGrpSpPr>
+        <p:cNvPr id="1" name=""/>
+        <p:cNvGrpSpPr/>
+        <p:nvPr/>
+      </p:nvGrpSpPr>
+      <p:grpSpPr>
+        <a:xfrm>
+          <a:off x="0" y="0"/>
+          <a:ext cx="0" cy="0"/>
+          <a:chOff x="0" y="0"/>
+          <a:chExt cx="0" cy="0"/>
+        </a:xfrm>
+      </p:grpSpPr>
+      <p:sp>
+        <p:nvSpPr>
+          <p:cNvPr id="2" name="Title 1"/>
+          <p:cNvSpPr>
+            <a:spLocks noGrp="1"/>
+          </p:cNvSpPr>
+          <p:nvPr>
+            <p:ph type="title"/>
+          </p:nvPr>
+        </p:nvSpPr>
+        <p:spPr/>
+        <p:txBody>
+          <a:bodyPr/>
+          <a:lstStyle/>
+          <a:p>
+            <a:pPr lvl="0" indent="0" marL="0">
+              <a:buNone/>
+            </a:pPr>
+            <a:r>
+              <a:rPr/>
+              <a:t>Цепочка подтверждения</a:t>
+            </a:r>
+          </a:p>
+        </p:txBody>
+      </p:sp>
+      <p:sp>
+        <p:nvSpPr>
+          <p:cNvPr id="3" name="Content Placeholder 2"/>
+          <p:cNvSpPr>
+            <a:spLocks noGrp="1"/>
+          </p:cNvSpPr>
+          <p:nvPr>
+            <p:ph idx="1"/>
+          </p:nvPr>
+        </p:nvSpPr>
+        <p:spPr/>
+        <p:txBody>
+          <a:bodyPr/>
+          <a:lstStyle/>
+          <a:p>
+            <a:pPr lvl="0" indent="0" marL="0">
+              <a:buNone/>
+            </a:pPr>
+            <a:r>
+              <a:rPr b="1"/>
+              <a:t>От аккредитации до сертификата</a:t>
+            </a:r>
+          </a:p>
+          <a:p>
+            <a:pPr lvl="0" indent="0" marL="0">
+              <a:buNone/>
+            </a:pPr>
+            <a:r>
+              <a:rPr/>
+              <a:t>Аккредитация → испытание → протокол → решение органа по сертификации → сертификат</a:t>
+            </a:r>
+          </a:p>
+          <a:p>
+            <a:pPr lvl="0"/>
+            <a:r>
+              <a:rPr/>
+              <a:t>У каждого звена своя область и свои ограничения.</a:t>
+            </a:r>
+          </a:p>
+          <a:p>
+            <a:pPr lvl="0"/>
+            <a:r>
+              <a:rPr/>
+              <a:t>Аккредитация не равна испытанию и не равна сертификату.</a:t>
+            </a:r>
+          </a:p>
+          <a:p>
+            <a:pPr lvl="0"/>
+            <a:r>
+              <a:rPr/>
+              <a:t>Разрыв на любом звене ослабляет вывод.</a:t>
+            </a:r>
+          </a:p>
+        </p:txBody>
+      </p:sp>
+    </p:spTree>
+  </p:cSld>
 </p:sld>
 </file>
 
@@ -4672,11 +5488,12 @@
           <a:bodyPr/>
           <a:lstStyle/>
           <a:p>
-            <a:pPr marL="0" lvl="0" indent="0">
-              <a:buNone/>
-            </a:pPr>
-            <a:r>
-              <a:t>Центральный вопрос</a:t>
+            <a:pPr lvl="0" indent="0" marL="0">
+              <a:buNone/>
+            </a:pPr>
+            <a:r>
+              <a:rPr/>
+              <a:t>Цели лекции</a:t>
             </a:r>
           </a:p>
         </p:txBody>
@@ -4696,67 +5513,1596 @@
           <a:bodyPr/>
           <a:lstStyle/>
           <a:p>
-            <a:pPr marL="0" lvl="0" indent="0">
+            <a:pPr lvl="0" indent="0" marL="0">
               <a:buNone/>
             </a:pPr>
             <a:r>
               <a:rPr b="1"/>
-              <a:t>Что требуется доказать?</a:t>
-            </a:r>
-          </a:p>
-          <a:p>
-            <a:pPr marL="0" lvl="0" indent="0">
-              <a:buNone/>
-            </a:pPr>
-            <a:r>
-              <a:t>Не достаточно назвать закон, стандарт или сертификат.</a:t>
-            </a:r>
-          </a:p>
-          <a:p>
-            <a:pPr marL="0" lvl="0" indent="0">
-              <a:buNone/>
-            </a:pPr>
-            <a:r>
-              <a:t>Для каждого решения специалист отвечает:</a:t>
-            </a:r>
-          </a:p>
-          <a:p>
-            <a:pPr lvl="0"/>
-            <a:r>
-              <a:t>какая норма или условие применяется;</a:t>
-            </a:r>
-          </a:p>
-          <a:p>
-            <a:pPr lvl="0"/>
-            <a:r>
-              <a:t>к какому объекту и в каких границах;</a:t>
-            </a:r>
-          </a:p>
-          <a:p>
-            <a:pPr lvl="0"/>
-            <a:r>
-              <a:t>что именно организация обязана или решила сделать;</a:t>
-            </a:r>
-          </a:p>
-          <a:p>
-            <a:pPr lvl="0"/>
-            <a:r>
-              <a:t>чем подтверждается выполнение;</a:t>
-            </a:r>
-          </a:p>
-          <a:p>
-            <a:pPr lvl="0"/>
-            <a:r>
-              <a:t>когда вывод нужно пересмотреть.</a:t>
+              <a:t>После лекции вы сможете</a:t>
+            </a:r>
+          </a:p>
+          <a:p>
+            <a:pPr lvl="0" indent="-342900" marL="342900">
+              <a:buAutoNum type="arabicPeriod"/>
+            </a:pPr>
+            <a:r>
+              <a:rPr/>
+              <a:t>Назвать виды источников требований и объяснить, чем они различаются по обязательности.</a:t>
+            </a:r>
+          </a:p>
+          <a:p>
+            <a:pPr lvl="0" indent="-342900" marL="342900">
+              <a:buAutoNum type="arabicPeriod"/>
+            </a:pPr>
+            <a:r>
+              <a:rPr/>
+              <a:t>Отличить технический регламент, национальный стандарт и ПНСТ.</a:t>
+            </a:r>
+          </a:p>
+          <a:p>
+            <a:pPr lvl="0" indent="-342900" marL="342900">
+              <a:buAutoNum type="arabicPeriod"/>
+            </a:pPr>
+            <a:r>
+              <a:rPr/>
+              <a:t>Различить обязательное подтверждение соответствия, добровольную сертификацию и специальные требования к объектам КИИ.</a:t>
+            </a:r>
+          </a:p>
+          <a:p>
+            <a:pPr lvl="0" indent="-342900" marL="342900">
+              <a:buAutoNum type="arabicPeriod"/>
+            </a:pPr>
+            <a:r>
+              <a:rPr/>
+              <a:t>Прочитать сертификат или протокол испытаний и определить, что он подтверждает.</a:t>
+            </a:r>
+          </a:p>
+          <a:p>
+            <a:pPr lvl="0" indent="-342900" marL="342900">
+              <a:buAutoNum type="arabicPeriod"/>
+            </a:pPr>
+            <a:r>
+              <a:rPr/>
+              <a:t>Оформить решение в виде карточки: основание, применимость, доказательство, ограничение, пересмотр.</a:t>
             </a:r>
           </a:p>
         </p:txBody>
       </p:sp>
     </p:spTree>
   </p:cSld>
-  <p:clrMapOvr>
-    <a:masterClrMapping/>
-  </p:clrMapOvr>
+</p:sld>
+</file>
+
+<file path=ppt/slides/slide20.xml><?xml version="1.0" encoding="utf-8"?>
+<p:sld xmlns:a="http://schemas.openxmlformats.org/drawingml/2006/main" xmlns:r="http://schemas.openxmlformats.org/officeDocument/2006/relationships" xmlns:p="http://schemas.openxmlformats.org/presentationml/2006/main">
+  <p:cSld>
+    <p:spTree>
+      <p:nvGrpSpPr>
+        <p:cNvPr id="1" name=""/>
+        <p:cNvGrpSpPr/>
+        <p:nvPr/>
+      </p:nvGrpSpPr>
+      <p:grpSpPr>
+        <a:xfrm>
+          <a:off x="0" y="0"/>
+          <a:ext cx="0" cy="0"/>
+          <a:chOff x="0" y="0"/>
+          <a:chExt cx="0" cy="0"/>
+        </a:xfrm>
+      </p:grpSpPr>
+      <p:sp>
+        <p:nvSpPr>
+          <p:cNvPr id="2" name="Title 1"/>
+          <p:cNvSpPr>
+            <a:spLocks noGrp="1"/>
+          </p:cNvSpPr>
+          <p:nvPr>
+            <p:ph type="title"/>
+          </p:nvPr>
+        </p:nvSpPr>
+        <p:spPr/>
+        <p:txBody>
+          <a:bodyPr/>
+          <a:lstStyle/>
+          <a:p>
+            <a:pPr lvl="0" indent="0" marL="0">
+              <a:buNone/>
+            </a:pPr>
+            <a:r>
+              <a:rPr/>
+              <a:t>Аккредитация и испытания</a:t>
+            </a:r>
+          </a:p>
+        </p:txBody>
+      </p:sp>
+      <p:sp>
+        <p:nvSpPr>
+          <p:cNvPr id="3" name="Content Placeholder 2"/>
+          <p:cNvSpPr>
+            <a:spLocks noGrp="1"/>
+          </p:cNvSpPr>
+          <p:nvPr>
+            <p:ph idx="1"/>
+          </p:nvPr>
+        </p:nvSpPr>
+        <p:spPr/>
+        <p:txBody>
+          <a:bodyPr/>
+          <a:lstStyle/>
+          <a:p>
+            <a:pPr lvl="0" indent="0" marL="0">
+              <a:buNone/>
+            </a:pPr>
+            <a:r>
+              <a:rPr/>
+              <a:t>Аккредитация подтверждает компетентность выполнять работы в определённой области.</a:t>
+            </a:r>
+          </a:p>
+          <a:p>
+            <a:pPr lvl="0" indent="0" marL="0">
+              <a:buNone/>
+            </a:pPr>
+            <a:r>
+              <a:rPr/>
+              <a:t>Пять вопросов к протоколу:</a:t>
+            </a:r>
+          </a:p>
+          <a:p>
+            <a:pPr lvl="0" indent="-342900" marL="342900">
+              <a:buAutoNum type="arabicPeriod"/>
+            </a:pPr>
+            <a:r>
+              <a:rPr/>
+              <a:t>Кто выполнил работу и в какой роли?</a:t>
+            </a:r>
+          </a:p>
+          <a:p>
+            <a:pPr lvl="0" indent="-342900" marL="342900">
+              <a:buAutoNum type="arabicPeriod"/>
+            </a:pPr>
+            <a:r>
+              <a:rPr/>
+              <a:t>Какой объект, версия и конфигурация исследовались?</a:t>
+            </a:r>
+          </a:p>
+          <a:p>
+            <a:pPr lvl="0" indent="-342900" marL="342900">
+              <a:buAutoNum type="arabicPeriod"/>
+            </a:pPr>
+            <a:r>
+              <a:rPr/>
+              <a:t>По какой методике, критерию или программе?</a:t>
+            </a:r>
+          </a:p>
+          <a:p>
+            <a:pPr lvl="0" indent="-342900" marL="342900">
+              <a:buAutoNum type="arabicPeriod"/>
+            </a:pPr>
+            <a:r>
+              <a:rPr/>
+              <a:t>Какие данные и условия использованы?</a:t>
+            </a:r>
+          </a:p>
+          <a:p>
+            <a:pPr lvl="0" indent="-342900" marL="342900">
+              <a:buAutoNum type="arabicPeriod"/>
+            </a:pPr>
+            <a:r>
+              <a:rPr/>
+              <a:t>Каковы границы результата: что подтверждает и что нет?</a:t>
+            </a:r>
+          </a:p>
+          <a:p>
+            <a:pPr lvl="0" indent="0" marL="0">
+              <a:buNone/>
+            </a:pPr>
+            <a:r>
+              <a:rPr/>
+              <a:t>Именно границы результата чаще всего теряются при пересказе.</a:t>
+            </a:r>
+          </a:p>
+        </p:txBody>
+      </p:sp>
+    </p:spTree>
+  </p:cSld>
+</p:sld>
+</file>
+
+<file path=ppt/slides/slide21.xml><?xml version="1.0" encoding="utf-8"?>
+<p:sld xmlns:a="http://schemas.openxmlformats.org/drawingml/2006/main" xmlns:r="http://schemas.openxmlformats.org/officeDocument/2006/relationships" xmlns:p="http://schemas.openxmlformats.org/presentationml/2006/main">
+  <p:cSld>
+    <p:spTree>
+      <p:nvGrpSpPr>
+        <p:cNvPr id="1" name=""/>
+        <p:cNvGrpSpPr/>
+        <p:nvPr/>
+      </p:nvGrpSpPr>
+      <p:grpSpPr>
+        <a:xfrm>
+          <a:off x="0" y="0"/>
+          <a:ext cx="0" cy="0"/>
+          <a:chOff x="0" y="0"/>
+          <a:chExt cx="0" cy="0"/>
+        </a:xfrm>
+      </p:grpSpPr>
+      <p:sp>
+        <p:nvSpPr>
+          <p:cNvPr id="2" name="Title 1"/>
+          <p:cNvSpPr>
+            <a:spLocks noGrp="1"/>
+          </p:cNvSpPr>
+          <p:nvPr>
+            <p:ph type="title"/>
+          </p:nvPr>
+        </p:nvSpPr>
+        <p:spPr/>
+        <p:txBody>
+          <a:bodyPr/>
+          <a:lstStyle/>
+          <a:p>
+            <a:pPr lvl="0" indent="0" marL="0">
+              <a:buNone/>
+            </a:pPr>
+            <a:r>
+              <a:rPr/>
+              <a:t>Рабочая карточка решения</a:t>
+            </a:r>
+          </a:p>
+        </p:txBody>
+      </p:sp>
+      <p:graphicFrame>
+        <p:nvGraphicFramePr>
+          <p:cNvPr id="6" name="Content Placeholder 5"/>
+          <p:cNvGraphicFramePr>
+            <a:graphicFrameLocks noGrp="1"/>
+          </p:cNvGraphicFramePr>
+          <p:nvPr>
+            <p:ph idx="1"/>
+          </p:nvPr>
+        </p:nvGraphicFramePr>
+        <p:xfrm>
+          <a:off x="457200" y="787400"/>
+          <a:ext cx="8229600" cy="3797300"/>
+        </p:xfrm>
+        <a:graphic>
+          <a:graphicData uri="http://schemas.openxmlformats.org/drawingml/2006/table">
+            <a:tbl>
+              <a:tblPr firstRow="1" bandRow="1">
+                <a:tableStyleId>{5C22544A-7EE6-4342-B048-85BDC9FD1C3A}</a:tableStyleId>
+              </a:tblPr>
+              <a:tblGrid>
+                <a:gridCol w="4114800"/>
+                <a:gridCol w="4114800"/>
+              </a:tblGrid>
+              <a:tr h="0">
+                <a:tc>
+                  <a:txBody>
+                    <a:bodyPr/>
+                    <a:lstStyle/>
+                    <a:p>
+                      <a:pPr lvl="0" indent="0" marL="0">
+                        <a:buNone/>
+                      </a:pPr>
+                      <a:r>
+                        <a:rPr/>
+                        <a:t>Поле</a:t>
+                      </a:r>
+                    </a:p>
+                  </a:txBody>
+                  <a:tcPr/>
+                </a:tc>
+                <a:tc>
+                  <a:txBody>
+                    <a:bodyPr/>
+                    <a:lstStyle/>
+                    <a:p>
+                      <a:pPr lvl="0" indent="0" marL="0">
+                        <a:buNone/>
+                      </a:pPr>
+                      <a:r>
+                        <a:rPr/>
+                        <a:t>Что фиксировать</a:t>
+                      </a:r>
+                    </a:p>
+                  </a:txBody>
+                  <a:tcPr/>
+                </a:tc>
+              </a:tr>
+              <a:tr h="0">
+                <a:tc>
+                  <a:txBody>
+                    <a:bodyPr/>
+                    <a:lstStyle/>
+                    <a:p>
+                      <a:pPr lvl="0" indent="0" marL="0">
+                        <a:buNone/>
+                      </a:pPr>
+                      <a:r>
+                        <a:rPr/>
+                        <a:t>Решение</a:t>
+                      </a:r>
+                    </a:p>
+                  </a:txBody>
+                </a:tc>
+                <a:tc>
+                  <a:txBody>
+                    <a:bodyPr/>
+                    <a:lstStyle/>
+                    <a:p>
+                      <a:pPr lvl="0" indent="0" marL="0">
+                        <a:buNone/>
+                      </a:pPr>
+                      <a:r>
+                        <a:rPr/>
+                        <a:t>что планируется или выполнено</a:t>
+                      </a:r>
+                    </a:p>
+                  </a:txBody>
+                </a:tc>
+              </a:tr>
+              <a:tr h="0">
+                <a:tc>
+                  <a:txBody>
+                    <a:bodyPr/>
+                    <a:lstStyle/>
+                    <a:p>
+                      <a:pPr lvl="0" indent="0" marL="0">
+                        <a:buNone/>
+                      </a:pPr>
+                      <a:r>
+                        <a:rPr/>
+                        <a:t>Основание</a:t>
+                      </a:r>
+                    </a:p>
+                  </a:txBody>
+                </a:tc>
+                <a:tc>
+                  <a:txBody>
+                    <a:bodyPr/>
+                    <a:lstStyle/>
+                    <a:p>
+                      <a:pPr lvl="0" indent="0" marL="0">
+                        <a:buNone/>
+                      </a:pPr>
+                      <a:r>
+                        <a:rPr/>
+                        <a:t>норма, договор, риск или внутреннее правило</a:t>
+                      </a:r>
+                    </a:p>
+                  </a:txBody>
+                </a:tc>
+              </a:tr>
+              <a:tr h="0">
+                <a:tc>
+                  <a:txBody>
+                    <a:bodyPr/>
+                    <a:lstStyle/>
+                    <a:p>
+                      <a:pPr lvl="0" indent="0" marL="0">
+                        <a:buNone/>
+                      </a:pPr>
+                      <a:r>
+                        <a:rPr/>
+                        <a:t>Применимость</a:t>
+                      </a:r>
+                    </a:p>
+                  </a:txBody>
+                </a:tc>
+                <a:tc>
+                  <a:txBody>
+                    <a:bodyPr/>
+                    <a:lstStyle/>
+                    <a:p>
+                      <a:pPr lvl="0" indent="0" marL="0">
+                        <a:buNone/>
+                      </a:pPr>
+                      <a:r>
+                        <a:rPr/>
+                        <a:t>объект, процесс, участник, редакция и дата</a:t>
+                      </a:r>
+                    </a:p>
+                  </a:txBody>
+                </a:tc>
+              </a:tr>
+              <a:tr h="0">
+                <a:tc>
+                  <a:txBody>
+                    <a:bodyPr/>
+                    <a:lstStyle/>
+                    <a:p>
+                      <a:pPr lvl="0" indent="0" marL="0">
+                        <a:buNone/>
+                      </a:pPr>
+                      <a:r>
+                        <a:rPr/>
+                        <a:t>Доказательство</a:t>
+                      </a:r>
+                    </a:p>
+                  </a:txBody>
+                </a:tc>
+                <a:tc>
+                  <a:txBody>
+                    <a:bodyPr/>
+                    <a:lstStyle/>
+                    <a:p>
+                      <a:pPr lvl="0" indent="0" marL="0">
+                        <a:buNone/>
+                      </a:pPr>
+                      <a:r>
+                        <a:rPr/>
+                        <a:t>акт, протокол, журнал, схема, сертификат</a:t>
+                      </a:r>
+                    </a:p>
+                  </a:txBody>
+                </a:tc>
+              </a:tr>
+              <a:tr h="0">
+                <a:tc>
+                  <a:txBody>
+                    <a:bodyPr/>
+                    <a:lstStyle/>
+                    <a:p>
+                      <a:pPr lvl="0" indent="0" marL="0">
+                        <a:buNone/>
+                      </a:pPr>
+                      <a:r>
+                        <a:rPr/>
+                        <a:t>Ограничение</a:t>
+                      </a:r>
+                    </a:p>
+                  </a:txBody>
+                </a:tc>
+                <a:tc>
+                  <a:txBody>
+                    <a:bodyPr/>
+                    <a:lstStyle/>
+                    <a:p>
+                      <a:pPr lvl="0" indent="0" marL="0">
+                        <a:buNone/>
+                      </a:pPr>
+                      <a:r>
+                        <a:rPr/>
+                        <a:t>чего доказательство не подтверждает</a:t>
+                      </a:r>
+                    </a:p>
+                  </a:txBody>
+                </a:tc>
+              </a:tr>
+              <a:tr h="0">
+                <a:tc>
+                  <a:txBody>
+                    <a:bodyPr/>
+                    <a:lstStyle/>
+                    <a:p>
+                      <a:pPr lvl="0" indent="0" marL="0">
+                        <a:buNone/>
+                      </a:pPr>
+                      <a:r>
+                        <a:rPr/>
+                        <a:t>Пересмотр</a:t>
+                      </a:r>
+                    </a:p>
+                  </a:txBody>
+                </a:tc>
+                <a:tc>
+                  <a:txBody>
+                    <a:bodyPr/>
+                    <a:lstStyle/>
+                    <a:p>
+                      <a:pPr lvl="0" indent="0" marL="0">
+                        <a:buNone/>
+                      </a:pPr>
+                      <a:r>
+                        <a:rPr/>
+                        <a:t>событие, владелец и срок проверки</a:t>
+                      </a:r>
+                    </a:p>
+                  </a:txBody>
+                </a:tc>
+              </a:tr>
+            </a:tbl>
+          </a:graphicData>
+        </a:graphic>
+      </p:graphicFrame>
+    </p:spTree>
+  </p:cSld>
+</p:sld>
+</file>
+
+<file path=ppt/slides/slide22.xml><?xml version="1.0" encoding="utf-8"?>
+<p:sld xmlns:a="http://schemas.openxmlformats.org/drawingml/2006/main" xmlns:r="http://schemas.openxmlformats.org/officeDocument/2006/relationships" xmlns:p="http://schemas.openxmlformats.org/presentationml/2006/main">
+  <p:cSld>
+    <p:spTree>
+      <p:nvGrpSpPr>
+        <p:cNvPr id="1" name=""/>
+        <p:cNvGrpSpPr/>
+        <p:nvPr/>
+      </p:nvGrpSpPr>
+      <p:grpSpPr>
+        <a:xfrm>
+          <a:off x="0" y="0"/>
+          <a:ext cx="0" cy="0"/>
+          <a:chOff x="0" y="0"/>
+          <a:chExt cx="0" cy="0"/>
+        </a:xfrm>
+      </p:grpSpPr>
+      <p:sp>
+        <p:nvSpPr>
+          <p:cNvPr id="2" name="Title 1"/>
+          <p:cNvSpPr>
+            <a:spLocks noGrp="1"/>
+          </p:cNvSpPr>
+          <p:nvPr>
+            <p:ph type="title"/>
+          </p:nvPr>
+        </p:nvSpPr>
+        <p:spPr/>
+        <p:txBody>
+          <a:bodyPr/>
+          <a:lstStyle/>
+          <a:p>
+            <a:pPr lvl="0" indent="0" marL="0">
+              <a:buNone/>
+            </a:pPr>
+            <a:r>
+              <a:rPr/>
+              <a:t>Пример карточки</a:t>
+            </a:r>
+          </a:p>
+        </p:txBody>
+      </p:sp>
+      <p:sp>
+        <p:nvSpPr>
+          <p:cNvPr id="3" name="Content Placeholder 2"/>
+          <p:cNvSpPr>
+            <a:spLocks noGrp="1"/>
+          </p:cNvSpPr>
+          <p:nvPr>
+            <p:ph idx="1"/>
+          </p:nvPr>
+        </p:nvSpPr>
+        <p:spPr>
+          <a:xfrm>
+            <a:off x="457200" y="787400"/>
+            <a:ext cx="8229600" cy="711200"/>
+          </a:xfrm>
+        </p:spPr>
+        <p:txBody>
+          <a:bodyPr/>
+          <a:lstStyle/>
+          <a:p>
+            <a:pPr lvl="0" indent="0" marL="0">
+              <a:buNone/>
+            </a:pPr>
+            <a:r>
+              <a:rPr b="1"/>
+              <a:t>Продукт версии 3.2 на сервере обработки данных</a:t>
+            </a:r>
+          </a:p>
+        </p:txBody>
+      </p:sp>
+      <p:graphicFrame>
+        <p:nvGraphicFramePr>
+          <p:cNvPr id="6" name="Content Placeholder 5"/>
+          <p:cNvGraphicFramePr>
+            <a:graphicFrameLocks noGrp="1"/>
+          </p:cNvGraphicFramePr>
+          <p:nvPr>
+            <p:ph idx="1"/>
+          </p:nvPr>
+        </p:nvGraphicFramePr>
+        <p:xfrm>
+          <a:off x="457200" y="1625600"/>
+          <a:ext cx="8229600" cy="2832100"/>
+        </p:xfrm>
+        <a:graphic>
+          <a:graphicData uri="http://schemas.openxmlformats.org/drawingml/2006/table">
+            <a:tbl>
+              <a:tblPr firstRow="1" bandRow="1">
+                <a:tableStyleId>{5C22544A-7EE6-4342-B048-85BDC9FD1C3A}</a:tableStyleId>
+              </a:tblPr>
+              <a:tblGrid>
+                <a:gridCol w="4114800"/>
+                <a:gridCol w="4114800"/>
+              </a:tblGrid>
+              <a:tr h="0">
+                <a:tc>
+                  <a:txBody>
+                    <a:bodyPr/>
+                    <a:lstStyle/>
+                    <a:p>
+                      <a:pPr lvl="0" indent="0" marL="0">
+                        <a:buNone/>
+                      </a:pPr>
+                      <a:r>
+                        <a:rPr/>
+                        <a:t>Поле</a:t>
+                      </a:r>
+                    </a:p>
+                  </a:txBody>
+                  <a:tcPr/>
+                </a:tc>
+                <a:tc>
+                  <a:txBody>
+                    <a:bodyPr/>
+                    <a:lstStyle/>
+                    <a:p>
+                      <a:pPr lvl="0" indent="0" marL="0">
+                        <a:buNone/>
+                      </a:pPr>
+                      <a:r>
+                        <a:rPr/>
+                        <a:t>Содержание</a:t>
+                      </a:r>
+                    </a:p>
+                  </a:txBody>
+                  <a:tcPr/>
+                </a:tc>
+              </a:tr>
+              <a:tr h="0">
+                <a:tc>
+                  <a:txBody>
+                    <a:bodyPr/>
+                    <a:lstStyle/>
+                    <a:p>
+                      <a:pPr lvl="0" indent="0" marL="0">
+                        <a:buNone/>
+                      </a:pPr>
+                      <a:r>
+                        <a:rPr/>
+                        <a:t>Решение</a:t>
+                      </a:r>
+                    </a:p>
+                  </a:txBody>
+                </a:tc>
+                <a:tc>
+                  <a:txBody>
+                    <a:bodyPr/>
+                    <a:lstStyle/>
+                    <a:p>
+                      <a:pPr lvl="0" indent="0" marL="0">
+                        <a:buNone/>
+                      </a:pPr>
+                      <a:r>
+                        <a:rPr/>
+                        <a:t>использовать продукт версии 3.2 на сервере обработки данных</a:t>
+                      </a:r>
+                    </a:p>
+                  </a:txBody>
+                </a:tc>
+              </a:tr>
+              <a:tr h="0">
+                <a:tc>
+                  <a:txBody>
+                    <a:bodyPr/>
+                    <a:lstStyle/>
+                    <a:p>
+                      <a:pPr lvl="0" indent="0" marL="0">
+                        <a:buNone/>
+                      </a:pPr>
+                      <a:r>
+                        <a:rPr/>
+                        <a:t>Основание</a:t>
+                      </a:r>
+                    </a:p>
+                  </a:txBody>
+                </a:tc>
+                <a:tc>
+                  <a:txBody>
+                    <a:bodyPr/>
+                    <a:lstStyle/>
+                    <a:p>
+                      <a:pPr lvl="0" indent="0" marL="0">
+                        <a:buNone/>
+                      </a:pPr>
+                      <a:r>
+                        <a:rPr/>
+                        <a:t>закупочное условие о сертификате; регламент выбора ПО</a:t>
+                      </a:r>
+                    </a:p>
+                  </a:txBody>
+                </a:tc>
+              </a:tr>
+              <a:tr h="0">
+                <a:tc>
+                  <a:txBody>
+                    <a:bodyPr/>
+                    <a:lstStyle/>
+                    <a:p>
+                      <a:pPr lvl="0" indent="0" marL="0">
+                        <a:buNone/>
+                      </a:pPr>
+                      <a:r>
+                        <a:rPr/>
+                        <a:t>Применимость</a:t>
+                      </a:r>
+                    </a:p>
+                  </a:txBody>
+                </a:tc>
+                <a:tc>
+                  <a:txBody>
+                    <a:bodyPr/>
+                    <a:lstStyle/>
+                    <a:p>
+                      <a:pPr lvl="0" indent="0" marL="0">
+                        <a:buNone/>
+                      </a:pPr>
+                      <a:r>
+                        <a:rPr/>
+                        <a:t>сервер обработки данных, подразделение «А»; редакция условий на дату договора</a:t>
+                      </a:r>
+                    </a:p>
+                  </a:txBody>
+                </a:tc>
+              </a:tr>
+              <a:tr h="0">
+                <a:tc>
+                  <a:txBody>
+                    <a:bodyPr/>
+                    <a:lstStyle/>
+                    <a:p>
+                      <a:pPr lvl="0" indent="0" marL="0">
+                        <a:buNone/>
+                      </a:pPr>
+                      <a:r>
+                        <a:rPr/>
+                        <a:t>Доказательство</a:t>
+                      </a:r>
+                    </a:p>
+                  </a:txBody>
+                </a:tc>
+                <a:tc>
+                  <a:txBody>
+                    <a:bodyPr/>
+                    <a:lstStyle/>
+                    <a:p>
+                      <a:pPr lvl="0" indent="0" marL="0">
+                        <a:buNone/>
+                      </a:pPr>
+                      <a:r>
+                        <a:rPr/>
+                        <a:t>сертификат на версию 3.2, акт приёмки, схема</a:t>
+                      </a:r>
+                    </a:p>
+                  </a:txBody>
+                </a:tc>
+              </a:tr>
+              <a:tr h="0">
+                <a:tc>
+                  <a:txBody>
+                    <a:bodyPr/>
+                    <a:lstStyle/>
+                    <a:p>
+                      <a:pPr lvl="0" indent="0" marL="0">
+                        <a:buNone/>
+                      </a:pPr>
+                      <a:r>
+                        <a:rPr/>
+                        <a:t>Ограничение</a:t>
+                      </a:r>
+                    </a:p>
+                  </a:txBody>
+                </a:tc>
+                <a:tc>
+                  <a:txBody>
+                    <a:bodyPr/>
+                    <a:lstStyle/>
+                    <a:p>
+                      <a:pPr lvl="0" indent="0" marL="0">
+                        <a:buNone/>
+                      </a:pPr>
+                      <a:r>
+                        <a:rPr/>
+                        <a:t>сертификат — для стандартной конфигурации; нестандартные модули не охвачены</a:t>
+                      </a:r>
+                    </a:p>
+                  </a:txBody>
+                </a:tc>
+              </a:tr>
+              <a:tr h="0">
+                <a:tc>
+                  <a:txBody>
+                    <a:bodyPr/>
+                    <a:lstStyle/>
+                    <a:p>
+                      <a:pPr lvl="0" indent="0" marL="0">
+                        <a:buNone/>
+                      </a:pPr>
+                      <a:r>
+                        <a:rPr/>
+                        <a:t>Пересмотр</a:t>
+                      </a:r>
+                    </a:p>
+                  </a:txBody>
+                </a:tc>
+                <a:tc>
+                  <a:txBody>
+                    <a:bodyPr/>
+                    <a:lstStyle/>
+                    <a:p>
+                      <a:pPr lvl="0" indent="0" marL="0">
+                        <a:buNone/>
+                      </a:pPr>
+                      <a:r>
+                        <a:rPr/>
+                        <a:t>при обновлении версии или истечении срока; отдел ИБ; раз в год</a:t>
+                      </a:r>
+                    </a:p>
+                  </a:txBody>
+                </a:tc>
+              </a:tr>
+            </a:tbl>
+          </a:graphicData>
+        </a:graphic>
+      </p:graphicFrame>
+    </p:spTree>
+  </p:cSld>
+</p:sld>
+</file>
+
+<file path=ppt/slides/slide23.xml><?xml version="1.0" encoding="utf-8"?>
+<p:sld xmlns:a="http://schemas.openxmlformats.org/drawingml/2006/main" xmlns:r="http://schemas.openxmlformats.org/officeDocument/2006/relationships" xmlns:p="http://schemas.openxmlformats.org/presentationml/2006/main">
+  <p:cSld>
+    <p:spTree>
+      <p:nvGrpSpPr>
+        <p:cNvPr id="1" name=""/>
+        <p:cNvGrpSpPr/>
+        <p:nvPr/>
+      </p:nvGrpSpPr>
+      <p:grpSpPr>
+        <a:xfrm>
+          <a:off x="0" y="0"/>
+          <a:ext cx="0" cy="0"/>
+          <a:chOff x="0" y="0"/>
+          <a:chExt cx="0" cy="0"/>
+        </a:xfrm>
+      </p:grpSpPr>
+      <p:sp>
+        <p:nvSpPr>
+          <p:cNvPr id="2" name="Title 1"/>
+          <p:cNvSpPr>
+            <a:spLocks noGrp="1"/>
+          </p:cNvSpPr>
+          <p:nvPr>
+            <p:ph type="title"/>
+          </p:nvPr>
+        </p:nvSpPr>
+        <p:spPr/>
+        <p:txBody>
+          <a:bodyPr/>
+          <a:lstStyle/>
+          <a:p>
+            <a:pPr lvl="0" indent="0" marL="0">
+              <a:buNone/>
+            </a:pPr>
+            <a:r>
+              <a:rPr/>
+              <a:t>Пример 1</a:t>
+            </a:r>
+          </a:p>
+        </p:txBody>
+      </p:sp>
+      <p:sp>
+        <p:nvSpPr>
+          <p:cNvPr id="3" name="Content Placeholder 2"/>
+          <p:cNvSpPr>
+            <a:spLocks noGrp="1"/>
+          </p:cNvSpPr>
+          <p:nvPr>
+            <p:ph idx="1"/>
+          </p:nvPr>
+        </p:nvSpPr>
+        <p:spPr/>
+        <p:txBody>
+          <a:bodyPr/>
+          <a:lstStyle/>
+          <a:p>
+            <a:pPr lvl="0" indent="0" marL="0">
+              <a:buNone/>
+            </a:pPr>
+            <a:r>
+              <a:rPr b="1"/>
+              <a:t>«Стандарт обязателен по закону?»</a:t>
+            </a:r>
+          </a:p>
+          <a:p>
+            <a:pPr lvl="0"/>
+            <a:r>
+              <a:rPr/>
+              <a:t>Ситуация: в ТЗ на закупку написано «соответствовать национальному стандарту».</a:t>
+            </a:r>
+          </a:p>
+          <a:p>
+            <a:pPr lvl="0"/>
+            <a:r>
+              <a:rPr/>
+              <a:t>Основание: условие закупки, а не закон.</a:t>
+            </a:r>
+          </a:p>
+          <a:p>
+            <a:pPr lvl="0"/>
+            <a:r>
+              <a:rPr/>
+              <a:t>Решение: включить в договор редакцию и разделы стандарта.</a:t>
+            </a:r>
+          </a:p>
+          <a:p>
+            <a:pPr lvl="0"/>
+            <a:r>
+              <a:rPr/>
+              <a:t>Ограничение: соответствие стандарту не доказывает пригодность для объекта КИИ.</a:t>
+            </a:r>
+          </a:p>
+          <a:p>
+            <a:pPr lvl="0" indent="0" marL="0">
+              <a:buNone/>
+            </a:pPr>
+            <a:r>
+              <a:rPr/>
+              <a:t>Вывод: обязательность возникла из договора.</a:t>
+            </a:r>
+          </a:p>
+        </p:txBody>
+      </p:sp>
+    </p:spTree>
+  </p:cSld>
+</p:sld>
+</file>
+
+<file path=ppt/slides/slide24.xml><?xml version="1.0" encoding="utf-8"?>
+<p:sld xmlns:a="http://schemas.openxmlformats.org/drawingml/2006/main" xmlns:r="http://schemas.openxmlformats.org/officeDocument/2006/relationships" xmlns:p="http://schemas.openxmlformats.org/presentationml/2006/main">
+  <p:cSld>
+    <p:spTree>
+      <p:nvGrpSpPr>
+        <p:cNvPr id="1" name=""/>
+        <p:cNvGrpSpPr/>
+        <p:nvPr/>
+      </p:nvGrpSpPr>
+      <p:grpSpPr>
+        <a:xfrm>
+          <a:off x="0" y="0"/>
+          <a:ext cx="0" cy="0"/>
+          <a:chOff x="0" y="0"/>
+          <a:chExt cx="0" cy="0"/>
+        </a:xfrm>
+      </p:grpSpPr>
+      <p:sp>
+        <p:nvSpPr>
+          <p:cNvPr id="2" name="Title 1"/>
+          <p:cNvSpPr>
+            <a:spLocks noGrp="1"/>
+          </p:cNvSpPr>
+          <p:nvPr>
+            <p:ph type="title"/>
+          </p:nvPr>
+        </p:nvSpPr>
+        <p:spPr/>
+        <p:txBody>
+          <a:bodyPr/>
+          <a:lstStyle/>
+          <a:p>
+            <a:pPr lvl="0" indent="0" marL="0">
+              <a:buNone/>
+            </a:pPr>
+            <a:r>
+              <a:rPr/>
+              <a:t>Пример 2</a:t>
+            </a:r>
+          </a:p>
+        </p:txBody>
+      </p:sp>
+      <p:sp>
+        <p:nvSpPr>
+          <p:cNvPr id="3" name="Content Placeholder 2"/>
+          <p:cNvSpPr>
+            <a:spLocks noGrp="1"/>
+          </p:cNvSpPr>
+          <p:nvPr>
+            <p:ph idx="1"/>
+          </p:nvPr>
+        </p:nvSpPr>
+        <p:spPr/>
+        <p:txBody>
+          <a:bodyPr/>
+          <a:lstStyle/>
+          <a:p>
+            <a:pPr lvl="0" indent="0" marL="0">
+              <a:buNone/>
+            </a:pPr>
+            <a:r>
+              <a:rPr b="1"/>
+              <a:t>Сертификат не на ту версию</a:t>
+            </a:r>
+          </a:p>
+          <a:p>
+            <a:pPr lvl="0"/>
+            <a:r>
+              <a:rPr/>
+              <a:t>Ситуация: используем версию 4.5, в сертификате — 4.2.</a:t>
+            </a:r>
+          </a:p>
+          <a:p>
+            <a:pPr lvl="0"/>
+            <a:r>
+              <a:rPr/>
+              <a:t>Применимость: сертификат относится к версии и конфигурации.</a:t>
+            </a:r>
+          </a:p>
+          <a:p>
+            <a:pPr lvl="0"/>
+            <a:r>
+              <a:rPr/>
+              <a:t>Решение: не принимать без подтверждения распространения на 4.5.</a:t>
+            </a:r>
+          </a:p>
+          <a:p>
+            <a:pPr lvl="0"/>
+            <a:r>
+              <a:rPr/>
+              <a:t>Пересмотр: проверять область сертификата при каждом обновлении.</a:t>
+            </a:r>
+          </a:p>
+          <a:p>
+            <a:pPr lvl="0" indent="0" marL="0">
+              <a:buNone/>
+            </a:pPr>
+            <a:r>
+              <a:rPr/>
+              <a:t>Вывод: «просто новее» — не доказательство.</a:t>
+            </a:r>
+          </a:p>
+        </p:txBody>
+      </p:sp>
+    </p:spTree>
+  </p:cSld>
+</p:sld>
+</file>
+
+<file path=ppt/slides/slide25.xml><?xml version="1.0" encoding="utf-8"?>
+<p:sld xmlns:a="http://schemas.openxmlformats.org/drawingml/2006/main" xmlns:r="http://schemas.openxmlformats.org/officeDocument/2006/relationships" xmlns:p="http://schemas.openxmlformats.org/presentationml/2006/main">
+  <p:cSld>
+    <p:spTree>
+      <p:nvGrpSpPr>
+        <p:cNvPr id="1" name=""/>
+        <p:cNvGrpSpPr/>
+        <p:nvPr/>
+      </p:nvGrpSpPr>
+      <p:grpSpPr>
+        <a:xfrm>
+          <a:off x="0" y="0"/>
+          <a:ext cx="0" cy="0"/>
+          <a:chOff x="0" y="0"/>
+          <a:chExt cx="0" cy="0"/>
+        </a:xfrm>
+      </p:grpSpPr>
+      <p:sp>
+        <p:nvSpPr>
+          <p:cNvPr id="2" name="Title 1"/>
+          <p:cNvSpPr>
+            <a:spLocks noGrp="1"/>
+          </p:cNvSpPr>
+          <p:nvPr>
+            <p:ph type="title"/>
+          </p:nvPr>
+        </p:nvSpPr>
+        <p:spPr/>
+        <p:txBody>
+          <a:bodyPr/>
+          <a:lstStyle/>
+          <a:p>
+            <a:pPr lvl="0" indent="0" marL="0">
+              <a:buNone/>
+            </a:pPr>
+            <a:r>
+              <a:rPr/>
+              <a:t>Пример 3</a:t>
+            </a:r>
+          </a:p>
+        </p:txBody>
+      </p:sp>
+      <p:sp>
+        <p:nvSpPr>
+          <p:cNvPr id="3" name="Content Placeholder 2"/>
+          <p:cNvSpPr>
+            <a:spLocks noGrp="1"/>
+          </p:cNvSpPr>
+          <p:nvPr>
+            <p:ph idx="1"/>
+          </p:nvPr>
+        </p:nvSpPr>
+        <p:spPr/>
+        <p:txBody>
+          <a:bodyPr/>
+          <a:lstStyle/>
+          <a:p>
+            <a:pPr lvl="0" indent="0" marL="0">
+              <a:buNone/>
+            </a:pPr>
+            <a:r>
+              <a:rPr b="1"/>
+              <a:t>Протокол испытаний и интеграция</a:t>
+            </a:r>
+          </a:p>
+          <a:p>
+            <a:pPr lvl="0"/>
+            <a:r>
+              <a:rPr/>
+              <a:t>Ситуация: протокол на межсетевой экран, его встраивают в узел.</a:t>
+            </a:r>
+          </a:p>
+          <a:p>
+            <a:pPr lvl="0"/>
+            <a:r>
+              <a:rPr/>
+              <a:t>Протокол доказывает свойства устройства в описанной конфигурации.</a:t>
+            </a:r>
+          </a:p>
+          <a:p>
+            <a:pPr lvl="0"/>
+            <a:r>
+              <a:rPr/>
+              <a:t>Корректность интеграции подтверждается отдельно.</a:t>
+            </a:r>
+          </a:p>
+          <a:p>
+            <a:pPr lvl="0"/>
+            <a:r>
+              <a:rPr/>
+              <a:t>Пересмотр: при смене конфигурации или архитектуры узла.</a:t>
+            </a:r>
+          </a:p>
+          <a:p>
+            <a:pPr lvl="0" indent="0" marL="0">
+              <a:buNone/>
+            </a:pPr>
+            <a:r>
+              <a:rPr/>
+              <a:t>Вывод: протокол подтверждает продукт, а не безопасность узла.</a:t>
+            </a:r>
+          </a:p>
+        </p:txBody>
+      </p:sp>
+    </p:spTree>
+  </p:cSld>
+</p:sld>
+</file>
+
+<file path=ppt/slides/slide26.xml><?xml version="1.0" encoding="utf-8"?>
+<p:sld xmlns:a="http://schemas.openxmlformats.org/drawingml/2006/main" xmlns:r="http://schemas.openxmlformats.org/officeDocument/2006/relationships" xmlns:p="http://schemas.openxmlformats.org/presentationml/2006/main">
+  <p:cSld>
+    <p:spTree>
+      <p:nvGrpSpPr>
+        <p:cNvPr id="1" name=""/>
+        <p:cNvGrpSpPr/>
+        <p:nvPr/>
+      </p:nvGrpSpPr>
+      <p:grpSpPr>
+        <a:xfrm>
+          <a:off x="0" y="0"/>
+          <a:ext cx="0" cy="0"/>
+          <a:chOff x="0" y="0"/>
+          <a:chExt cx="0" cy="0"/>
+        </a:xfrm>
+      </p:grpSpPr>
+      <p:sp>
+        <p:nvSpPr>
+          <p:cNvPr id="2" name="Title 1"/>
+          <p:cNvSpPr>
+            <a:spLocks noGrp="1"/>
+          </p:cNvSpPr>
+          <p:nvPr>
+            <p:ph type="title"/>
+          </p:nvPr>
+        </p:nvSpPr>
+        <p:spPr/>
+        <p:txBody>
+          <a:bodyPr/>
+          <a:lstStyle/>
+          <a:p>
+            <a:pPr lvl="0" indent="0" marL="0">
+              <a:buNone/>
+            </a:pPr>
+            <a:r>
+              <a:rPr/>
+              <a:t>Пример 4</a:t>
+            </a:r>
+          </a:p>
+        </p:txBody>
+      </p:sp>
+      <p:sp>
+        <p:nvSpPr>
+          <p:cNvPr id="3" name="Content Placeholder 2"/>
+          <p:cNvSpPr>
+            <a:spLocks noGrp="1"/>
+          </p:cNvSpPr>
+          <p:nvPr>
+            <p:ph idx="1"/>
+          </p:nvPr>
+        </p:nvSpPr>
+        <p:spPr/>
+        <p:txBody>
+          <a:bodyPr/>
+          <a:lstStyle/>
+          <a:p>
+            <a:pPr lvl="0" indent="0" marL="0">
+              <a:buNone/>
+            </a:pPr>
+            <a:r>
+              <a:rPr b="1"/>
+              <a:t>Истёкший срок ПНСТ</a:t>
+            </a:r>
+          </a:p>
+          <a:p>
+            <a:pPr lvl="0"/>
+            <a:r>
+              <a:rPr/>
+              <a:t>Ситуация: локальный документ двухлетней давности ссылается на ПНСТ.</a:t>
+            </a:r>
+          </a:p>
+          <a:p>
+            <a:pPr lvl="0"/>
+            <a:r>
+              <a:rPr/>
+              <a:t>Срок действия ПНСТ — не более трёх лет.</a:t>
+            </a:r>
+          </a:p>
+          <a:p>
+            <a:pPr lvl="0"/>
+            <a:r>
+              <a:rPr/>
+              <a:t>Решение: проверить статус и дату, при необходимости обновить ссылку.</a:t>
+            </a:r>
+          </a:p>
+          <a:p>
+            <a:pPr lvl="0"/>
+            <a:r>
+              <a:rPr/>
+              <a:t>Пересмотр: не реже раза в год.</a:t>
+            </a:r>
+          </a:p>
+          <a:p>
+            <a:pPr lvl="0" indent="0" marL="0">
+              <a:buNone/>
+            </a:pPr>
+            <a:r>
+              <a:rPr/>
+              <a:t>Вывод: ссылка без контроля срока — скрытый риск устаревания.</a:t>
+            </a:r>
+          </a:p>
+        </p:txBody>
+      </p:sp>
+    </p:spTree>
+  </p:cSld>
+</p:sld>
+</file>
+
+<file path=ppt/slides/slide27.xml><?xml version="1.0" encoding="utf-8"?>
+<p:sld xmlns:a="http://schemas.openxmlformats.org/drawingml/2006/main" xmlns:r="http://schemas.openxmlformats.org/officeDocument/2006/relationships" xmlns:p="http://schemas.openxmlformats.org/presentationml/2006/main">
+  <p:cSld>
+    <p:spTree>
+      <p:nvGrpSpPr>
+        <p:cNvPr id="1" name=""/>
+        <p:cNvGrpSpPr/>
+        <p:nvPr/>
+      </p:nvGrpSpPr>
+      <p:grpSpPr>
+        <a:xfrm>
+          <a:off x="0" y="0"/>
+          <a:ext cx="0" cy="0"/>
+          <a:chOff x="0" y="0"/>
+          <a:chExt cx="0" cy="0"/>
+        </a:xfrm>
+      </p:grpSpPr>
+      <p:sp>
+        <p:nvSpPr>
+          <p:cNvPr id="2" name="Title 1"/>
+          <p:cNvSpPr>
+            <a:spLocks noGrp="1"/>
+          </p:cNvSpPr>
+          <p:nvPr>
+            <p:ph type="title"/>
+          </p:nvPr>
+        </p:nvSpPr>
+        <p:spPr/>
+        <p:txBody>
+          <a:bodyPr/>
+          <a:lstStyle/>
+          <a:p>
+            <a:pPr lvl="0" indent="0" marL="0">
+              <a:buNone/>
+            </a:pPr>
+            <a:r>
+              <a:rPr/>
+              <a:t>Пример 5</a:t>
+            </a:r>
+          </a:p>
+        </p:txBody>
+      </p:sp>
+      <p:sp>
+        <p:nvSpPr>
+          <p:cNvPr id="3" name="Content Placeholder 2"/>
+          <p:cNvSpPr>
+            <a:spLocks noGrp="1"/>
+          </p:cNvSpPr>
+          <p:nvPr>
+            <p:ph idx="1"/>
+          </p:nvPr>
+        </p:nvSpPr>
+        <p:spPr/>
+        <p:txBody>
+          <a:bodyPr/>
+          <a:lstStyle/>
+          <a:p>
+            <a:pPr lvl="0" indent="0" marL="0">
+              <a:buNone/>
+            </a:pPr>
+            <a:r>
+              <a:rPr b="1"/>
+              <a:t>Письмо поставщика</a:t>
+            </a:r>
+          </a:p>
+          <a:p>
+            <a:pPr lvl="0" indent="0" marL="0">
+              <a:buNone/>
+            </a:pPr>
+            <a:r>
+              <a:rPr/>
+              <a:t>«Продукт соответствует требованиям законодательства о КИИ»</a:t>
+            </a:r>
+          </a:p>
+          <a:p>
+            <a:pPr lvl="0"/>
+            <a:r>
+              <a:rPr/>
+              <a:t>Это заявление стороны, а не протокол и не акт органа.</a:t>
+            </a:r>
+          </a:p>
+          <a:p>
+            <a:pPr lvl="0"/>
+            <a:r>
+              <a:rPr/>
+              <a:t>Нет требований, объектов и границ.</a:t>
+            </a:r>
+          </a:p>
+          <a:p>
+            <a:pPr lvl="0"/>
+            <a:r>
+              <a:rPr/>
+              <a:t>Решение: запросить конкретные документы и версии.</a:t>
+            </a:r>
+          </a:p>
+          <a:p>
+            <a:pPr lvl="0" indent="0" marL="0">
+              <a:buNone/>
+            </a:pPr>
+            <a:r>
+              <a:rPr/>
+              <a:t>Вывод: письмо без указания требований — не доказательство.</a:t>
+            </a:r>
+          </a:p>
+        </p:txBody>
+      </p:sp>
+    </p:spTree>
+  </p:cSld>
+</p:sld>
+</file>
+
+<file path=ppt/slides/slide28.xml><?xml version="1.0" encoding="utf-8"?>
+<p:sld xmlns:a="http://schemas.openxmlformats.org/drawingml/2006/main" xmlns:r="http://schemas.openxmlformats.org/officeDocument/2006/relationships" xmlns:p="http://schemas.openxmlformats.org/presentationml/2006/main">
+  <p:cSld>
+    <p:spTree>
+      <p:nvGrpSpPr>
+        <p:cNvPr id="1" name=""/>
+        <p:cNvGrpSpPr/>
+        <p:nvPr/>
+      </p:nvGrpSpPr>
+      <p:grpSpPr>
+        <a:xfrm>
+          <a:off x="0" y="0"/>
+          <a:ext cx="0" cy="0"/>
+          <a:chOff x="0" y="0"/>
+          <a:chExt cx="0" cy="0"/>
+        </a:xfrm>
+      </p:grpSpPr>
+      <p:sp>
+        <p:nvSpPr>
+          <p:cNvPr id="2" name="Title 1"/>
+          <p:cNvSpPr>
+            <a:spLocks noGrp="1"/>
+          </p:cNvSpPr>
+          <p:nvPr>
+            <p:ph type="title"/>
+          </p:nvPr>
+        </p:nvSpPr>
+        <p:spPr/>
+        <p:txBody>
+          <a:bodyPr/>
+          <a:lstStyle/>
+          <a:p>
+            <a:pPr lvl="0" indent="0" marL="0">
+              <a:buNone/>
+            </a:pPr>
+            <a:r>
+              <a:rPr/>
+              <a:t>Пример 6</a:t>
+            </a:r>
+          </a:p>
+        </p:txBody>
+      </p:sp>
+      <p:sp>
+        <p:nvSpPr>
+          <p:cNvPr id="3" name="Content Placeholder 2"/>
+          <p:cNvSpPr>
+            <a:spLocks noGrp="1"/>
+          </p:cNvSpPr>
+          <p:nvPr>
+            <p:ph idx="1"/>
+          </p:nvPr>
+        </p:nvSpPr>
+        <p:spPr/>
+        <p:txBody>
+          <a:bodyPr/>
+          <a:lstStyle/>
+          <a:p>
+            <a:pPr lvl="0" indent="0" marL="0">
+              <a:buNone/>
+            </a:pPr>
+            <a:r>
+              <a:rPr b="1"/>
+              <a:t>Добровольный сертификат и значимый объект</a:t>
+            </a:r>
+          </a:p>
+          <a:p>
+            <a:pPr lvl="0" indent="0" marL="0">
+              <a:buNone/>
+            </a:pPr>
+            <a:r>
+              <a:rPr/>
+              <a:t>«Требования выполнены, так как продукт сертифицирован»</a:t>
+            </a:r>
+          </a:p>
+          <a:p>
+            <a:pPr lvl="0"/>
+            <a:r>
+              <a:rPr/>
+              <a:t>Сертификат относится к продукту, а не ко всему объекту.</a:t>
+            </a:r>
+          </a:p>
+          <a:p>
+            <a:pPr lvl="0"/>
+            <a:r>
+              <a:rPr/>
+              <a:t>Он не заменяет обязательные требования.</a:t>
+            </a:r>
+          </a:p>
+          <a:p>
+            <a:pPr lvl="0"/>
+            <a:r>
+              <a:rPr/>
+              <a:t>Нужны документы по реализации остальных мер.</a:t>
+            </a:r>
+          </a:p>
+          <a:p>
+            <a:pPr lvl="0" indent="0" marL="0">
+              <a:buNone/>
+            </a:pPr>
+            <a:r>
+              <a:rPr/>
+              <a:t>Вывод: «продукт сертифицирован» ≠ «требования к объекту выполнены».</a:t>
+            </a:r>
+          </a:p>
+        </p:txBody>
+      </p:sp>
+    </p:spTree>
+  </p:cSld>
+</p:sld>
+</file>
+
+<file path=ppt/slides/slide29.xml><?xml version="1.0" encoding="utf-8"?>
+<p:sld xmlns:a="http://schemas.openxmlformats.org/drawingml/2006/main" xmlns:r="http://schemas.openxmlformats.org/officeDocument/2006/relationships" xmlns:p="http://schemas.openxmlformats.org/presentationml/2006/main">
+  <p:cSld>
+    <p:spTree>
+      <p:nvGrpSpPr>
+        <p:cNvPr id="1" name=""/>
+        <p:cNvGrpSpPr/>
+        <p:nvPr/>
+      </p:nvGrpSpPr>
+      <p:grpSpPr>
+        <a:xfrm>
+          <a:off x="0" y="0"/>
+          <a:ext cx="0" cy="0"/>
+          <a:chOff x="0" y="0"/>
+          <a:chExt cx="0" cy="0"/>
+        </a:xfrm>
+      </p:grpSpPr>
+      <p:sp>
+        <p:nvSpPr>
+          <p:cNvPr id="2" name="Title 1"/>
+          <p:cNvSpPr>
+            <a:spLocks noGrp="1"/>
+          </p:cNvSpPr>
+          <p:nvPr>
+            <p:ph type="title"/>
+          </p:nvPr>
+        </p:nvSpPr>
+        <p:spPr/>
+        <p:txBody>
+          <a:bodyPr/>
+          <a:lstStyle/>
+          <a:p>
+            <a:pPr lvl="0" indent="0" marL="0">
+              <a:buNone/>
+            </a:pPr>
+            <a:r>
+              <a:rPr/>
+              <a:t>Работа в группах</a:t>
+            </a:r>
+          </a:p>
+        </p:txBody>
+      </p:sp>
+      <p:sp>
+        <p:nvSpPr>
+          <p:cNvPr id="3" name="Content Placeholder 2"/>
+          <p:cNvSpPr>
+            <a:spLocks noGrp="1"/>
+          </p:cNvSpPr>
+          <p:nvPr>
+            <p:ph idx="1"/>
+          </p:nvPr>
+        </p:nvSpPr>
+        <p:spPr/>
+        <p:txBody>
+          <a:bodyPr/>
+          <a:lstStyle/>
+          <a:p>
+            <a:pPr lvl="0" indent="0" marL="0">
+              <a:buNone/>
+            </a:pPr>
+            <a:r>
+              <a:rPr b="1"/>
+              <a:t>10–15 минут</a:t>
+            </a:r>
+          </a:p>
+          <a:p>
+            <a:pPr lvl="0" indent="-342900" marL="342900">
+              <a:buAutoNum type="arabicPeriod"/>
+            </a:pPr>
+            <a:r>
+              <a:rPr/>
+              <a:t>Каждая группа получает один из примеров 1–6 без разбора.</a:t>
+            </a:r>
+          </a:p>
+          <a:p>
+            <a:pPr lvl="0" indent="-342900" marL="342900">
+              <a:buAutoNum type="arabicPeriod"/>
+            </a:pPr>
+            <a:r>
+              <a:rPr/>
+              <a:t>Заполняет карточку решения.</a:t>
+            </a:r>
+          </a:p>
+          <a:p>
+            <a:pPr lvl="0" indent="-342900" marL="342900">
+              <a:buAutoNum type="arabicPeriod"/>
+            </a:pPr>
+            <a:r>
+              <a:rPr/>
+              <a:t>Сравнивает с разбором преподавателя.</a:t>
+            </a:r>
+          </a:p>
+          <a:p>
+            <a:pPr lvl="0" indent="-342900" marL="342900">
+              <a:buAutoNum type="arabicPeriod"/>
+            </a:pPr>
+            <a:r>
+              <a:rPr/>
+              <a:t>Называет шаг, на котором чаще ошибались.</a:t>
+            </a:r>
+          </a:p>
+        </p:txBody>
+      </p:sp>
+    </p:spTree>
+  </p:cSld>
 </p:sld>
 </file>
 
@@ -4792,11 +7138,100 @@
           <a:bodyPr/>
           <a:lstStyle/>
           <a:p>
-            <a:pPr marL="0" lvl="0" indent="0">
-              <a:buNone/>
-            </a:pPr>
-            <a:r>
-              <a:t>Карта источников</a:t>
+            <a:pPr lvl="0" indent="0" marL="0">
+              <a:buNone/>
+            </a:pPr>
+            <a:r>
+              <a:rPr/>
+              <a:t>Вопрос 1</a:t>
+            </a:r>
+          </a:p>
+        </p:txBody>
+      </p:sp>
+      <p:sp>
+        <p:nvSpPr>
+          <p:cNvPr id="3" name="Content Placeholder 2"/>
+          <p:cNvSpPr>
+            <a:spLocks noGrp="1"/>
+          </p:cNvSpPr>
+          <p:nvPr>
+            <p:ph idx="1"/>
+          </p:nvPr>
+        </p:nvSpPr>
+        <p:spPr/>
+        <p:txBody>
+          <a:bodyPr/>
+          <a:lstStyle/>
+          <a:p>
+            <a:pPr lvl="0" indent="0" marL="0">
+              <a:buNone/>
+            </a:pPr>
+            <a:r>
+              <a:rPr b="1"/>
+              <a:t>«Продукт сертифицирован»</a:t>
+            </a:r>
+          </a:p>
+          <a:p>
+            <a:pPr lvl="0" indent="0" marL="0">
+              <a:buNone/>
+            </a:pPr>
+            <a:r>
+              <a:rPr/>
+              <a:t>Что, по-вашему, означает эта фраза?</a:t>
+            </a:r>
+          </a:p>
+          <a:p>
+            <a:pPr lvl="0"/>
+            <a:r>
+              <a:rPr/>
+              <a:t>Запишите 2–3 ответа.</a:t>
+            </a:r>
+          </a:p>
+        </p:txBody>
+      </p:sp>
+    </p:spTree>
+  </p:cSld>
+</p:sld>
+</file>
+
+<file path=ppt/slides/slide30.xml><?xml version="1.0" encoding="utf-8"?>
+<p:sld xmlns:a="http://schemas.openxmlformats.org/drawingml/2006/main" xmlns:r="http://schemas.openxmlformats.org/officeDocument/2006/relationships" xmlns:p="http://schemas.openxmlformats.org/presentationml/2006/main">
+  <p:cSld>
+    <p:spTree>
+      <p:nvGrpSpPr>
+        <p:cNvPr id="1" name=""/>
+        <p:cNvGrpSpPr/>
+        <p:nvPr/>
+      </p:nvGrpSpPr>
+      <p:grpSpPr>
+        <a:xfrm>
+          <a:off x="0" y="0"/>
+          <a:ext cx="0" cy="0"/>
+          <a:chOff x="0" y="0"/>
+          <a:chExt cx="0" cy="0"/>
+        </a:xfrm>
+      </p:grpSpPr>
+      <p:sp>
+        <p:nvSpPr>
+          <p:cNvPr id="2" name="Title 1"/>
+          <p:cNvSpPr>
+            <a:spLocks noGrp="1"/>
+          </p:cNvSpPr>
+          <p:nvPr>
+            <p:ph type="title"/>
+          </p:nvPr>
+        </p:nvSpPr>
+        <p:spPr/>
+        <p:txBody>
+          <a:bodyPr/>
+          <a:lstStyle/>
+          <a:p>
+            <a:pPr lvl="0" indent="0" marL="0">
+              <a:buNone/>
+            </a:pPr>
+            <a:r>
+              <a:rPr/>
+              <a:t>Типичные ошибки</a:t>
             </a:r>
           </a:p>
         </p:txBody>
@@ -4813,7 +7248,7 @@
         </p:nvGraphicFramePr>
         <p:xfrm>
           <a:off x="457200" y="787400"/>
-          <a:ext cx="8229600" cy="1988820"/>
+          <a:ext cx="8229600" cy="3797300"/>
         </p:xfrm>
         <a:graphic>
           <a:graphicData uri="http://schemas.openxmlformats.org/drawingml/2006/table">
@@ -4822,20 +7257,8 @@
                 <a:tableStyleId>{5C22544A-7EE6-4342-B048-85BDC9FD1C3A}</a:tableStyleId>
               </a:tblPr>
               <a:tblGrid>
-                <a:gridCol w="4114800">
-                  <a:extLst>
-                    <a:ext uri="{9D8B030D-6E8A-4147-A177-3AD203B41FA5}">
-                      <a16:colId xmlns:a16="http://schemas.microsoft.com/office/drawing/2014/main" val="20000"/>
-                    </a:ext>
-                  </a:extLst>
-                </a:gridCol>
-                <a:gridCol w="4114800">
-                  <a:extLst>
-                    <a:ext uri="{9D8B030D-6E8A-4147-A177-3AD203B41FA5}">
-                      <a16:colId xmlns:a16="http://schemas.microsoft.com/office/drawing/2014/main" val="20001"/>
-                    </a:ext>
-                  </a:extLst>
-                </a:gridCol>
+                <a:gridCol w="4114800"/>
+                <a:gridCol w="4114800"/>
               </a:tblGrid>
               <a:tr h="0">
                 <a:tc>
@@ -4843,11 +7266,12 @@
                     <a:bodyPr/>
                     <a:lstStyle/>
                     <a:p>
-                      <a:pPr marL="0" lvl="0" indent="0">
-                        <a:buNone/>
-                      </a:pPr>
-                      <a:r>
-                        <a:t>Источник</a:t>
+                      <a:pPr lvl="0" indent="0" marL="0">
+                        <a:buNone/>
+                      </a:pPr>
+                      <a:r>
+                        <a:rPr/>
+                        <a:t>Ошибка</a:t>
                       </a:r>
                     </a:p>
                   </a:txBody>
@@ -4858,21 +7282,17 @@
                     <a:bodyPr/>
                     <a:lstStyle/>
                     <a:p>
-                      <a:pPr marL="0" lvl="0" indent="0">
-                        <a:buNone/>
-                      </a:pPr>
-                      <a:r>
-                        <a:t>Роль</a:t>
+                      <a:pPr lvl="0" indent="0" marL="0">
+                        <a:buNone/>
+                      </a:pPr>
+                      <a:r>
+                        <a:rPr/>
+                        <a:t>Как избежать</a:t>
                       </a:r>
                     </a:p>
                   </a:txBody>
                   <a:tcPr/>
                 </a:tc>
-                <a:extLst>
-                  <a:ext uri="{0D108BD9-81ED-4DB2-BD59-A6C34878D82A}">
-                    <a16:rowId xmlns:a16="http://schemas.microsoft.com/office/drawing/2014/main" val="10000"/>
-                  </a:ext>
-                </a:extLst>
               </a:tr>
               <a:tr h="0">
                 <a:tc>
@@ -4880,36 +7300,31 @@
                     <a:bodyPr/>
                     <a:lstStyle/>
                     <a:p>
-                      <a:pPr marL="0" lvl="0" indent="0">
-                        <a:buNone/>
-                      </a:pPr>
-                      <a:r>
-                        <a:t>Федеральный закон</a:t>
-                      </a:r>
-                    </a:p>
-                  </a:txBody>
-                  <a:tcPr/>
-                </a:tc>
-                <a:tc>
-                  <a:txBody>
-                    <a:bodyPr/>
-                    <a:lstStyle/>
-                    <a:p>
-                      <a:pPr marL="0" lvl="0" indent="0">
-                        <a:buNone/>
-                      </a:pPr>
-                      <a:r>
-                        <a:t>устанавливает правовую рамку и полномочия</a:t>
-                      </a:r>
-                    </a:p>
-                  </a:txBody>
-                  <a:tcPr/>
-                </a:tc>
-                <a:extLst>
-                  <a:ext uri="{0D108BD9-81ED-4DB2-BD59-A6C34878D82A}">
-                    <a16:rowId xmlns:a16="http://schemas.microsoft.com/office/drawing/2014/main" val="10001"/>
-                  </a:ext>
-                </a:extLst>
+                      <a:pPr lvl="0" indent="0" marL="0">
+                        <a:buNone/>
+                      </a:pPr>
+                      <a:r>
+                        <a:rPr/>
+                        <a:t>«Есть документ» = «применим»</a:t>
+                      </a:r>
+                    </a:p>
+                  </a:txBody>
+                </a:tc>
+                <a:tc>
+                  <a:txBody>
+                    <a:bodyPr/>
+                    <a:lstStyle/>
+                    <a:p>
+                      <a:pPr lvl="0" indent="0" marL="0">
+                        <a:buNone/>
+                      </a:pPr>
+                      <a:r>
+                        <a:rPr/>
+                        <a:t>пять проверок применимости</a:t>
+                      </a:r>
+                    </a:p>
+                  </a:txBody>
+                </a:tc>
               </a:tr>
               <a:tr h="0">
                 <a:tc>
@@ -4917,36 +7332,31 @@
                     <a:bodyPr/>
                     <a:lstStyle/>
                     <a:p>
-                      <a:pPr marL="0" lvl="0" indent="0">
-                        <a:buNone/>
-                      </a:pPr>
-                      <a:r>
-                        <a:t>Подзаконный нормативный акт</a:t>
-                      </a:r>
-                    </a:p>
-                  </a:txBody>
-                  <a:tcPr/>
-                </a:tc>
-                <a:tc>
-                  <a:txBody>
-                    <a:bodyPr/>
-                    <a:lstStyle/>
-                    <a:p>
-                      <a:pPr marL="0" lvl="0" indent="0">
-                        <a:buNone/>
-                      </a:pPr>
-                      <a:r>
-                        <a:t>конкретизирует порядок и требования в пределах компетенции</a:t>
-                      </a:r>
-                    </a:p>
-                  </a:txBody>
-                  <a:tcPr/>
-                </a:tc>
-                <a:extLst>
-                  <a:ext uri="{0D108BD9-81ED-4DB2-BD59-A6C34878D82A}">
-                    <a16:rowId xmlns:a16="http://schemas.microsoft.com/office/drawing/2014/main" val="10002"/>
-                  </a:ext>
-                </a:extLst>
+                      <a:pPr lvl="0" indent="0" marL="0">
+                        <a:buNone/>
+                      </a:pPr>
+                      <a:r>
+                        <a:rPr/>
+                        <a:t>Стандарт обязателен «по умолчанию»</a:t>
+                      </a:r>
+                    </a:p>
+                  </a:txBody>
+                </a:tc>
+                <a:tc>
+                  <a:txBody>
+                    <a:bodyPr/>
+                    <a:lstStyle/>
+                    <a:p>
+                      <a:pPr lvl="0" indent="0" marL="0">
+                        <a:buNone/>
+                      </a:pPr>
+                      <a:r>
+                        <a:rPr/>
+                        <a:t>найти источник обязательности</a:t>
+                      </a:r>
+                    </a:p>
+                  </a:txBody>
+                </a:tc>
               </a:tr>
               <a:tr h="0">
                 <a:tc>
@@ -4954,36 +7364,31 @@
                     <a:bodyPr/>
                     <a:lstStyle/>
                     <a:p>
-                      <a:pPr marL="0" lvl="0" indent="0">
-                        <a:buNone/>
-                      </a:pPr>
-                      <a:r>
-                        <a:t>Документ по стандартизации</a:t>
-                      </a:r>
-                    </a:p>
-                  </a:txBody>
-                  <a:tcPr/>
-                </a:tc>
-                <a:tc>
-                  <a:txBody>
-                    <a:bodyPr/>
-                    <a:lstStyle/>
-                    <a:p>
-                      <a:pPr marL="0" lvl="0" indent="0">
-                        <a:buNone/>
-                      </a:pPr>
-                      <a:r>
-                        <a:t>описывает согласованные подходы и характеристики</a:t>
-                      </a:r>
-                    </a:p>
-                  </a:txBody>
-                  <a:tcPr/>
-                </a:tc>
-                <a:extLst>
-                  <a:ext uri="{0D108BD9-81ED-4DB2-BD59-A6C34878D82A}">
-                    <a16:rowId xmlns:a16="http://schemas.microsoft.com/office/drawing/2014/main" val="10003"/>
-                  </a:ext>
-                </a:extLst>
+                      <a:pPr lvl="0" indent="0" marL="0">
+                        <a:buNone/>
+                      </a:pPr>
+                      <a:r>
+                        <a:rPr/>
+                        <a:t>Сертификат — универсальное разрешение</a:t>
+                      </a:r>
+                    </a:p>
+                  </a:txBody>
+                </a:tc>
+                <a:tc>
+                  <a:txBody>
+                    <a:bodyPr/>
+                    <a:lstStyle/>
+                    <a:p>
+                      <a:pPr lvl="0" indent="0" marL="0">
+                        <a:buNone/>
+                      </a:pPr>
+                      <a:r>
+                        <a:rPr/>
+                        <a:t>проверить объект, версию, срок</a:t>
+                      </a:r>
+                    </a:p>
+                  </a:txBody>
+                </a:tc>
               </a:tr>
               <a:tr h="0">
                 <a:tc>
@@ -4991,36 +7396,31 @@
                     <a:bodyPr/>
                     <a:lstStyle/>
                     <a:p>
-                      <a:pPr marL="0" lvl="0" indent="0">
-                        <a:buNone/>
-                      </a:pPr>
-                      <a:r>
-                        <a:t>Договор, закупка, локальный акт</a:t>
-                      </a:r>
-                    </a:p>
-                  </a:txBody>
-                  <a:tcPr/>
-                </a:tc>
-                <a:tc>
-                  <a:txBody>
-                    <a:bodyPr/>
-                    <a:lstStyle/>
-                    <a:p>
-                      <a:pPr marL="0" lvl="0" indent="0">
-                        <a:buNone/>
-                      </a:pPr>
-                      <a:r>
-                        <a:t>задаёт обязательства конкретной организации</a:t>
-                      </a:r>
-                    </a:p>
-                  </a:txBody>
-                  <a:tcPr/>
-                </a:tc>
-                <a:extLst>
-                  <a:ext uri="{0D108BD9-81ED-4DB2-BD59-A6C34878D82A}">
-                    <a16:rowId xmlns:a16="http://schemas.microsoft.com/office/drawing/2014/main" val="10004"/>
-                  </a:ext>
-                </a:extLst>
+                      <a:pPr lvl="0" indent="0" marL="0">
+                        <a:buNone/>
+                      </a:pPr>
+                      <a:r>
+                        <a:rPr/>
+                        <a:t>Протокол достаточен по названию лаборатории</a:t>
+                      </a:r>
+                    </a:p>
+                  </a:txBody>
+                </a:tc>
+                <a:tc>
+                  <a:txBody>
+                    <a:bodyPr/>
+                    <a:lstStyle/>
+                    <a:p>
+                      <a:pPr lvl="0" indent="0" marL="0">
+                        <a:buNone/>
+                      </a:pPr>
+                      <a:r>
+                        <a:rPr/>
+                        <a:t>пять вопросов к протоколу</a:t>
+                      </a:r>
+                    </a:p>
+                  </a:txBody>
+                </a:tc>
               </a:tr>
               <a:tr h="0">
                 <a:tc>
@@ -5028,75 +7428,747 @@
                     <a:bodyPr/>
                     <a:lstStyle/>
                     <a:p>
-                      <a:pPr marL="0" lvl="0" indent="0">
-                        <a:buNone/>
-                      </a:pPr>
-                      <a:r>
-                        <a:t>Сертификат, протокол, журнал</a:t>
-                      </a:r>
-                    </a:p>
-                  </a:txBody>
-                  <a:tcPr/>
-                </a:tc>
-                <a:tc>
-                  <a:txBody>
-                    <a:bodyPr/>
-                    <a:lstStyle/>
-                    <a:p>
-                      <a:pPr marL="0" lvl="0" indent="0">
-                        <a:buNone/>
-                      </a:pPr>
-                      <a:r>
-                        <a:t>служит доказательством в своей области действия</a:t>
-                      </a:r>
-                    </a:p>
-                  </a:txBody>
-                  <a:tcPr/>
-                </a:tc>
-                <a:extLst>
-                  <a:ext uri="{0D108BD9-81ED-4DB2-BD59-A6C34878D82A}">
-                    <a16:rowId xmlns:a16="http://schemas.microsoft.com/office/drawing/2014/main" val="10005"/>
-                  </a:ext>
-                </a:extLst>
+                      <a:pPr lvl="0" indent="0" marL="0">
+                        <a:buNone/>
+                      </a:pPr>
+                      <a:r>
+                        <a:rPr/>
+                        <a:t>Специальные требования КИИ подменяют стандартом или сертификатом</a:t>
+                      </a:r>
+                    </a:p>
+                  </a:txBody>
+                </a:tc>
+                <a:tc>
+                  <a:txBody>
+                    <a:bodyPr/>
+                    <a:lstStyle/>
+                    <a:p>
+                      <a:pPr lvl="0" indent="0" marL="0">
+                        <a:buNone/>
+                      </a:pPr>
+                      <a:r>
+                        <a:rPr/>
+                        <a:t>отделить три конструкции подтверждения</a:t>
+                      </a:r>
+                    </a:p>
+                  </a:txBody>
+                </a:tc>
+              </a:tr>
+              <a:tr h="0">
+                <a:tc>
+                  <a:txBody>
+                    <a:bodyPr/>
+                    <a:lstStyle/>
+                    <a:p>
+                      <a:pPr lvl="0" indent="0" marL="0">
+                        <a:buNone/>
+                      </a:pPr>
+                      <a:r>
+                        <a:rPr/>
+                        <a:t>Игнорируют срок ПНСТ</a:t>
+                      </a:r>
+                    </a:p>
+                  </a:txBody>
+                </a:tc>
+                <a:tc>
+                  <a:txBody>
+                    <a:bodyPr/>
+                    <a:lstStyle/>
+                    <a:p>
+                      <a:pPr lvl="0" indent="0" marL="0">
+                        <a:buNone/>
+                      </a:pPr>
+                      <a:r>
+                        <a:rPr/>
+                        <a:t>фиксировать дату и контролировать срок</a:t>
+                      </a:r>
+                    </a:p>
+                  </a:txBody>
+                </a:tc>
+              </a:tr>
+              <a:tr h="0">
+                <a:tc>
+                  <a:txBody>
+                    <a:bodyPr/>
+                    <a:lstStyle/>
+                    <a:p>
+                      <a:pPr lvl="0" indent="0" marL="0">
+                        <a:buNone/>
+                      </a:pPr>
+                      <a:r>
+                        <a:rPr/>
+                        <a:t>Пустое поле «Ограничение»</a:t>
+                      </a:r>
+                    </a:p>
+                  </a:txBody>
+                </a:tc>
+                <a:tc>
+                  <a:txBody>
+                    <a:bodyPr/>
+                    <a:lstStyle/>
+                    <a:p>
+                      <a:pPr lvl="0" indent="0" marL="0">
+                        <a:buNone/>
+                      </a:pPr>
+                      <a:r>
+                        <a:rPr/>
+                        <a:t>заполнять всегда</a:t>
+                      </a:r>
+                    </a:p>
+                  </a:txBody>
+                </a:tc>
+              </a:tr>
+              <a:tr h="0">
+                <a:tc>
+                  <a:txBody>
+                    <a:bodyPr/>
+                    <a:lstStyle/>
+                    <a:p>
+                      <a:pPr lvl="0" indent="0" marL="0">
+                        <a:buNone/>
+                      </a:pPr>
+                      <a:r>
+                        <a:rPr/>
+                        <a:t>Основание придумывают задним числом</a:t>
+                      </a:r>
+                    </a:p>
+                  </a:txBody>
+                </a:tc>
+                <a:tc>
+                  <a:txBody>
+                    <a:bodyPr/>
+                    <a:lstStyle/>
+                    <a:p>
+                      <a:pPr lvl="0" indent="0" marL="0">
+                        <a:buNone/>
+                      </a:pPr>
+                      <a:r>
+                        <a:rPr/>
+                        <a:t>уточнить модель решения</a:t>
+                      </a:r>
+                    </a:p>
+                  </a:txBody>
+                </a:tc>
               </a:tr>
             </a:tbl>
           </a:graphicData>
         </a:graphic>
       </p:graphicFrame>
-      <p:sp>
-        <p:nvSpPr>
-          <p:cNvPr id="3" name="Content Placeholder 2"/>
-          <p:cNvSpPr>
-            <a:spLocks noGrp="1"/>
-          </p:cNvSpPr>
-          <p:nvPr>
-            <p:ph idx="1"/>
-          </p:nvPr>
-        </p:nvSpPr>
-        <p:spPr>
-          <a:xfrm>
-            <a:off x="457200" y="3632200"/>
-            <a:ext cx="8229600" cy="825500"/>
-          </a:xfrm>
-        </p:spPr>
-        <p:txBody>
-          <a:bodyPr/>
-          <a:lstStyle/>
-          <a:p>
-            <a:pPr marL="0" lvl="0" indent="0">
-              <a:buNone/>
-            </a:pPr>
-            <a:r>
-              <a:t>Ни один источник нельзя оценивать только по названию: важны предмет, адресат, редакция и дата действия.</a:t>
-            </a:r>
-          </a:p>
-        </p:txBody>
-      </p:sp>
     </p:spTree>
   </p:cSld>
-  <p:clrMapOvr>
-    <a:masterClrMapping/>
-  </p:clrMapOvr>
+</p:sld>
+</file>
+
+<file path=ppt/slides/slide31.xml><?xml version="1.0" encoding="utf-8"?>
+<p:sld xmlns:a="http://schemas.openxmlformats.org/drawingml/2006/main" xmlns:r="http://schemas.openxmlformats.org/officeDocument/2006/relationships" xmlns:p="http://schemas.openxmlformats.org/presentationml/2006/main">
+  <p:cSld>
+    <p:spTree>
+      <p:nvGrpSpPr>
+        <p:cNvPr id="1" name=""/>
+        <p:cNvGrpSpPr/>
+        <p:nvPr/>
+      </p:nvGrpSpPr>
+      <p:grpSpPr>
+        <a:xfrm>
+          <a:off x="0" y="0"/>
+          <a:ext cx="0" cy="0"/>
+          <a:chOff x="0" y="0"/>
+          <a:chExt cx="0" cy="0"/>
+        </a:xfrm>
+      </p:grpSpPr>
+      <p:sp>
+        <p:nvSpPr>
+          <p:cNvPr id="2" name="Title 1"/>
+          <p:cNvSpPr>
+            <a:spLocks noGrp="1"/>
+          </p:cNvSpPr>
+          <p:nvPr>
+            <p:ph type="title"/>
+          </p:nvPr>
+        </p:nvSpPr>
+        <p:spPr/>
+        <p:txBody>
+          <a:bodyPr/>
+          <a:lstStyle/>
+          <a:p>
+            <a:pPr lvl="0" indent="0" marL="0">
+              <a:buNone/>
+            </a:pPr>
+            <a:r>
+              <a:rPr/>
+              <a:t>Вопросы для обсуждения</a:t>
+            </a:r>
+          </a:p>
+        </p:txBody>
+      </p:sp>
+      <p:sp>
+        <p:nvSpPr>
+          <p:cNvPr id="3" name="Content Placeholder 2"/>
+          <p:cNvSpPr>
+            <a:spLocks noGrp="1"/>
+          </p:cNvSpPr>
+          <p:nvPr>
+            <p:ph idx="1"/>
+          </p:nvPr>
+        </p:nvSpPr>
+        <p:spPr/>
+        <p:txBody>
+          <a:bodyPr/>
+          <a:lstStyle/>
+          <a:p>
+            <a:pPr lvl="0" indent="-342900" marL="342900">
+              <a:buAutoNum type="arabicPeriod"/>
+            </a:pPr>
+            <a:r>
+              <a:rPr/>
+              <a:t>Чем «есть ли основание» отличается от «применимо ли основание»?</a:t>
+            </a:r>
+          </a:p>
+          <a:p>
+            <a:pPr lvl="0" indent="-342900" marL="342900">
+              <a:buAutoNum type="arabicPeriod"/>
+            </a:pPr>
+            <a:r>
+              <a:rPr/>
+              <a:t>Какие четыре пути делают стандарт обязательным?</a:t>
+            </a:r>
+          </a:p>
+          <a:p>
+            <a:pPr lvl="0" indent="-342900" marL="342900">
+              <a:buAutoNum type="arabicPeriod"/>
+            </a:pPr>
+            <a:r>
+              <a:rPr/>
+              <a:t>Чем регламент отличается от национального стандарта?</a:t>
+            </a:r>
+          </a:p>
+          <a:p>
+            <a:pPr lvl="0" indent="-342900" marL="342900">
+              <a:buAutoNum type="arabicPeriod"/>
+            </a:pPr>
+            <a:r>
+              <a:rPr/>
+              <a:t>Почему срок ПНСТ влияет на ссылки в договорах?</a:t>
+            </a:r>
+          </a:p>
+          <a:p>
+            <a:pPr lvl="0" indent="-342900" marL="342900">
+              <a:buAutoNum type="arabicPeriod"/>
+            </a:pPr>
+            <a:r>
+              <a:rPr/>
+              <a:t>Чем добровольная сертификация отличается от требований к значимому объекту КИИ?</a:t>
+            </a:r>
+          </a:p>
+          <a:p>
+            <a:pPr lvl="0" indent="-342900" marL="342900">
+              <a:buAutoNum type="arabicPeriod"/>
+            </a:pPr>
+            <a:r>
+              <a:rPr/>
+              <a:t>Что подтверждает аккредитация и чего не подтверждает?</a:t>
+            </a:r>
+          </a:p>
+          <a:p>
+            <a:pPr lvl="0" indent="-342900" marL="342900">
+              <a:buAutoNum type="arabicPeriod"/>
+            </a:pPr>
+            <a:r>
+              <a:rPr/>
+              <a:t>Назовите пять вопросов к протоколу испытаний.</a:t>
+            </a:r>
+          </a:p>
+          <a:p>
+            <a:pPr lvl="0" indent="-342900" marL="342900">
+              <a:buAutoNum type="arabicPeriod"/>
+            </a:pPr>
+            <a:r>
+              <a:rPr/>
+              <a:t>Почему письмо поставщика недостаточно?</a:t>
+            </a:r>
+          </a:p>
+        </p:txBody>
+      </p:sp>
+    </p:spTree>
+  </p:cSld>
+</p:sld>
+</file>
+
+<file path=ppt/slides/slide32.xml><?xml version="1.0" encoding="utf-8"?>
+<p:sld xmlns:a="http://schemas.openxmlformats.org/drawingml/2006/main" xmlns:r="http://schemas.openxmlformats.org/officeDocument/2006/relationships" xmlns:p="http://schemas.openxmlformats.org/presentationml/2006/main">
+  <p:cSld>
+    <p:spTree>
+      <p:nvGrpSpPr>
+        <p:cNvPr id="1" name=""/>
+        <p:cNvGrpSpPr/>
+        <p:nvPr/>
+      </p:nvGrpSpPr>
+      <p:grpSpPr>
+        <a:xfrm>
+          <a:off x="0" y="0"/>
+          <a:ext cx="0" cy="0"/>
+          <a:chOff x="0" y="0"/>
+          <a:chExt cx="0" cy="0"/>
+        </a:xfrm>
+      </p:grpSpPr>
+      <p:sp>
+        <p:nvSpPr>
+          <p:cNvPr id="2" name="Title 1"/>
+          <p:cNvSpPr>
+            <a:spLocks noGrp="1"/>
+          </p:cNvSpPr>
+          <p:nvPr>
+            <p:ph type="title"/>
+          </p:nvPr>
+        </p:nvSpPr>
+        <p:spPr/>
+        <p:txBody>
+          <a:bodyPr/>
+          <a:lstStyle/>
+          <a:p>
+            <a:pPr lvl="0" indent="0" marL="0">
+              <a:buNone/>
+            </a:pPr>
+            <a:r>
+              <a:rPr/>
+              <a:t>Связь с курсом</a:t>
+            </a:r>
+          </a:p>
+        </p:txBody>
+      </p:sp>
+      <p:sp>
+        <p:nvSpPr>
+          <p:cNvPr id="3" name="Content Placeholder 2"/>
+          <p:cNvSpPr>
+            <a:spLocks noGrp="1"/>
+          </p:cNvSpPr>
+          <p:nvPr>
+            <p:ph idx="1"/>
+          </p:nvPr>
+        </p:nvSpPr>
+        <p:spPr/>
+        <p:txBody>
+          <a:bodyPr/>
+          <a:lstStyle/>
+          <a:p>
+            <a:pPr lvl="0"/>
+            <a:r>
+              <a:rPr/>
+              <a:t>Лекция 2: применимость требований начинается с определения субъекта и объекта КИИ.</a:t>
+            </a:r>
+          </a:p>
+          <a:p>
+            <a:pPr lvl="0"/>
+            <a:r>
+              <a:rPr/>
+              <a:t>Лекции 3–11: решения о категорировании, защите и реагировании требуют доказательств выполнения.</a:t>
+            </a:r>
+          </a:p>
+          <a:p>
+            <a:pPr lvl="0"/>
+            <a:r>
+              <a:rPr/>
+              <a:t>Лекция 13: стандарты и ПНСТ для доверенных ПАК.</a:t>
+            </a:r>
+          </a:p>
+          <a:p>
+            <a:pPr lvl="0"/>
+            <a:r>
+              <a:rPr/>
+              <a:t>Лекция 14: оценка соответствия и границы сертификата.</a:t>
+            </a:r>
+          </a:p>
+          <a:p>
+            <a:pPr lvl="0"/>
+            <a:r>
+              <a:rPr/>
+              <a:t>Лекции 15–16: доказательная база, корректирующие меры и цикл улучшений.</a:t>
+            </a:r>
+          </a:p>
+        </p:txBody>
+      </p:sp>
+    </p:spTree>
+  </p:cSld>
+</p:sld>
+</file>
+
+<file path=ppt/slides/slide33.xml><?xml version="1.0" encoding="utf-8"?>
+<p:sld xmlns:a="http://schemas.openxmlformats.org/drawingml/2006/main" xmlns:r="http://schemas.openxmlformats.org/officeDocument/2006/relationships" xmlns:p="http://schemas.openxmlformats.org/presentationml/2006/main">
+  <p:cSld>
+    <p:spTree>
+      <p:nvGrpSpPr>
+        <p:cNvPr id="1" name=""/>
+        <p:cNvGrpSpPr/>
+        <p:nvPr/>
+      </p:nvGrpSpPr>
+      <p:grpSpPr>
+        <a:xfrm>
+          <a:off x="0" y="0"/>
+          <a:ext cx="0" cy="0"/>
+          <a:chOff x="0" y="0"/>
+          <a:chExt cx="0" cy="0"/>
+        </a:xfrm>
+      </p:grpSpPr>
+      <p:sp>
+        <p:nvSpPr>
+          <p:cNvPr id="2" name="Title 1"/>
+          <p:cNvSpPr>
+            <a:spLocks noGrp="1"/>
+          </p:cNvSpPr>
+          <p:nvPr>
+            <p:ph type="title"/>
+          </p:nvPr>
+        </p:nvSpPr>
+        <p:spPr/>
+        <p:txBody>
+          <a:bodyPr/>
+          <a:lstStyle/>
+          <a:p>
+            <a:pPr lvl="0" indent="0" marL="0">
+              <a:buNone/>
+            </a:pPr>
+            <a:r>
+              <a:rPr/>
+              <a:t>Итог</a:t>
+            </a:r>
+          </a:p>
+        </p:txBody>
+      </p:sp>
+      <p:sp>
+        <p:nvSpPr>
+          <p:cNvPr id="3" name="Content Placeholder 2"/>
+          <p:cNvSpPr>
+            <a:spLocks noGrp="1"/>
+          </p:cNvSpPr>
+          <p:nvPr>
+            <p:ph idx="1"/>
+          </p:nvPr>
+        </p:nvSpPr>
+        <p:spPr/>
+        <p:txBody>
+          <a:bodyPr/>
+          <a:lstStyle/>
+          <a:p>
+            <a:pPr lvl="0" indent="0" marL="0">
+              <a:buNone/>
+            </a:pPr>
+            <a:r>
+              <a:rPr b="1"/>
+              <a:t>Не «найти документ», а установить:</a:t>
+            </a:r>
+          </a:p>
+          <a:p>
+            <a:pPr lvl="0"/>
+            <a:r>
+              <a:rPr/>
+              <a:t>основание</a:t>
+            </a:r>
+          </a:p>
+          <a:p>
+            <a:pPr lvl="0"/>
+            <a:r>
+              <a:rPr/>
+              <a:t>применимость</a:t>
+            </a:r>
+          </a:p>
+          <a:p>
+            <a:pPr lvl="0"/>
+            <a:r>
+              <a:rPr/>
+              <a:t>решение</a:t>
+            </a:r>
+          </a:p>
+          <a:p>
+            <a:pPr lvl="0"/>
+            <a:r>
+              <a:rPr/>
+              <a:t>доказательство</a:t>
+            </a:r>
+          </a:p>
+          <a:p>
+            <a:pPr lvl="0"/>
+            <a:r>
+              <a:rPr/>
+              <a:t>ограничение</a:t>
+            </a:r>
+          </a:p>
+          <a:p>
+            <a:pPr lvl="0"/>
+            <a:r>
+              <a:rPr/>
+              <a:t>пересмотр</a:t>
+            </a:r>
+          </a:p>
+          <a:p>
+            <a:pPr lvl="0" indent="0" marL="0">
+              <a:buNone/>
+            </a:pPr>
+            <a:r>
+              <a:rPr/>
+              <a:t>Вопросы к лекции </a:t>
+            </a:r>
+            <a:r>
+              <a:rPr>
+                <a:hlinkClick r:id="rId2"/>
+              </a:rPr>
+              <a:t>https://github.com/arasskazov/IFTIS-KII-2026/blob/main/Lec_1/L1_questionnarie.md</a:t>
+            </a:r>
+          </a:p>
+        </p:txBody>
+      </p:sp>
+    </p:spTree>
+  </p:cSld>
+</p:sld>
+</file>
+
+<file path=ppt/slides/slide34.xml><?xml version="1.0" encoding="utf-8"?>
+<p:sld xmlns:a="http://schemas.openxmlformats.org/drawingml/2006/main" xmlns:r="http://schemas.openxmlformats.org/officeDocument/2006/relationships" xmlns:p="http://schemas.openxmlformats.org/presentationml/2006/main">
+  <p:cSld>
+    <p:spTree>
+      <p:nvGrpSpPr>
+        <p:cNvPr id="1" name=""/>
+        <p:cNvGrpSpPr/>
+        <p:nvPr/>
+      </p:nvGrpSpPr>
+      <p:grpSpPr>
+        <a:xfrm>
+          <a:off x="0" y="0"/>
+          <a:ext cx="0" cy="0"/>
+          <a:chOff x="0" y="0"/>
+          <a:chExt cx="0" cy="0"/>
+        </a:xfrm>
+      </p:grpSpPr>
+      <p:sp>
+        <p:nvSpPr>
+          <p:cNvPr id="2" name="Title 1"/>
+          <p:cNvSpPr>
+            <a:spLocks noGrp="1"/>
+          </p:cNvSpPr>
+          <p:nvPr>
+            <p:ph type="title"/>
+          </p:nvPr>
+        </p:nvSpPr>
+        <p:spPr/>
+        <p:txBody>
+          <a:bodyPr/>
+          <a:lstStyle/>
+          <a:p>
+            <a:pPr lvl="0" indent="0" marL="0">
+              <a:buNone/>
+            </a:pPr>
+            <a:r>
+              <a:rPr/>
+              <a:t>Список литературы</a:t>
+            </a:r>
+          </a:p>
+        </p:txBody>
+      </p:sp>
+      <p:sp>
+        <p:nvSpPr>
+          <p:cNvPr id="3" name="Content Placeholder 2"/>
+          <p:cNvSpPr>
+            <a:spLocks noGrp="1"/>
+          </p:cNvSpPr>
+          <p:nvPr>
+            <p:ph idx="1"/>
+          </p:nvPr>
+        </p:nvSpPr>
+        <p:spPr/>
+        <p:txBody>
+          <a:bodyPr/>
+          <a:lstStyle/>
+          <a:p>
+            <a:pPr lvl="0" indent="0" marL="0">
+              <a:buNone/>
+            </a:pPr>
+            <a:r>
+              <a:rPr b="1"/>
+              <a:t>Основные источники</a:t>
+            </a:r>
+          </a:p>
+          <a:p>
+            <a:pPr lvl="0" indent="-342900" marL="342900">
+              <a:buAutoNum type="arabicPeriod"/>
+            </a:pPr>
+            <a:r>
+              <a:rPr/>
+              <a:t>Федеральный закон от 27.12.2002 №184-ФЗ «О техническом регулировании». Официальное опубликование: </a:t>
+            </a:r>
+            <a:r>
+              <a:rPr>
+                <a:hlinkClick r:id="rId2"/>
+              </a:rPr>
+              <a:t>http://publication.pravo.gov.ru/Document/View/0001200212300020</a:t>
+            </a:r>
+            <a:r>
+              <a:rPr/>
+              <a:t>.</a:t>
+            </a:r>
+          </a:p>
+          <a:p>
+            <a:pPr lvl="0" indent="-342900" marL="342900">
+              <a:buAutoNum type="arabicPeriod"/>
+            </a:pPr>
+            <a:r>
+              <a:rPr/>
+              <a:t>Федеральный закон от 29.06.2015 №162-ФЗ «О стандартизации в Российской Федерации». Официальное опубликование: </a:t>
+            </a:r>
+            <a:r>
+              <a:rPr>
+                <a:hlinkClick r:id="rId3"/>
+              </a:rPr>
+              <a:t>http://publication.pravo.gov.ru/Document/View/0001201506300012</a:t>
+            </a:r>
+            <a:r>
+              <a:rPr/>
+              <a:t>.</a:t>
+            </a:r>
+          </a:p>
+          <a:p>
+            <a:pPr lvl="0" indent="-342900" marL="342900">
+              <a:buAutoNum type="arabicPeriod"/>
+            </a:pPr>
+            <a:r>
+              <a:rPr/>
+              <a:t>Федеральный закон от 28.12.2013 №412-ФЗ «Об аккредитации в национальной системе аккредитации». Официальное опубликование: </a:t>
+            </a:r>
+            <a:r>
+              <a:rPr>
+                <a:hlinkClick r:id="rId4"/>
+              </a:rPr>
+              <a:t>http://publication.pravo.gov.ru/Document/View/0001201312280035</a:t>
+            </a:r>
+            <a:r>
+              <a:rPr/>
+              <a:t>.</a:t>
+            </a:r>
+          </a:p>
+          <a:p>
+            <a:pPr lvl="0" indent="-342900" marL="342900">
+              <a:buAutoNum type="arabicPeriod"/>
+            </a:pPr>
+            <a:r>
+              <a:rPr/>
+              <a:t>Федеральный закон от 26.06.2008 №102-ФЗ «Об обеспечении единства измерений». Официальное опубликование: </a:t>
+            </a:r>
+            <a:r>
+              <a:rPr>
+                <a:hlinkClick r:id="rId5"/>
+              </a:rPr>
+              <a:t>http://publication.pravo.gov.ru/Document/View/0001200806270001</a:t>
+            </a:r>
+            <a:r>
+              <a:rPr/>
+              <a:t>.</a:t>
+            </a:r>
+          </a:p>
+          <a:p>
+            <a:pPr lvl="0" indent="-342900" marL="342900">
+              <a:buAutoNum type="arabicPeriod"/>
+            </a:pPr>
+            <a:r>
+              <a:rPr/>
+              <a:t>Федеральный закон от 26.07.2017 №187-ФЗ «О безопасности критической информационной инфраструктуры Российской Федерации». Официальное опубликование: </a:t>
+            </a:r>
+            <a:r>
+              <a:rPr>
+                <a:hlinkClick r:id="rId6"/>
+              </a:rPr>
+              <a:t>http://publication.pravo.gov.ru/Document/View/0001201707260023</a:t>
+            </a:r>
+            <a:r>
+              <a:rPr/>
+              <a:t>.</a:t>
+            </a:r>
+          </a:p>
+          <a:p>
+            <a:pPr lvl="0" indent="-342900" marL="342900">
+              <a:buAutoNum type="arabicPeriod"/>
+            </a:pPr>
+            <a:r>
+              <a:rPr/>
+              <a:t>Официальный интернет-портал правовой информации: </a:t>
+            </a:r>
+            <a:r>
+              <a:rPr>
+                <a:hlinkClick r:id="rId7"/>
+              </a:rPr>
+              <a:t>http://publication.pravo.gov.ru/</a:t>
+            </a:r>
+            <a:r>
+              <a:rPr/>
+              <a:t>.</a:t>
+            </a:r>
+          </a:p>
+          <a:p>
+            <a:pPr lvl="0" indent="-342900" marL="342900">
+              <a:buAutoNum type="arabicPeriod"/>
+            </a:pPr>
+            <a:r>
+              <a:rPr/>
+              <a:t>Росстандарт: </a:t>
+            </a:r>
+            <a:r>
+              <a:rPr>
+                <a:hlinkClick r:id="rId8"/>
+              </a:rPr>
+              <a:t>https://www.rst.gov.ru/</a:t>
+            </a:r>
+            <a:r>
+              <a:rPr/>
+              <a:t>.</a:t>
+            </a:r>
+          </a:p>
+          <a:p>
+            <a:pPr lvl="0" indent="-342900" marL="342900">
+              <a:buAutoNum type="arabicPeriod"/>
+            </a:pPr>
+            <a:r>
+              <a:rPr/>
+              <a:t>Росаккредитация: </a:t>
+            </a:r>
+            <a:r>
+              <a:rPr>
+                <a:hlinkClick r:id="rId9"/>
+              </a:rPr>
+              <a:t>https://fsa.gov.ru/</a:t>
+            </a:r>
+            <a:r>
+              <a:rPr/>
+              <a:t>.</a:t>
+            </a:r>
+          </a:p>
+          <a:p>
+            <a:pPr lvl="0" indent="0" marL="0">
+              <a:buNone/>
+            </a:pPr>
+            <a:r>
+              <a:rPr b="1"/>
+              <a:t>Связанные источники</a:t>
+            </a:r>
+          </a:p>
+          <a:p>
+            <a:pPr lvl="0" indent="-342900" marL="342900">
+              <a:buAutoNum startAt="9" type="arabicPeriod"/>
+            </a:pPr>
+            <a:r>
+              <a:rPr/>
+              <a:t>ГОСТ Р ИСО/МЭК 17025. Общие требования к компетентности испытательных и калибровочных лабораторий.</a:t>
+            </a:r>
+          </a:p>
+          <a:p>
+            <a:pPr lvl="0" indent="-342900" marL="342900">
+              <a:buAutoNum startAt="9" type="arabicPeriod"/>
+            </a:pPr>
+            <a:r>
+              <a:rPr/>
+              <a:t>ГОСТ Р ИСО/МЭК 17065. Оценка соответствия. Требования к органам по сертификации продукции, процессов и услуг.</a:t>
+            </a:r>
+          </a:p>
+        </p:txBody>
+      </p:sp>
+    </p:spTree>
+  </p:cSld>
 </p:sld>
 </file>
 
@@ -5132,11 +8204,12 @@
           <a:bodyPr/>
           <a:lstStyle/>
           <a:p>
-            <a:pPr marL="0" lvl="0" indent="0">
-              <a:buNone/>
-            </a:pPr>
-            <a:r>
-              <a:t>Иерархия и применимость</a:t>
+            <a:pPr lvl="0" indent="0" marL="0">
+              <a:buNone/>
+            </a:pPr>
+            <a:r>
+              <a:rPr/>
+              <a:t>Центральный вопрос</a:t>
             </a:r>
           </a:p>
         </p:txBody>
@@ -5156,45 +8229,71 @@
           <a:bodyPr/>
           <a:lstStyle/>
           <a:p>
-            <a:pPr marL="0" lvl="0" indent="0">
+            <a:pPr lvl="0" indent="0" marL="0">
               <a:buNone/>
             </a:pPr>
             <a:r>
               <a:rPr b="1"/>
-              <a:t>Два разных вопроса</a:t>
-            </a:r>
-          </a:p>
-          <a:p>
-            <a:pPr marL="342900" lvl="0" indent="-342900">
-              <a:buAutoNum type="arabicPeriod"/>
-            </a:pPr>
-            <a:r>
-              <a:t>Не противоречит ли документ акту большей юридической силы?</a:t>
-            </a:r>
-          </a:p>
-          <a:p>
-            <a:pPr marL="342900" lvl="0" indent="-342900">
-              <a:buAutoNum type="arabicPeriod"/>
-            </a:pPr>
-            <a:r>
-              <a:t>Применим ли он к данному объекту и ситуации?</a:t>
-            </a:r>
-          </a:p>
-          <a:p>
-            <a:pPr marL="0" lvl="0" indent="0">
-              <a:buNone/>
-            </a:pPr>
-            <a:r>
-              <a:t>Специальное регулирование КИИ применяется в пределах своего предмета и круга адресатов. Общий стандарт или локальный документ не отменяет специальное обязательное требование.</a:t>
+              <a:t>Что требуется доказать?</a:t>
+            </a:r>
+          </a:p>
+          <a:p>
+            <a:pPr lvl="0" indent="0" marL="0">
+              <a:buNone/>
+            </a:pPr>
+            <a:r>
+              <a:rPr/>
+              <a:t>Не достаточно назвать закон, стандарт или сертификат.</a:t>
+            </a:r>
+          </a:p>
+          <a:p>
+            <a:pPr lvl="0" indent="0" marL="0">
+              <a:buNone/>
+            </a:pPr>
+            <a:r>
+              <a:rPr/>
+              <a:t>Для каждого решения специалист отвечает:</a:t>
+            </a:r>
+          </a:p>
+          <a:p>
+            <a:pPr lvl="0"/>
+            <a:r>
+              <a:rPr/>
+              <a:t>какая норма или условие применяется;</a:t>
+            </a:r>
+          </a:p>
+          <a:p>
+            <a:pPr lvl="0"/>
+            <a:r>
+              <a:rPr/>
+              <a:t>к какому объекту и в каких границах;</a:t>
+            </a:r>
+          </a:p>
+          <a:p>
+            <a:pPr lvl="0"/>
+            <a:r>
+              <a:rPr/>
+              <a:t>что именно организация обязана или решила сделать;</a:t>
+            </a:r>
+          </a:p>
+          <a:p>
+            <a:pPr lvl="0"/>
+            <a:r>
+              <a:rPr/>
+              <a:t>чем подтверждается выполнение;</a:t>
+            </a:r>
+          </a:p>
+          <a:p>
+            <a:pPr lvl="0"/>
+            <a:r>
+              <a:rPr/>
+              <a:t>когда вывод нужно пересмотреть.</a:t>
             </a:r>
           </a:p>
         </p:txBody>
       </p:sp>
     </p:spTree>
   </p:cSld>
-  <p:clrMapOvr>
-    <a:masterClrMapping/>
-  </p:clrMapOvr>
 </p:sld>
 </file>
 
@@ -5230,11 +8329,12 @@
           <a:bodyPr/>
           <a:lstStyle/>
           <a:p>
-            <a:pPr marL="0" lvl="0" indent="0">
-              <a:buNone/>
-            </a:pPr>
-            <a:r>
-              <a:t>Технический регламент и стандарт</a:t>
+            <a:pPr lvl="0" indent="0" marL="0">
+              <a:buNone/>
+            </a:pPr>
+            <a:r>
+              <a:rPr/>
+              <a:t>Карта источников</a:t>
             </a:r>
           </a:p>
         </p:txBody>
@@ -5251,7 +8351,7 @@
         </p:nvGraphicFramePr>
         <p:xfrm>
           <a:off x="457200" y="787400"/>
-          <a:ext cx="8229600" cy="1600200"/>
+          <a:ext cx="8229600" cy="3797300"/>
         </p:xfrm>
         <a:graphic>
           <a:graphicData uri="http://schemas.openxmlformats.org/drawingml/2006/table">
@@ -5260,20 +8360,8 @@
                 <a:tableStyleId>{5C22544A-7EE6-4342-B048-85BDC9FD1C3A}</a:tableStyleId>
               </a:tblPr>
               <a:tblGrid>
-                <a:gridCol w="4114800">
-                  <a:extLst>
-                    <a:ext uri="{9D8B030D-6E8A-4147-A177-3AD203B41FA5}">
-                      <a16:colId xmlns:a16="http://schemas.microsoft.com/office/drawing/2014/main" val="20000"/>
-                    </a:ext>
-                  </a:extLst>
-                </a:gridCol>
-                <a:gridCol w="4114800">
-                  <a:extLst>
-                    <a:ext uri="{9D8B030D-6E8A-4147-A177-3AD203B41FA5}">
-                      <a16:colId xmlns:a16="http://schemas.microsoft.com/office/drawing/2014/main" val="20001"/>
-                    </a:ext>
-                  </a:extLst>
-                </a:gridCol>
+                <a:gridCol w="4114800"/>
+                <a:gridCol w="4114800"/>
               </a:tblGrid>
               <a:tr h="0">
                 <a:tc>
@@ -5281,11 +8369,12 @@
                     <a:bodyPr/>
                     <a:lstStyle/>
                     <a:p>
-                      <a:pPr marL="0" lvl="0" indent="0">
-                        <a:buNone/>
-                      </a:pPr>
-                      <a:r>
-                        <a:t>Категория</a:t>
+                      <a:pPr lvl="0" indent="0" marL="0">
+                        <a:buNone/>
+                      </a:pPr>
+                      <a:r>
+                        <a:rPr/>
+                        <a:t>Источник</a:t>
                       </a:r>
                     </a:p>
                   </a:txBody>
@@ -5296,21 +8385,17 @@
                     <a:bodyPr/>
                     <a:lstStyle/>
                     <a:p>
-                      <a:pPr marL="0" lvl="0" indent="0">
-                        <a:buNone/>
-                      </a:pPr>
-                      <a:r>
-                        <a:t>Главное различие</a:t>
+                      <a:pPr lvl="0" indent="0" marL="0">
+                        <a:buNone/>
+                      </a:pPr>
+                      <a:r>
+                        <a:rPr/>
+                        <a:t>Роль</a:t>
                       </a:r>
                     </a:p>
                   </a:txBody>
                   <a:tcPr/>
                 </a:tc>
-                <a:extLst>
-                  <a:ext uri="{0D108BD9-81ED-4DB2-BD59-A6C34878D82A}">
-                    <a16:rowId xmlns:a16="http://schemas.microsoft.com/office/drawing/2014/main" val="10000"/>
-                  </a:ext>
-                </a:extLst>
               </a:tr>
               <a:tr h="0">
                 <a:tc>
@@ -5318,36 +8403,31 @@
                     <a:bodyPr/>
                     <a:lstStyle/>
                     <a:p>
-                      <a:pPr marL="0" lvl="0" indent="0">
-                        <a:buNone/>
-                      </a:pPr>
-                      <a:r>
-                        <a:t>Технический регламент</a:t>
-                      </a:r>
-                    </a:p>
-                  </a:txBody>
-                  <a:tcPr/>
-                </a:tc>
-                <a:tc>
-                  <a:txBody>
-                    <a:bodyPr/>
-                    <a:lstStyle/>
-                    <a:p>
-                      <a:pPr marL="0" lvl="0" indent="0">
-                        <a:buNone/>
-                      </a:pPr>
-                      <a:r>
-                        <a:t>устанавливает обязательные требования в предусмотренной законом сфере</a:t>
-                      </a:r>
-                    </a:p>
-                  </a:txBody>
-                  <a:tcPr/>
-                </a:tc>
-                <a:extLst>
-                  <a:ext uri="{0D108BD9-81ED-4DB2-BD59-A6C34878D82A}">
-                    <a16:rowId xmlns:a16="http://schemas.microsoft.com/office/drawing/2014/main" val="10001"/>
-                  </a:ext>
-                </a:extLst>
+                      <a:pPr lvl="0" indent="0" marL="0">
+                        <a:buNone/>
+                      </a:pPr>
+                      <a:r>
+                        <a:rPr/>
+                        <a:t>Федеральный закон</a:t>
+                      </a:r>
+                    </a:p>
+                  </a:txBody>
+                </a:tc>
+                <a:tc>
+                  <a:txBody>
+                    <a:bodyPr/>
+                    <a:lstStyle/>
+                    <a:p>
+                      <a:pPr lvl="0" indent="0" marL="0">
+                        <a:buNone/>
+                      </a:pPr>
+                      <a:r>
+                        <a:rPr/>
+                        <a:t>устанавливает правовую рамку и полномочия</a:t>
+                      </a:r>
+                    </a:p>
+                  </a:txBody>
+                </a:tc>
               </a:tr>
               <a:tr h="0">
                 <a:tc>
@@ -5355,36 +8435,31 @@
                     <a:bodyPr/>
                     <a:lstStyle/>
                     <a:p>
-                      <a:pPr marL="0" lvl="0" indent="0">
-                        <a:buNone/>
-                      </a:pPr>
-                      <a:r>
-                        <a:t>Национальный стандарт</a:t>
-                      </a:r>
-                    </a:p>
-                  </a:txBody>
-                  <a:tcPr/>
-                </a:tc>
-                <a:tc>
-                  <a:txBody>
-                    <a:bodyPr/>
-                    <a:lstStyle/>
-                    <a:p>
-                      <a:pPr marL="0" lvl="0" indent="0">
-                        <a:buNone/>
-                      </a:pPr>
-                      <a:r>
-                        <a:t>в общем случае применяется добровольно</a:t>
-                      </a:r>
-                    </a:p>
-                  </a:txBody>
-                  <a:tcPr/>
-                </a:tc>
-                <a:extLst>
-                  <a:ext uri="{0D108BD9-81ED-4DB2-BD59-A6C34878D82A}">
-                    <a16:rowId xmlns:a16="http://schemas.microsoft.com/office/drawing/2014/main" val="10002"/>
-                  </a:ext>
-                </a:extLst>
+                      <a:pPr lvl="0" indent="0" marL="0">
+                        <a:buNone/>
+                      </a:pPr>
+                      <a:r>
+                        <a:rPr/>
+                        <a:t>Подзаконный нормативный акт</a:t>
+                      </a:r>
+                    </a:p>
+                  </a:txBody>
+                </a:tc>
+                <a:tc>
+                  <a:txBody>
+                    <a:bodyPr/>
+                    <a:lstStyle/>
+                    <a:p>
+                      <a:pPr lvl="0" indent="0" marL="0">
+                        <a:buNone/>
+                      </a:pPr>
+                      <a:r>
+                        <a:rPr/>
+                        <a:t>конкретизирует порядок и требования в пределах компетенции</a:t>
+                      </a:r>
+                    </a:p>
+                  </a:txBody>
+                </a:tc>
               </a:tr>
               <a:tr h="0">
                 <a:tc>
@@ -5392,75 +8467,102 @@
                     <a:bodyPr/>
                     <a:lstStyle/>
                     <a:p>
-                      <a:pPr marL="0" lvl="0" indent="0">
-                        <a:buNone/>
-                      </a:pPr>
-                      <a:r>
-                        <a:t>ПНСТ</a:t>
-                      </a:r>
-                    </a:p>
-                  </a:txBody>
-                  <a:tcPr/>
-                </a:tc>
-                <a:tc>
-                  <a:txBody>
-                    <a:bodyPr/>
-                    <a:lstStyle/>
-                    <a:p>
-                      <a:pPr marL="0" lvl="0" indent="0">
-                        <a:buNone/>
-                      </a:pPr>
-                      <a:r>
-                        <a:t>документ для апробации; срок действия — не более трёх лет</a:t>
-                      </a:r>
-                    </a:p>
-                  </a:txBody>
-                  <a:tcPr/>
-                </a:tc>
-                <a:extLst>
-                  <a:ext uri="{0D108BD9-81ED-4DB2-BD59-A6C34878D82A}">
-                    <a16:rowId xmlns:a16="http://schemas.microsoft.com/office/drawing/2014/main" val="10003"/>
-                  </a:ext>
-                </a:extLst>
+                      <a:pPr lvl="0" indent="0" marL="0">
+                        <a:buNone/>
+                      </a:pPr>
+                      <a:r>
+                        <a:rPr/>
+                        <a:t>Документ по стандартизации</a:t>
+                      </a:r>
+                    </a:p>
+                  </a:txBody>
+                </a:tc>
+                <a:tc>
+                  <a:txBody>
+                    <a:bodyPr/>
+                    <a:lstStyle/>
+                    <a:p>
+                      <a:pPr lvl="0" indent="0" marL="0">
+                        <a:buNone/>
+                      </a:pPr>
+                      <a:r>
+                        <a:rPr/>
+                        <a:t>описывает согласованные подходы и характеристики</a:t>
+                      </a:r>
+                    </a:p>
+                  </a:txBody>
+                </a:tc>
+              </a:tr>
+              <a:tr h="0">
+                <a:tc>
+                  <a:txBody>
+                    <a:bodyPr/>
+                    <a:lstStyle/>
+                    <a:p>
+                      <a:pPr lvl="0" indent="0" marL="0">
+                        <a:buNone/>
+                      </a:pPr>
+                      <a:r>
+                        <a:rPr/>
+                        <a:t>Договор, закупка, локальный акт</a:t>
+                      </a:r>
+                    </a:p>
+                  </a:txBody>
+                </a:tc>
+                <a:tc>
+                  <a:txBody>
+                    <a:bodyPr/>
+                    <a:lstStyle/>
+                    <a:p>
+                      <a:pPr lvl="0" indent="0" marL="0">
+                        <a:buNone/>
+                      </a:pPr>
+                      <a:r>
+                        <a:rPr/>
+                        <a:t>задаёт обязательства конкретной организации</a:t>
+                      </a:r>
+                    </a:p>
+                  </a:txBody>
+                </a:tc>
+              </a:tr>
+              <a:tr h="0">
+                <a:tc>
+                  <a:txBody>
+                    <a:bodyPr/>
+                    <a:lstStyle/>
+                    <a:p>
+                      <a:pPr lvl="0" indent="0" marL="0">
+                        <a:buNone/>
+                      </a:pPr>
+                      <a:r>
+                        <a:rPr/>
+                        <a:t>Сертификат, протокол, журнал</a:t>
+                      </a:r>
+                    </a:p>
+                  </a:txBody>
+                </a:tc>
+                <a:tc>
+                  <a:txBody>
+                    <a:bodyPr/>
+                    <a:lstStyle/>
+                    <a:p>
+                      <a:pPr lvl="0" indent="0" marL="0">
+                        <a:buNone/>
+                      </a:pPr>
+                      <a:r>
+                        <a:rPr/>
+                        <a:t>служит доказательством в своей области действия</a:t>
+                      </a:r>
+                    </a:p>
+                  </a:txBody>
+                </a:tc>
               </a:tr>
             </a:tbl>
           </a:graphicData>
         </a:graphic>
       </p:graphicFrame>
-      <p:sp>
-        <p:nvSpPr>
-          <p:cNvPr id="3" name="Content Placeholder 2"/>
-          <p:cNvSpPr>
-            <a:spLocks noGrp="1"/>
-          </p:cNvSpPr>
-          <p:nvPr>
-            <p:ph idx="1"/>
-          </p:nvPr>
-        </p:nvSpPr>
-        <p:spPr>
-          <a:xfrm>
-            <a:off x="457200" y="3314700"/>
-            <a:ext cx="8229600" cy="1143000"/>
-          </a:xfrm>
-        </p:spPr>
-        <p:txBody>
-          <a:bodyPr/>
-          <a:lstStyle/>
-          <a:p>
-            <a:pPr marL="0" lvl="0" indent="0">
-              <a:buNone/>
-            </a:pPr>
-            <a:r>
-              <a:t>Применение стандарта может стать обязательным, если это прямо следует из закона, нормативного акта в пределах компетенции или договора.</a:t>
-            </a:r>
-          </a:p>
-        </p:txBody>
-      </p:sp>
     </p:spTree>
   </p:cSld>
-  <p:clrMapOvr>
-    <a:masterClrMapping/>
-  </p:clrMapOvr>
 </p:sld>
 </file>
 
@@ -5496,11 +8598,12 @@
           <a:bodyPr/>
           <a:lstStyle/>
           <a:p>
-            <a:pPr marL="0" lvl="0" indent="0">
-              <a:buNone/>
-            </a:pPr>
-            <a:r>
-              <a:t>Подтверждение соответствия</a:t>
+            <a:pPr lvl="0" indent="0" marL="0">
+              <a:buNone/>
+            </a:pPr>
+            <a:r>
+              <a:rPr/>
+              <a:t>Лестница актов</a:t>
             </a:r>
           </a:p>
         </p:txBody>
@@ -5520,39 +8623,81 @@
           <a:bodyPr/>
           <a:lstStyle/>
           <a:p>
-            <a:pPr marL="0" lvl="0" indent="0">
+            <a:pPr lvl="0" indent="0" marL="0">
               <a:buNone/>
             </a:pPr>
             <a:r>
               <a:rPr b="1"/>
-              <a:t>Не смешивать три конструкции</a:t>
-            </a:r>
-          </a:p>
-          <a:p>
-            <a:pPr lvl="0"/>
-            <a:r>
-              <a:t>Обязательное подтверждение соответствия продукции: только в случаях, заданных техническим регламентом.</a:t>
-            </a:r>
-          </a:p>
-          <a:p>
-            <a:pPr lvl="0"/>
-            <a:r>
-              <a:t>Добровольная сертификация: по инициативе заявителя и правилам соответствующей системы.</a:t>
-            </a:r>
-          </a:p>
-          <a:p>
-            <a:pPr lvl="0"/>
-            <a:r>
-              <a:t>Обязательные требования к значимому объекту КИИ: специальный регуляторный контур, не тождественный обязательной сертификации продукции.</a:t>
+              <a:t>Иерархия юридической силы</a:t>
+            </a:r>
+          </a:p>
+          <a:p>
+            <a:pPr lvl="0" indent="-342900" marL="342900">
+              <a:buAutoNum type="arabicPeriod"/>
+            </a:pPr>
+            <a:r>
+              <a:rPr/>
+              <a:t>Конституция РФ</a:t>
+            </a:r>
+          </a:p>
+          <a:p>
+            <a:pPr lvl="0" indent="-342900" marL="342900">
+              <a:buAutoNum type="arabicPeriod"/>
+            </a:pPr>
+            <a:r>
+              <a:rPr/>
+              <a:t>Международные договоры</a:t>
+            </a:r>
+          </a:p>
+          <a:p>
+            <a:pPr lvl="0" indent="-342900" marL="342900">
+              <a:buAutoNum type="arabicPeriod"/>
+            </a:pPr>
+            <a:r>
+              <a:rPr/>
+              <a:t>Федеральные конституционные законы и федеральные законы</a:t>
+            </a:r>
+          </a:p>
+          <a:p>
+            <a:pPr lvl="0" indent="-342900" marL="342900">
+              <a:buAutoNum type="arabicPeriod"/>
+            </a:pPr>
+            <a:r>
+              <a:rPr/>
+              <a:t>Указы Президента РФ</a:t>
+            </a:r>
+          </a:p>
+          <a:p>
+            <a:pPr lvl="0" indent="-342900" marL="342900">
+              <a:buAutoNum type="arabicPeriod"/>
+            </a:pPr>
+            <a:r>
+              <a:rPr/>
+              <a:t>Постановления Правительства РФ</a:t>
+            </a:r>
+          </a:p>
+          <a:p>
+            <a:pPr lvl="0" indent="-342900" marL="342900">
+              <a:buAutoNum type="arabicPeriod"/>
+            </a:pPr>
+            <a:r>
+              <a:rPr/>
+              <a:t>Акты федеральных органов исполнительной власти</a:t>
+            </a:r>
+          </a:p>
+          <a:p>
+            <a:pPr lvl="0" indent="-342900" marL="342900">
+              <a:buAutoNum type="arabicPeriod"/>
+            </a:pPr>
+            <a:r>
+              <a:rPr/>
+              <a:t>Договоры и локальные документы (обязательны для участников, но не НПА)</a:t>
             </a:r>
           </a:p>
         </p:txBody>
       </p:sp>
     </p:spTree>
   </p:cSld>
-  <p:clrMapOvr>
-    <a:masterClrMapping/>
-  </p:clrMapOvr>
 </p:sld>
 </file>
 
@@ -5588,11 +8733,12 @@
           <a:bodyPr/>
           <a:lstStyle/>
           <a:p>
-            <a:pPr marL="0" lvl="0" indent="0">
-              <a:buNone/>
-            </a:pPr>
-            <a:r>
-              <a:t>Сертификат как доказательство</a:t>
+            <a:pPr lvl="0" indent="0" marL="0">
+              <a:buNone/>
+            </a:pPr>
+            <a:r>
+              <a:rPr/>
+              <a:t>Вопрос 2</a:t>
             </a:r>
           </a:p>
         </p:txBody>
@@ -5612,58 +8758,39 @@
           <a:bodyPr/>
           <a:lstStyle/>
           <a:p>
-            <a:pPr marL="0" lvl="0" indent="0">
-              <a:buNone/>
-            </a:pPr>
-            <a:r>
-              <a:t>Сертификат не является универсальным разрешением на использование продукта.</a:t>
-            </a:r>
-          </a:p>
-          <a:p>
-            <a:pPr marL="0" lvl="0" indent="0">
-              <a:buNone/>
-            </a:pPr>
-            <a:r>
-              <a:t>Проверяйте:</a:t>
+            <a:pPr lvl="0" indent="0" marL="0">
+              <a:buNone/>
+            </a:pPr>
+            <a:r>
+              <a:rPr b="1"/>
+              <a:t>Лестница актов: пример на каждый уровень</a:t>
             </a:r>
           </a:p>
           <a:p>
             <a:pPr lvl="0"/>
             <a:r>
-              <a:t>объект сертификации и его конфигурацию;</a:t>
+              <a:rPr/>
+              <a:t>Назовите по одному примеру документа для каждого уровня лестницы.</a:t>
             </a:r>
           </a:p>
           <a:p>
             <a:pPr lvl="0"/>
             <a:r>
-              <a:t>версию, срок и условия действия;</a:t>
+              <a:rPr/>
+              <a:t>Назовите документ, который в лестницу не входит.</a:t>
             </a:r>
           </a:p>
           <a:p>
             <a:pPr lvl="0"/>
             <a:r>
-              <a:t>схему, область и ограничения;</a:t>
-            </a:r>
-          </a:p>
-          <a:p>
-            <a:pPr lvl="0"/>
-            <a:r>
-              <a:t>связь с фактически применяемым решением;</a:t>
-            </a:r>
-          </a:p>
-          <a:p>
-            <a:pPr lvl="0"/>
-            <a:r>
-              <a:t>дополнительные обязательные требования к объекту КИИ.</a:t>
+              <a:rPr/>
+              <a:t>Проверьте: не попали ли стандарты и методические рекомендации на один уровень с приказами?</a:t>
             </a:r>
           </a:p>
         </p:txBody>
       </p:sp>
     </p:spTree>
   </p:cSld>
-  <p:clrMapOvr>
-    <a:masterClrMapping/>
-  </p:clrMapOvr>
 </p:sld>
 </file>
 
@@ -5699,11 +8826,12 @@
           <a:bodyPr/>
           <a:lstStyle/>
           <a:p>
-            <a:pPr marL="0" lvl="0" indent="0">
-              <a:buNone/>
-            </a:pPr>
-            <a:r>
-              <a:t>Аккредитация и испытания</a:t>
+            <a:pPr lvl="0" indent="0" marL="0">
+              <a:buNone/>
+            </a:pPr>
+            <a:r>
+              <a:rPr/>
+              <a:t>Три коллизии</a:t>
             </a:r>
           </a:p>
         </p:txBody>
@@ -5723,66 +8851,48 @@
           <a:bodyPr/>
           <a:lstStyle/>
           <a:p>
-            <a:pPr marL="0" lvl="0" indent="0">
-              <a:buNone/>
-            </a:pPr>
-            <a:r>
-              <a:t>Аккредитация подтверждает компетентность участника выполнять работы в определённой области.</a:t>
-            </a:r>
-          </a:p>
-          <a:p>
-            <a:pPr marL="0" lvl="0" indent="0">
-              <a:buNone/>
-            </a:pPr>
-            <a:r>
-              <a:t>При оценке испытаний уточняют:</a:t>
+            <a:pPr lvl="0" indent="0" marL="0">
+              <a:buNone/>
+            </a:pPr>
+            <a:r>
+              <a:rPr b="1"/>
+              <a:t>Где иерархия «не срабатывает»</a:t>
             </a:r>
           </a:p>
           <a:p>
             <a:pPr lvl="0"/>
             <a:r>
-              <a:t>кто выполнил работу;</a:t>
+              <a:rPr/>
+              <a:t>Общее и специальное: общие положения о стандартизации не отменяют специальные требования к значимым объектам КИИ.</a:t>
             </a:r>
           </a:p>
           <a:p>
             <a:pPr lvl="0"/>
             <a:r>
-              <a:t>в какой области компетентности;</a:t>
+              <a:rPr/>
+              <a:t>Разные редакции во времени: фиксируем редакцию и дату.</a:t>
             </a:r>
           </a:p>
           <a:p>
             <a:pPr lvl="0"/>
             <a:r>
-              <a:t>по какой методике;</a:t>
-            </a:r>
-          </a:p>
-          <a:p>
-            <a:pPr lvl="0"/>
-            <a:r>
-              <a:t>какие средства и данные использованы;</a:t>
-            </a:r>
-          </a:p>
-          <a:p>
-            <a:pPr lvl="0"/>
-            <a:r>
-              <a:t>каковы ограничения результата.</a:t>
-            </a:r>
-          </a:p>
-          <a:p>
-            <a:pPr marL="0" lvl="0" indent="0">
-              <a:buNone/>
-            </a:pPr>
-            <a:r>
-              <a:t>Статус участника конкретной добровольной системы подтверждения соответствия проверяют по её правилам и применимым требованиям.</a:t>
+              <a:rPr/>
+              <a:t>Формально не противоречит, но не применим: акт для других адресатов или предмета нельзя применять «по аналогии».</a:t>
+            </a:r>
+          </a:p>
+          <a:p>
+            <a:pPr lvl="0" indent="0" marL="0">
+              <a:buNone/>
+            </a:pPr>
+            <a:r>
+              <a:rPr/>
+              <a:t>Два вопроса: не противоречит ли акту большей силы? применим ли к объекту и ситуации?</a:t>
             </a:r>
           </a:p>
         </p:txBody>
       </p:sp>
     </p:spTree>
   </p:cSld>
-  <p:clrMapOvr>
-    <a:masterClrMapping/>
-  </p:clrMapOvr>
 </p:sld>
 </file>
 
@@ -5818,11 +8928,12 @@
           <a:bodyPr/>
           <a:lstStyle/>
           <a:p>
-            <a:pPr marL="0" lvl="0" indent="0">
-              <a:buNone/>
-            </a:pPr>
-            <a:r>
-              <a:t>Роль стандартизации</a:t>
+            <a:pPr lvl="0" indent="0" marL="0">
+              <a:buNone/>
+            </a:pPr>
+            <a:r>
+              <a:rPr/>
+              <a:t>Пять проверок применимости</a:t>
             </a:r>
           </a:p>
         </p:txBody>
@@ -5842,45 +8953,72 @@
           <a:bodyPr/>
           <a:lstStyle/>
           <a:p>
-            <a:pPr marL="0" lvl="0" indent="0">
-              <a:buNone/>
-            </a:pPr>
-            <a:r>
-              <a:t>Технические комитеты участвуют в подготовке документов по стандартизации в закреплённых областях.</a:t>
-            </a:r>
-          </a:p>
-          <a:p>
-            <a:pPr marL="0" lvl="0" indent="0">
-              <a:buNone/>
-            </a:pPr>
-            <a:r>
-              <a:t>Для курса важны не названия комитетов сами по себе, а практический вопрос:</a:t>
-            </a:r>
-          </a:p>
-          <a:p>
-            <a:pPr marL="0" lvl="0" indent="0">
+            <a:pPr lvl="0" indent="0" marL="0">
               <a:buNone/>
             </a:pPr>
             <a:r>
               <a:rPr b="1"/>
-              <a:t>Как стандарт помогает обосновать требование, характеристику или метод проверки?</a:t>
-            </a:r>
-          </a:p>
-          <a:p>
-            <a:pPr marL="0" lvl="0" indent="0">
-              <a:buNone/>
-            </a:pPr>
-            <a:r>
-              <a:t>Материалы по доверенным ПАК и документам стандартизации подробно рассматриваются в лекции 13.</a:t>
+              <a:t>Для любого документа</a:t>
+            </a:r>
+          </a:p>
+          <a:p>
+            <a:pPr lvl="0" indent="-342900" marL="342900">
+              <a:buAutoNum type="arabicPeriod"/>
+            </a:pPr>
+            <a:r>
+              <a:rPr/>
+              <a:t>Кто адресат?</a:t>
+            </a:r>
+          </a:p>
+          <a:p>
+            <a:pPr lvl="0" indent="-342900" marL="342900">
+              <a:buAutoNum type="arabicPeriod"/>
+            </a:pPr>
+            <a:r>
+              <a:rPr/>
+              <a:t>Какой предмет?</a:t>
+            </a:r>
+          </a:p>
+          <a:p>
+            <a:pPr lvl="0" indent="-342900" marL="342900">
+              <a:buAutoNum type="arabicPeriod"/>
+            </a:pPr>
+            <a:r>
+              <a:rPr/>
+              <a:t>Какая редакция и дата?</a:t>
+            </a:r>
+          </a:p>
+          <a:p>
+            <a:pPr lvl="0" indent="-342900" marL="342900">
+              <a:buAutoNum type="arabicPeriod"/>
+            </a:pPr>
+            <a:r>
+              <a:rPr/>
+              <a:t>Какова сфера и условие (исключения, переходные положения)?</a:t>
+            </a:r>
+          </a:p>
+          <a:p>
+            <a:pPr lvl="0" indent="-342900" marL="342900">
+              <a:buAutoNum type="arabicPeriod"/>
+            </a:pPr>
+            <a:r>
+              <a:rPr/>
+              <a:t>Какова связь с договором — не расширяет ли он обязательность?</a:t>
+            </a:r>
+          </a:p>
+          <a:p>
+            <a:pPr lvl="0" indent="0" marL="0">
+              <a:buNone/>
+            </a:pPr>
+            <a:r>
+              <a:rPr/>
+              <a:t>Ошибиться можно в обе стороны: недооценить требование или применить его к объекту, который не является значимым объектом КИИ.</a:t>
             </a:r>
           </a:p>
         </p:txBody>
       </p:sp>
     </p:spTree>
   </p:cSld>
-  <p:clrMapOvr>
-    <a:masterClrMapping/>
-  </p:clrMapOvr>
 </p:sld>
 </file>
 
@@ -6202,4 +9340,265 @@
   </a:objectDefaults>
   <a:extraClrSchemeLst/>
 </a:theme>
+</file>
+
+<file path=ppt/theme/theme2.xml><?xml version="1.0" encoding="utf-8"?>
+<a:theme xmlns:a="http://schemas.openxmlformats.org/drawingml/2006/main" name="Office Theme">
+  <a:themeElements>
+    <a:clrScheme name="Office">
+      <a:dk1>
+        <a:sysClr val="windowText" lastClr="000000"/>
+      </a:dk1>
+      <a:lt1>
+        <a:sysClr val="window" lastClr="FFFFFF"/>
+      </a:lt1>
+      <a:dk2>
+        <a:srgbClr val="44546A"/>
+      </a:dk2>
+      <a:lt2>
+        <a:srgbClr val="E7E6E6"/>
+      </a:lt2>
+      <a:accent1>
+        <a:srgbClr val="5B9BD5"/>
+      </a:accent1>
+      <a:accent2>
+        <a:srgbClr val="ED7D31"/>
+      </a:accent2>
+      <a:accent3>
+        <a:srgbClr val="A5A5A5"/>
+      </a:accent3>
+      <a:accent4>
+        <a:srgbClr val="FFC000"/>
+      </a:accent4>
+      <a:accent5>
+        <a:srgbClr val="4472C4"/>
+      </a:accent5>
+      <a:accent6>
+        <a:srgbClr val="70AD47"/>
+      </a:accent6>
+      <a:hlink>
+        <a:srgbClr val="0563C1"/>
+      </a:hlink>
+      <a:folHlink>
+        <a:srgbClr val="954F72"/>
+      </a:folHlink>
+    </a:clrScheme>
+    <a:fontScheme name="Office">
+      <a:majorFont>
+        <a:latin typeface="Calibri Light" panose="020F0302020204030204"/>
+        <a:ea typeface=""/>
+        <a:cs typeface=""/>
+        <a:font script="Jpan" typeface="ＭＳ Ｐゴシック"/>
+        <a:font script="Hang" typeface="맑은 고딕"/>
+        <a:font script="Hans" typeface="宋体"/>
+        <a:font script="Hant" typeface="新細明體"/>
+        <a:font script="Arab" typeface="Times New Roman"/>
+        <a:font script="Hebr" typeface="Times New Roman"/>
+        <a:font script="Thai" typeface="Angsana New"/>
+        <a:font script="Ethi" typeface="Nyala"/>
+        <a:font script="Beng" typeface="Vrinda"/>
+        <a:font script="Gujr" typeface="Shruti"/>
+        <a:font script="Khmr" typeface="MoolBoran"/>
+        <a:font script="Knda" typeface="Tunga"/>
+        <a:font script="Guru" typeface="Raavi"/>
+        <a:font script="Cans" typeface="Euphemia"/>
+        <a:font script="Cher" typeface="Plantagenet Cherokee"/>
+        <a:font script="Yiii" typeface="Microsoft Yi Baiti"/>
+        <a:font script="Tibt" typeface="Microsoft Himalaya"/>
+        <a:font script="Thaa" typeface="MV Boli"/>
+        <a:font script="Deva" typeface="Mangal"/>
+        <a:font script="Telu" typeface="Gautami"/>
+        <a:font script="Taml" typeface="Latha"/>
+        <a:font script="Syrc" typeface="Estrangelo Edessa"/>
+        <a:font script="Orya" typeface="Kalinga"/>
+        <a:font script="Mlym" typeface="Kartika"/>
+        <a:font script="Laoo" typeface="DokChampa"/>
+        <a:font script="Sinh" typeface="Iskoola Pota"/>
+        <a:font script="Mong" typeface="Mongolian Baiti"/>
+        <a:font script="Viet" typeface="Times New Roman"/>
+        <a:font script="Uigh" typeface="Microsoft Uighur"/>
+        <a:font script="Geor" typeface="Sylfaen"/>
+      </a:majorFont>
+      <a:minorFont>
+        <a:latin typeface="Calibri" panose="020F0502020204030204"/>
+        <a:ea typeface=""/>
+        <a:cs typeface=""/>
+        <a:font script="Jpan" typeface="ＭＳ Ｐゴシック"/>
+        <a:font script="Hang" typeface="맑은 고딕"/>
+        <a:font script="Hans" typeface="宋体"/>
+        <a:font script="Hant" typeface="新細明體"/>
+        <a:font script="Arab" typeface="Arial"/>
+        <a:font script="Hebr" typeface="Arial"/>
+        <a:font script="Thai" typeface="Cordia New"/>
+        <a:font script="Ethi" typeface="Nyala"/>
+        <a:font script="Beng" typeface="Vrinda"/>
+        <a:font script="Gujr" typeface="Shruti"/>
+        <a:font script="Khmr" typeface="DaunPenh"/>
+        <a:font script="Knda" typeface="Tunga"/>
+        <a:font script="Guru" typeface="Raavi"/>
+        <a:font script="Cans" typeface="Euphemia"/>
+        <a:font script="Cher" typeface="Plantagenet Cherokee"/>
+        <a:font script="Yiii" typeface="Microsoft Yi Baiti"/>
+        <a:font script="Tibt" typeface="Microsoft Himalaya"/>
+        <a:font script="Thaa" typeface="MV Boli"/>
+        <a:font script="Deva" typeface="Mangal"/>
+        <a:font script="Telu" typeface="Gautami"/>
+        <a:font script="Taml" typeface="Latha"/>
+        <a:font script="Syrc" typeface="Estrangelo Edessa"/>
+        <a:font script="Orya" typeface="Kalinga"/>
+        <a:font script="Mlym" typeface="Kartika"/>
+        <a:font script="Laoo" typeface="DokChampa"/>
+        <a:font script="Sinh" typeface="Iskoola Pota"/>
+        <a:font script="Mong" typeface="Mongolian Baiti"/>
+        <a:font script="Viet" typeface="Arial"/>
+        <a:font script="Uigh" typeface="Microsoft Uighur"/>
+        <a:font script="Geor" typeface="Sylfaen"/>
+      </a:minorFont>
+    </a:fontScheme>
+    <a:fmtScheme name="Office">
+      <a:fillStyleLst>
+        <a:solidFill>
+          <a:schemeClr val="phClr"/>
+        </a:solidFill>
+        <a:gradFill rotWithShape="1">
+          <a:gsLst>
+            <a:gs pos="0">
+              <a:schemeClr val="phClr">
+                <a:lumMod val="110000"/>
+                <a:satMod val="105000"/>
+                <a:tint val="67000"/>
+              </a:schemeClr>
+            </a:gs>
+            <a:gs pos="50000">
+              <a:schemeClr val="phClr">
+                <a:lumMod val="105000"/>
+                <a:satMod val="103000"/>
+                <a:tint val="73000"/>
+              </a:schemeClr>
+            </a:gs>
+            <a:gs pos="100000">
+              <a:schemeClr val="phClr">
+                <a:lumMod val="105000"/>
+                <a:satMod val="109000"/>
+                <a:tint val="81000"/>
+              </a:schemeClr>
+            </a:gs>
+          </a:gsLst>
+          <a:lin ang="5400000" scaled="0"/>
+        </a:gradFill>
+        <a:gradFill rotWithShape="1">
+          <a:gsLst>
+            <a:gs pos="0">
+              <a:schemeClr val="phClr">
+                <a:satMod val="103000"/>
+                <a:lumMod val="102000"/>
+                <a:tint val="94000"/>
+              </a:schemeClr>
+            </a:gs>
+            <a:gs pos="50000">
+              <a:schemeClr val="phClr">
+                <a:satMod val="110000"/>
+                <a:lumMod val="100000"/>
+                <a:shade val="100000"/>
+              </a:schemeClr>
+            </a:gs>
+            <a:gs pos="100000">
+              <a:schemeClr val="phClr">
+                <a:lumMod val="99000"/>
+                <a:satMod val="120000"/>
+                <a:shade val="78000"/>
+              </a:schemeClr>
+            </a:gs>
+          </a:gsLst>
+          <a:lin ang="5400000" scaled="0"/>
+        </a:gradFill>
+      </a:fillStyleLst>
+      <a:lnStyleLst>
+        <a:ln w="6350" cap="flat" cmpd="sng" algn="ctr">
+          <a:solidFill>
+            <a:schemeClr val="phClr"/>
+          </a:solidFill>
+          <a:prstDash val="solid"/>
+          <a:miter lim="800000"/>
+        </a:ln>
+        <a:ln w="12700" cap="flat" cmpd="sng" algn="ctr">
+          <a:solidFill>
+            <a:schemeClr val="phClr"/>
+          </a:solidFill>
+          <a:prstDash val="solid"/>
+          <a:miter lim="800000"/>
+        </a:ln>
+        <a:ln w="19050" cap="flat" cmpd="sng" algn="ctr">
+          <a:solidFill>
+            <a:schemeClr val="phClr"/>
+          </a:solidFill>
+          <a:prstDash val="solid"/>
+          <a:miter lim="800000"/>
+        </a:ln>
+      </a:lnStyleLst>
+      <a:effectStyleLst>
+        <a:effectStyle>
+          <a:effectLst/>
+        </a:effectStyle>
+        <a:effectStyle>
+          <a:effectLst/>
+        </a:effectStyle>
+        <a:effectStyle>
+          <a:effectLst>
+            <a:outerShdw blurRad="57150" dist="19050" dir="5400000" algn="ctr" rotWithShape="0">
+              <a:srgbClr val="000000">
+                <a:alpha val="63000"/>
+              </a:srgbClr>
+            </a:outerShdw>
+          </a:effectLst>
+        </a:effectStyle>
+      </a:effectStyleLst>
+      <a:bgFillStyleLst>
+        <a:solidFill>
+          <a:schemeClr val="phClr"/>
+        </a:solidFill>
+        <a:solidFill>
+          <a:schemeClr val="phClr">
+            <a:tint val="95000"/>
+            <a:satMod val="170000"/>
+          </a:schemeClr>
+        </a:solidFill>
+        <a:gradFill rotWithShape="1">
+          <a:gsLst>
+            <a:gs pos="0">
+              <a:schemeClr val="phClr">
+                <a:tint val="93000"/>
+                <a:satMod val="150000"/>
+                <a:shade val="98000"/>
+                <a:lumMod val="102000"/>
+              </a:schemeClr>
+            </a:gs>
+            <a:gs pos="50000">
+              <a:schemeClr val="phClr">
+                <a:tint val="98000"/>
+                <a:satMod val="130000"/>
+                <a:shade val="90000"/>
+                <a:lumMod val="103000"/>
+              </a:schemeClr>
+            </a:gs>
+            <a:gs pos="100000">
+              <a:schemeClr val="phClr">
+                <a:shade val="63000"/>
+                <a:satMod val="120000"/>
+              </a:schemeClr>
+            </a:gs>
+          </a:gsLst>
+          <a:lin ang="5400000" scaled="0"/>
+        </a:gradFill>
+      </a:bgFillStyleLst>
+    </a:fmtScheme>
+  </a:themeElements>
+  <a:objectDefaults/>
+  <a:extraClrSchemeLst/>
+  <a:extLst>
+    <a:ext uri="{05A4C25C-085E-4340-85A3-A5531E510DB2}">
+      <thm15:themeFamily xmlns:thm15="http://schemas.microsoft.com/office/thememl/2012/main" name="Office Theme" id="{62F939B6-93AF-4DB8-9C6B-D6C7DFDC589F}" vid="{4A3C46E8-61CC-4603-A589-7422A47A8E4A}"/>
+    </a:ext>
+  </a:extLst>
+</a:theme>
 </file>
--- a/Lec_1_Модуль 1_1_Слайд-конспект.pptx
+++ b/Lec_1_Модуль 1_1_Слайд-конспект.pptx
@@ -1,6 +1,6 @@
 
 <file path=ppt/presentation.xml><?xml version="1.0" encoding="utf-8"?>
-<p:presentation xmlns:a="http://schemas.openxmlformats.org/drawingml/2006/main" xmlns:p="http://schemas.openxmlformats.org/presentationml/2006/main" xmlns:r="http://schemas.openxmlformats.org/officeDocument/2006/relationships" autoCompressPictures="0" saveSubsetFonts="1">
+<p:presentation xmlns:a="http://schemas.openxmlformats.org/drawingml/2006/main" xmlns:r="http://schemas.openxmlformats.org/officeDocument/2006/relationships" xmlns:p="http://schemas.openxmlformats.org/presentationml/2006/main" saveSubsetFonts="1" autoCompressPictures="0">
   <p:sldMasterIdLst>
     <p:sldMasterId id="2147483648" r:id="rId1"/>
   </p:sldMasterIdLst>
@@ -46,8 +46,8 @@
     <a:defPPr>
       <a:defRPr lang="en-US"/>
     </a:defPPr>
-    <a:lvl1pPr algn="l" defTabSz="457200" eaLnBrk="1" hangingPunct="1" latinLnBrk="0" marL="0" rtl="0">
-      <a:defRPr kern="1200" sz="1800">
+    <a:lvl1pPr marL="0" algn="l" defTabSz="457200" rtl="0" eaLnBrk="1" latinLnBrk="0" hangingPunct="1">
+      <a:defRPr sz="1800" kern="1200">
         <a:solidFill>
           <a:schemeClr val="tx1"/>
         </a:solidFill>
@@ -56,8 +56,8 @@
         <a:cs typeface="+mn-cs"/>
       </a:defRPr>
     </a:lvl1pPr>
-    <a:lvl2pPr algn="l" defTabSz="457200" eaLnBrk="1" hangingPunct="1" latinLnBrk="0" marL="457200" rtl="0">
-      <a:defRPr kern="1200" sz="1800">
+    <a:lvl2pPr marL="457200" algn="l" defTabSz="457200" rtl="0" eaLnBrk="1" latinLnBrk="0" hangingPunct="1">
+      <a:defRPr sz="1800" kern="1200">
         <a:solidFill>
           <a:schemeClr val="tx1"/>
         </a:solidFill>
@@ -66,8 +66,8 @@
         <a:cs typeface="+mn-cs"/>
       </a:defRPr>
     </a:lvl2pPr>
-    <a:lvl3pPr algn="l" defTabSz="457200" eaLnBrk="1" hangingPunct="1" latinLnBrk="0" marL="914400" rtl="0">
-      <a:defRPr kern="1200" sz="1800">
+    <a:lvl3pPr marL="914400" algn="l" defTabSz="457200" rtl="0" eaLnBrk="1" latinLnBrk="0" hangingPunct="1">
+      <a:defRPr sz="1800" kern="1200">
         <a:solidFill>
           <a:schemeClr val="tx1"/>
         </a:solidFill>
@@ -76,8 +76,8 @@
         <a:cs typeface="+mn-cs"/>
       </a:defRPr>
     </a:lvl3pPr>
-    <a:lvl4pPr algn="l" defTabSz="457200" eaLnBrk="1" hangingPunct="1" latinLnBrk="0" marL="1371600" rtl="0">
-      <a:defRPr kern="1200" sz="1800">
+    <a:lvl4pPr marL="1371600" algn="l" defTabSz="457200" rtl="0" eaLnBrk="1" latinLnBrk="0" hangingPunct="1">
+      <a:defRPr sz="1800" kern="1200">
         <a:solidFill>
           <a:schemeClr val="tx1"/>
         </a:solidFill>
@@ -86,8 +86,8 @@
         <a:cs typeface="+mn-cs"/>
       </a:defRPr>
     </a:lvl4pPr>
-    <a:lvl5pPr algn="l" defTabSz="457200" eaLnBrk="1" hangingPunct="1" latinLnBrk="0" marL="1828800" rtl="0">
-      <a:defRPr kern="1200" sz="1800">
+    <a:lvl5pPr marL="1828800" algn="l" defTabSz="457200" rtl="0" eaLnBrk="1" latinLnBrk="0" hangingPunct="1">
+      <a:defRPr sz="1800" kern="1200">
         <a:solidFill>
           <a:schemeClr val="tx1"/>
         </a:solidFill>
@@ -96,8 +96,8 @@
         <a:cs typeface="+mn-cs"/>
       </a:defRPr>
     </a:lvl5pPr>
-    <a:lvl6pPr algn="l" defTabSz="457200" eaLnBrk="1" hangingPunct="1" latinLnBrk="0" marL="2286000" rtl="0">
-      <a:defRPr kern="1200" sz="1800">
+    <a:lvl6pPr marL="2286000" algn="l" defTabSz="457200" rtl="0" eaLnBrk="1" latinLnBrk="0" hangingPunct="1">
+      <a:defRPr sz="1800" kern="1200">
         <a:solidFill>
           <a:schemeClr val="tx1"/>
         </a:solidFill>
@@ -106,8 +106,8 @@
         <a:cs typeface="+mn-cs"/>
       </a:defRPr>
     </a:lvl6pPr>
-    <a:lvl7pPr algn="l" defTabSz="457200" eaLnBrk="1" hangingPunct="1" latinLnBrk="0" marL="2743200" rtl="0">
-      <a:defRPr kern="1200" sz="1800">
+    <a:lvl7pPr marL="2743200" algn="l" defTabSz="457200" rtl="0" eaLnBrk="1" latinLnBrk="0" hangingPunct="1">
+      <a:defRPr sz="1800" kern="1200">
         <a:solidFill>
           <a:schemeClr val="tx1"/>
         </a:solidFill>
@@ -116,8 +116,8 @@
         <a:cs typeface="+mn-cs"/>
       </a:defRPr>
     </a:lvl7pPr>
-    <a:lvl8pPr algn="l" defTabSz="457200" eaLnBrk="1" hangingPunct="1" latinLnBrk="0" marL="3200400" rtl="0">
-      <a:defRPr kern="1200" sz="1800">
+    <a:lvl8pPr marL="3200400" algn="l" defTabSz="457200" rtl="0" eaLnBrk="1" latinLnBrk="0" hangingPunct="1">
+      <a:defRPr sz="1800" kern="1200">
         <a:solidFill>
           <a:schemeClr val="tx1"/>
         </a:solidFill>
@@ -126,8 +126,8 @@
         <a:cs typeface="+mn-cs"/>
       </a:defRPr>
     </a:lvl8pPr>
-    <a:lvl9pPr algn="l" defTabSz="457200" eaLnBrk="1" hangingPunct="1" latinLnBrk="0" marL="3657600" rtl="0">
-      <a:defRPr kern="1200" sz="1800">
+    <a:lvl9pPr marL="3657600" algn="l" defTabSz="457200" rtl="0" eaLnBrk="1" latinLnBrk="0" hangingPunct="1">
+      <a:defRPr sz="1800" kern="1200">
         <a:solidFill>
           <a:schemeClr val="tx1"/>
         </a:solidFill>
@@ -2692,7 +2692,7 @@
 </file>
 
 <file path=ppt/slideMasters/slideMaster1.xml><?xml version="1.0" encoding="utf-8"?>
-<p:sldMaster xmlns:a="http://schemas.openxmlformats.org/drawingml/2006/main" xmlns:p="http://schemas.openxmlformats.org/presentationml/2006/main" xmlns:r="http://schemas.openxmlformats.org/officeDocument/2006/relationships">
+<p:sldMaster xmlns:a="http://schemas.openxmlformats.org/drawingml/2006/main" xmlns:r="http://schemas.openxmlformats.org/officeDocument/2006/relationships" xmlns:p="http://schemas.openxmlformats.org/presentationml/2006/main">
   <p:cSld>
     <p:bg>
       <p:bgRef idx="1001">
@@ -2733,13 +2733,13 @@
           </a:prstGeom>
         </p:spPr>
         <p:txBody>
-          <a:bodyPr anchor="ctr" bIns="45720" lIns="91440" rIns="91440" rtlCol="0" tIns="45720" vert="horz">
+          <a:bodyPr vert="horz" lIns="91440" tIns="45720" rIns="91440" bIns="45720" rtlCol="0" anchor="ctr">
             <a:normAutofit/>
           </a:bodyPr>
           <a:lstStyle/>
           <a:p>
             <a:r>
-              <a:rPr dirty="0" lang="en-US"/>
+              <a:rPr lang="en-US" dirty="0"/>
               <a:t>Click to edit Master title style</a:t>
             </a:r>
           </a:p>
@@ -2752,7 +2752,7 @@
             <a:spLocks noGrp="1"/>
           </p:cNvSpPr>
           <p:nvPr>
-            <p:ph idx="1" type="body"/>
+            <p:ph type="body" idx="1"/>
           </p:nvPr>
         </p:nvSpPr>
         <p:spPr>
@@ -2765,42 +2765,42 @@
           </a:prstGeom>
         </p:spPr>
         <p:txBody>
-          <a:bodyPr bIns="45720" lIns="91440" rIns="91440" rtlCol="0" tIns="45720" vert="horz">
+          <a:bodyPr vert="horz" lIns="91440" tIns="45720" rIns="91440" bIns="45720" rtlCol="0">
             <a:normAutofit/>
           </a:bodyPr>
           <a:lstStyle/>
           <a:p>
             <a:pPr lvl="0"/>
             <a:r>
-              <a:rPr dirty="0" lang="en-US"/>
+              <a:rPr lang="en-US" dirty="0"/>
               <a:t>Click to edit Master text styles</a:t>
             </a:r>
           </a:p>
           <a:p>
             <a:pPr lvl="1"/>
             <a:r>
-              <a:rPr dirty="0" lang="en-US"/>
+              <a:rPr lang="en-US" dirty="0"/>
               <a:t>Second level</a:t>
             </a:r>
           </a:p>
           <a:p>
             <a:pPr lvl="2"/>
             <a:r>
-              <a:rPr dirty="0" lang="en-US"/>
+              <a:rPr lang="en-US" dirty="0"/>
               <a:t>Third level</a:t>
             </a:r>
           </a:p>
           <a:p>
             <a:pPr lvl="3"/>
             <a:r>
-              <a:rPr dirty="0" lang="en-US"/>
+              <a:rPr lang="en-US" dirty="0"/>
               <a:t>Fourth level</a:t>
             </a:r>
           </a:p>
           <a:p>
             <a:pPr lvl="4"/>
             <a:r>
-              <a:rPr dirty="0" lang="en-US"/>
+              <a:rPr lang="en-US" dirty="0"/>
               <a:t>Fifth level</a:t>
             </a:r>
           </a:p>
@@ -2813,7 +2813,7 @@
             <a:spLocks noGrp="1"/>
           </p:cNvSpPr>
           <p:nvPr>
-            <p:ph idx="2" sz="half" type="dt"/>
+            <p:ph type="dt" sz="half" idx="2"/>
           </p:nvPr>
         </p:nvSpPr>
         <p:spPr>
@@ -2826,7 +2826,7 @@
           </a:prstGeom>
         </p:spPr>
         <p:txBody>
-          <a:bodyPr anchor="ctr" bIns="45720" lIns="91440" rIns="91440" rtlCol="0" tIns="45720" vert="horz"/>
+          <a:bodyPr vert="horz" lIns="91440" tIns="45720" rIns="91440" bIns="45720" rtlCol="0" anchor="ctr"/>
           <a:lstStyle>
             <a:lvl1pPr algn="l">
               <a:defRPr sz="900">
@@ -2854,7 +2854,7 @@
             <a:spLocks noGrp="1"/>
           </p:cNvSpPr>
           <p:nvPr>
-            <p:ph idx="3" sz="quarter" type="ftr"/>
+            <p:ph type="ftr" sz="quarter" idx="3"/>
           </p:nvPr>
         </p:nvSpPr>
         <p:spPr>
@@ -2867,7 +2867,7 @@
           </a:prstGeom>
         </p:spPr>
         <p:txBody>
-          <a:bodyPr anchor="ctr" bIns="45720" lIns="91440" rIns="91440" rtlCol="0" tIns="45720" vert="horz"/>
+          <a:bodyPr vert="horz" lIns="91440" tIns="45720" rIns="91440" bIns="45720" rtlCol="0" anchor="ctr"/>
           <a:lstStyle>
             <a:lvl1pPr algn="ctr">
               <a:defRPr sz="900">
@@ -2891,7 +2891,7 @@
             <a:spLocks noGrp="1"/>
           </p:cNvSpPr>
           <p:nvPr>
-            <p:ph idx="4" sz="quarter" type="sldNum"/>
+            <p:ph type="sldNum" sz="quarter" idx="4"/>
           </p:nvPr>
         </p:nvSpPr>
         <p:spPr>
@@ -2904,7 +2904,7 @@
           </a:prstGeom>
         </p:spPr>
         <p:txBody>
-          <a:bodyPr anchor="ctr" bIns="45720" lIns="91440" rIns="91440" rtlCol="0" tIns="45720" vert="horz"/>
+          <a:bodyPr vert="horz" lIns="91440" tIns="45720" rIns="91440" bIns="45720" rtlCol="0" anchor="ctr"/>
           <a:lstStyle>
             <a:lvl1pPr algn="r">
               <a:defRPr sz="900">
@@ -2927,7 +2927,7 @@
       </p:sp>
       <p:pic>
         <p:nvPicPr>
-          <p:cNvPr descr="/mnt/data/asset_icons/image3.png" id="7" name="Image 1">
+          <p:cNvPr id="7" name="Image 1" descr="/mnt/data/asset_icons/image3.png">
             <a:extLst>
               <a:ext uri="{FF2B5EF4-FFF2-40B4-BE49-F238E27FC236}">
                 <a16:creationId xmlns:a16="http://schemas.microsoft.com/office/drawing/2014/main" id="{07B1F67F-77AB-4D11-A16B-35A1040E62AB}"/>
@@ -2962,7 +2962,7 @@
       </p:ext>
     </p:extLst>
   </p:cSld>
-  <p:clrMap accent1="accent1" accent2="accent2" accent3="accent3" accent4="accent4" accent5="accent5" accent6="accent6" bg1="lt1" bg2="lt2" folHlink="folHlink" hlink="hlink" tx1="dk1" tx2="dk2"/>
+  <p:clrMap bg1="lt1" tx1="dk1" bg2="lt2" tx2="dk2" accent1="accent1" accent2="accent2" accent3="accent3" accent4="accent4" accent5="accent5" accent6="accent6" hlink="hlink" folHlink="folHlink"/>
   <p:sldLayoutIdLst>
     <p:sldLayoutId id="2147483649" r:id="rId1"/>
     <p:sldLayoutId id="2147483650" r:id="rId2"/>
@@ -2978,12 +2978,12 @@
   </p:sldLayoutIdLst>
   <p:txStyles>
     <p:titleStyle>
-      <a:lvl1pPr algn="ctr" defTabSz="342900" eaLnBrk="1" hangingPunct="1" latinLnBrk="0" rtl="0">
+      <a:lvl1pPr algn="ctr" defTabSz="342900" rtl="0" eaLnBrk="1" latinLnBrk="0" hangingPunct="1">
         <a:spcBef>
           <a:spcPct val="0"/>
         </a:spcBef>
         <a:buNone/>
-        <a:defRPr kern="1200" sz="2400">
+        <a:defRPr sz="2400" kern="1200">
           <a:solidFill>
             <a:schemeClr val="tx1"/>
           </a:solidFill>
@@ -2994,13 +2994,13 @@
       </a:lvl1pPr>
     </p:titleStyle>
     <p:bodyStyle>
-      <a:lvl1pPr algn="l" defTabSz="342900" eaLnBrk="1" hangingPunct="1" indent="-342900" latinLnBrk="0" marL="342900" rtl="0">
+      <a:lvl1pPr marL="342900" indent="-342900" algn="l" defTabSz="342900" rtl="0" eaLnBrk="1" latinLnBrk="0" hangingPunct="1">
         <a:spcBef>
           <a:spcPct val="20000"/>
         </a:spcBef>
         <a:buFont typeface="Arial"/>
         <a:buChar char="•"/>
-        <a:defRPr kern="1200" sz="2000">
+        <a:defRPr sz="2000" kern="1200">
           <a:solidFill>
             <a:schemeClr val="tx1"/>
           </a:solidFill>
@@ -3009,13 +3009,13 @@
           <a:cs typeface="+mn-cs"/>
         </a:defRPr>
       </a:lvl1pPr>
-      <a:lvl2pPr algn="l" defTabSz="342900" eaLnBrk="1" hangingPunct="1" indent="-342900" latinLnBrk="0" marL="685800" rtl="0">
+      <a:lvl2pPr marL="685800" indent="-342900" algn="l" defTabSz="342900" rtl="0" eaLnBrk="1" latinLnBrk="0" hangingPunct="1">
         <a:spcBef>
           <a:spcPct val="20000"/>
         </a:spcBef>
         <a:buFont typeface="Arial"/>
         <a:buChar char="–"/>
-        <a:defRPr kern="1200" sz="2000">
+        <a:defRPr sz="2000" kern="1200">
           <a:solidFill>
             <a:schemeClr val="tx1"/>
           </a:solidFill>
@@ -3024,13 +3024,13 @@
           <a:cs typeface="+mn-cs"/>
         </a:defRPr>
       </a:lvl2pPr>
-      <a:lvl3pPr algn="l" defTabSz="342900" eaLnBrk="1" hangingPunct="1" indent="-342900" latinLnBrk="0" marL="1028700" rtl="0">
+      <a:lvl3pPr marL="1028700" indent="-342900" algn="l" defTabSz="342900" rtl="0" eaLnBrk="1" latinLnBrk="0" hangingPunct="1">
         <a:spcBef>
           <a:spcPct val="20000"/>
         </a:spcBef>
         <a:buFont typeface="Arial"/>
         <a:buChar char="•"/>
-        <a:defRPr kern="1200" sz="1600">
+        <a:defRPr sz="1600" kern="1200">
           <a:solidFill>
             <a:schemeClr val="tx1"/>
           </a:solidFill>
@@ -3039,13 +3039,13 @@
           <a:cs typeface="+mn-cs"/>
         </a:defRPr>
       </a:lvl3pPr>
-      <a:lvl4pPr algn="l" defTabSz="342900" eaLnBrk="1" hangingPunct="1" indent="-342900" latinLnBrk="0" marL="1371600" rtl="0">
+      <a:lvl4pPr marL="1371600" indent="-342900" algn="l" defTabSz="342900" rtl="0" eaLnBrk="1" latinLnBrk="0" hangingPunct="1">
         <a:spcBef>
           <a:spcPct val="20000"/>
         </a:spcBef>
         <a:buFont typeface="Arial"/>
         <a:buChar char="–"/>
-        <a:defRPr kern="1200" sz="1400">
+        <a:defRPr sz="1400" kern="1200">
           <a:solidFill>
             <a:schemeClr val="tx1"/>
           </a:solidFill>
@@ -3054,13 +3054,13 @@
           <a:cs typeface="+mn-cs"/>
         </a:defRPr>
       </a:lvl4pPr>
-      <a:lvl5pPr algn="l" defTabSz="342900" eaLnBrk="1" hangingPunct="1" indent="-342900" latinLnBrk="0" marL="1714500" rtl="0">
+      <a:lvl5pPr marL="1714500" indent="-342900" algn="l" defTabSz="342900" rtl="0" eaLnBrk="1" latinLnBrk="0" hangingPunct="1">
         <a:spcBef>
           <a:spcPct val="20000"/>
         </a:spcBef>
         <a:buFont typeface="Arial"/>
         <a:buChar char="»"/>
-        <a:defRPr kern="1200" sz="1400">
+        <a:defRPr sz="1400" kern="1200">
           <a:solidFill>
             <a:schemeClr val="tx1"/>
           </a:solidFill>
@@ -3069,13 +3069,13 @@
           <a:cs typeface="+mn-cs"/>
         </a:defRPr>
       </a:lvl5pPr>
-      <a:lvl6pPr algn="l" defTabSz="342900" eaLnBrk="1" hangingPunct="1" indent="-342900" latinLnBrk="0" marL="2057400" rtl="0">
+      <a:lvl6pPr marL="2057400" indent="-342900" algn="l" defTabSz="342900" rtl="0" eaLnBrk="1" latinLnBrk="0" hangingPunct="1">
         <a:spcBef>
           <a:spcPct val="20000"/>
         </a:spcBef>
         <a:buFont typeface="Arial"/>
         <a:buChar char="•"/>
-        <a:defRPr kern="1200" sz="1500">
+        <a:defRPr sz="1500" kern="1200">
           <a:solidFill>
             <a:schemeClr val="tx1"/>
           </a:solidFill>
@@ -3084,13 +3084,13 @@
           <a:cs typeface="+mn-cs"/>
         </a:defRPr>
       </a:lvl6pPr>
-      <a:lvl7pPr algn="l" defTabSz="342900" eaLnBrk="1" hangingPunct="1" indent="-342900" latinLnBrk="0" marL="2400300" rtl="0">
+      <a:lvl7pPr marL="2400300" indent="-342900" algn="l" defTabSz="342900" rtl="0" eaLnBrk="1" latinLnBrk="0" hangingPunct="1">
         <a:spcBef>
           <a:spcPct val="20000"/>
         </a:spcBef>
         <a:buFont typeface="Arial"/>
         <a:buChar char="•"/>
-        <a:defRPr kern="1200" sz="1500">
+        <a:defRPr sz="1500" kern="1200">
           <a:solidFill>
             <a:schemeClr val="tx1"/>
           </a:solidFill>
@@ -3099,13 +3099,13 @@
           <a:cs typeface="+mn-cs"/>
         </a:defRPr>
       </a:lvl7pPr>
-      <a:lvl8pPr algn="l" defTabSz="342900" eaLnBrk="1" hangingPunct="1" indent="-342900" latinLnBrk="0" marL="2743200" rtl="0">
+      <a:lvl8pPr marL="2743200" indent="-342900" algn="l" defTabSz="342900" rtl="0" eaLnBrk="1" latinLnBrk="0" hangingPunct="1">
         <a:spcBef>
           <a:spcPct val="20000"/>
         </a:spcBef>
         <a:buFont typeface="Arial"/>
         <a:buChar char="•"/>
-        <a:defRPr kern="1200" sz="1500">
+        <a:defRPr sz="1500" kern="1200">
           <a:solidFill>
             <a:schemeClr val="tx1"/>
           </a:solidFill>
@@ -3114,13 +3114,13 @@
           <a:cs typeface="+mn-cs"/>
         </a:defRPr>
       </a:lvl8pPr>
-      <a:lvl9pPr algn="l" defTabSz="342900" eaLnBrk="1" hangingPunct="1" indent="-342900" latinLnBrk="0" marL="3086100" rtl="0">
+      <a:lvl9pPr marL="3086100" indent="-342900" algn="l" defTabSz="342900" rtl="0" eaLnBrk="1" latinLnBrk="0" hangingPunct="1">
         <a:spcBef>
           <a:spcPct val="20000"/>
         </a:spcBef>
         <a:buFont typeface="Arial"/>
         <a:buChar char="•"/>
-        <a:defRPr kern="1200" sz="1500">
+        <a:defRPr sz="1500" kern="1200">
           <a:solidFill>
             <a:schemeClr val="tx1"/>
           </a:solidFill>
@@ -3134,8 +3134,8 @@
       <a:defPPr>
         <a:defRPr lang="en-US"/>
       </a:defPPr>
-      <a:lvl1pPr algn="l" defTabSz="342900" eaLnBrk="1" hangingPunct="1" latinLnBrk="0" marL="0" rtl="0">
-        <a:defRPr kern="1200" sz="1350">
+      <a:lvl1pPr marL="0" algn="l" defTabSz="342900" rtl="0" eaLnBrk="1" latinLnBrk="0" hangingPunct="1">
+        <a:defRPr sz="1350" kern="1200">
           <a:solidFill>
             <a:schemeClr val="tx1"/>
           </a:solidFill>
@@ -3144,8 +3144,8 @@
           <a:cs typeface="+mn-cs"/>
         </a:defRPr>
       </a:lvl1pPr>
-      <a:lvl2pPr algn="l" defTabSz="342900" eaLnBrk="1" hangingPunct="1" latinLnBrk="0" marL="342900" rtl="0">
-        <a:defRPr kern="1200" sz="1350">
+      <a:lvl2pPr marL="342900" algn="l" defTabSz="342900" rtl="0" eaLnBrk="1" latinLnBrk="0" hangingPunct="1">
+        <a:defRPr sz="1350" kern="1200">
           <a:solidFill>
             <a:schemeClr val="tx1"/>
           </a:solidFill>
@@ -3154,8 +3154,8 @@
           <a:cs typeface="+mn-cs"/>
         </a:defRPr>
       </a:lvl2pPr>
-      <a:lvl3pPr algn="l" defTabSz="342900" eaLnBrk="1" hangingPunct="1" latinLnBrk="0" marL="685800" rtl="0">
-        <a:defRPr kern="1200" sz="1350">
+      <a:lvl3pPr marL="685800" algn="l" defTabSz="342900" rtl="0" eaLnBrk="1" latinLnBrk="0" hangingPunct="1">
+        <a:defRPr sz="1350" kern="1200">
           <a:solidFill>
             <a:schemeClr val="tx1"/>
           </a:solidFill>
@@ -3164,8 +3164,8 @@
           <a:cs typeface="+mn-cs"/>
         </a:defRPr>
       </a:lvl3pPr>
-      <a:lvl4pPr algn="l" defTabSz="342900" eaLnBrk="1" hangingPunct="1" latinLnBrk="0" marL="1028700" rtl="0">
-        <a:defRPr kern="1200" sz="1350">
+      <a:lvl4pPr marL="1028700" algn="l" defTabSz="342900" rtl="0" eaLnBrk="1" latinLnBrk="0" hangingPunct="1">
+        <a:defRPr sz="1350" kern="1200">
           <a:solidFill>
             <a:schemeClr val="tx1"/>
           </a:solidFill>
@@ -3174,8 +3174,8 @@
           <a:cs typeface="+mn-cs"/>
         </a:defRPr>
       </a:lvl4pPr>
-      <a:lvl5pPr algn="l" defTabSz="342900" eaLnBrk="1" hangingPunct="1" latinLnBrk="0" marL="1371600" rtl="0">
-        <a:defRPr kern="1200" sz="1350">
+      <a:lvl5pPr marL="1371600" algn="l" defTabSz="342900" rtl="0" eaLnBrk="1" latinLnBrk="0" hangingPunct="1">
+        <a:defRPr sz="1350" kern="1200">
           <a:solidFill>
             <a:schemeClr val="tx1"/>
           </a:solidFill>
@@ -3184,8 +3184,8 @@
           <a:cs typeface="+mn-cs"/>
         </a:defRPr>
       </a:lvl5pPr>
-      <a:lvl6pPr algn="l" defTabSz="342900" eaLnBrk="1" hangingPunct="1" latinLnBrk="0" marL="1714500" rtl="0">
-        <a:defRPr kern="1200" sz="1350">
+      <a:lvl6pPr marL="1714500" algn="l" defTabSz="342900" rtl="0" eaLnBrk="1" latinLnBrk="0" hangingPunct="1">
+        <a:defRPr sz="1350" kern="1200">
           <a:solidFill>
             <a:schemeClr val="tx1"/>
           </a:solidFill>
@@ -3194,8 +3194,8 @@
           <a:cs typeface="+mn-cs"/>
         </a:defRPr>
       </a:lvl6pPr>
-      <a:lvl7pPr algn="l" defTabSz="342900" eaLnBrk="1" hangingPunct="1" latinLnBrk="0" marL="2057400" rtl="0">
-        <a:defRPr kern="1200" sz="1350">
+      <a:lvl7pPr marL="2057400" algn="l" defTabSz="342900" rtl="0" eaLnBrk="1" latinLnBrk="0" hangingPunct="1">
+        <a:defRPr sz="1350" kern="1200">
           <a:solidFill>
             <a:schemeClr val="tx1"/>
           </a:solidFill>
@@ -3204,8 +3204,8 @@
           <a:cs typeface="+mn-cs"/>
         </a:defRPr>
       </a:lvl7pPr>
-      <a:lvl8pPr algn="l" defTabSz="342900" eaLnBrk="1" hangingPunct="1" latinLnBrk="0" marL="2400300" rtl="0">
-        <a:defRPr kern="1200" sz="1350">
+      <a:lvl8pPr marL="2400300" algn="l" defTabSz="342900" rtl="0" eaLnBrk="1" latinLnBrk="0" hangingPunct="1">
+        <a:defRPr sz="1350" kern="1200">
           <a:solidFill>
             <a:schemeClr val="tx1"/>
           </a:solidFill>
@@ -3214,8 +3214,8 @@
           <a:cs typeface="+mn-cs"/>
         </a:defRPr>
       </a:lvl8pPr>
-      <a:lvl9pPr algn="l" defTabSz="342900" eaLnBrk="1" hangingPunct="1" latinLnBrk="0" marL="2743200" rtl="0">
-        <a:defRPr kern="1200" sz="1350">
+      <a:lvl9pPr marL="2743200" algn="l" defTabSz="342900" rtl="0" eaLnBrk="1" latinLnBrk="0" hangingPunct="1">
+        <a:defRPr sz="1350" kern="1200">
           <a:solidFill>
             <a:schemeClr val="tx1"/>
           </a:solidFill>
@@ -3253,7 +3253,7 @@
             <a:spLocks noGrp="1"/>
           </p:cNvSpPr>
           <p:nvPr>
-            <p:ph type="title"/>
+            <p:ph type="ctrTitle"/>
           </p:nvPr>
         </p:nvSpPr>
         <p:spPr/>
@@ -3261,11 +3261,10 @@
           <a:bodyPr/>
           <a:lstStyle/>
           <a:p>
-            <a:pPr lvl="0" indent="0" marL="0">
-              <a:buNone/>
-            </a:pPr>
-            <a:r>
-              <a:rPr/>
+            <a:pPr marL="0" lvl="0" indent="0">
+              <a:buNone/>
+            </a:pPr>
+            <a:r>
               <a:t>Лекция 1</a:t>
             </a:r>
           </a:p>
@@ -3278,15 +3277,17 @@
             <a:spLocks noGrp="1"/>
           </p:cNvSpPr>
           <p:nvPr>
-            <p:ph idx="1"/>
+            <p:ph type="subTitle" idx="1"/>
           </p:nvPr>
         </p:nvSpPr>
         <p:spPr/>
         <p:txBody>
-          <a:bodyPr/>
-          <a:lstStyle/>
-          <a:p>
-            <a:pPr lvl="0" indent="0" marL="0">
+          <a:bodyPr>
+            <a:normAutofit fontScale="70000" lnSpcReduction="20000"/>
+          </a:bodyPr>
+          <a:lstStyle/>
+          <a:p>
+            <a:pPr marL="0" lvl="0" indent="0">
               <a:buNone/>
             </a:pPr>
             <a:r>
@@ -3295,7 +3296,7 @@
             </a:r>
           </a:p>
           <a:p>
-            <a:pPr lvl="0" indent="0" marL="0">
+            <a:pPr marL="0" lvl="0" indent="0">
               <a:spcBef>
                 <a:spcPts val="3000"/>
               </a:spcBef>
@@ -3307,11 +3308,10 @@
             </a:r>
           </a:p>
           <a:p>
-            <a:pPr lvl="0" indent="0" marL="0">
-              <a:buNone/>
-            </a:pPr>
-            <a:r>
-              <a:rPr/>
+            <a:pPr marL="0" lvl="0" indent="0">
+              <a:buNone/>
+            </a:pPr>
+            <a:r>
               <a:t>(Лекции 32 часа, практ занятия 32 часа)</a:t>
             </a:r>
           </a:p>
@@ -3319,6 +3319,9 @@
       </p:sp>
     </p:spTree>
   </p:cSld>
+  <p:clrMapOvr>
+    <a:masterClrMapping/>
+  </p:clrMapOvr>
 </p:sld>
 </file>
 
@@ -3354,11 +3357,10 @@
           <a:bodyPr/>
           <a:lstStyle/>
           <a:p>
-            <a:pPr lvl="0" indent="0" marL="0">
-              <a:buNone/>
-            </a:pPr>
-            <a:r>
-              <a:rPr/>
+            <a:pPr marL="0" lvl="0" indent="0">
+              <a:buNone/>
+            </a:pPr>
+            <a:r>
               <a:t>Глоссарий (1)</a:t>
             </a:r>
           </a:p>
@@ -3384,7 +3386,7 @@
           <a:bodyPr/>
           <a:lstStyle/>
           <a:p>
-            <a:pPr lvl="0" indent="0" marL="0">
+            <a:pPr marL="0" lvl="0" indent="0">
               <a:buNone/>
             </a:pPr>
             <a:r>
@@ -3406,7 +3408,7 @@
         </p:nvGraphicFramePr>
         <p:xfrm>
           <a:off x="457200" y="1549400"/>
-          <a:ext cx="8229600" cy="2146300"/>
+          <a:ext cx="8229600" cy="2400300"/>
         </p:xfrm>
         <a:graphic>
           <a:graphicData uri="http://schemas.openxmlformats.org/drawingml/2006/table">
@@ -3415,8 +3417,20 @@
                 <a:tableStyleId>{5C22544A-7EE6-4342-B048-85BDC9FD1C3A}</a:tableStyleId>
               </a:tblPr>
               <a:tblGrid>
-                <a:gridCol w="4114800"/>
-                <a:gridCol w="4114800"/>
+                <a:gridCol w="4114800">
+                  <a:extLst>
+                    <a:ext uri="{9D8B030D-6E8A-4147-A177-3AD203B41FA5}">
+                      <a16:colId xmlns:a16="http://schemas.microsoft.com/office/drawing/2014/main" val="20000"/>
+                    </a:ext>
+                  </a:extLst>
+                </a:gridCol>
+                <a:gridCol w="4114800">
+                  <a:extLst>
+                    <a:ext uri="{9D8B030D-6E8A-4147-A177-3AD203B41FA5}">
+                      <a16:colId xmlns:a16="http://schemas.microsoft.com/office/drawing/2014/main" val="20001"/>
+                    </a:ext>
+                  </a:extLst>
+                </a:gridCol>
               </a:tblGrid>
               <a:tr h="0">
                 <a:tc>
@@ -3424,11 +3438,10 @@
                     <a:bodyPr/>
                     <a:lstStyle/>
                     <a:p>
-                      <a:pPr lvl="0" indent="0" marL="0">
-                        <a:buNone/>
-                      </a:pPr>
-                      <a:r>
-                        <a:rPr/>
+                      <a:pPr marL="0" lvl="0" indent="0">
+                        <a:buNone/>
+                      </a:pPr>
+                      <a:r>
                         <a:t>Понятие</a:t>
                       </a:r>
                     </a:p>
@@ -3440,17 +3453,21 @@
                     <a:bodyPr/>
                     <a:lstStyle/>
                     <a:p>
-                      <a:pPr lvl="0" indent="0" marL="0">
-                        <a:buNone/>
-                      </a:pPr>
-                      <a:r>
-                        <a:rPr/>
+                      <a:pPr marL="0" lvl="0" indent="0">
+                        <a:buNone/>
+                      </a:pPr>
+                      <a:r>
                         <a:t>Смысл</a:t>
                       </a:r>
                     </a:p>
                   </a:txBody>
                   <a:tcPr/>
                 </a:tc>
+                <a:extLst>
+                  <a:ext uri="{0D108BD9-81ED-4DB2-BD59-A6C34878D82A}">
+                    <a16:rowId xmlns:a16="http://schemas.microsoft.com/office/drawing/2014/main" val="10000"/>
+                  </a:ext>
+                </a:extLst>
               </a:tr>
               <a:tr h="0">
                 <a:tc>
@@ -3458,31 +3475,36 @@
                     <a:bodyPr/>
                     <a:lstStyle/>
                     <a:p>
-                      <a:pPr lvl="0" indent="0" marL="0">
-                        <a:buNone/>
-                      </a:pPr>
-                      <a:r>
-                        <a:rPr/>
+                      <a:pPr marL="0" lvl="0" indent="0">
+                        <a:buNone/>
+                      </a:pPr>
+                      <a:r>
                         <a:t>Технический регламент</a:t>
                       </a:r>
                     </a:p>
                   </a:txBody>
-                </a:tc>
-                <a:tc>
-                  <a:txBody>
-                    <a:bodyPr/>
-                    <a:lstStyle/>
-                    <a:p>
-                      <a:pPr lvl="0" indent="0" marL="0">
-                        <a:buNone/>
-                      </a:pPr>
-                      <a:r>
-                        <a:rPr/>
+                  <a:tcPr/>
+                </a:tc>
+                <a:tc>
+                  <a:txBody>
+                    <a:bodyPr/>
+                    <a:lstStyle/>
+                    <a:p>
+                      <a:pPr marL="0" lvl="0" indent="0">
+                        <a:buNone/>
+                      </a:pPr>
+                      <a:r>
                         <a:t>обязательные требования в сфере, предусмотренной законом</a:t>
                       </a:r>
                     </a:p>
                   </a:txBody>
-                </a:tc>
+                  <a:tcPr/>
+                </a:tc>
+                <a:extLst>
+                  <a:ext uri="{0D108BD9-81ED-4DB2-BD59-A6C34878D82A}">
+                    <a16:rowId xmlns:a16="http://schemas.microsoft.com/office/drawing/2014/main" val="10001"/>
+                  </a:ext>
+                </a:extLst>
               </a:tr>
               <a:tr h="0">
                 <a:tc>
@@ -3490,31 +3512,36 @@
                     <a:bodyPr/>
                     <a:lstStyle/>
                     <a:p>
-                      <a:pPr lvl="0" indent="0" marL="0">
-                        <a:buNone/>
-                      </a:pPr>
-                      <a:r>
-                        <a:rPr/>
+                      <a:pPr marL="0" lvl="0" indent="0">
+                        <a:buNone/>
+                      </a:pPr>
+                      <a:r>
                         <a:t>Документ по стандартизации</a:t>
                       </a:r>
                     </a:p>
                   </a:txBody>
-                </a:tc>
-                <a:tc>
-                  <a:txBody>
-                    <a:bodyPr/>
-                    <a:lstStyle/>
-                    <a:p>
-                      <a:pPr lvl="0" indent="0" marL="0">
-                        <a:buNone/>
-                      </a:pPr>
-                      <a:r>
-                        <a:rPr/>
+                  <a:tcPr/>
+                </a:tc>
+                <a:tc>
+                  <a:txBody>
+                    <a:bodyPr/>
+                    <a:lstStyle/>
+                    <a:p>
+                      <a:pPr marL="0" lvl="0" indent="0">
+                        <a:buNone/>
+                      </a:pPr>
+                      <a:r>
                         <a:t>в общем случае добровольное многократное использование</a:t>
                       </a:r>
                     </a:p>
                   </a:txBody>
-                </a:tc>
+                  <a:tcPr/>
+                </a:tc>
+                <a:extLst>
+                  <a:ext uri="{0D108BD9-81ED-4DB2-BD59-A6C34878D82A}">
+                    <a16:rowId xmlns:a16="http://schemas.microsoft.com/office/drawing/2014/main" val="10002"/>
+                  </a:ext>
+                </a:extLst>
               </a:tr>
               <a:tr h="0">
                 <a:tc>
@@ -3522,31 +3549,36 @@
                     <a:bodyPr/>
                     <a:lstStyle/>
                     <a:p>
-                      <a:pPr lvl="0" indent="0" marL="0">
-                        <a:buNone/>
-                      </a:pPr>
-                      <a:r>
-                        <a:rPr/>
+                      <a:pPr marL="0" lvl="0" indent="0">
+                        <a:buNone/>
+                      </a:pPr>
+                      <a:r>
                         <a:t>Национальный стандарт</a:t>
                       </a:r>
                     </a:p>
                   </a:txBody>
-                </a:tc>
-                <a:tc>
-                  <a:txBody>
-                    <a:bodyPr/>
-                    <a:lstStyle/>
-                    <a:p>
-                      <a:pPr lvl="0" indent="0" marL="0">
-                        <a:buNone/>
-                      </a:pPr>
-                      <a:r>
-                        <a:rPr/>
+                  <a:tcPr/>
+                </a:tc>
+                <a:tc>
+                  <a:txBody>
+                    <a:bodyPr/>
+                    <a:lstStyle/>
+                    <a:p>
+                      <a:pPr marL="0" lvl="0" indent="0">
+                        <a:buNone/>
+                      </a:pPr>
+                      <a:r>
                         <a:t>утверждён национальным органом по стандартизации</a:t>
                       </a:r>
                     </a:p>
                   </a:txBody>
-                </a:tc>
+                  <a:tcPr/>
+                </a:tc>
+                <a:extLst>
+                  <a:ext uri="{0D108BD9-81ED-4DB2-BD59-A6C34878D82A}">
+                    <a16:rowId xmlns:a16="http://schemas.microsoft.com/office/drawing/2014/main" val="10003"/>
+                  </a:ext>
+                </a:extLst>
               </a:tr>
               <a:tr h="0">
                 <a:tc>
@@ -3554,31 +3586,36 @@
                     <a:bodyPr/>
                     <a:lstStyle/>
                     <a:p>
-                      <a:pPr lvl="0" indent="0" marL="0">
-                        <a:buNone/>
-                      </a:pPr>
-                      <a:r>
-                        <a:rPr/>
+                      <a:pPr marL="0" lvl="0" indent="0">
+                        <a:buNone/>
+                      </a:pPr>
+                      <a:r>
                         <a:t>ПНСТ</a:t>
                       </a:r>
                     </a:p>
                   </a:txBody>
-                </a:tc>
-                <a:tc>
-                  <a:txBody>
-                    <a:bodyPr/>
-                    <a:lstStyle/>
-                    <a:p>
-                      <a:pPr lvl="0" indent="0" marL="0">
-                        <a:buNone/>
-                      </a:pPr>
-                      <a:r>
-                        <a:rPr/>
+                  <a:tcPr/>
+                </a:tc>
+                <a:tc>
+                  <a:txBody>
+                    <a:bodyPr/>
+                    <a:lstStyle/>
+                    <a:p>
+                      <a:pPr marL="0" lvl="0" indent="0">
+                        <a:buNone/>
+                      </a:pPr>
+                      <a:r>
                         <a:t>документ для апробации, срок — не более трёх лет</a:t>
                       </a:r>
                     </a:p>
                   </a:txBody>
-                </a:tc>
+                  <a:tcPr/>
+                </a:tc>
+                <a:extLst>
+                  <a:ext uri="{0D108BD9-81ED-4DB2-BD59-A6C34878D82A}">
+                    <a16:rowId xmlns:a16="http://schemas.microsoft.com/office/drawing/2014/main" val="10004"/>
+                  </a:ext>
+                </a:extLst>
               </a:tr>
               <a:tr h="0">
                 <a:tc>
@@ -3586,31 +3623,36 @@
                     <a:bodyPr/>
                     <a:lstStyle/>
                     <a:p>
-                      <a:pPr lvl="0" indent="0" marL="0">
-                        <a:buNone/>
-                      </a:pPr>
-                      <a:r>
-                        <a:rPr/>
+                      <a:pPr marL="0" lvl="0" indent="0">
+                        <a:buNone/>
+                      </a:pPr>
+                      <a:r>
                         <a:t>Стандарт организации</a:t>
                       </a:r>
                     </a:p>
                   </a:txBody>
-                </a:tc>
-                <a:tc>
-                  <a:txBody>
-                    <a:bodyPr/>
-                    <a:lstStyle/>
-                    <a:p>
-                      <a:pPr lvl="0" indent="0" marL="0">
-                        <a:buNone/>
-                      </a:pPr>
-                      <a:r>
-                        <a:rPr/>
+                  <a:tcPr/>
+                </a:tc>
+                <a:tc>
+                  <a:txBody>
+                    <a:bodyPr/>
+                    <a:lstStyle/>
+                    <a:p>
+                      <a:pPr marL="0" lvl="0" indent="0">
+                        <a:buNone/>
+                      </a:pPr>
+                      <a:r>
                         <a:t>утверждает организация для своих нужд</a:t>
                       </a:r>
                     </a:p>
                   </a:txBody>
-                </a:tc>
+                  <a:tcPr/>
+                </a:tc>
+                <a:extLst>
+                  <a:ext uri="{0D108BD9-81ED-4DB2-BD59-A6C34878D82A}">
+                    <a16:rowId xmlns:a16="http://schemas.microsoft.com/office/drawing/2014/main" val="10005"/>
+                  </a:ext>
+                </a:extLst>
               </a:tr>
             </a:tbl>
           </a:graphicData>
@@ -3618,7 +3660,7 @@
       </p:graphicFrame>
       <p:sp>
         <p:nvSpPr>
-          <p:cNvPr id="3" name="Content Placeholder 2"/>
+          <p:cNvPr id="4" name="Content Placeholder 2"/>
           <p:cNvSpPr>
             <a:spLocks noGrp="1"/>
           </p:cNvSpPr>
@@ -3636,11 +3678,10 @@
           <a:bodyPr/>
           <a:lstStyle/>
           <a:p>
-            <a:pPr lvl="0" indent="0" marL="0">
-              <a:buNone/>
-            </a:pPr>
-            <a:r>
-              <a:rPr/>
+            <a:pPr marL="0" lvl="0" indent="0">
+              <a:buNone/>
+            </a:pPr>
+            <a:r>
               <a:t>Формулировки учебные; точные определения — в тексте закона.</a:t>
             </a:r>
           </a:p>
@@ -3648,6 +3689,9 @@
       </p:sp>
     </p:spTree>
   </p:cSld>
+  <p:clrMapOvr>
+    <a:masterClrMapping/>
+  </p:clrMapOvr>
 </p:sld>
 </file>
 
@@ -3683,11 +3727,10 @@
           <a:bodyPr/>
           <a:lstStyle/>
           <a:p>
-            <a:pPr lvl="0" indent="0" marL="0">
-              <a:buNone/>
-            </a:pPr>
-            <a:r>
-              <a:rPr/>
+            <a:pPr marL="0" lvl="0" indent="0">
+              <a:buNone/>
+            </a:pPr>
+            <a:r>
               <a:t>Глоссарий (2)</a:t>
             </a:r>
           </a:p>
@@ -3713,7 +3756,7 @@
           <a:bodyPr/>
           <a:lstStyle/>
           <a:p>
-            <a:pPr lvl="0" indent="0" marL="0">
+            <a:pPr marL="0" lvl="0" indent="0">
               <a:buNone/>
             </a:pPr>
             <a:r>
@@ -3735,7 +3778,7 @@
         </p:nvGraphicFramePr>
         <p:xfrm>
           <a:off x="457200" y="1625600"/>
-          <a:ext cx="8229600" cy="2832100"/>
+          <a:ext cx="8229600" cy="2286000"/>
         </p:xfrm>
         <a:graphic>
           <a:graphicData uri="http://schemas.openxmlformats.org/drawingml/2006/table">
@@ -3744,8 +3787,20 @@
                 <a:tableStyleId>{5C22544A-7EE6-4342-B048-85BDC9FD1C3A}</a:tableStyleId>
               </a:tblPr>
               <a:tblGrid>
-                <a:gridCol w="4114800"/>
-                <a:gridCol w="4114800"/>
+                <a:gridCol w="4114800">
+                  <a:extLst>
+                    <a:ext uri="{9D8B030D-6E8A-4147-A177-3AD203B41FA5}">
+                      <a16:colId xmlns:a16="http://schemas.microsoft.com/office/drawing/2014/main" val="20000"/>
+                    </a:ext>
+                  </a:extLst>
+                </a:gridCol>
+                <a:gridCol w="4114800">
+                  <a:extLst>
+                    <a:ext uri="{9D8B030D-6E8A-4147-A177-3AD203B41FA5}">
+                      <a16:colId xmlns:a16="http://schemas.microsoft.com/office/drawing/2014/main" val="20001"/>
+                    </a:ext>
+                  </a:extLst>
+                </a:gridCol>
               </a:tblGrid>
               <a:tr h="0">
                 <a:tc>
@@ -3753,11 +3808,10 @@
                     <a:bodyPr/>
                     <a:lstStyle/>
                     <a:p>
-                      <a:pPr lvl="0" indent="0" marL="0">
-                        <a:buNone/>
-                      </a:pPr>
-                      <a:r>
-                        <a:rPr/>
+                      <a:pPr marL="0" lvl="0" indent="0">
+                        <a:buNone/>
+                      </a:pPr>
+                      <a:r>
                         <a:t>Понятие</a:t>
                       </a:r>
                     </a:p>
@@ -3769,17 +3823,21 @@
                     <a:bodyPr/>
                     <a:lstStyle/>
                     <a:p>
-                      <a:pPr lvl="0" indent="0" marL="0">
-                        <a:buNone/>
-                      </a:pPr>
-                      <a:r>
-                        <a:rPr/>
+                      <a:pPr marL="0" lvl="0" indent="0">
+                        <a:buNone/>
+                      </a:pPr>
+                      <a:r>
                         <a:t>Смысл</a:t>
                       </a:r>
                     </a:p>
                   </a:txBody>
                   <a:tcPr/>
                 </a:tc>
+                <a:extLst>
+                  <a:ext uri="{0D108BD9-81ED-4DB2-BD59-A6C34878D82A}">
+                    <a16:rowId xmlns:a16="http://schemas.microsoft.com/office/drawing/2014/main" val="10000"/>
+                  </a:ext>
+                </a:extLst>
               </a:tr>
               <a:tr h="0">
                 <a:tc>
@@ -3787,31 +3845,36 @@
                     <a:bodyPr/>
                     <a:lstStyle/>
                     <a:p>
-                      <a:pPr lvl="0" indent="0" marL="0">
-                        <a:buNone/>
-                      </a:pPr>
-                      <a:r>
-                        <a:rPr/>
+                      <a:pPr marL="0" lvl="0" indent="0">
+                        <a:buNone/>
+                      </a:pPr>
+                      <a:r>
                         <a:t>Подтверждение соответствия</a:t>
                       </a:r>
                     </a:p>
                   </a:txBody>
-                </a:tc>
-                <a:tc>
-                  <a:txBody>
-                    <a:bodyPr/>
-                    <a:lstStyle/>
-                    <a:p>
-                      <a:pPr lvl="0" indent="0" marL="0">
-                        <a:buNone/>
-                      </a:pPr>
-                      <a:r>
-                        <a:rPr/>
+                  <a:tcPr/>
+                </a:tc>
+                <a:tc>
+                  <a:txBody>
+                    <a:bodyPr/>
+                    <a:lstStyle/>
+                    <a:p>
+                      <a:pPr marL="0" lvl="0" indent="0">
+                        <a:buNone/>
+                      </a:pPr>
+                      <a:r>
                         <a:t>документальное удостоверение соответствия</a:t>
                       </a:r>
                     </a:p>
                   </a:txBody>
-                </a:tc>
+                  <a:tcPr/>
+                </a:tc>
+                <a:extLst>
+                  <a:ext uri="{0D108BD9-81ED-4DB2-BD59-A6C34878D82A}">
+                    <a16:rowId xmlns:a16="http://schemas.microsoft.com/office/drawing/2014/main" val="10001"/>
+                  </a:ext>
+                </a:extLst>
               </a:tr>
               <a:tr h="0">
                 <a:tc>
@@ -3819,31 +3882,36 @@
                     <a:bodyPr/>
                     <a:lstStyle/>
                     <a:p>
-                      <a:pPr lvl="0" indent="0" marL="0">
-                        <a:buNone/>
-                      </a:pPr>
-                      <a:r>
-                        <a:rPr/>
+                      <a:pPr marL="0" lvl="0" indent="0">
+                        <a:buNone/>
+                      </a:pPr>
+                      <a:r>
                         <a:t>Декларирование</a:t>
                       </a:r>
                     </a:p>
                   </a:txBody>
-                </a:tc>
-                <a:tc>
-                  <a:txBody>
-                    <a:bodyPr/>
-                    <a:lstStyle/>
-                    <a:p>
-                      <a:pPr lvl="0" indent="0" marL="0">
-                        <a:buNone/>
-                      </a:pPr>
-                      <a:r>
-                        <a:rPr/>
+                  <a:tcPr/>
+                </a:tc>
+                <a:tc>
+                  <a:txBody>
+                    <a:bodyPr/>
+                    <a:lstStyle/>
+                    <a:p>
+                      <a:pPr marL="0" lvl="0" indent="0">
+                        <a:buNone/>
+                      </a:pPr>
+                      <a:r>
                         <a:t>заявитель сам принимает декларацию</a:t>
                       </a:r>
                     </a:p>
                   </a:txBody>
-                </a:tc>
+                  <a:tcPr/>
+                </a:tc>
+                <a:extLst>
+                  <a:ext uri="{0D108BD9-81ED-4DB2-BD59-A6C34878D82A}">
+                    <a16:rowId xmlns:a16="http://schemas.microsoft.com/office/drawing/2014/main" val="10002"/>
+                  </a:ext>
+                </a:extLst>
               </a:tr>
               <a:tr h="0">
                 <a:tc>
@@ -3851,31 +3919,36 @@
                     <a:bodyPr/>
                     <a:lstStyle/>
                     <a:p>
-                      <a:pPr lvl="0" indent="0" marL="0">
-                        <a:buNone/>
-                      </a:pPr>
-                      <a:r>
-                        <a:rPr/>
+                      <a:pPr marL="0" lvl="0" indent="0">
+                        <a:buNone/>
+                      </a:pPr>
+                      <a:r>
                         <a:t>Обязательная сертификация</a:t>
                       </a:r>
                     </a:p>
                   </a:txBody>
-                </a:tc>
-                <a:tc>
-                  <a:txBody>
-                    <a:bodyPr/>
-                    <a:lstStyle/>
-                    <a:p>
-                      <a:pPr lvl="0" indent="0" marL="0">
-                        <a:buNone/>
-                      </a:pPr>
-                      <a:r>
-                        <a:rPr/>
+                  <a:tcPr/>
+                </a:tc>
+                <a:tc>
+                  <a:txBody>
+                    <a:bodyPr/>
+                    <a:lstStyle/>
+                    <a:p>
+                      <a:pPr marL="0" lvl="0" indent="0">
+                        <a:buNone/>
+                      </a:pPr>
+                      <a:r>
                         <a:t>с участием органа по сертификации</a:t>
                       </a:r>
                     </a:p>
                   </a:txBody>
-                </a:tc>
+                  <a:tcPr/>
+                </a:tc>
+                <a:extLst>
+                  <a:ext uri="{0D108BD9-81ED-4DB2-BD59-A6C34878D82A}">
+                    <a16:rowId xmlns:a16="http://schemas.microsoft.com/office/drawing/2014/main" val="10003"/>
+                  </a:ext>
+                </a:extLst>
               </a:tr>
               <a:tr h="0">
                 <a:tc>
@@ -3883,31 +3956,36 @@
                     <a:bodyPr/>
                     <a:lstStyle/>
                     <a:p>
-                      <a:pPr lvl="0" indent="0" marL="0">
-                        <a:buNone/>
-                      </a:pPr>
-                      <a:r>
-                        <a:rPr/>
+                      <a:pPr marL="0" lvl="0" indent="0">
+                        <a:buNone/>
+                      </a:pPr>
+                      <a:r>
                         <a:t>Аккредитация</a:t>
                       </a:r>
                     </a:p>
                   </a:txBody>
-                </a:tc>
-                <a:tc>
-                  <a:txBody>
-                    <a:bodyPr/>
-                    <a:lstStyle/>
-                    <a:p>
-                      <a:pPr lvl="0" indent="0" marL="0">
-                        <a:buNone/>
-                      </a:pPr>
-                      <a:r>
-                        <a:rPr/>
+                  <a:tcPr/>
+                </a:tc>
+                <a:tc>
+                  <a:txBody>
+                    <a:bodyPr/>
+                    <a:lstStyle/>
+                    <a:p>
+                      <a:pPr marL="0" lvl="0" indent="0">
+                        <a:buNone/>
+                      </a:pPr>
+                      <a:r>
                         <a:t>подтверждение компетентности в области</a:t>
                       </a:r>
                     </a:p>
                   </a:txBody>
-                </a:tc>
+                  <a:tcPr/>
+                </a:tc>
+                <a:extLst>
+                  <a:ext uri="{0D108BD9-81ED-4DB2-BD59-A6C34878D82A}">
+                    <a16:rowId xmlns:a16="http://schemas.microsoft.com/office/drawing/2014/main" val="10004"/>
+                  </a:ext>
+                </a:extLst>
               </a:tr>
               <a:tr h="0">
                 <a:tc>
@@ -3915,31 +3993,36 @@
                     <a:bodyPr/>
                     <a:lstStyle/>
                     <a:p>
-                      <a:pPr lvl="0" indent="0" marL="0">
-                        <a:buNone/>
-                      </a:pPr>
-                      <a:r>
-                        <a:rPr/>
+                      <a:pPr marL="0" lvl="0" indent="0">
+                        <a:buNone/>
+                      </a:pPr>
+                      <a:r>
                         <a:t>Испытание</a:t>
                       </a:r>
                     </a:p>
                   </a:txBody>
-                </a:tc>
-                <a:tc>
-                  <a:txBody>
-                    <a:bodyPr/>
-                    <a:lstStyle/>
-                    <a:p>
-                      <a:pPr lvl="0" indent="0" marL="0">
-                        <a:buNone/>
-                      </a:pPr>
-                      <a:r>
-                        <a:rPr/>
+                  <a:tcPr/>
+                </a:tc>
+                <a:tc>
+                  <a:txBody>
+                    <a:bodyPr/>
+                    <a:lstStyle/>
+                    <a:p>
+                      <a:pPr marL="0" lvl="0" indent="0">
+                        <a:buNone/>
+                      </a:pPr>
+                      <a:r>
                         <a:t>определение характеристик по методике</a:t>
                       </a:r>
                     </a:p>
                   </a:txBody>
-                </a:tc>
+                  <a:tcPr/>
+                </a:tc>
+                <a:extLst>
+                  <a:ext uri="{0D108BD9-81ED-4DB2-BD59-A6C34878D82A}">
+                    <a16:rowId xmlns:a16="http://schemas.microsoft.com/office/drawing/2014/main" val="10005"/>
+                  </a:ext>
+                </a:extLst>
               </a:tr>
               <a:tr h="0">
                 <a:tc>
@@ -3947,31 +4030,36 @@
                     <a:bodyPr/>
                     <a:lstStyle/>
                     <a:p>
-                      <a:pPr lvl="0" indent="0" marL="0">
-                        <a:buNone/>
-                      </a:pPr>
-                      <a:r>
-                        <a:rPr/>
+                      <a:pPr marL="0" lvl="0" indent="0">
+                        <a:buNone/>
+                      </a:pPr>
+                      <a:r>
                         <a:t>Доказательство</a:t>
                       </a:r>
                     </a:p>
                   </a:txBody>
-                </a:tc>
-                <a:tc>
-                  <a:txBody>
-                    <a:bodyPr/>
-                    <a:lstStyle/>
-                    <a:p>
-                      <a:pPr lvl="0" indent="0" marL="0">
-                        <a:buNone/>
-                      </a:pPr>
-                      <a:r>
-                        <a:rPr/>
+                  <a:tcPr/>
+                </a:tc>
+                <a:tc>
+                  <a:txBody>
+                    <a:bodyPr/>
+                    <a:lstStyle/>
+                    <a:p>
+                      <a:pPr marL="0" lvl="0" indent="0">
+                        <a:buNone/>
+                      </a:pPr>
+                      <a:r>
                         <a:t>документированный факт, на который опирается вывод</a:t>
                       </a:r>
                     </a:p>
                   </a:txBody>
-                </a:tc>
+                  <a:tcPr/>
+                </a:tc>
+                <a:extLst>
+                  <a:ext uri="{0D108BD9-81ED-4DB2-BD59-A6C34878D82A}">
+                    <a16:rowId xmlns:a16="http://schemas.microsoft.com/office/drawing/2014/main" val="10006"/>
+                  </a:ext>
+                </a:extLst>
               </a:tr>
             </a:tbl>
           </a:graphicData>
@@ -3979,6 +4067,9 @@
       </p:graphicFrame>
     </p:spTree>
   </p:cSld>
+  <p:clrMapOvr>
+    <a:masterClrMapping/>
+  </p:clrMapOvr>
 </p:sld>
 </file>
 
@@ -4014,11 +4105,10 @@
           <a:bodyPr/>
           <a:lstStyle/>
           <a:p>
-            <a:pPr lvl="0" indent="0" marL="0">
-              <a:buNone/>
-            </a:pPr>
-            <a:r>
-              <a:rPr/>
+            <a:pPr marL="0" lvl="0" indent="0">
+              <a:buNone/>
+            </a:pPr>
+            <a:r>
               <a:t>Регламент, стандарт, ПНСТ</a:t>
             </a:r>
           </a:p>
@@ -4036,7 +4126,7 @@
         </p:nvGraphicFramePr>
         <p:xfrm>
           <a:off x="457200" y="787400"/>
-          <a:ext cx="8229600" cy="2717800"/>
+          <a:ext cx="8229600" cy="3017520"/>
         </p:xfrm>
         <a:graphic>
           <a:graphicData uri="http://schemas.openxmlformats.org/drawingml/2006/table">
@@ -4045,10 +4135,34 @@
                 <a:tableStyleId>{5C22544A-7EE6-4342-B048-85BDC9FD1C3A}</a:tableStyleId>
               </a:tblPr>
               <a:tblGrid>
-                <a:gridCol w="2057400"/>
-                <a:gridCol w="2057400"/>
-                <a:gridCol w="2057400"/>
-                <a:gridCol w="2057400"/>
+                <a:gridCol w="2057400">
+                  <a:extLst>
+                    <a:ext uri="{9D8B030D-6E8A-4147-A177-3AD203B41FA5}">
+                      <a16:colId xmlns:a16="http://schemas.microsoft.com/office/drawing/2014/main" val="20000"/>
+                    </a:ext>
+                  </a:extLst>
+                </a:gridCol>
+                <a:gridCol w="2057400">
+                  <a:extLst>
+                    <a:ext uri="{9D8B030D-6E8A-4147-A177-3AD203B41FA5}">
+                      <a16:colId xmlns:a16="http://schemas.microsoft.com/office/drawing/2014/main" val="20001"/>
+                    </a:ext>
+                  </a:extLst>
+                </a:gridCol>
+                <a:gridCol w="2057400">
+                  <a:extLst>
+                    <a:ext uri="{9D8B030D-6E8A-4147-A177-3AD203B41FA5}">
+                      <a16:colId xmlns:a16="http://schemas.microsoft.com/office/drawing/2014/main" val="20002"/>
+                    </a:ext>
+                  </a:extLst>
+                </a:gridCol>
+                <a:gridCol w="2057400">
+                  <a:extLst>
+                    <a:ext uri="{9D8B030D-6E8A-4147-A177-3AD203B41FA5}">
+                      <a16:colId xmlns:a16="http://schemas.microsoft.com/office/drawing/2014/main" val="20003"/>
+                    </a:ext>
+                  </a:extLst>
+                </a:gridCol>
               </a:tblGrid>
               <a:tr h="0">
                 <a:tc>
@@ -4056,11 +4170,10 @@
                     <a:bodyPr/>
                     <a:lstStyle/>
                     <a:p>
-                      <a:pPr lvl="0" indent="0" marL="0">
-                        <a:buNone/>
-                      </a:pPr>
-                      <a:r>
-                        <a:rPr/>
+                      <a:pPr marL="0" lvl="0" indent="0">
+                        <a:buNone/>
+                      </a:pPr>
+                      <a:r>
                         <a:t>Признак</a:t>
                       </a:r>
                     </a:p>
@@ -4072,11 +4185,10 @@
                     <a:bodyPr/>
                     <a:lstStyle/>
                     <a:p>
-                      <a:pPr lvl="0" indent="0" marL="0">
-                        <a:buNone/>
-                      </a:pPr>
-                      <a:r>
-                        <a:rPr/>
+                      <a:pPr marL="0" lvl="0" indent="0">
+                        <a:buNone/>
+                      </a:pPr>
+                      <a:r>
                         <a:t>Регламент</a:t>
                       </a:r>
                     </a:p>
@@ -4088,11 +4200,10 @@
                     <a:bodyPr/>
                     <a:lstStyle/>
                     <a:p>
-                      <a:pPr lvl="0" indent="0" marL="0">
-                        <a:buNone/>
-                      </a:pPr>
-                      <a:r>
-                        <a:rPr/>
+                      <a:pPr marL="0" lvl="0" indent="0">
+                        <a:buNone/>
+                      </a:pPr>
+                      <a:r>
                         <a:t>Нац. стандарт</a:t>
                       </a:r>
                     </a:p>
@@ -4104,17 +4215,21 @@
                     <a:bodyPr/>
                     <a:lstStyle/>
                     <a:p>
-                      <a:pPr lvl="0" indent="0" marL="0">
-                        <a:buNone/>
-                      </a:pPr>
-                      <a:r>
-                        <a:rPr/>
+                      <a:pPr marL="0" lvl="0" indent="0">
+                        <a:buNone/>
+                      </a:pPr>
+                      <a:r>
                         <a:t>ПНСТ</a:t>
                       </a:r>
                     </a:p>
                   </a:txBody>
                   <a:tcPr/>
                 </a:tc>
+                <a:extLst>
+                  <a:ext uri="{0D108BD9-81ED-4DB2-BD59-A6C34878D82A}">
+                    <a16:rowId xmlns:a16="http://schemas.microsoft.com/office/drawing/2014/main" val="10000"/>
+                  </a:ext>
+                </a:extLst>
               </a:tr>
               <a:tr h="0">
                 <a:tc>
@@ -4122,61 +4237,66 @@
                     <a:bodyPr/>
                     <a:lstStyle/>
                     <a:p>
-                      <a:pPr lvl="0" indent="0" marL="0">
-                        <a:buNone/>
-                      </a:pPr>
-                      <a:r>
-                        <a:rPr/>
+                      <a:pPr marL="0" lvl="0" indent="0">
+                        <a:buNone/>
+                      </a:pPr>
+                      <a:r>
                         <a:t>Назначение</a:t>
                       </a:r>
                     </a:p>
                   </a:txBody>
-                </a:tc>
-                <a:tc>
-                  <a:txBody>
-                    <a:bodyPr/>
-                    <a:lstStyle/>
-                    <a:p>
-                      <a:pPr lvl="0" indent="0" marL="0">
-                        <a:buNone/>
-                      </a:pPr>
-                      <a:r>
-                        <a:rPr/>
+                  <a:tcPr/>
+                </a:tc>
+                <a:tc>
+                  <a:txBody>
+                    <a:bodyPr/>
+                    <a:lstStyle/>
+                    <a:p>
+                      <a:pPr marL="0" lvl="0" indent="0">
+                        <a:buNone/>
+                      </a:pPr>
+                      <a:r>
                         <a:t>обязательные требования</a:t>
                       </a:r>
                     </a:p>
                   </a:txBody>
-                </a:tc>
-                <a:tc>
-                  <a:txBody>
-                    <a:bodyPr/>
-                    <a:lstStyle/>
-                    <a:p>
-                      <a:pPr lvl="0" indent="0" marL="0">
-                        <a:buNone/>
-                      </a:pPr>
-                      <a:r>
-                        <a:rPr/>
+                  <a:tcPr/>
+                </a:tc>
+                <a:tc>
+                  <a:txBody>
+                    <a:bodyPr/>
+                    <a:lstStyle/>
+                    <a:p>
+                      <a:pPr marL="0" lvl="0" indent="0">
+                        <a:buNone/>
+                      </a:pPr>
+                      <a:r>
                         <a:t>согласованные характеристики, правила, методы</a:t>
                       </a:r>
                     </a:p>
                   </a:txBody>
-                </a:tc>
-                <a:tc>
-                  <a:txBody>
-                    <a:bodyPr/>
-                    <a:lstStyle/>
-                    <a:p>
-                      <a:pPr lvl="0" indent="0" marL="0">
-                        <a:buNone/>
-                      </a:pPr>
-                      <a:r>
-                        <a:rPr/>
+                  <a:tcPr/>
+                </a:tc>
+                <a:tc>
+                  <a:txBody>
+                    <a:bodyPr/>
+                    <a:lstStyle/>
+                    <a:p>
+                      <a:pPr marL="0" lvl="0" indent="0">
+                        <a:buNone/>
+                      </a:pPr>
+                      <a:r>
                         <a:t>апробация до утверждения стандарта</a:t>
                       </a:r>
                     </a:p>
                   </a:txBody>
-                </a:tc>
+                  <a:tcPr/>
+                </a:tc>
+                <a:extLst>
+                  <a:ext uri="{0D108BD9-81ED-4DB2-BD59-A6C34878D82A}">
+                    <a16:rowId xmlns:a16="http://schemas.microsoft.com/office/drawing/2014/main" val="10001"/>
+                  </a:ext>
+                </a:extLst>
               </a:tr>
               <a:tr h="0">
                 <a:tc>
@@ -4184,61 +4304,66 @@
                     <a:bodyPr/>
                     <a:lstStyle/>
                     <a:p>
-                      <a:pPr lvl="0" indent="0" marL="0">
-                        <a:buNone/>
-                      </a:pPr>
-                      <a:r>
-                        <a:rPr/>
+                      <a:pPr marL="0" lvl="0" indent="0">
+                        <a:buNone/>
+                      </a:pPr>
+                      <a:r>
                         <a:t>Обязательность</a:t>
                       </a:r>
                     </a:p>
                   </a:txBody>
-                </a:tc>
-                <a:tc>
-                  <a:txBody>
-                    <a:bodyPr/>
-                    <a:lstStyle/>
-                    <a:p>
-                      <a:pPr lvl="0" indent="0" marL="0">
-                        <a:buNone/>
-                      </a:pPr>
-                      <a:r>
-                        <a:rPr/>
+                  <a:tcPr/>
+                </a:tc>
+                <a:tc>
+                  <a:txBody>
+                    <a:bodyPr/>
+                    <a:lstStyle/>
+                    <a:p>
+                      <a:pPr marL="0" lvl="0" indent="0">
+                        <a:buNone/>
+                      </a:pPr>
+                      <a:r>
                         <a:t>в сфере, заданной законом</a:t>
                       </a:r>
                     </a:p>
                   </a:txBody>
-                </a:tc>
-                <a:tc>
-                  <a:txBody>
-                    <a:bodyPr/>
-                    <a:lstStyle/>
-                    <a:p>
-                      <a:pPr lvl="0" indent="0" marL="0">
-                        <a:buNone/>
-                      </a:pPr>
-                      <a:r>
-                        <a:rPr/>
+                  <a:tcPr/>
+                </a:tc>
+                <a:tc>
+                  <a:txBody>
+                    <a:bodyPr/>
+                    <a:lstStyle/>
+                    <a:p>
+                      <a:pPr marL="0" lvl="0" indent="0">
+                        <a:buNone/>
+                      </a:pPr>
+                      <a:r>
                         <a:t>в общем случае добровольный</a:t>
                       </a:r>
                     </a:p>
                   </a:txBody>
-                </a:tc>
-                <a:tc>
-                  <a:txBody>
-                    <a:bodyPr/>
-                    <a:lstStyle/>
-                    <a:p>
-                      <a:pPr lvl="0" indent="0" marL="0">
-                        <a:buNone/>
-                      </a:pPr>
-                      <a:r>
-                        <a:rPr/>
+                  <a:tcPr/>
+                </a:tc>
+                <a:tc>
+                  <a:txBody>
+                    <a:bodyPr/>
+                    <a:lstStyle/>
+                    <a:p>
+                      <a:pPr marL="0" lvl="0" indent="0">
+                        <a:buNone/>
+                      </a:pPr>
+                      <a:r>
                         <a:t>в общем случае добровольный</a:t>
                       </a:r>
                     </a:p>
                   </a:txBody>
-                </a:tc>
+                  <a:tcPr/>
+                </a:tc>
+                <a:extLst>
+                  <a:ext uri="{0D108BD9-81ED-4DB2-BD59-A6C34878D82A}">
+                    <a16:rowId xmlns:a16="http://schemas.microsoft.com/office/drawing/2014/main" val="10002"/>
+                  </a:ext>
+                </a:extLst>
               </a:tr>
               <a:tr h="0">
                 <a:tc>
@@ -4246,61 +4371,66 @@
                     <a:bodyPr/>
                     <a:lstStyle/>
                     <a:p>
-                      <a:pPr lvl="0" indent="0" marL="0">
-                        <a:buNone/>
-                      </a:pPr>
-                      <a:r>
-                        <a:rPr/>
+                      <a:pPr marL="0" lvl="0" indent="0">
+                        <a:buNone/>
+                      </a:pPr>
+                      <a:r>
                         <a:t>Срок действия</a:t>
                       </a:r>
                     </a:p>
                   </a:txBody>
-                </a:tc>
-                <a:tc>
-                  <a:txBody>
-                    <a:bodyPr/>
-                    <a:lstStyle/>
-                    <a:p>
-                      <a:pPr lvl="0" indent="0" marL="0">
-                        <a:buNone/>
-                      </a:pPr>
-                      <a:r>
-                        <a:rPr/>
+                  <a:tcPr/>
+                </a:tc>
+                <a:tc>
+                  <a:txBody>
+                    <a:bodyPr/>
+                    <a:lstStyle/>
+                    <a:p>
+                      <a:pPr marL="0" lvl="0" indent="0">
+                        <a:buNone/>
+                      </a:pPr>
+                      <a:r>
                         <a:t>по акту и законодательству</a:t>
                       </a:r>
                     </a:p>
                   </a:txBody>
-                </a:tc>
-                <a:tc>
-                  <a:txBody>
-                    <a:bodyPr/>
-                    <a:lstStyle/>
-                    <a:p>
-                      <a:pPr lvl="0" indent="0" marL="0">
-                        <a:buNone/>
-                      </a:pPr>
-                      <a:r>
-                        <a:rPr/>
+                  <a:tcPr/>
+                </a:tc>
+                <a:tc>
+                  <a:txBody>
+                    <a:bodyPr/>
+                    <a:lstStyle/>
+                    <a:p>
+                      <a:pPr marL="0" lvl="0" indent="0">
+                        <a:buNone/>
+                      </a:pPr>
+                      <a:r>
                         <a:t>как правило бессрочный, может быть отменён</a:t>
                       </a:r>
                     </a:p>
                   </a:txBody>
-                </a:tc>
-                <a:tc>
-                  <a:txBody>
-                    <a:bodyPr/>
-                    <a:lstStyle/>
-                    <a:p>
-                      <a:pPr lvl="0" indent="0" marL="0">
-                        <a:buNone/>
-                      </a:pPr>
-                      <a:r>
-                        <a:rPr/>
+                  <a:tcPr/>
+                </a:tc>
+                <a:tc>
+                  <a:txBody>
+                    <a:bodyPr/>
+                    <a:lstStyle/>
+                    <a:p>
+                      <a:pPr marL="0" lvl="0" indent="0">
+                        <a:buNone/>
+                      </a:pPr>
+                      <a:r>
                         <a:t>не более трёх лет</a:t>
                       </a:r>
                     </a:p>
                   </a:txBody>
-                </a:tc>
+                  <a:tcPr/>
+                </a:tc>
+                <a:extLst>
+                  <a:ext uri="{0D108BD9-81ED-4DB2-BD59-A6C34878D82A}">
+                    <a16:rowId xmlns:a16="http://schemas.microsoft.com/office/drawing/2014/main" val="10003"/>
+                  </a:ext>
+                </a:extLst>
               </a:tr>
               <a:tr h="0">
                 <a:tc>
@@ -4308,61 +4438,66 @@
                     <a:bodyPr/>
                     <a:lstStyle/>
                     <a:p>
-                      <a:pPr lvl="0" indent="0" marL="0">
-                        <a:buNone/>
-                      </a:pPr>
-                      <a:r>
-                        <a:rPr/>
+                      <a:pPr marL="0" lvl="0" indent="0">
+                        <a:buNone/>
+                      </a:pPr>
+                      <a:r>
                         <a:t>Кто утверждает</a:t>
                       </a:r>
                     </a:p>
                   </a:txBody>
-                </a:tc>
-                <a:tc>
-                  <a:txBody>
-                    <a:bodyPr/>
-                    <a:lstStyle/>
-                    <a:p>
-                      <a:pPr lvl="0" indent="0" marL="0">
-                        <a:buNone/>
-                      </a:pPr>
-                      <a:r>
-                        <a:rPr/>
+                  <a:tcPr/>
+                </a:tc>
+                <a:tc>
+                  <a:txBody>
+                    <a:bodyPr/>
+                    <a:lstStyle/>
+                    <a:p>
+                      <a:pPr marL="0" lvl="0" indent="0">
+                        <a:buNone/>
+                      </a:pPr>
+                      <a:r>
                         <a:t>по законодательству</a:t>
                       </a:r>
                     </a:p>
                   </a:txBody>
-                </a:tc>
-                <a:tc>
-                  <a:txBody>
-                    <a:bodyPr/>
-                    <a:lstStyle/>
-                    <a:p>
-                      <a:pPr lvl="0" indent="0" marL="0">
-                        <a:buNone/>
-                      </a:pPr>
-                      <a:r>
-                        <a:rPr/>
+                  <a:tcPr/>
+                </a:tc>
+                <a:tc>
+                  <a:txBody>
+                    <a:bodyPr/>
+                    <a:lstStyle/>
+                    <a:p>
+                      <a:pPr marL="0" lvl="0" indent="0">
+                        <a:buNone/>
+                      </a:pPr>
+                      <a:r>
                         <a:t>нац. орган по стандартизации</a:t>
                       </a:r>
                     </a:p>
                   </a:txBody>
-                </a:tc>
-                <a:tc>
-                  <a:txBody>
-                    <a:bodyPr/>
-                    <a:lstStyle/>
-                    <a:p>
-                      <a:pPr lvl="0" indent="0" marL="0">
-                        <a:buNone/>
-                      </a:pPr>
-                      <a:r>
-                        <a:rPr/>
+                  <a:tcPr/>
+                </a:tc>
+                <a:tc>
+                  <a:txBody>
+                    <a:bodyPr/>
+                    <a:lstStyle/>
+                    <a:p>
+                      <a:pPr marL="0" lvl="0" indent="0">
+                        <a:buNone/>
+                      </a:pPr>
+                      <a:r>
                         <a:t>нац. орган по стандартизации</a:t>
                       </a:r>
                     </a:p>
                   </a:txBody>
-                </a:tc>
+                  <a:tcPr/>
+                </a:tc>
+                <a:extLst>
+                  <a:ext uri="{0D108BD9-81ED-4DB2-BD59-A6C34878D82A}">
+                    <a16:rowId xmlns:a16="http://schemas.microsoft.com/office/drawing/2014/main" val="10004"/>
+                  </a:ext>
+                </a:extLst>
               </a:tr>
               <a:tr h="0">
                 <a:tc>
@@ -4370,61 +4505,66 @@
                     <a:bodyPr/>
                     <a:lstStyle/>
                     <a:p>
-                      <a:pPr lvl="0" indent="0" marL="0">
-                        <a:buNone/>
-                      </a:pPr>
-                      <a:r>
-                        <a:rPr/>
+                      <a:pPr marL="0" lvl="0" indent="0">
+                        <a:buNone/>
+                      </a:pPr>
+                      <a:r>
                         <a:t>Что проверить</a:t>
                       </a:r>
                     </a:p>
                   </a:txBody>
-                </a:tc>
-                <a:tc>
-                  <a:txBody>
-                    <a:bodyPr/>
-                    <a:lstStyle/>
-                    <a:p>
-                      <a:pPr lvl="0" indent="0" marL="0">
-                        <a:buNone/>
-                      </a:pPr>
-                      <a:r>
-                        <a:rPr/>
+                  <a:tcPr/>
+                </a:tc>
+                <a:tc>
+                  <a:txBody>
+                    <a:bodyPr/>
+                    <a:lstStyle/>
+                    <a:p>
+                      <a:pPr marL="0" lvl="0" indent="0">
+                        <a:buNone/>
+                      </a:pPr>
+                      <a:r>
                         <a:t>сферу, объекты, переходные положения</a:t>
                       </a:r>
                     </a:p>
                   </a:txBody>
-                </a:tc>
-                <a:tc>
-                  <a:txBody>
-                    <a:bodyPr/>
-                    <a:lstStyle/>
-                    <a:p>
-                      <a:pPr lvl="0" indent="0" marL="0">
-                        <a:buNone/>
-                      </a:pPr>
-                      <a:r>
-                        <a:rPr/>
+                  <a:tcPr/>
+                </a:tc>
+                <a:tc>
+                  <a:txBody>
+                    <a:bodyPr/>
+                    <a:lstStyle/>
+                    <a:p>
+                      <a:pPr marL="0" lvl="0" indent="0">
+                        <a:buNone/>
+                      </a:pPr>
+                      <a:r>
                         <a:t>редакцию, раздел, статус</a:t>
                       </a:r>
                     </a:p>
                   </a:txBody>
-                </a:tc>
-                <a:tc>
-                  <a:txBody>
-                    <a:bodyPr/>
-                    <a:lstStyle/>
-                    <a:p>
-                      <a:pPr lvl="0" indent="0" marL="0">
-                        <a:buNone/>
-                      </a:pPr>
-                      <a:r>
-                        <a:rPr/>
+                  <a:tcPr/>
+                </a:tc>
+                <a:tc>
+                  <a:txBody>
+                    <a:bodyPr/>
+                    <a:lstStyle/>
+                    <a:p>
+                      <a:pPr marL="0" lvl="0" indent="0">
+                        <a:buNone/>
+                      </a:pPr>
+                      <a:r>
                         <a:t>дату введения, срок, статус</a:t>
                       </a:r>
                     </a:p>
                   </a:txBody>
-                </a:tc>
+                  <a:tcPr/>
+                </a:tc>
+                <a:extLst>
+                  <a:ext uri="{0D108BD9-81ED-4DB2-BD59-A6C34878D82A}">
+                    <a16:rowId xmlns:a16="http://schemas.microsoft.com/office/drawing/2014/main" val="10005"/>
+                  </a:ext>
+                </a:extLst>
               </a:tr>
             </a:tbl>
           </a:graphicData>
@@ -4450,11 +4590,10 @@
           <a:bodyPr/>
           <a:lstStyle/>
           <a:p>
-            <a:pPr lvl="0" indent="0" marL="0">
-              <a:buNone/>
-            </a:pPr>
-            <a:r>
-              <a:rPr/>
+            <a:pPr marL="0" lvl="0" indent="0">
+              <a:buNone/>
+            </a:pPr>
+            <a:r>
               <a:t>По названию нельзя определить обязательность: нужно найти её источник.</a:t>
             </a:r>
           </a:p>
@@ -4462,6 +4601,9 @@
       </p:sp>
     </p:spTree>
   </p:cSld>
+  <p:clrMapOvr>
+    <a:masterClrMapping/>
+  </p:clrMapOvr>
 </p:sld>
 </file>
 
@@ -4497,11 +4639,10 @@
           <a:bodyPr/>
           <a:lstStyle/>
           <a:p>
-            <a:pPr lvl="0" indent="0" marL="0">
-              <a:buNone/>
-            </a:pPr>
-            <a:r>
-              <a:rPr/>
+            <a:pPr marL="0" lvl="0" indent="0">
+              <a:buNone/>
+            </a:pPr>
+            <a:r>
               <a:t>Когда стандарт обязателен</a:t>
             </a:r>
           </a:p>
@@ -4522,7 +4663,7 @@
           <a:bodyPr/>
           <a:lstStyle/>
           <a:p>
-            <a:pPr lvl="0" indent="0" marL="0">
+            <a:pPr marL="0" lvl="0" indent="0">
               <a:buNone/>
             </a:pPr>
             <a:r>
@@ -4531,47 +4672,42 @@
             </a:r>
           </a:p>
           <a:p>
-            <a:pPr lvl="0" indent="-342900" marL="342900">
+            <a:pPr marL="342900" lvl="0" indent="-342900">
               <a:buAutoNum type="arabicPeriod"/>
             </a:pPr>
             <a:r>
-              <a:rPr/>
               <a:t>Закон прямо требует применять документ.</a:t>
             </a:r>
           </a:p>
           <a:p>
-            <a:pPr lvl="0" indent="-342900" marL="342900">
+            <a:pPr marL="342900" lvl="0" indent="-342900">
               <a:buAutoNum type="arabicPeriod"/>
             </a:pPr>
             <a:r>
-              <a:rPr/>
               <a:t>Нормативный акт органа в пределах компетенции ссылается на стандарт.</a:t>
             </a:r>
           </a:p>
           <a:p>
-            <a:pPr lvl="0" indent="-342900" marL="342900">
+            <a:pPr marL="342900" lvl="0" indent="-342900">
               <a:buAutoNum type="arabicPeriod"/>
             </a:pPr>
             <a:r>
-              <a:rPr/>
               <a:t>Договор или закупка включают стандарт в условия.</a:t>
             </a:r>
           </a:p>
           <a:p>
-            <a:pPr lvl="0" indent="-342900" marL="342900">
+            <a:pPr marL="342900" lvl="0" indent="-342900">
               <a:buAutoNum type="arabicPeriod"/>
             </a:pPr>
             <a:r>
-              <a:rPr/>
               <a:t>Собственный выбор организации, закреплённый локальным актом.</a:t>
             </a:r>
           </a:p>
           <a:p>
-            <a:pPr lvl="0" indent="0" marL="0">
-              <a:buNone/>
-            </a:pPr>
-            <a:r>
-              <a:rPr/>
+            <a:pPr marL="0" lvl="0" indent="0">
+              <a:buNone/>
+            </a:pPr>
+            <a:r>
               <a:t>Всегда фиксируем номер, год, раздел и границы. «Применяем ГОСТ» — не основание.</a:t>
             </a:r>
           </a:p>
@@ -4579,6 +4715,9 @@
       </p:sp>
     </p:spTree>
   </p:cSld>
+  <p:clrMapOvr>
+    <a:masterClrMapping/>
+  </p:clrMapOvr>
 </p:sld>
 </file>
 
@@ -4614,11 +4753,10 @@
           <a:bodyPr/>
           <a:lstStyle/>
           <a:p>
-            <a:pPr lvl="0" indent="0" marL="0">
-              <a:buNone/>
-            </a:pPr>
-            <a:r>
-              <a:rPr/>
+            <a:pPr marL="0" lvl="0" indent="0">
+              <a:buNone/>
+            </a:pPr>
+            <a:r>
               <a:t>Вопрос 3</a:t>
             </a:r>
           </a:p>
@@ -4639,7 +4777,7 @@
           <a:bodyPr/>
           <a:lstStyle/>
           <a:p>
-            <a:pPr lvl="0" indent="0" marL="0">
+            <a:pPr marL="0" lvl="0" indent="0">
               <a:buNone/>
             </a:pPr>
             <a:r>
@@ -4648,25 +4786,22 @@
             </a:r>
           </a:p>
           <a:p>
-            <a:pPr lvl="0" indent="0" marL="0">
-              <a:buNone/>
-            </a:pPr>
-            <a:r>
-              <a:rPr/>
+            <a:pPr marL="0" lvl="0" indent="0">
+              <a:buNone/>
+            </a:pPr>
+            <a:r>
               <a:t>В ТЗ на закупку написано: «оборудование должно соответствовать стандарту такому-то».</a:t>
             </a:r>
           </a:p>
           <a:p>
             <a:pPr lvl="0"/>
             <a:r>
-              <a:rPr/>
               <a:t>Откуда возникает обязательность: из закона или из договора?</a:t>
             </a:r>
           </a:p>
           <a:p>
             <a:pPr lvl="0"/>
             <a:r>
-              <a:rPr/>
               <a:t>Что изменится, если договор заключён не будет?</a:t>
             </a:r>
           </a:p>
@@ -4674,6 +4809,9 @@
       </p:sp>
     </p:spTree>
   </p:cSld>
+  <p:clrMapOvr>
+    <a:masterClrMapping/>
+  </p:clrMapOvr>
 </p:sld>
 </file>
 
@@ -4709,11 +4847,10 @@
           <a:bodyPr/>
           <a:lstStyle/>
           <a:p>
-            <a:pPr lvl="0" indent="0" marL="0">
-              <a:buNone/>
-            </a:pPr>
-            <a:r>
-              <a:rPr/>
+            <a:pPr marL="0" lvl="0" indent="0">
+              <a:buNone/>
+            </a:pPr>
+            <a:r>
               <a:t>ПНСТ и типичные ошибки</a:t>
             </a:r>
           </a:p>
@@ -4734,7 +4871,7 @@
           <a:bodyPr/>
           <a:lstStyle/>
           <a:p>
-            <a:pPr lvl="0" indent="0" marL="0">
+            <a:pPr marL="0" lvl="0" indent="0">
               <a:buNone/>
             </a:pPr>
             <a:r>
@@ -4745,58 +4882,50 @@
           <a:p>
             <a:pPr lvl="0"/>
             <a:r>
-              <a:rPr/>
               <a:t>Не окончательный стандарт: может быть заменён, продлён или прекращён.</a:t>
             </a:r>
           </a:p>
           <a:p>
             <a:pPr lvl="0"/>
             <a:r>
-              <a:rPr/>
               <a:t>Ссылка в договоре требует номера, года и контроля срока.</a:t>
             </a:r>
           </a:p>
           <a:p>
             <a:pPr lvl="0"/>
             <a:r>
-              <a:rPr/>
               <a:t>Подробнее о стандартах для доверенных ПАК — лекция 13.</a:t>
             </a:r>
           </a:p>
           <a:p>
-            <a:pPr lvl="0" indent="0" marL="0">
-              <a:buNone/>
-            </a:pPr>
-            <a:r>
-              <a:rPr/>
+            <a:pPr marL="0" lvl="0" indent="0">
+              <a:buNone/>
+            </a:pPr>
+            <a:r>
               <a:t>Типичные ошибки:</a:t>
             </a:r>
           </a:p>
           <a:p>
             <a:pPr lvl="0"/>
             <a:r>
-              <a:rPr/>
               <a:t>считать стандарт обязательным «по умолчанию»;</a:t>
             </a:r>
           </a:p>
           <a:p>
             <a:pPr lvl="0"/>
             <a:r>
-              <a:rPr/>
               <a:t>считать необязательный стандарт ненужным;</a:t>
             </a:r>
           </a:p>
           <a:p>
             <a:pPr lvl="0"/>
             <a:r>
-              <a:rPr/>
               <a:t>ссылаться без номера, редакции и раздела;</a:t>
             </a:r>
           </a:p>
           <a:p>
             <a:pPr lvl="0"/>
             <a:r>
-              <a:rPr/>
               <a:t>подменять специальное требование общим стандартом.</a:t>
             </a:r>
           </a:p>
@@ -4804,6 +4933,9 @@
       </p:sp>
     </p:spTree>
   </p:cSld>
+  <p:clrMapOvr>
+    <a:masterClrMapping/>
+  </p:clrMapOvr>
 </p:sld>
 </file>
 
@@ -4839,11 +4971,10 @@
           <a:bodyPr/>
           <a:lstStyle/>
           <a:p>
-            <a:pPr lvl="0" indent="0" marL="0">
-              <a:buNone/>
-            </a:pPr>
-            <a:r>
-              <a:rPr/>
+            <a:pPr marL="0" lvl="0" indent="0">
+              <a:buNone/>
+            </a:pPr>
+            <a:r>
               <a:t>Подтверждение соответствия</a:t>
             </a:r>
           </a:p>
@@ -4864,7 +4995,7 @@
           <a:bodyPr/>
           <a:lstStyle/>
           <a:p>
-            <a:pPr lvl="0" indent="0" marL="0">
+            <a:pPr marL="0" lvl="0" indent="0">
               <a:buNone/>
             </a:pPr>
             <a:r>
@@ -4875,21 +5006,18 @@
           <a:p>
             <a:pPr lvl="0"/>
             <a:r>
-              <a:rPr/>
               <a:t>Обязательное подтверждение соответствия продукции: только в случаях, заданных техническим регламентом.</a:t>
             </a:r>
           </a:p>
           <a:p>
             <a:pPr lvl="0"/>
             <a:r>
-              <a:rPr/>
               <a:t>Добровольная сертификация: по инициативе заявителя и правилам соответствующей системы.</a:t>
             </a:r>
           </a:p>
           <a:p>
             <a:pPr lvl="0"/>
             <a:r>
-              <a:rPr/>
               <a:t>Обязательные требования к значимому объекту КИИ: специальный регуляторный контур, не тождественный обязательной сертификации продукции.</a:t>
             </a:r>
           </a:p>
@@ -4897,6 +5025,9 @@
       </p:sp>
     </p:spTree>
   </p:cSld>
+  <p:clrMapOvr>
+    <a:masterClrMapping/>
+  </p:clrMapOvr>
 </p:sld>
 </file>
 
@@ -4932,11 +5063,10 @@
           <a:bodyPr/>
           <a:lstStyle/>
           <a:p>
-            <a:pPr lvl="0" indent="0" marL="0">
-              <a:buNone/>
-            </a:pPr>
-            <a:r>
-              <a:rPr/>
+            <a:pPr marL="0" lvl="0" indent="0">
+              <a:buNone/>
+            </a:pPr>
+            <a:r>
               <a:t>Три конструкции: сводка</a:t>
             </a:r>
           </a:p>
@@ -4954,7 +5084,7 @@
         </p:nvGraphicFramePr>
         <p:xfrm>
           <a:off x="457200" y="787400"/>
-          <a:ext cx="8229600" cy="3797300"/>
+          <a:ext cx="8229600" cy="2217420"/>
         </p:xfrm>
         <a:graphic>
           <a:graphicData uri="http://schemas.openxmlformats.org/drawingml/2006/table">
@@ -4963,10 +5093,34 @@
                 <a:tableStyleId>{5C22544A-7EE6-4342-B048-85BDC9FD1C3A}</a:tableStyleId>
               </a:tblPr>
               <a:tblGrid>
-                <a:gridCol w="2057400"/>
-                <a:gridCol w="2057400"/>
-                <a:gridCol w="2057400"/>
-                <a:gridCol w="2057400"/>
+                <a:gridCol w="2057400">
+                  <a:extLst>
+                    <a:ext uri="{9D8B030D-6E8A-4147-A177-3AD203B41FA5}">
+                      <a16:colId xmlns:a16="http://schemas.microsoft.com/office/drawing/2014/main" val="20000"/>
+                    </a:ext>
+                  </a:extLst>
+                </a:gridCol>
+                <a:gridCol w="2057400">
+                  <a:extLst>
+                    <a:ext uri="{9D8B030D-6E8A-4147-A177-3AD203B41FA5}">
+                      <a16:colId xmlns:a16="http://schemas.microsoft.com/office/drawing/2014/main" val="20001"/>
+                    </a:ext>
+                  </a:extLst>
+                </a:gridCol>
+                <a:gridCol w="2057400">
+                  <a:extLst>
+                    <a:ext uri="{9D8B030D-6E8A-4147-A177-3AD203B41FA5}">
+                      <a16:colId xmlns:a16="http://schemas.microsoft.com/office/drawing/2014/main" val="20002"/>
+                    </a:ext>
+                  </a:extLst>
+                </a:gridCol>
+                <a:gridCol w="2057400">
+                  <a:extLst>
+                    <a:ext uri="{9D8B030D-6E8A-4147-A177-3AD203B41FA5}">
+                      <a16:colId xmlns:a16="http://schemas.microsoft.com/office/drawing/2014/main" val="20003"/>
+                    </a:ext>
+                  </a:extLst>
+                </a:gridCol>
               </a:tblGrid>
               <a:tr h="0">
                 <a:tc>
@@ -4974,11 +5128,10 @@
                     <a:bodyPr/>
                     <a:lstStyle/>
                     <a:p>
-                      <a:pPr lvl="0" indent="0" marL="0">
-                        <a:buNone/>
-                      </a:pPr>
-                      <a:r>
-                        <a:rPr/>
+                      <a:pPr marL="0" lvl="0" indent="0">
+                        <a:buNone/>
+                      </a:pPr>
+                      <a:r>
                         <a:t>Конструкция</a:t>
                       </a:r>
                     </a:p>
@@ -4990,11 +5143,10 @@
                     <a:bodyPr/>
                     <a:lstStyle/>
                     <a:p>
-                      <a:pPr lvl="0" indent="0" marL="0">
-                        <a:buNone/>
-                      </a:pPr>
-                      <a:r>
-                        <a:rPr/>
+                      <a:pPr marL="0" lvl="0" indent="0">
+                        <a:buNone/>
+                      </a:pPr>
+                      <a:r>
                         <a:t>Откуда обязательность</a:t>
                       </a:r>
                     </a:p>
@@ -5006,11 +5158,10 @@
                     <a:bodyPr/>
                     <a:lstStyle/>
                     <a:p>
-                      <a:pPr lvl="0" indent="0" marL="0">
-                        <a:buNone/>
-                      </a:pPr>
-                      <a:r>
-                        <a:rPr/>
+                      <a:pPr marL="0" lvl="0" indent="0">
+                        <a:buNone/>
+                      </a:pPr>
+                      <a:r>
                         <a:t>Что подтверждается</a:t>
                       </a:r>
                     </a:p>
@@ -5022,17 +5173,21 @@
                     <a:bodyPr/>
                     <a:lstStyle/>
                     <a:p>
-                      <a:pPr lvl="0" indent="0" marL="0">
-                        <a:buNone/>
-                      </a:pPr>
-                      <a:r>
-                        <a:rPr/>
+                      <a:pPr marL="0" lvl="0" indent="0">
+                        <a:buNone/>
+                      </a:pPr>
+                      <a:r>
                         <a:t>Типичная ошибка</a:t>
                       </a:r>
                     </a:p>
                   </a:txBody>
                   <a:tcPr/>
                 </a:tc>
+                <a:extLst>
+                  <a:ext uri="{0D108BD9-81ED-4DB2-BD59-A6C34878D82A}">
+                    <a16:rowId xmlns:a16="http://schemas.microsoft.com/office/drawing/2014/main" val="10000"/>
+                  </a:ext>
+                </a:extLst>
               </a:tr>
               <a:tr h="0">
                 <a:tc>
@@ -5040,61 +5195,66 @@
                     <a:bodyPr/>
                     <a:lstStyle/>
                     <a:p>
-                      <a:pPr lvl="0" indent="0" marL="0">
-                        <a:buNone/>
-                      </a:pPr>
-                      <a:r>
-                        <a:rPr/>
+                      <a:pPr marL="0" lvl="0" indent="0">
+                        <a:buNone/>
+                      </a:pPr>
+                      <a:r>
                         <a:t>Обязательное подтверждение</a:t>
                       </a:r>
                     </a:p>
                   </a:txBody>
-                </a:tc>
-                <a:tc>
-                  <a:txBody>
-                    <a:bodyPr/>
-                    <a:lstStyle/>
-                    <a:p>
-                      <a:pPr lvl="0" indent="0" marL="0">
-                        <a:buNone/>
-                      </a:pPr>
-                      <a:r>
-                        <a:rPr/>
+                  <a:tcPr/>
+                </a:tc>
+                <a:tc>
+                  <a:txBody>
+                    <a:bodyPr/>
+                    <a:lstStyle/>
+                    <a:p>
+                      <a:pPr marL="0" lvl="0" indent="0">
+                        <a:buNone/>
+                      </a:pPr>
+                      <a:r>
                         <a:t>технический регламент</a:t>
                       </a:r>
                     </a:p>
                   </a:txBody>
-                </a:tc>
-                <a:tc>
-                  <a:txBody>
-                    <a:bodyPr/>
-                    <a:lstStyle/>
-                    <a:p>
-                      <a:pPr lvl="0" indent="0" marL="0">
-                        <a:buNone/>
-                      </a:pPr>
-                      <a:r>
-                        <a:rPr/>
+                  <a:tcPr/>
+                </a:tc>
+                <a:tc>
+                  <a:txBody>
+                    <a:bodyPr/>
+                    <a:lstStyle/>
+                    <a:p>
+                      <a:pPr marL="0" lvl="0" indent="0">
+                        <a:buNone/>
+                      </a:pPr>
+                      <a:r>
                         <a:t>соответствие продукции регламенту</a:t>
                       </a:r>
                     </a:p>
                   </a:txBody>
-                </a:tc>
-                <a:tc>
-                  <a:txBody>
-                    <a:bodyPr/>
-                    <a:lstStyle/>
-                    <a:p>
-                      <a:pPr lvl="0" indent="0" marL="0">
-                        <a:buNone/>
-                      </a:pPr>
-                      <a:r>
-                        <a:rPr/>
+                  <a:tcPr/>
+                </a:tc>
+                <a:tc>
+                  <a:txBody>
+                    <a:bodyPr/>
+                    <a:lstStyle/>
+                    <a:p>
+                      <a:pPr marL="0" lvl="0" indent="0">
+                        <a:buNone/>
+                      </a:pPr>
+                      <a:r>
                         <a:t>применять к любым системам</a:t>
                       </a:r>
                     </a:p>
                   </a:txBody>
-                </a:tc>
+                  <a:tcPr/>
+                </a:tc>
+                <a:extLst>
+                  <a:ext uri="{0D108BD9-81ED-4DB2-BD59-A6C34878D82A}">
+                    <a16:rowId xmlns:a16="http://schemas.microsoft.com/office/drawing/2014/main" val="10001"/>
+                  </a:ext>
+                </a:extLst>
               </a:tr>
               <a:tr h="0">
                 <a:tc>
@@ -5102,61 +5262,66 @@
                     <a:bodyPr/>
                     <a:lstStyle/>
                     <a:p>
-                      <a:pPr lvl="0" indent="0" marL="0">
-                        <a:buNone/>
-                      </a:pPr>
-                      <a:r>
-                        <a:rPr/>
+                      <a:pPr marL="0" lvl="0" indent="0">
+                        <a:buNone/>
+                      </a:pPr>
+                      <a:r>
                         <a:t>Добровольная сертификация</a:t>
                       </a:r>
                     </a:p>
                   </a:txBody>
-                </a:tc>
-                <a:tc>
-                  <a:txBody>
-                    <a:bodyPr/>
-                    <a:lstStyle/>
-                    <a:p>
-                      <a:pPr lvl="0" indent="0" marL="0">
-                        <a:buNone/>
-                      </a:pPr>
-                      <a:r>
-                        <a:rPr/>
+                  <a:tcPr/>
+                </a:tc>
+                <a:tc>
+                  <a:txBody>
+                    <a:bodyPr/>
+                    <a:lstStyle/>
+                    <a:p>
+                      <a:pPr marL="0" lvl="0" indent="0">
+                        <a:buNone/>
+                      </a:pPr>
+                      <a:r>
                         <a:t>инициатива заявителя; договор</a:t>
                       </a:r>
                     </a:p>
                   </a:txBody>
-                </a:tc>
-                <a:tc>
-                  <a:txBody>
-                    <a:bodyPr/>
-                    <a:lstStyle/>
-                    <a:p>
-                      <a:pPr lvl="0" indent="0" marL="0">
-                        <a:buNone/>
-                      </a:pPr>
-                      <a:r>
-                        <a:rPr/>
+                  <a:tcPr/>
+                </a:tc>
+                <a:tc>
+                  <a:txBody>
+                    <a:bodyPr/>
+                    <a:lstStyle/>
+                    <a:p>
+                      <a:pPr marL="0" lvl="0" indent="0">
+                        <a:buNone/>
+                      </a:pPr>
+                      <a:r>
                         <a:t>соответствие по правилам системы</a:t>
                       </a:r>
                     </a:p>
                   </a:txBody>
-                </a:tc>
-                <a:tc>
-                  <a:txBody>
-                    <a:bodyPr/>
-                    <a:lstStyle/>
-                    <a:p>
-                      <a:pPr lvl="0" indent="0" marL="0">
-                        <a:buNone/>
-                      </a:pPr>
-                      <a:r>
-                        <a:rPr/>
+                  <a:tcPr/>
+                </a:tc>
+                <a:tc>
+                  <a:txBody>
+                    <a:bodyPr/>
+                    <a:lstStyle/>
+                    <a:p>
+                      <a:pPr marL="0" lvl="0" indent="0">
+                        <a:buNone/>
+                      </a:pPr>
+                      <a:r>
                         <a:t>считать сертификат универсальным разрешением</a:t>
                       </a:r>
                     </a:p>
                   </a:txBody>
-                </a:tc>
+                  <a:tcPr/>
+                </a:tc>
+                <a:extLst>
+                  <a:ext uri="{0D108BD9-81ED-4DB2-BD59-A6C34878D82A}">
+                    <a16:rowId xmlns:a16="http://schemas.microsoft.com/office/drawing/2014/main" val="10002"/>
+                  </a:ext>
+                </a:extLst>
               </a:tr>
               <a:tr h="0">
                 <a:tc>
@@ -5164,61 +5329,66 @@
                     <a:bodyPr/>
                     <a:lstStyle/>
                     <a:p>
-                      <a:pPr lvl="0" indent="0" marL="0">
-                        <a:buNone/>
-                      </a:pPr>
-                      <a:r>
-                        <a:rPr/>
+                      <a:pPr marL="0" lvl="0" indent="0">
+                        <a:buNone/>
+                      </a:pPr>
+                      <a:r>
                         <a:t>Требования к значимому объекту КИИ</a:t>
                       </a:r>
                     </a:p>
                   </a:txBody>
-                </a:tc>
-                <a:tc>
-                  <a:txBody>
-                    <a:bodyPr/>
-                    <a:lstStyle/>
-                    <a:p>
-                      <a:pPr lvl="0" indent="0" marL="0">
-                        <a:buNone/>
-                      </a:pPr>
-                      <a:r>
-                        <a:rPr/>
+                  <a:tcPr/>
+                </a:tc>
+                <a:tc>
+                  <a:txBody>
+                    <a:bodyPr/>
+                    <a:lstStyle/>
+                    <a:p>
+                      <a:pPr marL="0" lvl="0" indent="0">
+                        <a:buNone/>
+                      </a:pPr>
+                      <a:r>
                         <a:t>специальное регулирование КИИ</a:t>
                       </a:r>
                     </a:p>
                   </a:txBody>
-                </a:tc>
-                <a:tc>
-                  <a:txBody>
-                    <a:bodyPr/>
-                    <a:lstStyle/>
-                    <a:p>
-                      <a:pPr lvl="0" indent="0" marL="0">
-                        <a:buNone/>
-                      </a:pPr>
-                      <a:r>
-                        <a:rPr/>
+                  <a:tcPr/>
+                </a:tc>
+                <a:tc>
+                  <a:txBody>
+                    <a:bodyPr/>
+                    <a:lstStyle/>
+                    <a:p>
+                      <a:pPr marL="0" lvl="0" indent="0">
+                        <a:buNone/>
+                      </a:pPr>
+                      <a:r>
                         <a:t>выполнение мер защиты применительно к объекту</a:t>
                       </a:r>
                     </a:p>
                   </a:txBody>
-                </a:tc>
-                <a:tc>
-                  <a:txBody>
-                    <a:bodyPr/>
-                    <a:lstStyle/>
-                    <a:p>
-                      <a:pPr lvl="0" indent="0" marL="0">
-                        <a:buNone/>
-                      </a:pPr>
-                      <a:r>
-                        <a:rPr/>
+                  <a:tcPr/>
+                </a:tc>
+                <a:tc>
+                  <a:txBody>
+                    <a:bodyPr/>
+                    <a:lstStyle/>
+                    <a:p>
+                      <a:pPr marL="0" lvl="0" indent="0">
+                        <a:buNone/>
+                      </a:pPr>
+                      <a:r>
                         <a:t>считать, что сертификат продукта закрывает все требования</a:t>
                       </a:r>
                     </a:p>
                   </a:txBody>
-                </a:tc>
+                  <a:tcPr/>
+                </a:tc>
+                <a:extLst>
+                  <a:ext uri="{0D108BD9-81ED-4DB2-BD59-A6C34878D82A}">
+                    <a16:rowId xmlns:a16="http://schemas.microsoft.com/office/drawing/2014/main" val="10003"/>
+                  </a:ext>
+                </a:extLst>
               </a:tr>
             </a:tbl>
           </a:graphicData>
@@ -5226,6 +5396,9 @@
       </p:graphicFrame>
     </p:spTree>
   </p:cSld>
+  <p:clrMapOvr>
+    <a:masterClrMapping/>
+  </p:clrMapOvr>
 </p:sld>
 </file>
 
@@ -5261,11 +5434,10 @@
           <a:bodyPr/>
           <a:lstStyle/>
           <a:p>
-            <a:pPr lvl="0" indent="0" marL="0">
-              <a:buNone/>
-            </a:pPr>
-            <a:r>
-              <a:rPr/>
+            <a:pPr marL="0" lvl="0" indent="0">
+              <a:buNone/>
+            </a:pPr>
+            <a:r>
               <a:t>Сертификат как доказательство</a:t>
             </a:r>
           </a:p>
@@ -5286,64 +5458,56 @@
           <a:bodyPr/>
           <a:lstStyle/>
           <a:p>
-            <a:pPr lvl="0" indent="0" marL="0">
-              <a:buNone/>
-            </a:pPr>
-            <a:r>
-              <a:rPr/>
+            <a:pPr marL="0" lvl="0" indent="0">
+              <a:buNone/>
+            </a:pPr>
+            <a:r>
               <a:t>Сертификат не является универсальным разрешением на использование продукта.</a:t>
             </a:r>
           </a:p>
           <a:p>
-            <a:pPr lvl="0" indent="0" marL="0">
-              <a:buNone/>
-            </a:pPr>
-            <a:r>
-              <a:rPr/>
+            <a:pPr marL="0" lvl="0" indent="0">
+              <a:buNone/>
+            </a:pPr>
+            <a:r>
               <a:t>Как читать сертификат:</a:t>
             </a:r>
           </a:p>
           <a:p>
             <a:pPr lvl="0"/>
             <a:r>
-              <a:rPr/>
               <a:t>что сертифицировано: продукт, версия, комплектация;</a:t>
             </a:r>
           </a:p>
           <a:p>
             <a:pPr lvl="0"/>
             <a:r>
-              <a:rPr/>
               <a:t>схема и требования;</a:t>
             </a:r>
           </a:p>
           <a:p>
             <a:pPr lvl="0"/>
             <a:r>
-              <a:rPr/>
               <a:t>срок и условия действия;</a:t>
             </a:r>
           </a:p>
           <a:p>
             <a:pPr lvl="0"/>
             <a:r>
-              <a:rPr/>
               <a:t>ограничения;</a:t>
             </a:r>
           </a:p>
           <a:p>
             <a:pPr lvl="0"/>
             <a:r>
-              <a:rPr/>
               <a:t>совпадает ли конфигурация с реально используемой.</a:t>
             </a:r>
           </a:p>
           <a:p>
-            <a:pPr lvl="0" indent="0" marL="0">
-              <a:buNone/>
-            </a:pPr>
-            <a:r>
-              <a:rPr/>
+            <a:pPr marL="0" lvl="0" indent="0">
+              <a:buNone/>
+            </a:pPr>
+            <a:r>
               <a:t>Дополнительно: есть ли обязательные требования к объекту КИИ.</a:t>
             </a:r>
           </a:p>
@@ -5351,6 +5515,9 @@
       </p:sp>
     </p:spTree>
   </p:cSld>
+  <p:clrMapOvr>
+    <a:masterClrMapping/>
+  </p:clrMapOvr>
 </p:sld>
 </file>
 
@@ -5386,11 +5553,10 @@
           <a:bodyPr/>
           <a:lstStyle/>
           <a:p>
-            <a:pPr lvl="0" indent="0" marL="0">
-              <a:buNone/>
-            </a:pPr>
-            <a:r>
-              <a:rPr/>
+            <a:pPr marL="0" lvl="0" indent="0">
+              <a:buNone/>
+            </a:pPr>
+            <a:r>
               <a:t>Цепочка подтверждения</a:t>
             </a:r>
           </a:p>
@@ -5411,7 +5577,7 @@
           <a:bodyPr/>
           <a:lstStyle/>
           <a:p>
-            <a:pPr lvl="0" indent="0" marL="0">
+            <a:pPr marL="0" lvl="0" indent="0">
               <a:buNone/>
             </a:pPr>
             <a:r>
@@ -5420,32 +5586,28 @@
             </a:r>
           </a:p>
           <a:p>
-            <a:pPr lvl="0" indent="0" marL="0">
-              <a:buNone/>
-            </a:pPr>
-            <a:r>
-              <a:rPr/>
+            <a:pPr marL="0" lvl="0" indent="0">
+              <a:buNone/>
+            </a:pPr>
+            <a:r>
               <a:t>Аккредитация → испытание → протокол → решение органа по сертификации → сертификат</a:t>
             </a:r>
           </a:p>
           <a:p>
             <a:pPr lvl="0"/>
             <a:r>
-              <a:rPr/>
               <a:t>У каждого звена своя область и свои ограничения.</a:t>
             </a:r>
           </a:p>
           <a:p>
             <a:pPr lvl="0"/>
             <a:r>
-              <a:rPr/>
               <a:t>Аккредитация не равна испытанию и не равна сертификату.</a:t>
             </a:r>
           </a:p>
           <a:p>
             <a:pPr lvl="0"/>
             <a:r>
-              <a:rPr/>
               <a:t>Разрыв на любом звене ослабляет вывод.</a:t>
             </a:r>
           </a:p>
@@ -5453,6 +5615,9 @@
       </p:sp>
     </p:spTree>
   </p:cSld>
+  <p:clrMapOvr>
+    <a:masterClrMapping/>
+  </p:clrMapOvr>
 </p:sld>
 </file>
 
@@ -5488,11 +5653,10 @@
           <a:bodyPr/>
           <a:lstStyle/>
           <a:p>
-            <a:pPr lvl="0" indent="0" marL="0">
-              <a:buNone/>
-            </a:pPr>
-            <a:r>
-              <a:rPr/>
+            <a:pPr marL="0" lvl="0" indent="0">
+              <a:buNone/>
+            </a:pPr>
+            <a:r>
               <a:t>Цели лекции</a:t>
             </a:r>
           </a:p>
@@ -5513,7 +5677,7 @@
           <a:bodyPr/>
           <a:lstStyle/>
           <a:p>
-            <a:pPr lvl="0" indent="0" marL="0">
+            <a:pPr marL="0" lvl="0" indent="0">
               <a:buNone/>
             </a:pPr>
             <a:r>
@@ -5522,47 +5686,42 @@
             </a:r>
           </a:p>
           <a:p>
-            <a:pPr lvl="0" indent="-342900" marL="342900">
+            <a:pPr marL="342900" lvl="0" indent="-342900">
               <a:buAutoNum type="arabicPeriod"/>
             </a:pPr>
             <a:r>
-              <a:rPr/>
               <a:t>Назвать виды источников требований и объяснить, чем они различаются по обязательности.</a:t>
             </a:r>
           </a:p>
           <a:p>
-            <a:pPr lvl="0" indent="-342900" marL="342900">
+            <a:pPr marL="342900" lvl="0" indent="-342900">
               <a:buAutoNum type="arabicPeriod"/>
             </a:pPr>
             <a:r>
-              <a:rPr/>
               <a:t>Отличить технический регламент, национальный стандарт и ПНСТ.</a:t>
             </a:r>
           </a:p>
           <a:p>
-            <a:pPr lvl="0" indent="-342900" marL="342900">
+            <a:pPr marL="342900" lvl="0" indent="-342900">
               <a:buAutoNum type="arabicPeriod"/>
             </a:pPr>
             <a:r>
-              <a:rPr/>
               <a:t>Различить обязательное подтверждение соответствия, добровольную сертификацию и специальные требования к объектам КИИ.</a:t>
             </a:r>
           </a:p>
           <a:p>
-            <a:pPr lvl="0" indent="-342900" marL="342900">
+            <a:pPr marL="342900" lvl="0" indent="-342900">
               <a:buAutoNum type="arabicPeriod"/>
             </a:pPr>
             <a:r>
-              <a:rPr/>
               <a:t>Прочитать сертификат или протокол испытаний и определить, что он подтверждает.</a:t>
             </a:r>
           </a:p>
           <a:p>
-            <a:pPr lvl="0" indent="-342900" marL="342900">
+            <a:pPr marL="342900" lvl="0" indent="-342900">
               <a:buAutoNum type="arabicPeriod"/>
             </a:pPr>
             <a:r>
-              <a:rPr/>
               <a:t>Оформить решение в виде карточки: основание, применимость, доказательство, ограничение, пересмотр.</a:t>
             </a:r>
           </a:p>
@@ -5570,6 +5729,9 @@
       </p:sp>
     </p:spTree>
   </p:cSld>
+  <p:clrMapOvr>
+    <a:masterClrMapping/>
+  </p:clrMapOvr>
 </p:sld>
 </file>
 
@@ -5605,11 +5767,10 @@
           <a:bodyPr/>
           <a:lstStyle/>
           <a:p>
-            <a:pPr lvl="0" indent="0" marL="0">
-              <a:buNone/>
-            </a:pPr>
-            <a:r>
-              <a:rPr/>
+            <a:pPr marL="0" lvl="0" indent="0">
+              <a:buNone/>
+            </a:pPr>
+            <a:r>
               <a:t>Аккредитация и испытания</a:t>
             </a:r>
           </a:p>
@@ -5630,74 +5791,66 @@
           <a:bodyPr/>
           <a:lstStyle/>
           <a:p>
-            <a:pPr lvl="0" indent="0" marL="0">
-              <a:buNone/>
-            </a:pPr>
-            <a:r>
-              <a:rPr/>
+            <a:pPr marL="0" lvl="0" indent="0">
+              <a:buNone/>
+            </a:pPr>
+            <a:r>
               <a:t>Аккредитация подтверждает компетентность выполнять работы в определённой области.</a:t>
             </a:r>
           </a:p>
           <a:p>
-            <a:pPr lvl="0" indent="0" marL="0">
-              <a:buNone/>
-            </a:pPr>
-            <a:r>
-              <a:rPr/>
+            <a:pPr marL="0" lvl="0" indent="0">
+              <a:buNone/>
+            </a:pPr>
+            <a:r>
               <a:t>Пять вопросов к протоколу:</a:t>
             </a:r>
           </a:p>
           <a:p>
-            <a:pPr lvl="0" indent="-342900" marL="342900">
+            <a:pPr marL="342900" lvl="0" indent="-342900">
               <a:buAutoNum type="arabicPeriod"/>
             </a:pPr>
             <a:r>
-              <a:rPr/>
               <a:t>Кто выполнил работу и в какой роли?</a:t>
             </a:r>
           </a:p>
           <a:p>
-            <a:pPr lvl="0" indent="-342900" marL="342900">
+            <a:pPr marL="342900" lvl="0" indent="-342900">
               <a:buAutoNum type="arabicPeriod"/>
             </a:pPr>
             <a:r>
-              <a:rPr/>
               <a:t>Какой объект, версия и конфигурация исследовались?</a:t>
             </a:r>
           </a:p>
           <a:p>
-            <a:pPr lvl="0" indent="-342900" marL="342900">
+            <a:pPr marL="342900" lvl="0" indent="-342900">
               <a:buAutoNum type="arabicPeriod"/>
             </a:pPr>
             <a:r>
-              <a:rPr/>
               <a:t>По какой методике, критерию или программе?</a:t>
             </a:r>
           </a:p>
           <a:p>
-            <a:pPr lvl="0" indent="-342900" marL="342900">
+            <a:pPr marL="342900" lvl="0" indent="-342900">
               <a:buAutoNum type="arabicPeriod"/>
             </a:pPr>
             <a:r>
-              <a:rPr/>
               <a:t>Какие данные и условия использованы?</a:t>
             </a:r>
           </a:p>
           <a:p>
-            <a:pPr lvl="0" indent="-342900" marL="342900">
+            <a:pPr marL="342900" lvl="0" indent="-342900">
               <a:buAutoNum type="arabicPeriod"/>
             </a:pPr>
             <a:r>
-              <a:rPr/>
               <a:t>Каковы границы результата: что подтверждает и что нет?</a:t>
             </a:r>
           </a:p>
           <a:p>
-            <a:pPr lvl="0" indent="0" marL="0">
-              <a:buNone/>
-            </a:pPr>
-            <a:r>
-              <a:rPr/>
+            <a:pPr marL="0" lvl="0" indent="0">
+              <a:buNone/>
+            </a:pPr>
+            <a:r>
               <a:t>Именно границы результата чаще всего теряются при пересказе.</a:t>
             </a:r>
           </a:p>
@@ -5705,6 +5858,9 @@
       </p:sp>
     </p:spTree>
   </p:cSld>
+  <p:clrMapOvr>
+    <a:masterClrMapping/>
+  </p:clrMapOvr>
 </p:sld>
 </file>
 
@@ -5740,11 +5896,10 @@
           <a:bodyPr/>
           <a:lstStyle/>
           <a:p>
-            <a:pPr lvl="0" indent="0" marL="0">
-              <a:buNone/>
-            </a:pPr>
-            <a:r>
-              <a:rPr/>
+            <a:pPr marL="0" lvl="0" indent="0">
+              <a:buNone/>
+            </a:pPr>
+            <a:r>
               <a:t>Рабочая карточка решения</a:t>
             </a:r>
           </a:p>
@@ -5762,7 +5917,7 @@
         </p:nvGraphicFramePr>
         <p:xfrm>
           <a:off x="457200" y="787400"/>
-          <a:ext cx="8229600" cy="3797300"/>
+          <a:ext cx="8229600" cy="2080260"/>
         </p:xfrm>
         <a:graphic>
           <a:graphicData uri="http://schemas.openxmlformats.org/drawingml/2006/table">
@@ -5771,8 +5926,20 @@
                 <a:tableStyleId>{5C22544A-7EE6-4342-B048-85BDC9FD1C3A}</a:tableStyleId>
               </a:tblPr>
               <a:tblGrid>
-                <a:gridCol w="4114800"/>
-                <a:gridCol w="4114800"/>
+                <a:gridCol w="4114800">
+                  <a:extLst>
+                    <a:ext uri="{9D8B030D-6E8A-4147-A177-3AD203B41FA5}">
+                      <a16:colId xmlns:a16="http://schemas.microsoft.com/office/drawing/2014/main" val="20000"/>
+                    </a:ext>
+                  </a:extLst>
+                </a:gridCol>
+                <a:gridCol w="4114800">
+                  <a:extLst>
+                    <a:ext uri="{9D8B030D-6E8A-4147-A177-3AD203B41FA5}">
+                      <a16:colId xmlns:a16="http://schemas.microsoft.com/office/drawing/2014/main" val="20001"/>
+                    </a:ext>
+                  </a:extLst>
+                </a:gridCol>
               </a:tblGrid>
               <a:tr h="0">
                 <a:tc>
@@ -5780,11 +5947,10 @@
                     <a:bodyPr/>
                     <a:lstStyle/>
                     <a:p>
-                      <a:pPr lvl="0" indent="0" marL="0">
-                        <a:buNone/>
-                      </a:pPr>
-                      <a:r>
-                        <a:rPr/>
+                      <a:pPr marL="0" lvl="0" indent="0">
+                        <a:buNone/>
+                      </a:pPr>
+                      <a:r>
                         <a:t>Поле</a:t>
                       </a:r>
                     </a:p>
@@ -5796,17 +5962,21 @@
                     <a:bodyPr/>
                     <a:lstStyle/>
                     <a:p>
-                      <a:pPr lvl="0" indent="0" marL="0">
-                        <a:buNone/>
-                      </a:pPr>
-                      <a:r>
-                        <a:rPr/>
+                      <a:pPr marL="0" lvl="0" indent="0">
+                        <a:buNone/>
+                      </a:pPr>
+                      <a:r>
                         <a:t>Что фиксировать</a:t>
                       </a:r>
                     </a:p>
                   </a:txBody>
                   <a:tcPr/>
                 </a:tc>
+                <a:extLst>
+                  <a:ext uri="{0D108BD9-81ED-4DB2-BD59-A6C34878D82A}">
+                    <a16:rowId xmlns:a16="http://schemas.microsoft.com/office/drawing/2014/main" val="10000"/>
+                  </a:ext>
+                </a:extLst>
               </a:tr>
               <a:tr h="0">
                 <a:tc>
@@ -5814,31 +5984,36 @@
                     <a:bodyPr/>
                     <a:lstStyle/>
                     <a:p>
-                      <a:pPr lvl="0" indent="0" marL="0">
-                        <a:buNone/>
-                      </a:pPr>
-                      <a:r>
-                        <a:rPr/>
+                      <a:pPr marL="0" lvl="0" indent="0">
+                        <a:buNone/>
+                      </a:pPr>
+                      <a:r>
                         <a:t>Решение</a:t>
                       </a:r>
                     </a:p>
                   </a:txBody>
-                </a:tc>
-                <a:tc>
-                  <a:txBody>
-                    <a:bodyPr/>
-                    <a:lstStyle/>
-                    <a:p>
-                      <a:pPr lvl="0" indent="0" marL="0">
-                        <a:buNone/>
-                      </a:pPr>
-                      <a:r>
-                        <a:rPr/>
+                  <a:tcPr/>
+                </a:tc>
+                <a:tc>
+                  <a:txBody>
+                    <a:bodyPr/>
+                    <a:lstStyle/>
+                    <a:p>
+                      <a:pPr marL="0" lvl="0" indent="0">
+                        <a:buNone/>
+                      </a:pPr>
+                      <a:r>
                         <a:t>что планируется или выполнено</a:t>
                       </a:r>
                     </a:p>
                   </a:txBody>
-                </a:tc>
+                  <a:tcPr/>
+                </a:tc>
+                <a:extLst>
+                  <a:ext uri="{0D108BD9-81ED-4DB2-BD59-A6C34878D82A}">
+                    <a16:rowId xmlns:a16="http://schemas.microsoft.com/office/drawing/2014/main" val="10001"/>
+                  </a:ext>
+                </a:extLst>
               </a:tr>
               <a:tr h="0">
                 <a:tc>
@@ -5846,31 +6021,36 @@
                     <a:bodyPr/>
                     <a:lstStyle/>
                     <a:p>
-                      <a:pPr lvl="0" indent="0" marL="0">
-                        <a:buNone/>
-                      </a:pPr>
-                      <a:r>
-                        <a:rPr/>
+                      <a:pPr marL="0" lvl="0" indent="0">
+                        <a:buNone/>
+                      </a:pPr>
+                      <a:r>
                         <a:t>Основание</a:t>
                       </a:r>
                     </a:p>
                   </a:txBody>
-                </a:tc>
-                <a:tc>
-                  <a:txBody>
-                    <a:bodyPr/>
-                    <a:lstStyle/>
-                    <a:p>
-                      <a:pPr lvl="0" indent="0" marL="0">
-                        <a:buNone/>
-                      </a:pPr>
-                      <a:r>
-                        <a:rPr/>
+                  <a:tcPr/>
+                </a:tc>
+                <a:tc>
+                  <a:txBody>
+                    <a:bodyPr/>
+                    <a:lstStyle/>
+                    <a:p>
+                      <a:pPr marL="0" lvl="0" indent="0">
+                        <a:buNone/>
+                      </a:pPr>
+                      <a:r>
                         <a:t>норма, договор, риск или внутреннее правило</a:t>
                       </a:r>
                     </a:p>
                   </a:txBody>
-                </a:tc>
+                  <a:tcPr/>
+                </a:tc>
+                <a:extLst>
+                  <a:ext uri="{0D108BD9-81ED-4DB2-BD59-A6C34878D82A}">
+                    <a16:rowId xmlns:a16="http://schemas.microsoft.com/office/drawing/2014/main" val="10002"/>
+                  </a:ext>
+                </a:extLst>
               </a:tr>
               <a:tr h="0">
                 <a:tc>
@@ -5878,31 +6058,36 @@
                     <a:bodyPr/>
                     <a:lstStyle/>
                     <a:p>
-                      <a:pPr lvl="0" indent="0" marL="0">
-                        <a:buNone/>
-                      </a:pPr>
-                      <a:r>
-                        <a:rPr/>
+                      <a:pPr marL="0" lvl="0" indent="0">
+                        <a:buNone/>
+                      </a:pPr>
+                      <a:r>
                         <a:t>Применимость</a:t>
                       </a:r>
                     </a:p>
                   </a:txBody>
-                </a:tc>
-                <a:tc>
-                  <a:txBody>
-                    <a:bodyPr/>
-                    <a:lstStyle/>
-                    <a:p>
-                      <a:pPr lvl="0" indent="0" marL="0">
-                        <a:buNone/>
-                      </a:pPr>
-                      <a:r>
-                        <a:rPr/>
+                  <a:tcPr/>
+                </a:tc>
+                <a:tc>
+                  <a:txBody>
+                    <a:bodyPr/>
+                    <a:lstStyle/>
+                    <a:p>
+                      <a:pPr marL="0" lvl="0" indent="0">
+                        <a:buNone/>
+                      </a:pPr>
+                      <a:r>
                         <a:t>объект, процесс, участник, редакция и дата</a:t>
                       </a:r>
                     </a:p>
                   </a:txBody>
-                </a:tc>
+                  <a:tcPr/>
+                </a:tc>
+                <a:extLst>
+                  <a:ext uri="{0D108BD9-81ED-4DB2-BD59-A6C34878D82A}">
+                    <a16:rowId xmlns:a16="http://schemas.microsoft.com/office/drawing/2014/main" val="10003"/>
+                  </a:ext>
+                </a:extLst>
               </a:tr>
               <a:tr h="0">
                 <a:tc>
@@ -5910,31 +6095,36 @@
                     <a:bodyPr/>
                     <a:lstStyle/>
                     <a:p>
-                      <a:pPr lvl="0" indent="0" marL="0">
-                        <a:buNone/>
-                      </a:pPr>
-                      <a:r>
-                        <a:rPr/>
+                      <a:pPr marL="0" lvl="0" indent="0">
+                        <a:buNone/>
+                      </a:pPr>
+                      <a:r>
                         <a:t>Доказательство</a:t>
                       </a:r>
                     </a:p>
                   </a:txBody>
-                </a:tc>
-                <a:tc>
-                  <a:txBody>
-                    <a:bodyPr/>
-                    <a:lstStyle/>
-                    <a:p>
-                      <a:pPr lvl="0" indent="0" marL="0">
-                        <a:buNone/>
-                      </a:pPr>
-                      <a:r>
-                        <a:rPr/>
+                  <a:tcPr/>
+                </a:tc>
+                <a:tc>
+                  <a:txBody>
+                    <a:bodyPr/>
+                    <a:lstStyle/>
+                    <a:p>
+                      <a:pPr marL="0" lvl="0" indent="0">
+                        <a:buNone/>
+                      </a:pPr>
+                      <a:r>
                         <a:t>акт, протокол, журнал, схема, сертификат</a:t>
                       </a:r>
                     </a:p>
                   </a:txBody>
-                </a:tc>
+                  <a:tcPr/>
+                </a:tc>
+                <a:extLst>
+                  <a:ext uri="{0D108BD9-81ED-4DB2-BD59-A6C34878D82A}">
+                    <a16:rowId xmlns:a16="http://schemas.microsoft.com/office/drawing/2014/main" val="10004"/>
+                  </a:ext>
+                </a:extLst>
               </a:tr>
               <a:tr h="0">
                 <a:tc>
@@ -5942,31 +6132,36 @@
                     <a:bodyPr/>
                     <a:lstStyle/>
                     <a:p>
-                      <a:pPr lvl="0" indent="0" marL="0">
-                        <a:buNone/>
-                      </a:pPr>
-                      <a:r>
-                        <a:rPr/>
+                      <a:pPr marL="0" lvl="0" indent="0">
+                        <a:buNone/>
+                      </a:pPr>
+                      <a:r>
                         <a:t>Ограничение</a:t>
                       </a:r>
                     </a:p>
                   </a:txBody>
-                </a:tc>
-                <a:tc>
-                  <a:txBody>
-                    <a:bodyPr/>
-                    <a:lstStyle/>
-                    <a:p>
-                      <a:pPr lvl="0" indent="0" marL="0">
-                        <a:buNone/>
-                      </a:pPr>
-                      <a:r>
-                        <a:rPr/>
+                  <a:tcPr/>
+                </a:tc>
+                <a:tc>
+                  <a:txBody>
+                    <a:bodyPr/>
+                    <a:lstStyle/>
+                    <a:p>
+                      <a:pPr marL="0" lvl="0" indent="0">
+                        <a:buNone/>
+                      </a:pPr>
+                      <a:r>
                         <a:t>чего доказательство не подтверждает</a:t>
                       </a:r>
                     </a:p>
                   </a:txBody>
-                </a:tc>
+                  <a:tcPr/>
+                </a:tc>
+                <a:extLst>
+                  <a:ext uri="{0D108BD9-81ED-4DB2-BD59-A6C34878D82A}">
+                    <a16:rowId xmlns:a16="http://schemas.microsoft.com/office/drawing/2014/main" val="10005"/>
+                  </a:ext>
+                </a:extLst>
               </a:tr>
               <a:tr h="0">
                 <a:tc>
@@ -5974,31 +6169,36 @@
                     <a:bodyPr/>
                     <a:lstStyle/>
                     <a:p>
-                      <a:pPr lvl="0" indent="0" marL="0">
-                        <a:buNone/>
-                      </a:pPr>
-                      <a:r>
-                        <a:rPr/>
+                      <a:pPr marL="0" lvl="0" indent="0">
+                        <a:buNone/>
+                      </a:pPr>
+                      <a:r>
                         <a:t>Пересмотр</a:t>
                       </a:r>
                     </a:p>
                   </a:txBody>
-                </a:tc>
-                <a:tc>
-                  <a:txBody>
-                    <a:bodyPr/>
-                    <a:lstStyle/>
-                    <a:p>
-                      <a:pPr lvl="0" indent="0" marL="0">
-                        <a:buNone/>
-                      </a:pPr>
-                      <a:r>
-                        <a:rPr/>
+                  <a:tcPr/>
+                </a:tc>
+                <a:tc>
+                  <a:txBody>
+                    <a:bodyPr/>
+                    <a:lstStyle/>
+                    <a:p>
+                      <a:pPr marL="0" lvl="0" indent="0">
+                        <a:buNone/>
+                      </a:pPr>
+                      <a:r>
                         <a:t>событие, владелец и срок проверки</a:t>
                       </a:r>
                     </a:p>
                   </a:txBody>
-                </a:tc>
+                  <a:tcPr/>
+                </a:tc>
+                <a:extLst>
+                  <a:ext uri="{0D108BD9-81ED-4DB2-BD59-A6C34878D82A}">
+                    <a16:rowId xmlns:a16="http://schemas.microsoft.com/office/drawing/2014/main" val="10006"/>
+                  </a:ext>
+                </a:extLst>
               </a:tr>
             </a:tbl>
           </a:graphicData>
@@ -6006,6 +6206,9 @@
       </p:graphicFrame>
     </p:spTree>
   </p:cSld>
+  <p:clrMapOvr>
+    <a:masterClrMapping/>
+  </p:clrMapOvr>
 </p:sld>
 </file>
 
@@ -6041,11 +6244,10 @@
           <a:bodyPr/>
           <a:lstStyle/>
           <a:p>
-            <a:pPr lvl="0" indent="0" marL="0">
-              <a:buNone/>
-            </a:pPr>
-            <a:r>
-              <a:rPr/>
+            <a:pPr marL="0" lvl="0" indent="0">
+              <a:buNone/>
+            </a:pPr>
+            <a:r>
               <a:t>Пример карточки</a:t>
             </a:r>
           </a:p>
@@ -6071,7 +6273,7 @@
           <a:bodyPr/>
           <a:lstStyle/>
           <a:p>
-            <a:pPr lvl="0" indent="0" marL="0">
+            <a:pPr marL="0" lvl="0" indent="0">
               <a:buNone/>
             </a:pPr>
             <a:r>
@@ -6093,7 +6295,7 @@
         </p:nvGraphicFramePr>
         <p:xfrm>
           <a:off x="457200" y="1625600"/>
-          <a:ext cx="8229600" cy="2832100"/>
+          <a:ext cx="8229600" cy="3108960"/>
         </p:xfrm>
         <a:graphic>
           <a:graphicData uri="http://schemas.openxmlformats.org/drawingml/2006/table">
@@ -6102,8 +6304,20 @@
                 <a:tableStyleId>{5C22544A-7EE6-4342-B048-85BDC9FD1C3A}</a:tableStyleId>
               </a:tblPr>
               <a:tblGrid>
-                <a:gridCol w="4114800"/>
-                <a:gridCol w="4114800"/>
+                <a:gridCol w="4114800">
+                  <a:extLst>
+                    <a:ext uri="{9D8B030D-6E8A-4147-A177-3AD203B41FA5}">
+                      <a16:colId xmlns:a16="http://schemas.microsoft.com/office/drawing/2014/main" val="20000"/>
+                    </a:ext>
+                  </a:extLst>
+                </a:gridCol>
+                <a:gridCol w="4114800">
+                  <a:extLst>
+                    <a:ext uri="{9D8B030D-6E8A-4147-A177-3AD203B41FA5}">
+                      <a16:colId xmlns:a16="http://schemas.microsoft.com/office/drawing/2014/main" val="20001"/>
+                    </a:ext>
+                  </a:extLst>
+                </a:gridCol>
               </a:tblGrid>
               <a:tr h="0">
                 <a:tc>
@@ -6111,11 +6325,10 @@
                     <a:bodyPr/>
                     <a:lstStyle/>
                     <a:p>
-                      <a:pPr lvl="0" indent="0" marL="0">
-                        <a:buNone/>
-                      </a:pPr>
-                      <a:r>
-                        <a:rPr/>
+                      <a:pPr marL="0" lvl="0" indent="0">
+                        <a:buNone/>
+                      </a:pPr>
+                      <a:r>
                         <a:t>Поле</a:t>
                       </a:r>
                     </a:p>
@@ -6127,17 +6340,21 @@
                     <a:bodyPr/>
                     <a:lstStyle/>
                     <a:p>
-                      <a:pPr lvl="0" indent="0" marL="0">
-                        <a:buNone/>
-                      </a:pPr>
-                      <a:r>
-                        <a:rPr/>
+                      <a:pPr marL="0" lvl="0" indent="0">
+                        <a:buNone/>
+                      </a:pPr>
+                      <a:r>
                         <a:t>Содержание</a:t>
                       </a:r>
                     </a:p>
                   </a:txBody>
                   <a:tcPr/>
                 </a:tc>
+                <a:extLst>
+                  <a:ext uri="{0D108BD9-81ED-4DB2-BD59-A6C34878D82A}">
+                    <a16:rowId xmlns:a16="http://schemas.microsoft.com/office/drawing/2014/main" val="10000"/>
+                  </a:ext>
+                </a:extLst>
               </a:tr>
               <a:tr h="0">
                 <a:tc>
@@ -6145,31 +6362,36 @@
                     <a:bodyPr/>
                     <a:lstStyle/>
                     <a:p>
-                      <a:pPr lvl="0" indent="0" marL="0">
-                        <a:buNone/>
-                      </a:pPr>
-                      <a:r>
-                        <a:rPr/>
+                      <a:pPr marL="0" lvl="0" indent="0">
+                        <a:buNone/>
+                      </a:pPr>
+                      <a:r>
                         <a:t>Решение</a:t>
                       </a:r>
                     </a:p>
                   </a:txBody>
-                </a:tc>
-                <a:tc>
-                  <a:txBody>
-                    <a:bodyPr/>
-                    <a:lstStyle/>
-                    <a:p>
-                      <a:pPr lvl="0" indent="0" marL="0">
-                        <a:buNone/>
-                      </a:pPr>
-                      <a:r>
-                        <a:rPr/>
+                  <a:tcPr/>
+                </a:tc>
+                <a:tc>
+                  <a:txBody>
+                    <a:bodyPr/>
+                    <a:lstStyle/>
+                    <a:p>
+                      <a:pPr marL="0" lvl="0" indent="0">
+                        <a:buNone/>
+                      </a:pPr>
+                      <a:r>
                         <a:t>использовать продукт версии 3.2 на сервере обработки данных</a:t>
                       </a:r>
                     </a:p>
                   </a:txBody>
-                </a:tc>
+                  <a:tcPr/>
+                </a:tc>
+                <a:extLst>
+                  <a:ext uri="{0D108BD9-81ED-4DB2-BD59-A6C34878D82A}">
+                    <a16:rowId xmlns:a16="http://schemas.microsoft.com/office/drawing/2014/main" val="10001"/>
+                  </a:ext>
+                </a:extLst>
               </a:tr>
               <a:tr h="0">
                 <a:tc>
@@ -6177,31 +6399,36 @@
                     <a:bodyPr/>
                     <a:lstStyle/>
                     <a:p>
-                      <a:pPr lvl="0" indent="0" marL="0">
-                        <a:buNone/>
-                      </a:pPr>
-                      <a:r>
-                        <a:rPr/>
+                      <a:pPr marL="0" lvl="0" indent="0">
+                        <a:buNone/>
+                      </a:pPr>
+                      <a:r>
                         <a:t>Основание</a:t>
                       </a:r>
                     </a:p>
                   </a:txBody>
-                </a:tc>
-                <a:tc>
-                  <a:txBody>
-                    <a:bodyPr/>
-                    <a:lstStyle/>
-                    <a:p>
-                      <a:pPr lvl="0" indent="0" marL="0">
-                        <a:buNone/>
-                      </a:pPr>
-                      <a:r>
-                        <a:rPr/>
+                  <a:tcPr/>
+                </a:tc>
+                <a:tc>
+                  <a:txBody>
+                    <a:bodyPr/>
+                    <a:lstStyle/>
+                    <a:p>
+                      <a:pPr marL="0" lvl="0" indent="0">
+                        <a:buNone/>
+                      </a:pPr>
+                      <a:r>
                         <a:t>закупочное условие о сертификате; регламент выбора ПО</a:t>
                       </a:r>
                     </a:p>
                   </a:txBody>
-                </a:tc>
+                  <a:tcPr/>
+                </a:tc>
+                <a:extLst>
+                  <a:ext uri="{0D108BD9-81ED-4DB2-BD59-A6C34878D82A}">
+                    <a16:rowId xmlns:a16="http://schemas.microsoft.com/office/drawing/2014/main" val="10002"/>
+                  </a:ext>
+                </a:extLst>
               </a:tr>
               <a:tr h="0">
                 <a:tc>
@@ -6209,31 +6436,36 @@
                     <a:bodyPr/>
                     <a:lstStyle/>
                     <a:p>
-                      <a:pPr lvl="0" indent="0" marL="0">
-                        <a:buNone/>
-                      </a:pPr>
-                      <a:r>
-                        <a:rPr/>
+                      <a:pPr marL="0" lvl="0" indent="0">
+                        <a:buNone/>
+                      </a:pPr>
+                      <a:r>
                         <a:t>Применимость</a:t>
                       </a:r>
                     </a:p>
                   </a:txBody>
-                </a:tc>
-                <a:tc>
-                  <a:txBody>
-                    <a:bodyPr/>
-                    <a:lstStyle/>
-                    <a:p>
-                      <a:pPr lvl="0" indent="0" marL="0">
-                        <a:buNone/>
-                      </a:pPr>
-                      <a:r>
-                        <a:rPr/>
+                  <a:tcPr/>
+                </a:tc>
+                <a:tc>
+                  <a:txBody>
+                    <a:bodyPr/>
+                    <a:lstStyle/>
+                    <a:p>
+                      <a:pPr marL="0" lvl="0" indent="0">
+                        <a:buNone/>
+                      </a:pPr>
+                      <a:r>
                         <a:t>сервер обработки данных, подразделение «А»; редакция условий на дату договора</a:t>
                       </a:r>
                     </a:p>
                   </a:txBody>
-                </a:tc>
+                  <a:tcPr/>
+                </a:tc>
+                <a:extLst>
+                  <a:ext uri="{0D108BD9-81ED-4DB2-BD59-A6C34878D82A}">
+                    <a16:rowId xmlns:a16="http://schemas.microsoft.com/office/drawing/2014/main" val="10003"/>
+                  </a:ext>
+                </a:extLst>
               </a:tr>
               <a:tr h="0">
                 <a:tc>
@@ -6241,31 +6473,36 @@
                     <a:bodyPr/>
                     <a:lstStyle/>
                     <a:p>
-                      <a:pPr lvl="0" indent="0" marL="0">
-                        <a:buNone/>
-                      </a:pPr>
-                      <a:r>
-                        <a:rPr/>
+                      <a:pPr marL="0" lvl="0" indent="0">
+                        <a:buNone/>
+                      </a:pPr>
+                      <a:r>
                         <a:t>Доказательство</a:t>
                       </a:r>
                     </a:p>
                   </a:txBody>
-                </a:tc>
-                <a:tc>
-                  <a:txBody>
-                    <a:bodyPr/>
-                    <a:lstStyle/>
-                    <a:p>
-                      <a:pPr lvl="0" indent="0" marL="0">
-                        <a:buNone/>
-                      </a:pPr>
-                      <a:r>
-                        <a:rPr/>
+                  <a:tcPr/>
+                </a:tc>
+                <a:tc>
+                  <a:txBody>
+                    <a:bodyPr/>
+                    <a:lstStyle/>
+                    <a:p>
+                      <a:pPr marL="0" lvl="0" indent="0">
+                        <a:buNone/>
+                      </a:pPr>
+                      <a:r>
                         <a:t>сертификат на версию 3.2, акт приёмки, схема</a:t>
                       </a:r>
                     </a:p>
                   </a:txBody>
-                </a:tc>
+                  <a:tcPr/>
+                </a:tc>
+                <a:extLst>
+                  <a:ext uri="{0D108BD9-81ED-4DB2-BD59-A6C34878D82A}">
+                    <a16:rowId xmlns:a16="http://schemas.microsoft.com/office/drawing/2014/main" val="10004"/>
+                  </a:ext>
+                </a:extLst>
               </a:tr>
               <a:tr h="0">
                 <a:tc>
@@ -6273,31 +6510,36 @@
                     <a:bodyPr/>
                     <a:lstStyle/>
                     <a:p>
-                      <a:pPr lvl="0" indent="0" marL="0">
-                        <a:buNone/>
-                      </a:pPr>
-                      <a:r>
-                        <a:rPr/>
+                      <a:pPr marL="0" lvl="0" indent="0">
+                        <a:buNone/>
+                      </a:pPr>
+                      <a:r>
                         <a:t>Ограничение</a:t>
                       </a:r>
                     </a:p>
                   </a:txBody>
-                </a:tc>
-                <a:tc>
-                  <a:txBody>
-                    <a:bodyPr/>
-                    <a:lstStyle/>
-                    <a:p>
-                      <a:pPr lvl="0" indent="0" marL="0">
-                        <a:buNone/>
-                      </a:pPr>
-                      <a:r>
-                        <a:rPr/>
+                  <a:tcPr/>
+                </a:tc>
+                <a:tc>
+                  <a:txBody>
+                    <a:bodyPr/>
+                    <a:lstStyle/>
+                    <a:p>
+                      <a:pPr marL="0" lvl="0" indent="0">
+                        <a:buNone/>
+                      </a:pPr>
+                      <a:r>
                         <a:t>сертификат — для стандартной конфигурации; нестандартные модули не охвачены</a:t>
                       </a:r>
                     </a:p>
                   </a:txBody>
-                </a:tc>
+                  <a:tcPr/>
+                </a:tc>
+                <a:extLst>
+                  <a:ext uri="{0D108BD9-81ED-4DB2-BD59-A6C34878D82A}">
+                    <a16:rowId xmlns:a16="http://schemas.microsoft.com/office/drawing/2014/main" val="10005"/>
+                  </a:ext>
+                </a:extLst>
               </a:tr>
               <a:tr h="0">
                 <a:tc>
@@ -6305,31 +6547,36 @@
                     <a:bodyPr/>
                     <a:lstStyle/>
                     <a:p>
-                      <a:pPr lvl="0" indent="0" marL="0">
-                        <a:buNone/>
-                      </a:pPr>
-                      <a:r>
-                        <a:rPr/>
+                      <a:pPr marL="0" lvl="0" indent="0">
+                        <a:buNone/>
+                      </a:pPr>
+                      <a:r>
                         <a:t>Пересмотр</a:t>
                       </a:r>
                     </a:p>
                   </a:txBody>
-                </a:tc>
-                <a:tc>
-                  <a:txBody>
-                    <a:bodyPr/>
-                    <a:lstStyle/>
-                    <a:p>
-                      <a:pPr lvl="0" indent="0" marL="0">
-                        <a:buNone/>
-                      </a:pPr>
-                      <a:r>
-                        <a:rPr/>
+                  <a:tcPr/>
+                </a:tc>
+                <a:tc>
+                  <a:txBody>
+                    <a:bodyPr/>
+                    <a:lstStyle/>
+                    <a:p>
+                      <a:pPr marL="0" lvl="0" indent="0">
+                        <a:buNone/>
+                      </a:pPr>
+                      <a:r>
                         <a:t>при обновлении версии или истечении срока; отдел ИБ; раз в год</a:t>
                       </a:r>
                     </a:p>
                   </a:txBody>
-                </a:tc>
+                  <a:tcPr/>
+                </a:tc>
+                <a:extLst>
+                  <a:ext uri="{0D108BD9-81ED-4DB2-BD59-A6C34878D82A}">
+                    <a16:rowId xmlns:a16="http://schemas.microsoft.com/office/drawing/2014/main" val="10006"/>
+                  </a:ext>
+                </a:extLst>
               </a:tr>
             </a:tbl>
           </a:graphicData>
@@ -6337,6 +6584,9 @@
       </p:graphicFrame>
     </p:spTree>
   </p:cSld>
+  <p:clrMapOvr>
+    <a:masterClrMapping/>
+  </p:clrMapOvr>
 </p:sld>
 </file>
 
@@ -6372,11 +6622,10 @@
           <a:bodyPr/>
           <a:lstStyle/>
           <a:p>
-            <a:pPr lvl="0" indent="0" marL="0">
-              <a:buNone/>
-            </a:pPr>
-            <a:r>
-              <a:rPr/>
+            <a:pPr marL="0" lvl="0" indent="0">
+              <a:buNone/>
+            </a:pPr>
+            <a:r>
               <a:t>Пример 1</a:t>
             </a:r>
           </a:p>
@@ -6397,7 +6646,7 @@
           <a:bodyPr/>
           <a:lstStyle/>
           <a:p>
-            <a:pPr lvl="0" indent="0" marL="0">
+            <a:pPr marL="0" lvl="0" indent="0">
               <a:buNone/>
             </a:pPr>
             <a:r>
@@ -6408,37 +6657,32 @@
           <a:p>
             <a:pPr lvl="0"/>
             <a:r>
-              <a:rPr/>
               <a:t>Ситуация: в ТЗ на закупку написано «соответствовать национальному стандарту».</a:t>
             </a:r>
           </a:p>
           <a:p>
             <a:pPr lvl="0"/>
             <a:r>
-              <a:rPr/>
               <a:t>Основание: условие закупки, а не закон.</a:t>
             </a:r>
           </a:p>
           <a:p>
             <a:pPr lvl="0"/>
             <a:r>
-              <a:rPr/>
               <a:t>Решение: включить в договор редакцию и разделы стандарта.</a:t>
             </a:r>
           </a:p>
           <a:p>
             <a:pPr lvl="0"/>
             <a:r>
-              <a:rPr/>
               <a:t>Ограничение: соответствие стандарту не доказывает пригодность для объекта КИИ.</a:t>
             </a:r>
           </a:p>
           <a:p>
-            <a:pPr lvl="0" indent="0" marL="0">
-              <a:buNone/>
-            </a:pPr>
-            <a:r>
-              <a:rPr/>
+            <a:pPr marL="0" lvl="0" indent="0">
+              <a:buNone/>
+            </a:pPr>
+            <a:r>
               <a:t>Вывод: обязательность возникла из договора.</a:t>
             </a:r>
           </a:p>
@@ -6446,6 +6690,9 @@
       </p:sp>
     </p:spTree>
   </p:cSld>
+  <p:clrMapOvr>
+    <a:masterClrMapping/>
+  </p:clrMapOvr>
 </p:sld>
 </file>
 
@@ -6481,11 +6728,10 @@
           <a:bodyPr/>
           <a:lstStyle/>
           <a:p>
-            <a:pPr lvl="0" indent="0" marL="0">
-              <a:buNone/>
-            </a:pPr>
-            <a:r>
-              <a:rPr/>
+            <a:pPr marL="0" lvl="0" indent="0">
+              <a:buNone/>
+            </a:pPr>
+            <a:r>
               <a:t>Пример 2</a:t>
             </a:r>
           </a:p>
@@ -6506,7 +6752,7 @@
           <a:bodyPr/>
           <a:lstStyle/>
           <a:p>
-            <a:pPr lvl="0" indent="0" marL="0">
+            <a:pPr marL="0" lvl="0" indent="0">
               <a:buNone/>
             </a:pPr>
             <a:r>
@@ -6517,37 +6763,32 @@
           <a:p>
             <a:pPr lvl="0"/>
             <a:r>
-              <a:rPr/>
               <a:t>Ситуация: используем версию 4.5, в сертификате — 4.2.</a:t>
             </a:r>
           </a:p>
           <a:p>
             <a:pPr lvl="0"/>
             <a:r>
-              <a:rPr/>
               <a:t>Применимость: сертификат относится к версии и конфигурации.</a:t>
             </a:r>
           </a:p>
           <a:p>
             <a:pPr lvl="0"/>
             <a:r>
-              <a:rPr/>
               <a:t>Решение: не принимать без подтверждения распространения на 4.5.</a:t>
             </a:r>
           </a:p>
           <a:p>
             <a:pPr lvl="0"/>
             <a:r>
-              <a:rPr/>
               <a:t>Пересмотр: проверять область сертификата при каждом обновлении.</a:t>
             </a:r>
           </a:p>
           <a:p>
-            <a:pPr lvl="0" indent="0" marL="0">
-              <a:buNone/>
-            </a:pPr>
-            <a:r>
-              <a:rPr/>
+            <a:pPr marL="0" lvl="0" indent="0">
+              <a:buNone/>
+            </a:pPr>
+            <a:r>
               <a:t>Вывод: «просто новее» — не доказательство.</a:t>
             </a:r>
           </a:p>
@@ -6555,6 +6796,9 @@
       </p:sp>
     </p:spTree>
   </p:cSld>
+  <p:clrMapOvr>
+    <a:masterClrMapping/>
+  </p:clrMapOvr>
 </p:sld>
 </file>
 
@@ -6590,11 +6834,10 @@
           <a:bodyPr/>
           <a:lstStyle/>
           <a:p>
-            <a:pPr lvl="0" indent="0" marL="0">
-              <a:buNone/>
-            </a:pPr>
-            <a:r>
-              <a:rPr/>
+            <a:pPr marL="0" lvl="0" indent="0">
+              <a:buNone/>
+            </a:pPr>
+            <a:r>
               <a:t>Пример 3</a:t>
             </a:r>
           </a:p>
@@ -6615,7 +6858,7 @@
           <a:bodyPr/>
           <a:lstStyle/>
           <a:p>
-            <a:pPr lvl="0" indent="0" marL="0">
+            <a:pPr marL="0" lvl="0" indent="0">
               <a:buNone/>
             </a:pPr>
             <a:r>
@@ -6626,37 +6869,32 @@
           <a:p>
             <a:pPr lvl="0"/>
             <a:r>
-              <a:rPr/>
               <a:t>Ситуация: протокол на межсетевой экран, его встраивают в узел.</a:t>
             </a:r>
           </a:p>
           <a:p>
             <a:pPr lvl="0"/>
             <a:r>
-              <a:rPr/>
               <a:t>Протокол доказывает свойства устройства в описанной конфигурации.</a:t>
             </a:r>
           </a:p>
           <a:p>
             <a:pPr lvl="0"/>
             <a:r>
-              <a:rPr/>
               <a:t>Корректность интеграции подтверждается отдельно.</a:t>
             </a:r>
           </a:p>
           <a:p>
             <a:pPr lvl="0"/>
             <a:r>
-              <a:rPr/>
               <a:t>Пересмотр: при смене конфигурации или архитектуры узла.</a:t>
             </a:r>
           </a:p>
           <a:p>
-            <a:pPr lvl="0" indent="0" marL="0">
-              <a:buNone/>
-            </a:pPr>
-            <a:r>
-              <a:rPr/>
+            <a:pPr marL="0" lvl="0" indent="0">
+              <a:buNone/>
+            </a:pPr>
+            <a:r>
               <a:t>Вывод: протокол подтверждает продукт, а не безопасность узла.</a:t>
             </a:r>
           </a:p>
@@ -6664,6 +6902,9 @@
       </p:sp>
     </p:spTree>
   </p:cSld>
+  <p:clrMapOvr>
+    <a:masterClrMapping/>
+  </p:clrMapOvr>
 </p:sld>
 </file>
 
@@ -6699,11 +6940,10 @@
           <a:bodyPr/>
           <a:lstStyle/>
           <a:p>
-            <a:pPr lvl="0" indent="0" marL="0">
-              <a:buNone/>
-            </a:pPr>
-            <a:r>
-              <a:rPr/>
+            <a:pPr marL="0" lvl="0" indent="0">
+              <a:buNone/>
+            </a:pPr>
+            <a:r>
               <a:t>Пример 4</a:t>
             </a:r>
           </a:p>
@@ -6724,7 +6964,7 @@
           <a:bodyPr/>
           <a:lstStyle/>
           <a:p>
-            <a:pPr lvl="0" indent="0" marL="0">
+            <a:pPr marL="0" lvl="0" indent="0">
               <a:buNone/>
             </a:pPr>
             <a:r>
@@ -6735,37 +6975,32 @@
           <a:p>
             <a:pPr lvl="0"/>
             <a:r>
-              <a:rPr/>
               <a:t>Ситуация: локальный документ двухлетней давности ссылается на ПНСТ.</a:t>
             </a:r>
           </a:p>
           <a:p>
             <a:pPr lvl="0"/>
             <a:r>
-              <a:rPr/>
               <a:t>Срок действия ПНСТ — не более трёх лет.</a:t>
             </a:r>
           </a:p>
           <a:p>
             <a:pPr lvl="0"/>
             <a:r>
-              <a:rPr/>
               <a:t>Решение: проверить статус и дату, при необходимости обновить ссылку.</a:t>
             </a:r>
           </a:p>
           <a:p>
             <a:pPr lvl="0"/>
             <a:r>
-              <a:rPr/>
               <a:t>Пересмотр: не реже раза в год.</a:t>
             </a:r>
           </a:p>
           <a:p>
-            <a:pPr lvl="0" indent="0" marL="0">
-              <a:buNone/>
-            </a:pPr>
-            <a:r>
-              <a:rPr/>
+            <a:pPr marL="0" lvl="0" indent="0">
+              <a:buNone/>
+            </a:pPr>
+            <a:r>
               <a:t>Вывод: ссылка без контроля срока — скрытый риск устаревания.</a:t>
             </a:r>
           </a:p>
@@ -6773,6 +7008,9 @@
       </p:sp>
     </p:spTree>
   </p:cSld>
+  <p:clrMapOvr>
+    <a:masterClrMapping/>
+  </p:clrMapOvr>
 </p:sld>
 </file>
 
@@ -6808,11 +7046,10 @@
           <a:bodyPr/>
           <a:lstStyle/>
           <a:p>
-            <a:pPr lvl="0" indent="0" marL="0">
-              <a:buNone/>
-            </a:pPr>
-            <a:r>
-              <a:rPr/>
+            <a:pPr marL="0" lvl="0" indent="0">
+              <a:buNone/>
+            </a:pPr>
+            <a:r>
               <a:t>Пример 5</a:t>
             </a:r>
           </a:p>
@@ -6833,7 +7070,7 @@
           <a:bodyPr/>
           <a:lstStyle/>
           <a:p>
-            <a:pPr lvl="0" indent="0" marL="0">
+            <a:pPr marL="0" lvl="0" indent="0">
               <a:buNone/>
             </a:pPr>
             <a:r>
@@ -6842,41 +7079,36 @@
             </a:r>
           </a:p>
           <a:p>
-            <a:pPr lvl="0" indent="0" marL="0">
-              <a:buNone/>
-            </a:pPr>
-            <a:r>
-              <a:rPr/>
+            <a:pPr marL="0" lvl="0" indent="0">
+              <a:buNone/>
+            </a:pPr>
+            <a:r>
               <a:t>«Продукт соответствует требованиям законодательства о КИИ»</a:t>
             </a:r>
           </a:p>
           <a:p>
             <a:pPr lvl="0"/>
             <a:r>
-              <a:rPr/>
               <a:t>Это заявление стороны, а не протокол и не акт органа.</a:t>
             </a:r>
           </a:p>
           <a:p>
             <a:pPr lvl="0"/>
             <a:r>
-              <a:rPr/>
               <a:t>Нет требований, объектов и границ.</a:t>
             </a:r>
           </a:p>
           <a:p>
             <a:pPr lvl="0"/>
             <a:r>
-              <a:rPr/>
               <a:t>Решение: запросить конкретные документы и версии.</a:t>
             </a:r>
           </a:p>
           <a:p>
-            <a:pPr lvl="0" indent="0" marL="0">
-              <a:buNone/>
-            </a:pPr>
-            <a:r>
-              <a:rPr/>
+            <a:pPr marL="0" lvl="0" indent="0">
+              <a:buNone/>
+            </a:pPr>
+            <a:r>
               <a:t>Вывод: письмо без указания требований — не доказательство.</a:t>
             </a:r>
           </a:p>
@@ -6884,6 +7116,9 @@
       </p:sp>
     </p:spTree>
   </p:cSld>
+  <p:clrMapOvr>
+    <a:masterClrMapping/>
+  </p:clrMapOvr>
 </p:sld>
 </file>
 
@@ -6919,11 +7154,10 @@
           <a:bodyPr/>
           <a:lstStyle/>
           <a:p>
-            <a:pPr lvl="0" indent="0" marL="0">
-              <a:buNone/>
-            </a:pPr>
-            <a:r>
-              <a:rPr/>
+            <a:pPr marL="0" lvl="0" indent="0">
+              <a:buNone/>
+            </a:pPr>
+            <a:r>
               <a:t>Пример 6</a:t>
             </a:r>
           </a:p>
@@ -6944,7 +7178,7 @@
           <a:bodyPr/>
           <a:lstStyle/>
           <a:p>
-            <a:pPr lvl="0" indent="0" marL="0">
+            <a:pPr marL="0" lvl="0" indent="0">
               <a:buNone/>
             </a:pPr>
             <a:r>
@@ -6953,41 +7187,36 @@
             </a:r>
           </a:p>
           <a:p>
-            <a:pPr lvl="0" indent="0" marL="0">
-              <a:buNone/>
-            </a:pPr>
-            <a:r>
-              <a:rPr/>
+            <a:pPr marL="0" lvl="0" indent="0">
+              <a:buNone/>
+            </a:pPr>
+            <a:r>
               <a:t>«Требования выполнены, так как продукт сертифицирован»</a:t>
             </a:r>
           </a:p>
           <a:p>
             <a:pPr lvl="0"/>
             <a:r>
-              <a:rPr/>
               <a:t>Сертификат относится к продукту, а не ко всему объекту.</a:t>
             </a:r>
           </a:p>
           <a:p>
             <a:pPr lvl="0"/>
             <a:r>
-              <a:rPr/>
               <a:t>Он не заменяет обязательные требования.</a:t>
             </a:r>
           </a:p>
           <a:p>
             <a:pPr lvl="0"/>
             <a:r>
-              <a:rPr/>
               <a:t>Нужны документы по реализации остальных мер.</a:t>
             </a:r>
           </a:p>
           <a:p>
-            <a:pPr lvl="0" indent="0" marL="0">
-              <a:buNone/>
-            </a:pPr>
-            <a:r>
-              <a:rPr/>
+            <a:pPr marL="0" lvl="0" indent="0">
+              <a:buNone/>
+            </a:pPr>
+            <a:r>
               <a:t>Вывод: «продукт сертифицирован» ≠ «требования к объекту выполнены».</a:t>
             </a:r>
           </a:p>
@@ -6995,6 +7224,9 @@
       </p:sp>
     </p:spTree>
   </p:cSld>
+  <p:clrMapOvr>
+    <a:masterClrMapping/>
+  </p:clrMapOvr>
 </p:sld>
 </file>
 
@@ -7030,11 +7262,10 @@
           <a:bodyPr/>
           <a:lstStyle/>
           <a:p>
-            <a:pPr lvl="0" indent="0" marL="0">
-              <a:buNone/>
-            </a:pPr>
-            <a:r>
-              <a:rPr/>
+            <a:pPr marL="0" lvl="0" indent="0">
+              <a:buNone/>
+            </a:pPr>
+            <a:r>
               <a:t>Работа в группах</a:t>
             </a:r>
           </a:p>
@@ -7055,7 +7286,7 @@
           <a:bodyPr/>
           <a:lstStyle/>
           <a:p>
-            <a:pPr lvl="0" indent="0" marL="0">
+            <a:pPr marL="0" lvl="0" indent="0">
               <a:buNone/>
             </a:pPr>
             <a:r>
@@ -7064,38 +7295,34 @@
             </a:r>
           </a:p>
           <a:p>
-            <a:pPr lvl="0" indent="-342900" marL="342900">
+            <a:pPr marL="342900" lvl="0" indent="-342900">
               <a:buAutoNum type="arabicPeriod"/>
             </a:pPr>
             <a:r>
-              <a:rPr/>
               <a:t>Каждая группа получает один из примеров 1–6 без разбора.</a:t>
             </a:r>
           </a:p>
           <a:p>
-            <a:pPr lvl="0" indent="-342900" marL="342900">
+            <a:pPr marL="342900" lvl="0" indent="-342900">
               <a:buAutoNum type="arabicPeriod"/>
             </a:pPr>
             <a:r>
-              <a:rPr/>
               <a:t>Заполняет карточку решения.</a:t>
             </a:r>
           </a:p>
           <a:p>
-            <a:pPr lvl="0" indent="-342900" marL="342900">
+            <a:pPr marL="342900" lvl="0" indent="-342900">
               <a:buAutoNum type="arabicPeriod"/>
             </a:pPr>
             <a:r>
-              <a:rPr/>
               <a:t>Сравнивает с разбором преподавателя.</a:t>
             </a:r>
           </a:p>
           <a:p>
-            <a:pPr lvl="0" indent="-342900" marL="342900">
+            <a:pPr marL="342900" lvl="0" indent="-342900">
               <a:buAutoNum type="arabicPeriod"/>
             </a:pPr>
             <a:r>
-              <a:rPr/>
               <a:t>Называет шаг, на котором чаще ошибались.</a:t>
             </a:r>
           </a:p>
@@ -7103,6 +7330,9 @@
       </p:sp>
     </p:spTree>
   </p:cSld>
+  <p:clrMapOvr>
+    <a:masterClrMapping/>
+  </p:clrMapOvr>
 </p:sld>
 </file>
 
@@ -7138,11 +7368,10 @@
           <a:bodyPr/>
           <a:lstStyle/>
           <a:p>
-            <a:pPr lvl="0" indent="0" marL="0">
-              <a:buNone/>
-            </a:pPr>
-            <a:r>
-              <a:rPr/>
+            <a:pPr marL="0" lvl="0" indent="0">
+              <a:buNone/>
+            </a:pPr>
+            <a:r>
               <a:t>Вопрос 1</a:t>
             </a:r>
           </a:p>
@@ -7163,7 +7392,7 @@
           <a:bodyPr/>
           <a:lstStyle/>
           <a:p>
-            <a:pPr lvl="0" indent="0" marL="0">
+            <a:pPr marL="0" lvl="0" indent="0">
               <a:buNone/>
             </a:pPr>
             <a:r>
@@ -7172,18 +7401,16 @@
             </a:r>
           </a:p>
           <a:p>
-            <a:pPr lvl="0" indent="0" marL="0">
-              <a:buNone/>
-            </a:pPr>
-            <a:r>
-              <a:rPr/>
+            <a:pPr marL="0" lvl="0" indent="0">
+              <a:buNone/>
+            </a:pPr>
+            <a:r>
               <a:t>Что, по-вашему, означает эта фраза?</a:t>
             </a:r>
           </a:p>
           <a:p>
             <a:pPr lvl="0"/>
             <a:r>
-              <a:rPr/>
               <a:t>Запишите 2–3 ответа.</a:t>
             </a:r>
           </a:p>
@@ -7191,6 +7418,9 @@
       </p:sp>
     </p:spTree>
   </p:cSld>
+  <p:clrMapOvr>
+    <a:masterClrMapping/>
+  </p:clrMapOvr>
 </p:sld>
 </file>
 
@@ -7226,11 +7456,10 @@
           <a:bodyPr/>
           <a:lstStyle/>
           <a:p>
-            <a:pPr lvl="0" indent="0" marL="0">
-              <a:buNone/>
-            </a:pPr>
-            <a:r>
-              <a:rPr/>
+            <a:pPr marL="0" lvl="0" indent="0">
+              <a:buNone/>
+            </a:pPr>
+            <a:r>
               <a:t>Типичные ошибки</a:t>
             </a:r>
           </a:p>
@@ -7248,7 +7477,7 @@
         </p:nvGraphicFramePr>
         <p:xfrm>
           <a:off x="457200" y="787400"/>
-          <a:ext cx="8229600" cy="3797300"/>
+          <a:ext cx="8229600" cy="2880360"/>
         </p:xfrm>
         <a:graphic>
           <a:graphicData uri="http://schemas.openxmlformats.org/drawingml/2006/table">
@@ -7257,8 +7486,20 @@
                 <a:tableStyleId>{5C22544A-7EE6-4342-B048-85BDC9FD1C3A}</a:tableStyleId>
               </a:tblPr>
               <a:tblGrid>
-                <a:gridCol w="4114800"/>
-                <a:gridCol w="4114800"/>
+                <a:gridCol w="4114800">
+                  <a:extLst>
+                    <a:ext uri="{9D8B030D-6E8A-4147-A177-3AD203B41FA5}">
+                      <a16:colId xmlns:a16="http://schemas.microsoft.com/office/drawing/2014/main" val="20000"/>
+                    </a:ext>
+                  </a:extLst>
+                </a:gridCol>
+                <a:gridCol w="4114800">
+                  <a:extLst>
+                    <a:ext uri="{9D8B030D-6E8A-4147-A177-3AD203B41FA5}">
+                      <a16:colId xmlns:a16="http://schemas.microsoft.com/office/drawing/2014/main" val="20001"/>
+                    </a:ext>
+                  </a:extLst>
+                </a:gridCol>
               </a:tblGrid>
               <a:tr h="0">
                 <a:tc>
@@ -7266,11 +7507,10 @@
                     <a:bodyPr/>
                     <a:lstStyle/>
                     <a:p>
-                      <a:pPr lvl="0" indent="0" marL="0">
-                        <a:buNone/>
-                      </a:pPr>
-                      <a:r>
-                        <a:rPr/>
+                      <a:pPr marL="0" lvl="0" indent="0">
+                        <a:buNone/>
+                      </a:pPr>
+                      <a:r>
                         <a:t>Ошибка</a:t>
                       </a:r>
                     </a:p>
@@ -7282,17 +7522,21 @@
                     <a:bodyPr/>
                     <a:lstStyle/>
                     <a:p>
-                      <a:pPr lvl="0" indent="0" marL="0">
-                        <a:buNone/>
-                      </a:pPr>
-                      <a:r>
-                        <a:rPr/>
+                      <a:pPr marL="0" lvl="0" indent="0">
+                        <a:buNone/>
+                      </a:pPr>
+                      <a:r>
                         <a:t>Как избежать</a:t>
                       </a:r>
                     </a:p>
                   </a:txBody>
                   <a:tcPr/>
                 </a:tc>
+                <a:extLst>
+                  <a:ext uri="{0D108BD9-81ED-4DB2-BD59-A6C34878D82A}">
+                    <a16:rowId xmlns:a16="http://schemas.microsoft.com/office/drawing/2014/main" val="10000"/>
+                  </a:ext>
+                </a:extLst>
               </a:tr>
               <a:tr h="0">
                 <a:tc>
@@ -7300,31 +7544,36 @@
                     <a:bodyPr/>
                     <a:lstStyle/>
                     <a:p>
-                      <a:pPr lvl="0" indent="0" marL="0">
-                        <a:buNone/>
-                      </a:pPr>
-                      <a:r>
-                        <a:rPr/>
+                      <a:pPr marL="0" lvl="0" indent="0">
+                        <a:buNone/>
+                      </a:pPr>
+                      <a:r>
                         <a:t>«Есть документ» = «применим»</a:t>
                       </a:r>
                     </a:p>
                   </a:txBody>
-                </a:tc>
-                <a:tc>
-                  <a:txBody>
-                    <a:bodyPr/>
-                    <a:lstStyle/>
-                    <a:p>
-                      <a:pPr lvl="0" indent="0" marL="0">
-                        <a:buNone/>
-                      </a:pPr>
-                      <a:r>
-                        <a:rPr/>
+                  <a:tcPr/>
+                </a:tc>
+                <a:tc>
+                  <a:txBody>
+                    <a:bodyPr/>
+                    <a:lstStyle/>
+                    <a:p>
+                      <a:pPr marL="0" lvl="0" indent="0">
+                        <a:buNone/>
+                      </a:pPr>
+                      <a:r>
                         <a:t>пять проверок применимости</a:t>
                       </a:r>
                     </a:p>
                   </a:txBody>
-                </a:tc>
+                  <a:tcPr/>
+                </a:tc>
+                <a:extLst>
+                  <a:ext uri="{0D108BD9-81ED-4DB2-BD59-A6C34878D82A}">
+                    <a16:rowId xmlns:a16="http://schemas.microsoft.com/office/drawing/2014/main" val="10001"/>
+                  </a:ext>
+                </a:extLst>
               </a:tr>
               <a:tr h="0">
                 <a:tc>
@@ -7332,31 +7581,36 @@
                     <a:bodyPr/>
                     <a:lstStyle/>
                     <a:p>
-                      <a:pPr lvl="0" indent="0" marL="0">
-                        <a:buNone/>
-                      </a:pPr>
-                      <a:r>
-                        <a:rPr/>
+                      <a:pPr marL="0" lvl="0" indent="0">
+                        <a:buNone/>
+                      </a:pPr>
+                      <a:r>
                         <a:t>Стандарт обязателен «по умолчанию»</a:t>
                       </a:r>
                     </a:p>
                   </a:txBody>
-                </a:tc>
-                <a:tc>
-                  <a:txBody>
-                    <a:bodyPr/>
-                    <a:lstStyle/>
-                    <a:p>
-                      <a:pPr lvl="0" indent="0" marL="0">
-                        <a:buNone/>
-                      </a:pPr>
-                      <a:r>
-                        <a:rPr/>
+                  <a:tcPr/>
+                </a:tc>
+                <a:tc>
+                  <a:txBody>
+                    <a:bodyPr/>
+                    <a:lstStyle/>
+                    <a:p>
+                      <a:pPr marL="0" lvl="0" indent="0">
+                        <a:buNone/>
+                      </a:pPr>
+                      <a:r>
                         <a:t>найти источник обязательности</a:t>
                       </a:r>
                     </a:p>
                   </a:txBody>
-                </a:tc>
+                  <a:tcPr/>
+                </a:tc>
+                <a:extLst>
+                  <a:ext uri="{0D108BD9-81ED-4DB2-BD59-A6C34878D82A}">
+                    <a16:rowId xmlns:a16="http://schemas.microsoft.com/office/drawing/2014/main" val="10002"/>
+                  </a:ext>
+                </a:extLst>
               </a:tr>
               <a:tr h="0">
                 <a:tc>
@@ -7364,31 +7618,36 @@
                     <a:bodyPr/>
                     <a:lstStyle/>
                     <a:p>
-                      <a:pPr lvl="0" indent="0" marL="0">
-                        <a:buNone/>
-                      </a:pPr>
-                      <a:r>
-                        <a:rPr/>
+                      <a:pPr marL="0" lvl="0" indent="0">
+                        <a:buNone/>
+                      </a:pPr>
+                      <a:r>
                         <a:t>Сертификат — универсальное разрешение</a:t>
                       </a:r>
                     </a:p>
                   </a:txBody>
-                </a:tc>
-                <a:tc>
-                  <a:txBody>
-                    <a:bodyPr/>
-                    <a:lstStyle/>
-                    <a:p>
-                      <a:pPr lvl="0" indent="0" marL="0">
-                        <a:buNone/>
-                      </a:pPr>
-                      <a:r>
-                        <a:rPr/>
+                  <a:tcPr/>
+                </a:tc>
+                <a:tc>
+                  <a:txBody>
+                    <a:bodyPr/>
+                    <a:lstStyle/>
+                    <a:p>
+                      <a:pPr marL="0" lvl="0" indent="0">
+                        <a:buNone/>
+                      </a:pPr>
+                      <a:r>
                         <a:t>проверить объект, версию, срок</a:t>
                       </a:r>
                     </a:p>
                   </a:txBody>
-                </a:tc>
+                  <a:tcPr/>
+                </a:tc>
+                <a:extLst>
+                  <a:ext uri="{0D108BD9-81ED-4DB2-BD59-A6C34878D82A}">
+                    <a16:rowId xmlns:a16="http://schemas.microsoft.com/office/drawing/2014/main" val="10003"/>
+                  </a:ext>
+                </a:extLst>
               </a:tr>
               <a:tr h="0">
                 <a:tc>
@@ -7396,31 +7655,36 @@
                     <a:bodyPr/>
                     <a:lstStyle/>
                     <a:p>
-                      <a:pPr lvl="0" indent="0" marL="0">
-                        <a:buNone/>
-                      </a:pPr>
-                      <a:r>
-                        <a:rPr/>
+                      <a:pPr marL="0" lvl="0" indent="0">
+                        <a:buNone/>
+                      </a:pPr>
+                      <a:r>
                         <a:t>Протокол достаточен по названию лаборатории</a:t>
                       </a:r>
                     </a:p>
                   </a:txBody>
-                </a:tc>
-                <a:tc>
-                  <a:txBody>
-                    <a:bodyPr/>
-                    <a:lstStyle/>
-                    <a:p>
-                      <a:pPr lvl="0" indent="0" marL="0">
-                        <a:buNone/>
-                      </a:pPr>
-                      <a:r>
-                        <a:rPr/>
+                  <a:tcPr/>
+                </a:tc>
+                <a:tc>
+                  <a:txBody>
+                    <a:bodyPr/>
+                    <a:lstStyle/>
+                    <a:p>
+                      <a:pPr marL="0" lvl="0" indent="0">
+                        <a:buNone/>
+                      </a:pPr>
+                      <a:r>
                         <a:t>пять вопросов к протоколу</a:t>
                       </a:r>
                     </a:p>
                   </a:txBody>
-                </a:tc>
+                  <a:tcPr/>
+                </a:tc>
+                <a:extLst>
+                  <a:ext uri="{0D108BD9-81ED-4DB2-BD59-A6C34878D82A}">
+                    <a16:rowId xmlns:a16="http://schemas.microsoft.com/office/drawing/2014/main" val="10004"/>
+                  </a:ext>
+                </a:extLst>
               </a:tr>
               <a:tr h="0">
                 <a:tc>
@@ -7428,31 +7692,36 @@
                     <a:bodyPr/>
                     <a:lstStyle/>
                     <a:p>
-                      <a:pPr lvl="0" indent="0" marL="0">
-                        <a:buNone/>
-                      </a:pPr>
-                      <a:r>
-                        <a:rPr/>
+                      <a:pPr marL="0" lvl="0" indent="0">
+                        <a:buNone/>
+                      </a:pPr>
+                      <a:r>
                         <a:t>Специальные требования КИИ подменяют стандартом или сертификатом</a:t>
                       </a:r>
                     </a:p>
                   </a:txBody>
-                </a:tc>
-                <a:tc>
-                  <a:txBody>
-                    <a:bodyPr/>
-                    <a:lstStyle/>
-                    <a:p>
-                      <a:pPr lvl="0" indent="0" marL="0">
-                        <a:buNone/>
-                      </a:pPr>
-                      <a:r>
-                        <a:rPr/>
+                  <a:tcPr/>
+                </a:tc>
+                <a:tc>
+                  <a:txBody>
+                    <a:bodyPr/>
+                    <a:lstStyle/>
+                    <a:p>
+                      <a:pPr marL="0" lvl="0" indent="0">
+                        <a:buNone/>
+                      </a:pPr>
+                      <a:r>
                         <a:t>отделить три конструкции подтверждения</a:t>
                       </a:r>
                     </a:p>
                   </a:txBody>
-                </a:tc>
+                  <a:tcPr/>
+                </a:tc>
+                <a:extLst>
+                  <a:ext uri="{0D108BD9-81ED-4DB2-BD59-A6C34878D82A}">
+                    <a16:rowId xmlns:a16="http://schemas.microsoft.com/office/drawing/2014/main" val="10005"/>
+                  </a:ext>
+                </a:extLst>
               </a:tr>
               <a:tr h="0">
                 <a:tc>
@@ -7460,31 +7729,36 @@
                     <a:bodyPr/>
                     <a:lstStyle/>
                     <a:p>
-                      <a:pPr lvl="0" indent="0" marL="0">
-                        <a:buNone/>
-                      </a:pPr>
-                      <a:r>
-                        <a:rPr/>
+                      <a:pPr marL="0" lvl="0" indent="0">
+                        <a:buNone/>
+                      </a:pPr>
+                      <a:r>
                         <a:t>Игнорируют срок ПНСТ</a:t>
                       </a:r>
                     </a:p>
                   </a:txBody>
-                </a:tc>
-                <a:tc>
-                  <a:txBody>
-                    <a:bodyPr/>
-                    <a:lstStyle/>
-                    <a:p>
-                      <a:pPr lvl="0" indent="0" marL="0">
-                        <a:buNone/>
-                      </a:pPr>
-                      <a:r>
-                        <a:rPr/>
+                  <a:tcPr/>
+                </a:tc>
+                <a:tc>
+                  <a:txBody>
+                    <a:bodyPr/>
+                    <a:lstStyle/>
+                    <a:p>
+                      <a:pPr marL="0" lvl="0" indent="0">
+                        <a:buNone/>
+                      </a:pPr>
+                      <a:r>
                         <a:t>фиксировать дату и контролировать срок</a:t>
                       </a:r>
                     </a:p>
                   </a:txBody>
-                </a:tc>
+                  <a:tcPr/>
+                </a:tc>
+                <a:extLst>
+                  <a:ext uri="{0D108BD9-81ED-4DB2-BD59-A6C34878D82A}">
+                    <a16:rowId xmlns:a16="http://schemas.microsoft.com/office/drawing/2014/main" val="10006"/>
+                  </a:ext>
+                </a:extLst>
               </a:tr>
               <a:tr h="0">
                 <a:tc>
@@ -7492,31 +7766,36 @@
                     <a:bodyPr/>
                     <a:lstStyle/>
                     <a:p>
-                      <a:pPr lvl="0" indent="0" marL="0">
-                        <a:buNone/>
-                      </a:pPr>
-                      <a:r>
-                        <a:rPr/>
+                      <a:pPr marL="0" lvl="0" indent="0">
+                        <a:buNone/>
+                      </a:pPr>
+                      <a:r>
                         <a:t>Пустое поле «Ограничение»</a:t>
                       </a:r>
                     </a:p>
                   </a:txBody>
-                </a:tc>
-                <a:tc>
-                  <a:txBody>
-                    <a:bodyPr/>
-                    <a:lstStyle/>
-                    <a:p>
-                      <a:pPr lvl="0" indent="0" marL="0">
-                        <a:buNone/>
-                      </a:pPr>
-                      <a:r>
-                        <a:rPr/>
+                  <a:tcPr/>
+                </a:tc>
+                <a:tc>
+                  <a:txBody>
+                    <a:bodyPr/>
+                    <a:lstStyle/>
+                    <a:p>
+                      <a:pPr marL="0" lvl="0" indent="0">
+                        <a:buNone/>
+                      </a:pPr>
+                      <a:r>
                         <a:t>заполнять всегда</a:t>
                       </a:r>
                     </a:p>
                   </a:txBody>
-                </a:tc>
+                  <a:tcPr/>
+                </a:tc>
+                <a:extLst>
+                  <a:ext uri="{0D108BD9-81ED-4DB2-BD59-A6C34878D82A}">
+                    <a16:rowId xmlns:a16="http://schemas.microsoft.com/office/drawing/2014/main" val="10007"/>
+                  </a:ext>
+                </a:extLst>
               </a:tr>
               <a:tr h="0">
                 <a:tc>
@@ -7524,31 +7803,36 @@
                     <a:bodyPr/>
                     <a:lstStyle/>
                     <a:p>
-                      <a:pPr lvl="0" indent="0" marL="0">
-                        <a:buNone/>
-                      </a:pPr>
-                      <a:r>
-                        <a:rPr/>
+                      <a:pPr marL="0" lvl="0" indent="0">
+                        <a:buNone/>
+                      </a:pPr>
+                      <a:r>
                         <a:t>Основание придумывают задним числом</a:t>
                       </a:r>
                     </a:p>
                   </a:txBody>
-                </a:tc>
-                <a:tc>
-                  <a:txBody>
-                    <a:bodyPr/>
-                    <a:lstStyle/>
-                    <a:p>
-                      <a:pPr lvl="0" indent="0" marL="0">
-                        <a:buNone/>
-                      </a:pPr>
-                      <a:r>
-                        <a:rPr/>
+                  <a:tcPr/>
+                </a:tc>
+                <a:tc>
+                  <a:txBody>
+                    <a:bodyPr/>
+                    <a:lstStyle/>
+                    <a:p>
+                      <a:pPr marL="0" lvl="0" indent="0">
+                        <a:buNone/>
+                      </a:pPr>
+                      <a:r>
                         <a:t>уточнить модель решения</a:t>
                       </a:r>
                     </a:p>
                   </a:txBody>
-                </a:tc>
+                  <a:tcPr/>
+                </a:tc>
+                <a:extLst>
+                  <a:ext uri="{0D108BD9-81ED-4DB2-BD59-A6C34878D82A}">
+                    <a16:rowId xmlns:a16="http://schemas.microsoft.com/office/drawing/2014/main" val="10008"/>
+                  </a:ext>
+                </a:extLst>
               </a:tr>
             </a:tbl>
           </a:graphicData>
@@ -7556,6 +7840,9 @@
       </p:graphicFrame>
     </p:spTree>
   </p:cSld>
+  <p:clrMapOvr>
+    <a:masterClrMapping/>
+  </p:clrMapOvr>
 </p:sld>
 </file>
 
@@ -7591,11 +7878,10 @@
           <a:bodyPr/>
           <a:lstStyle/>
           <a:p>
-            <a:pPr lvl="0" indent="0" marL="0">
-              <a:buNone/>
-            </a:pPr>
-            <a:r>
-              <a:rPr/>
+            <a:pPr marL="0" lvl="0" indent="0">
+              <a:buNone/>
+            </a:pPr>
+            <a:r>
               <a:t>Вопросы для обсуждения</a:t>
             </a:r>
           </a:p>
@@ -7616,74 +7902,66 @@
           <a:bodyPr/>
           <a:lstStyle/>
           <a:p>
-            <a:pPr lvl="0" indent="-342900" marL="342900">
+            <a:pPr marL="342900" lvl="0" indent="-342900">
               <a:buAutoNum type="arabicPeriod"/>
             </a:pPr>
             <a:r>
-              <a:rPr/>
               <a:t>Чем «есть ли основание» отличается от «применимо ли основание»?</a:t>
             </a:r>
           </a:p>
           <a:p>
-            <a:pPr lvl="0" indent="-342900" marL="342900">
+            <a:pPr marL="342900" lvl="0" indent="-342900">
               <a:buAutoNum type="arabicPeriod"/>
             </a:pPr>
             <a:r>
-              <a:rPr/>
               <a:t>Какие четыре пути делают стандарт обязательным?</a:t>
             </a:r>
           </a:p>
           <a:p>
-            <a:pPr lvl="0" indent="-342900" marL="342900">
+            <a:pPr marL="342900" lvl="0" indent="-342900">
               <a:buAutoNum type="arabicPeriod"/>
             </a:pPr>
             <a:r>
-              <a:rPr/>
               <a:t>Чем регламент отличается от национального стандарта?</a:t>
             </a:r>
           </a:p>
           <a:p>
-            <a:pPr lvl="0" indent="-342900" marL="342900">
+            <a:pPr marL="342900" lvl="0" indent="-342900">
               <a:buAutoNum type="arabicPeriod"/>
             </a:pPr>
             <a:r>
-              <a:rPr/>
               <a:t>Почему срок ПНСТ влияет на ссылки в договорах?</a:t>
             </a:r>
           </a:p>
           <a:p>
-            <a:pPr lvl="0" indent="-342900" marL="342900">
+            <a:pPr marL="342900" lvl="0" indent="-342900">
               <a:buAutoNum type="arabicPeriod"/>
             </a:pPr>
             <a:r>
-              <a:rPr/>
               <a:t>Чем добровольная сертификация отличается от требований к значимому объекту КИИ?</a:t>
             </a:r>
           </a:p>
           <a:p>
-            <a:pPr lvl="0" indent="-342900" marL="342900">
+            <a:pPr marL="342900" lvl="0" indent="-342900">
               <a:buAutoNum type="arabicPeriod"/>
             </a:pPr>
             <a:r>
-              <a:rPr/>
               <a:t>Что подтверждает аккредитация и чего не подтверждает?</a:t>
             </a:r>
           </a:p>
           <a:p>
-            <a:pPr lvl="0" indent="-342900" marL="342900">
+            <a:pPr marL="342900" lvl="0" indent="-342900">
               <a:buAutoNum type="arabicPeriod"/>
             </a:pPr>
             <a:r>
-              <a:rPr/>
               <a:t>Назовите пять вопросов к протоколу испытаний.</a:t>
             </a:r>
           </a:p>
           <a:p>
-            <a:pPr lvl="0" indent="-342900" marL="342900">
+            <a:pPr marL="342900" lvl="0" indent="-342900">
               <a:buAutoNum type="arabicPeriod"/>
             </a:pPr>
             <a:r>
-              <a:rPr/>
               <a:t>Почему письмо поставщика недостаточно?</a:t>
             </a:r>
           </a:p>
@@ -7691,6 +7969,9 @@
       </p:sp>
     </p:spTree>
   </p:cSld>
+  <p:clrMapOvr>
+    <a:masterClrMapping/>
+  </p:clrMapOvr>
 </p:sld>
 </file>
 
@@ -7726,11 +8007,10 @@
           <a:bodyPr/>
           <a:lstStyle/>
           <a:p>
-            <a:pPr lvl="0" indent="0" marL="0">
-              <a:buNone/>
-            </a:pPr>
-            <a:r>
-              <a:rPr/>
+            <a:pPr marL="0" lvl="0" indent="0">
+              <a:buNone/>
+            </a:pPr>
+            <a:r>
               <a:t>Связь с курсом</a:t>
             </a:r>
           </a:p>
@@ -7753,35 +8033,30 @@
           <a:p>
             <a:pPr lvl="0"/>
             <a:r>
-              <a:rPr/>
               <a:t>Лекция 2: применимость требований начинается с определения субъекта и объекта КИИ.</a:t>
             </a:r>
           </a:p>
           <a:p>
             <a:pPr lvl="0"/>
             <a:r>
-              <a:rPr/>
               <a:t>Лекции 3–11: решения о категорировании, защите и реагировании требуют доказательств выполнения.</a:t>
             </a:r>
           </a:p>
           <a:p>
             <a:pPr lvl="0"/>
             <a:r>
-              <a:rPr/>
               <a:t>Лекция 13: стандарты и ПНСТ для доверенных ПАК.</a:t>
             </a:r>
           </a:p>
           <a:p>
             <a:pPr lvl="0"/>
             <a:r>
-              <a:rPr/>
               <a:t>Лекция 14: оценка соответствия и границы сертификата.</a:t>
             </a:r>
           </a:p>
           <a:p>
             <a:pPr lvl="0"/>
             <a:r>
-              <a:rPr/>
               <a:t>Лекции 15–16: доказательная база, корректирующие меры и цикл улучшений.</a:t>
             </a:r>
           </a:p>
@@ -7789,6 +8064,9 @@
       </p:sp>
     </p:spTree>
   </p:cSld>
+  <p:clrMapOvr>
+    <a:masterClrMapping/>
+  </p:clrMapOvr>
 </p:sld>
 </file>
 
@@ -7824,11 +8102,10 @@
           <a:bodyPr/>
           <a:lstStyle/>
           <a:p>
-            <a:pPr lvl="0" indent="0" marL="0">
-              <a:buNone/>
-            </a:pPr>
-            <a:r>
-              <a:rPr/>
+            <a:pPr marL="0" lvl="0" indent="0">
+              <a:buNone/>
+            </a:pPr>
+            <a:r>
               <a:t>Итог</a:t>
             </a:r>
           </a:p>
@@ -7849,7 +8126,7 @@
           <a:bodyPr/>
           <a:lstStyle/>
           <a:p>
-            <a:pPr lvl="0" indent="0" marL="0">
+            <a:pPr marL="0" lvl="0" indent="0">
               <a:buNone/>
             </a:pPr>
             <a:r>
@@ -7860,51 +8137,44 @@
           <a:p>
             <a:pPr lvl="0"/>
             <a:r>
-              <a:rPr/>
               <a:t>основание</a:t>
             </a:r>
           </a:p>
           <a:p>
             <a:pPr lvl="0"/>
             <a:r>
-              <a:rPr/>
               <a:t>применимость</a:t>
             </a:r>
           </a:p>
           <a:p>
             <a:pPr lvl="0"/>
             <a:r>
-              <a:rPr/>
               <a:t>решение</a:t>
             </a:r>
           </a:p>
           <a:p>
             <a:pPr lvl="0"/>
             <a:r>
-              <a:rPr/>
               <a:t>доказательство</a:t>
             </a:r>
           </a:p>
           <a:p>
             <a:pPr lvl="0"/>
             <a:r>
-              <a:rPr/>
               <a:t>ограничение</a:t>
             </a:r>
           </a:p>
           <a:p>
             <a:pPr lvl="0"/>
             <a:r>
-              <a:rPr/>
               <a:t>пересмотр</a:t>
             </a:r>
           </a:p>
           <a:p>
-            <a:pPr lvl="0" indent="0" marL="0">
-              <a:buNone/>
-            </a:pPr>
-            <a:r>
-              <a:rPr/>
+            <a:pPr marL="0" lvl="0" indent="0">
+              <a:buNone/>
+            </a:pPr>
+            <a:r>
               <a:t>Вопросы к лекции </a:t>
             </a:r>
             <a:r>
@@ -7918,6 +8188,9 @@
       </p:sp>
     </p:spTree>
   </p:cSld>
+  <p:clrMapOvr>
+    <a:masterClrMapping/>
+  </p:clrMapOvr>
 </p:sld>
 </file>
 
@@ -7953,11 +8226,10 @@
           <a:bodyPr/>
           <a:lstStyle/>
           <a:p>
-            <a:pPr lvl="0" indent="0" marL="0">
-              <a:buNone/>
-            </a:pPr>
-            <a:r>
-              <a:rPr/>
+            <a:pPr marL="0" lvl="0" indent="0">
+              <a:buNone/>
+            </a:pPr>
+            <a:r>
               <a:t>Список литературы</a:t>
             </a:r>
           </a:p>
@@ -7975,200 +8247,719 @@
         </p:nvSpPr>
         <p:spPr/>
         <p:txBody>
-          <a:bodyPr/>
-          <a:lstStyle/>
-          <a:p>
-            <a:pPr lvl="0" indent="0" marL="0">
-              <a:buNone/>
-            </a:pPr>
-            <a:r>
-              <a:rPr b="1"/>
-              <a:t>Основные источники</a:t>
-            </a:r>
-          </a:p>
-          <a:p>
-            <a:pPr lvl="0" indent="-342900" marL="342900">
+          <a:bodyPr>
+            <a:normAutofit fontScale="62500" lnSpcReduction="20000"/>
+          </a:bodyPr>
+          <a:lstStyle/>
+          <a:p>
+            <a:pPr marL="0" lvl="0" indent="0">
+              <a:buNone/>
+            </a:pPr>
+            <a:r>
+              <a:rPr b="1" dirty="0" err="1"/>
+              <a:t>Основные</a:t>
+            </a:r>
+            <a:r>
+              <a:rPr b="1" dirty="0"/>
+              <a:t> </a:t>
+            </a:r>
+            <a:r>
+              <a:rPr b="1" dirty="0" err="1"/>
+              <a:t>источники</a:t>
+            </a:r>
+            <a:endParaRPr b="1" dirty="0"/>
+          </a:p>
+          <a:p>
+            <a:pPr marL="342900" lvl="0" indent="-342900">
               <a:buAutoNum type="arabicPeriod"/>
             </a:pPr>
             <a:r>
-              <a:rPr/>
-              <a:t>Федеральный закон от 27.12.2002 №184-ФЗ «О техническом регулировании». Официальное опубликование: </a:t>
-            </a:r>
-            <a:r>
-              <a:rPr>
+              <a:rPr dirty="0" err="1"/>
+              <a:t>Федеральный</a:t>
+            </a:r>
+            <a:r>
+              <a:rPr dirty="0"/>
+              <a:t> </a:t>
+            </a:r>
+            <a:r>
+              <a:rPr dirty="0" err="1"/>
+              <a:t>закон</a:t>
+            </a:r>
+            <a:r>
+              <a:rPr dirty="0"/>
+              <a:t> </a:t>
+            </a:r>
+            <a:r>
+              <a:rPr dirty="0" err="1"/>
+              <a:t>от</a:t>
+            </a:r>
+            <a:r>
+              <a:rPr dirty="0"/>
+              <a:t> 27.12.2002 №184-ФЗ «О </a:t>
+            </a:r>
+            <a:r>
+              <a:rPr dirty="0" err="1"/>
+              <a:t>техническом</a:t>
+            </a:r>
+            <a:r>
+              <a:rPr dirty="0"/>
+              <a:t> </a:t>
+            </a:r>
+            <a:r>
+              <a:rPr dirty="0" err="1"/>
+              <a:t>регулировании</a:t>
+            </a:r>
+            <a:r>
+              <a:rPr dirty="0"/>
+              <a:t>». </a:t>
+            </a:r>
+            <a:r>
+              <a:rPr dirty="0" err="1"/>
+              <a:t>Официальное</a:t>
+            </a:r>
+            <a:r>
+              <a:rPr dirty="0"/>
+              <a:t> </a:t>
+            </a:r>
+            <a:r>
+              <a:rPr dirty="0" err="1"/>
+              <a:t>опубликование</a:t>
+            </a:r>
+            <a:r>
+              <a:rPr dirty="0"/>
+              <a:t>: </a:t>
+            </a:r>
+            <a:r>
+              <a:rPr dirty="0">
                 <a:hlinkClick r:id="rId2"/>
               </a:rPr>
               <a:t>http://publication.pravo.gov.ru/Document/View/0001200212300020</a:t>
             </a:r>
             <a:r>
-              <a:rPr/>
+              <a:rPr dirty="0"/>
               <a:t>.</a:t>
             </a:r>
           </a:p>
           <a:p>
-            <a:pPr lvl="0" indent="-342900" marL="342900">
+            <a:pPr marL="342900" lvl="0" indent="-342900">
               <a:buAutoNum type="arabicPeriod"/>
             </a:pPr>
             <a:r>
-              <a:rPr/>
-              <a:t>Федеральный закон от 29.06.2015 №162-ФЗ «О стандартизации в Российской Федерации». Официальное опубликование: </a:t>
-            </a:r>
-            <a:r>
-              <a:rPr>
+              <a:rPr dirty="0" err="1"/>
+              <a:t>Федеральный</a:t>
+            </a:r>
+            <a:r>
+              <a:rPr dirty="0"/>
+              <a:t> </a:t>
+            </a:r>
+            <a:r>
+              <a:rPr dirty="0" err="1"/>
+              <a:t>закон</a:t>
+            </a:r>
+            <a:r>
+              <a:rPr dirty="0"/>
+              <a:t> </a:t>
+            </a:r>
+            <a:r>
+              <a:rPr dirty="0" err="1"/>
+              <a:t>от</a:t>
+            </a:r>
+            <a:r>
+              <a:rPr dirty="0"/>
+              <a:t> 29.06.2015 №162-ФЗ «О </a:t>
+            </a:r>
+            <a:r>
+              <a:rPr dirty="0" err="1"/>
+              <a:t>стандартизации</a:t>
+            </a:r>
+            <a:r>
+              <a:rPr dirty="0"/>
+              <a:t> в </a:t>
+            </a:r>
+            <a:r>
+              <a:rPr dirty="0" err="1"/>
+              <a:t>Российской</a:t>
+            </a:r>
+            <a:r>
+              <a:rPr dirty="0"/>
+              <a:t> </a:t>
+            </a:r>
+            <a:r>
+              <a:rPr dirty="0" err="1"/>
+              <a:t>Федерации</a:t>
+            </a:r>
+            <a:r>
+              <a:rPr dirty="0"/>
+              <a:t>». </a:t>
+            </a:r>
+            <a:r>
+              <a:rPr dirty="0" err="1"/>
+              <a:t>Официальное</a:t>
+            </a:r>
+            <a:r>
+              <a:rPr dirty="0"/>
+              <a:t> </a:t>
+            </a:r>
+            <a:r>
+              <a:rPr dirty="0" err="1"/>
+              <a:t>опубликование</a:t>
+            </a:r>
+            <a:r>
+              <a:rPr dirty="0"/>
+              <a:t>: </a:t>
+            </a:r>
+            <a:r>
+              <a:rPr dirty="0">
                 <a:hlinkClick r:id="rId3"/>
               </a:rPr>
               <a:t>http://publication.pravo.gov.ru/Document/View/0001201506300012</a:t>
             </a:r>
             <a:r>
-              <a:rPr/>
+              <a:rPr dirty="0"/>
               <a:t>.</a:t>
             </a:r>
           </a:p>
           <a:p>
-            <a:pPr lvl="0" indent="-342900" marL="342900">
+            <a:pPr marL="342900" lvl="0" indent="-342900">
               <a:buAutoNum type="arabicPeriod"/>
             </a:pPr>
             <a:r>
-              <a:rPr/>
-              <a:t>Федеральный закон от 28.12.2013 №412-ФЗ «Об аккредитации в национальной системе аккредитации». Официальное опубликование: </a:t>
-            </a:r>
-            <a:r>
-              <a:rPr>
+              <a:rPr dirty="0" err="1"/>
+              <a:t>Федеральный</a:t>
+            </a:r>
+            <a:r>
+              <a:rPr dirty="0"/>
+              <a:t> </a:t>
+            </a:r>
+            <a:r>
+              <a:rPr dirty="0" err="1"/>
+              <a:t>закон</a:t>
+            </a:r>
+            <a:r>
+              <a:rPr dirty="0"/>
+              <a:t> </a:t>
+            </a:r>
+            <a:r>
+              <a:rPr dirty="0" err="1"/>
+              <a:t>от</a:t>
+            </a:r>
+            <a:r>
+              <a:rPr dirty="0"/>
+              <a:t> 28.12.2013 №412-ФЗ «</a:t>
+            </a:r>
+            <a:r>
+              <a:rPr dirty="0" err="1"/>
+              <a:t>Об</a:t>
+            </a:r>
+            <a:r>
+              <a:rPr dirty="0"/>
+              <a:t> </a:t>
+            </a:r>
+            <a:r>
+              <a:rPr dirty="0" err="1"/>
+              <a:t>аккредитации</a:t>
+            </a:r>
+            <a:r>
+              <a:rPr dirty="0"/>
+              <a:t> в </a:t>
+            </a:r>
+            <a:r>
+              <a:rPr dirty="0" err="1"/>
+              <a:t>национальной</a:t>
+            </a:r>
+            <a:r>
+              <a:rPr dirty="0"/>
+              <a:t> </a:t>
+            </a:r>
+            <a:r>
+              <a:rPr dirty="0" err="1"/>
+              <a:t>системе</a:t>
+            </a:r>
+            <a:r>
+              <a:rPr dirty="0"/>
+              <a:t> </a:t>
+            </a:r>
+            <a:r>
+              <a:rPr dirty="0" err="1"/>
+              <a:t>аккредитации</a:t>
+            </a:r>
+            <a:r>
+              <a:rPr dirty="0"/>
+              <a:t>». </a:t>
+            </a:r>
+            <a:r>
+              <a:rPr dirty="0" err="1"/>
+              <a:t>Официальное</a:t>
+            </a:r>
+            <a:r>
+              <a:rPr dirty="0"/>
+              <a:t> </a:t>
+            </a:r>
+            <a:r>
+              <a:rPr dirty="0" err="1"/>
+              <a:t>опубликование</a:t>
+            </a:r>
+            <a:r>
+              <a:rPr dirty="0"/>
+              <a:t>: </a:t>
+            </a:r>
+            <a:r>
+              <a:rPr dirty="0">
                 <a:hlinkClick r:id="rId4"/>
               </a:rPr>
               <a:t>http://publication.pravo.gov.ru/Document/View/0001201312280035</a:t>
             </a:r>
             <a:r>
-              <a:rPr/>
+              <a:rPr dirty="0"/>
               <a:t>.</a:t>
             </a:r>
           </a:p>
           <a:p>
-            <a:pPr lvl="0" indent="-342900" marL="342900">
+            <a:pPr marL="342900" lvl="0" indent="-342900">
               <a:buAutoNum type="arabicPeriod"/>
             </a:pPr>
             <a:r>
-              <a:rPr/>
-              <a:t>Федеральный закон от 26.06.2008 №102-ФЗ «Об обеспечении единства измерений». Официальное опубликование: </a:t>
-            </a:r>
-            <a:r>
-              <a:rPr>
+              <a:rPr dirty="0" err="1"/>
+              <a:t>Федеральный</a:t>
+            </a:r>
+            <a:r>
+              <a:rPr dirty="0"/>
+              <a:t> </a:t>
+            </a:r>
+            <a:r>
+              <a:rPr dirty="0" err="1"/>
+              <a:t>закон</a:t>
+            </a:r>
+            <a:r>
+              <a:rPr dirty="0"/>
+              <a:t> </a:t>
+            </a:r>
+            <a:r>
+              <a:rPr dirty="0" err="1"/>
+              <a:t>от</a:t>
+            </a:r>
+            <a:r>
+              <a:rPr dirty="0"/>
+              <a:t> 26.06.2008 №102-ФЗ «</a:t>
+            </a:r>
+            <a:r>
+              <a:rPr dirty="0" err="1"/>
+              <a:t>Об</a:t>
+            </a:r>
+            <a:r>
+              <a:rPr dirty="0"/>
+              <a:t> </a:t>
+            </a:r>
+            <a:r>
+              <a:rPr dirty="0" err="1"/>
+              <a:t>обеспечении</a:t>
+            </a:r>
+            <a:r>
+              <a:rPr dirty="0"/>
+              <a:t> </a:t>
+            </a:r>
+            <a:r>
+              <a:rPr dirty="0" err="1"/>
+              <a:t>единства</a:t>
+            </a:r>
+            <a:r>
+              <a:rPr dirty="0"/>
+              <a:t> </a:t>
+            </a:r>
+            <a:r>
+              <a:rPr dirty="0" err="1"/>
+              <a:t>измерений</a:t>
+            </a:r>
+            <a:r>
+              <a:rPr dirty="0"/>
+              <a:t>». </a:t>
+            </a:r>
+            <a:r>
+              <a:rPr dirty="0" err="1"/>
+              <a:t>Официальное</a:t>
+            </a:r>
+            <a:r>
+              <a:rPr dirty="0"/>
+              <a:t> </a:t>
+            </a:r>
+            <a:r>
+              <a:rPr dirty="0" err="1"/>
+              <a:t>опубликование</a:t>
+            </a:r>
+            <a:r>
+              <a:rPr dirty="0"/>
+              <a:t>: </a:t>
+            </a:r>
+            <a:r>
+              <a:rPr dirty="0">
                 <a:hlinkClick r:id="rId5"/>
               </a:rPr>
               <a:t>http://publication.pravo.gov.ru/Document/View/0001200806270001</a:t>
             </a:r>
             <a:r>
-              <a:rPr/>
+              <a:rPr dirty="0"/>
               <a:t>.</a:t>
             </a:r>
           </a:p>
           <a:p>
-            <a:pPr lvl="0" indent="-342900" marL="342900">
+            <a:pPr marL="342900" lvl="0" indent="-342900">
               <a:buAutoNum type="arabicPeriod"/>
             </a:pPr>
             <a:r>
-              <a:rPr/>
-              <a:t>Федеральный закон от 26.07.2017 №187-ФЗ «О безопасности критической информационной инфраструктуры Российской Федерации». Официальное опубликование: </a:t>
-            </a:r>
-            <a:r>
-              <a:rPr>
+              <a:rPr dirty="0" err="1"/>
+              <a:t>Федеральный</a:t>
+            </a:r>
+            <a:r>
+              <a:rPr dirty="0"/>
+              <a:t> </a:t>
+            </a:r>
+            <a:r>
+              <a:rPr dirty="0" err="1"/>
+              <a:t>закон</a:t>
+            </a:r>
+            <a:r>
+              <a:rPr dirty="0"/>
+              <a:t> </a:t>
+            </a:r>
+            <a:r>
+              <a:rPr dirty="0" err="1"/>
+              <a:t>от</a:t>
+            </a:r>
+            <a:r>
+              <a:rPr dirty="0"/>
+              <a:t> 26.07.2017 №187-ФЗ «О </a:t>
+            </a:r>
+            <a:r>
+              <a:rPr dirty="0" err="1"/>
+              <a:t>безопасности</a:t>
+            </a:r>
+            <a:r>
+              <a:rPr dirty="0"/>
+              <a:t> </a:t>
+            </a:r>
+            <a:r>
+              <a:rPr dirty="0" err="1"/>
+              <a:t>критической</a:t>
+            </a:r>
+            <a:r>
+              <a:rPr dirty="0"/>
+              <a:t> </a:t>
+            </a:r>
+            <a:r>
+              <a:rPr dirty="0" err="1"/>
+              <a:t>информационной</a:t>
+            </a:r>
+            <a:r>
+              <a:rPr dirty="0"/>
+              <a:t> </a:t>
+            </a:r>
+            <a:r>
+              <a:rPr dirty="0" err="1"/>
+              <a:t>инфраструктуры</a:t>
+            </a:r>
+            <a:r>
+              <a:rPr dirty="0"/>
+              <a:t> </a:t>
+            </a:r>
+            <a:r>
+              <a:rPr dirty="0" err="1"/>
+              <a:t>Российской</a:t>
+            </a:r>
+            <a:r>
+              <a:rPr dirty="0"/>
+              <a:t> </a:t>
+            </a:r>
+            <a:r>
+              <a:rPr dirty="0" err="1"/>
+              <a:t>Федерации</a:t>
+            </a:r>
+            <a:r>
+              <a:rPr dirty="0"/>
+              <a:t>». </a:t>
+            </a:r>
+            <a:r>
+              <a:rPr dirty="0" err="1"/>
+              <a:t>Официальное</a:t>
+            </a:r>
+            <a:r>
+              <a:rPr dirty="0"/>
+              <a:t> </a:t>
+            </a:r>
+            <a:r>
+              <a:rPr dirty="0" err="1"/>
+              <a:t>опубликование</a:t>
+            </a:r>
+            <a:r>
+              <a:rPr dirty="0"/>
+              <a:t>: </a:t>
+            </a:r>
+            <a:r>
+              <a:rPr dirty="0">
                 <a:hlinkClick r:id="rId6"/>
               </a:rPr>
               <a:t>http://publication.pravo.gov.ru/Document/View/0001201707260023</a:t>
             </a:r>
             <a:r>
-              <a:rPr/>
+              <a:rPr dirty="0"/>
               <a:t>.</a:t>
             </a:r>
           </a:p>
           <a:p>
-            <a:pPr lvl="0" indent="-342900" marL="342900">
+            <a:pPr marL="342900" lvl="0" indent="-342900">
               <a:buAutoNum type="arabicPeriod"/>
             </a:pPr>
             <a:r>
-              <a:rPr/>
-              <a:t>Официальный интернет-портал правовой информации: </a:t>
-            </a:r>
-            <a:r>
-              <a:rPr>
+              <a:rPr dirty="0" err="1"/>
+              <a:t>Официальный</a:t>
+            </a:r>
+            <a:r>
+              <a:rPr dirty="0"/>
+              <a:t> </a:t>
+            </a:r>
+            <a:r>
+              <a:rPr dirty="0" err="1"/>
+              <a:t>интернет-портал</a:t>
+            </a:r>
+            <a:r>
+              <a:rPr dirty="0"/>
+              <a:t> </a:t>
+            </a:r>
+            <a:r>
+              <a:rPr dirty="0" err="1"/>
+              <a:t>правовой</a:t>
+            </a:r>
+            <a:r>
+              <a:rPr dirty="0"/>
+              <a:t> </a:t>
+            </a:r>
+            <a:r>
+              <a:rPr dirty="0" err="1"/>
+              <a:t>информации</a:t>
+            </a:r>
+            <a:r>
+              <a:rPr dirty="0"/>
+              <a:t>: </a:t>
+            </a:r>
+            <a:r>
+              <a:rPr dirty="0">
                 <a:hlinkClick r:id="rId7"/>
               </a:rPr>
               <a:t>http://publication.pravo.gov.ru/</a:t>
             </a:r>
             <a:r>
-              <a:rPr/>
+              <a:rPr dirty="0"/>
               <a:t>.</a:t>
             </a:r>
           </a:p>
           <a:p>
-            <a:pPr lvl="0" indent="-342900" marL="342900">
+            <a:pPr marL="342900" lvl="0" indent="-342900">
               <a:buAutoNum type="arabicPeriod"/>
             </a:pPr>
             <a:r>
-              <a:rPr/>
-              <a:t>Росстандарт: </a:t>
-            </a:r>
-            <a:r>
-              <a:rPr>
+              <a:rPr dirty="0" err="1"/>
+              <a:t>Росстандарт</a:t>
+            </a:r>
+            <a:r>
+              <a:rPr dirty="0"/>
+              <a:t>: </a:t>
+            </a:r>
+            <a:r>
+              <a:rPr dirty="0">
                 <a:hlinkClick r:id="rId8"/>
               </a:rPr>
               <a:t>https://www.rst.gov.ru/</a:t>
             </a:r>
             <a:r>
-              <a:rPr/>
+              <a:rPr dirty="0"/>
               <a:t>.</a:t>
             </a:r>
           </a:p>
           <a:p>
-            <a:pPr lvl="0" indent="-342900" marL="342900">
+            <a:pPr marL="342900" lvl="0" indent="-342900">
               <a:buAutoNum type="arabicPeriod"/>
             </a:pPr>
             <a:r>
-              <a:rPr/>
-              <a:t>Росаккредитация: </a:t>
-            </a:r>
-            <a:r>
-              <a:rPr>
+              <a:rPr dirty="0" err="1"/>
+              <a:t>Росаккредитация</a:t>
+            </a:r>
+            <a:r>
+              <a:rPr dirty="0"/>
+              <a:t>: </a:t>
+            </a:r>
+            <a:r>
+              <a:rPr dirty="0">
                 <a:hlinkClick r:id="rId9"/>
               </a:rPr>
               <a:t>https://fsa.gov.ru/</a:t>
             </a:r>
             <a:r>
-              <a:rPr/>
+              <a:rPr dirty="0"/>
               <a:t>.</a:t>
             </a:r>
           </a:p>
           <a:p>
-            <a:pPr lvl="0" indent="0" marL="0">
-              <a:buNone/>
-            </a:pPr>
-            <a:r>
-              <a:rPr b="1"/>
-              <a:t>Связанные источники</a:t>
-            </a:r>
-          </a:p>
-          <a:p>
-            <a:pPr lvl="0" indent="-342900" marL="342900">
-              <a:buAutoNum startAt="9" type="arabicPeriod"/>
-            </a:pPr>
-            <a:r>
-              <a:rPr/>
-              <a:t>ГОСТ Р ИСО/МЭК 17025. Общие требования к компетентности испытательных и калибровочных лабораторий.</a:t>
-            </a:r>
-          </a:p>
-          <a:p>
-            <a:pPr lvl="0" indent="-342900" marL="342900">
-              <a:buAutoNum startAt="9" type="arabicPeriod"/>
-            </a:pPr>
-            <a:r>
-              <a:rPr/>
-              <a:t>ГОСТ Р ИСО/МЭК 17065. Оценка соответствия. Требования к органам по сертификации продукции, процессов и услуг.</a:t>
+            <a:pPr marL="0" lvl="0" indent="0">
+              <a:buNone/>
+            </a:pPr>
+            <a:r>
+              <a:rPr b="1" dirty="0" err="1"/>
+              <a:t>Связанные</a:t>
+            </a:r>
+            <a:r>
+              <a:rPr b="1" dirty="0"/>
+              <a:t> </a:t>
+            </a:r>
+            <a:r>
+              <a:rPr b="1" dirty="0" err="1"/>
+              <a:t>источники</a:t>
+            </a:r>
+            <a:endParaRPr b="1" dirty="0"/>
+          </a:p>
+          <a:p>
+            <a:pPr marL="342900" lvl="0" indent="-342900">
+              <a:buAutoNum type="arabicPeriod" startAt="9"/>
+            </a:pPr>
+            <a:r>
+              <a:rPr dirty="0"/>
+              <a:t>ГОСТ Р ИСО/МЭК 17025. </a:t>
+            </a:r>
+            <a:r>
+              <a:rPr dirty="0" err="1"/>
+              <a:t>Общие</a:t>
+            </a:r>
+            <a:r>
+              <a:rPr dirty="0"/>
+              <a:t> </a:t>
+            </a:r>
+            <a:r>
+              <a:rPr dirty="0" err="1"/>
+              <a:t>требования</a:t>
+            </a:r>
+            <a:r>
+              <a:rPr dirty="0"/>
+              <a:t> к </a:t>
+            </a:r>
+            <a:r>
+              <a:rPr dirty="0" err="1"/>
+              <a:t>компетентности</a:t>
+            </a:r>
+            <a:r>
+              <a:rPr dirty="0"/>
+              <a:t> </a:t>
+            </a:r>
+            <a:r>
+              <a:rPr dirty="0" err="1"/>
+              <a:t>испытательных</a:t>
+            </a:r>
+            <a:r>
+              <a:rPr dirty="0"/>
+              <a:t> и </a:t>
+            </a:r>
+            <a:r>
+              <a:rPr dirty="0" err="1"/>
+              <a:t>калибровочных</a:t>
+            </a:r>
+            <a:r>
+              <a:rPr dirty="0"/>
+              <a:t> </a:t>
+            </a:r>
+            <a:r>
+              <a:rPr dirty="0" err="1"/>
+              <a:t>лабораторий</a:t>
+            </a:r>
+            <a:r>
+              <a:rPr dirty="0"/>
+              <a:t>.</a:t>
+            </a:r>
+          </a:p>
+          <a:p>
+            <a:pPr marL="342900" lvl="0" indent="-342900">
+              <a:buAutoNum type="arabicPeriod" startAt="9"/>
+            </a:pPr>
+            <a:r>
+              <a:rPr dirty="0"/>
+              <a:t>ГОСТ Р ИСО/МЭК 17065. </a:t>
+            </a:r>
+            <a:r>
+              <a:rPr dirty="0" err="1"/>
+              <a:t>Оценка</a:t>
+            </a:r>
+            <a:r>
+              <a:rPr dirty="0"/>
+              <a:t> </a:t>
+            </a:r>
+            <a:r>
+              <a:rPr dirty="0" err="1"/>
+              <a:t>соответствия</a:t>
+            </a:r>
+            <a:r>
+              <a:rPr dirty="0"/>
+              <a:t>. </a:t>
+            </a:r>
+            <a:r>
+              <a:rPr dirty="0" err="1"/>
+              <a:t>Требования</a:t>
+            </a:r>
+            <a:r>
+              <a:rPr dirty="0"/>
+              <a:t> к </a:t>
+            </a:r>
+            <a:r>
+              <a:rPr dirty="0" err="1"/>
+              <a:t>органам</a:t>
+            </a:r>
+            <a:r>
+              <a:rPr dirty="0"/>
+              <a:t> </a:t>
+            </a:r>
+            <a:r>
+              <a:rPr dirty="0" err="1"/>
+              <a:t>по</a:t>
+            </a:r>
+            <a:r>
+              <a:rPr dirty="0"/>
+              <a:t> </a:t>
+            </a:r>
+            <a:r>
+              <a:rPr dirty="0" err="1"/>
+              <a:t>сертификации</a:t>
+            </a:r>
+            <a:r>
+              <a:rPr dirty="0"/>
+              <a:t> </a:t>
+            </a:r>
+            <a:r>
+              <a:rPr dirty="0" err="1"/>
+              <a:t>продукции</a:t>
+            </a:r>
+            <a:r>
+              <a:rPr dirty="0"/>
+              <a:t>, </a:t>
+            </a:r>
+            <a:r>
+              <a:rPr dirty="0" err="1"/>
+              <a:t>процессов</a:t>
+            </a:r>
+            <a:r>
+              <a:rPr dirty="0"/>
+              <a:t> и </a:t>
+            </a:r>
+            <a:r>
+              <a:rPr dirty="0" err="1"/>
+              <a:t>услуг</a:t>
+            </a:r>
+            <a:r>
+              <a:rPr dirty="0"/>
+              <a:t>.</a:t>
             </a:r>
           </a:p>
         </p:txBody>
       </p:sp>
     </p:spTree>
   </p:cSld>
+  <p:clrMapOvr>
+    <a:masterClrMapping/>
+  </p:clrMapOvr>
 </p:sld>
 </file>
 
@@ -8204,11 +8995,10 @@
           <a:bodyPr/>
           <a:lstStyle/>
           <a:p>
-            <a:pPr lvl="0" indent="0" marL="0">
-              <a:buNone/>
-            </a:pPr>
-            <a:r>
-              <a:rPr/>
+            <a:pPr marL="0" lvl="0" indent="0">
+              <a:buNone/>
+            </a:pPr>
+            <a:r>
               <a:t>Центральный вопрос</a:t>
             </a:r>
           </a:p>
@@ -8229,7 +9019,7 @@
           <a:bodyPr/>
           <a:lstStyle/>
           <a:p>
-            <a:pPr lvl="0" indent="0" marL="0">
+            <a:pPr marL="0" lvl="0" indent="0">
               <a:buNone/>
             </a:pPr>
             <a:r>
@@ -8238,55 +9028,48 @@
             </a:r>
           </a:p>
           <a:p>
-            <a:pPr lvl="0" indent="0" marL="0">
-              <a:buNone/>
-            </a:pPr>
-            <a:r>
-              <a:rPr/>
+            <a:pPr marL="0" lvl="0" indent="0">
+              <a:buNone/>
+            </a:pPr>
+            <a:r>
               <a:t>Не достаточно назвать закон, стандарт или сертификат.</a:t>
             </a:r>
           </a:p>
           <a:p>
-            <a:pPr lvl="0" indent="0" marL="0">
-              <a:buNone/>
-            </a:pPr>
-            <a:r>
-              <a:rPr/>
+            <a:pPr marL="0" lvl="0" indent="0">
+              <a:buNone/>
+            </a:pPr>
+            <a:r>
               <a:t>Для каждого решения специалист отвечает:</a:t>
             </a:r>
           </a:p>
           <a:p>
             <a:pPr lvl="0"/>
             <a:r>
-              <a:rPr/>
               <a:t>какая норма или условие применяется;</a:t>
             </a:r>
           </a:p>
           <a:p>
             <a:pPr lvl="0"/>
             <a:r>
-              <a:rPr/>
               <a:t>к какому объекту и в каких границах;</a:t>
             </a:r>
           </a:p>
           <a:p>
             <a:pPr lvl="0"/>
             <a:r>
-              <a:rPr/>
               <a:t>что именно организация обязана или решила сделать;</a:t>
             </a:r>
           </a:p>
           <a:p>
             <a:pPr lvl="0"/>
             <a:r>
-              <a:rPr/>
               <a:t>чем подтверждается выполнение;</a:t>
             </a:r>
           </a:p>
           <a:p>
             <a:pPr lvl="0"/>
             <a:r>
-              <a:rPr/>
               <a:t>когда вывод нужно пересмотреть.</a:t>
             </a:r>
           </a:p>
@@ -8294,6 +9077,9 @@
       </p:sp>
     </p:spTree>
   </p:cSld>
+  <p:clrMapOvr>
+    <a:masterClrMapping/>
+  </p:clrMapOvr>
 </p:sld>
 </file>
 
@@ -8329,11 +9115,10 @@
           <a:bodyPr/>
           <a:lstStyle/>
           <a:p>
-            <a:pPr lvl="0" indent="0" marL="0">
-              <a:buNone/>
-            </a:pPr>
-            <a:r>
-              <a:rPr/>
+            <a:pPr marL="0" lvl="0" indent="0">
+              <a:buNone/>
+            </a:pPr>
+            <a:r>
               <a:t>Карта источников</a:t>
             </a:r>
           </a:p>
@@ -8351,7 +9136,7 @@
         </p:nvGraphicFramePr>
         <p:xfrm>
           <a:off x="457200" y="787400"/>
-          <a:ext cx="8229600" cy="3797300"/>
+          <a:ext cx="8229600" cy="1988820"/>
         </p:xfrm>
         <a:graphic>
           <a:graphicData uri="http://schemas.openxmlformats.org/drawingml/2006/table">
@@ -8360,8 +9145,20 @@
                 <a:tableStyleId>{5C22544A-7EE6-4342-B048-85BDC9FD1C3A}</a:tableStyleId>
               </a:tblPr>
               <a:tblGrid>
-                <a:gridCol w="4114800"/>
-                <a:gridCol w="4114800"/>
+                <a:gridCol w="4114800">
+                  <a:extLst>
+                    <a:ext uri="{9D8B030D-6E8A-4147-A177-3AD203B41FA5}">
+                      <a16:colId xmlns:a16="http://schemas.microsoft.com/office/drawing/2014/main" val="20000"/>
+                    </a:ext>
+                  </a:extLst>
+                </a:gridCol>
+                <a:gridCol w="4114800">
+                  <a:extLst>
+                    <a:ext uri="{9D8B030D-6E8A-4147-A177-3AD203B41FA5}">
+                      <a16:colId xmlns:a16="http://schemas.microsoft.com/office/drawing/2014/main" val="20001"/>
+                    </a:ext>
+                  </a:extLst>
+                </a:gridCol>
               </a:tblGrid>
               <a:tr h="0">
                 <a:tc>
@@ -8369,11 +9166,10 @@
                     <a:bodyPr/>
                     <a:lstStyle/>
                     <a:p>
-                      <a:pPr lvl="0" indent="0" marL="0">
-                        <a:buNone/>
-                      </a:pPr>
-                      <a:r>
-                        <a:rPr/>
+                      <a:pPr marL="0" lvl="0" indent="0">
+                        <a:buNone/>
+                      </a:pPr>
+                      <a:r>
                         <a:t>Источник</a:t>
                       </a:r>
                     </a:p>
@@ -8385,17 +9181,21 @@
                     <a:bodyPr/>
                     <a:lstStyle/>
                     <a:p>
-                      <a:pPr lvl="0" indent="0" marL="0">
-                        <a:buNone/>
-                      </a:pPr>
-                      <a:r>
-                        <a:rPr/>
+                      <a:pPr marL="0" lvl="0" indent="0">
+                        <a:buNone/>
+                      </a:pPr>
+                      <a:r>
                         <a:t>Роль</a:t>
                       </a:r>
                     </a:p>
                   </a:txBody>
                   <a:tcPr/>
                 </a:tc>
+                <a:extLst>
+                  <a:ext uri="{0D108BD9-81ED-4DB2-BD59-A6C34878D82A}">
+                    <a16:rowId xmlns:a16="http://schemas.microsoft.com/office/drawing/2014/main" val="10000"/>
+                  </a:ext>
+                </a:extLst>
               </a:tr>
               <a:tr h="0">
                 <a:tc>
@@ -8403,31 +9203,36 @@
                     <a:bodyPr/>
                     <a:lstStyle/>
                     <a:p>
-                      <a:pPr lvl="0" indent="0" marL="0">
-                        <a:buNone/>
-                      </a:pPr>
-                      <a:r>
-                        <a:rPr/>
+                      <a:pPr marL="0" lvl="0" indent="0">
+                        <a:buNone/>
+                      </a:pPr>
+                      <a:r>
                         <a:t>Федеральный закон</a:t>
                       </a:r>
                     </a:p>
                   </a:txBody>
-                </a:tc>
-                <a:tc>
-                  <a:txBody>
-                    <a:bodyPr/>
-                    <a:lstStyle/>
-                    <a:p>
-                      <a:pPr lvl="0" indent="0" marL="0">
-                        <a:buNone/>
-                      </a:pPr>
-                      <a:r>
-                        <a:rPr/>
+                  <a:tcPr/>
+                </a:tc>
+                <a:tc>
+                  <a:txBody>
+                    <a:bodyPr/>
+                    <a:lstStyle/>
+                    <a:p>
+                      <a:pPr marL="0" lvl="0" indent="0">
+                        <a:buNone/>
+                      </a:pPr>
+                      <a:r>
                         <a:t>устанавливает правовую рамку и полномочия</a:t>
                       </a:r>
                     </a:p>
                   </a:txBody>
-                </a:tc>
+                  <a:tcPr/>
+                </a:tc>
+                <a:extLst>
+                  <a:ext uri="{0D108BD9-81ED-4DB2-BD59-A6C34878D82A}">
+                    <a16:rowId xmlns:a16="http://schemas.microsoft.com/office/drawing/2014/main" val="10001"/>
+                  </a:ext>
+                </a:extLst>
               </a:tr>
               <a:tr h="0">
                 <a:tc>
@@ -8435,31 +9240,36 @@
                     <a:bodyPr/>
                     <a:lstStyle/>
                     <a:p>
-                      <a:pPr lvl="0" indent="0" marL="0">
-                        <a:buNone/>
-                      </a:pPr>
-                      <a:r>
-                        <a:rPr/>
+                      <a:pPr marL="0" lvl="0" indent="0">
+                        <a:buNone/>
+                      </a:pPr>
+                      <a:r>
                         <a:t>Подзаконный нормативный акт</a:t>
                       </a:r>
                     </a:p>
                   </a:txBody>
-                </a:tc>
-                <a:tc>
-                  <a:txBody>
-                    <a:bodyPr/>
-                    <a:lstStyle/>
-                    <a:p>
-                      <a:pPr lvl="0" indent="0" marL="0">
-                        <a:buNone/>
-                      </a:pPr>
-                      <a:r>
-                        <a:rPr/>
+                  <a:tcPr/>
+                </a:tc>
+                <a:tc>
+                  <a:txBody>
+                    <a:bodyPr/>
+                    <a:lstStyle/>
+                    <a:p>
+                      <a:pPr marL="0" lvl="0" indent="0">
+                        <a:buNone/>
+                      </a:pPr>
+                      <a:r>
                         <a:t>конкретизирует порядок и требования в пределах компетенции</a:t>
                       </a:r>
                     </a:p>
                   </a:txBody>
-                </a:tc>
+                  <a:tcPr/>
+                </a:tc>
+                <a:extLst>
+                  <a:ext uri="{0D108BD9-81ED-4DB2-BD59-A6C34878D82A}">
+                    <a16:rowId xmlns:a16="http://schemas.microsoft.com/office/drawing/2014/main" val="10002"/>
+                  </a:ext>
+                </a:extLst>
               </a:tr>
               <a:tr h="0">
                 <a:tc>
@@ -8467,31 +9277,36 @@
                     <a:bodyPr/>
                     <a:lstStyle/>
                     <a:p>
-                      <a:pPr lvl="0" indent="0" marL="0">
-                        <a:buNone/>
-                      </a:pPr>
-                      <a:r>
-                        <a:rPr/>
+                      <a:pPr marL="0" lvl="0" indent="0">
+                        <a:buNone/>
+                      </a:pPr>
+                      <a:r>
                         <a:t>Документ по стандартизации</a:t>
                       </a:r>
                     </a:p>
                   </a:txBody>
-                </a:tc>
-                <a:tc>
-                  <a:txBody>
-                    <a:bodyPr/>
-                    <a:lstStyle/>
-                    <a:p>
-                      <a:pPr lvl="0" indent="0" marL="0">
-                        <a:buNone/>
-                      </a:pPr>
-                      <a:r>
-                        <a:rPr/>
+                  <a:tcPr/>
+                </a:tc>
+                <a:tc>
+                  <a:txBody>
+                    <a:bodyPr/>
+                    <a:lstStyle/>
+                    <a:p>
+                      <a:pPr marL="0" lvl="0" indent="0">
+                        <a:buNone/>
+                      </a:pPr>
+                      <a:r>
                         <a:t>описывает согласованные подходы и характеристики</a:t>
                       </a:r>
                     </a:p>
                   </a:txBody>
-                </a:tc>
+                  <a:tcPr/>
+                </a:tc>
+                <a:extLst>
+                  <a:ext uri="{0D108BD9-81ED-4DB2-BD59-A6C34878D82A}">
+                    <a16:rowId xmlns:a16="http://schemas.microsoft.com/office/drawing/2014/main" val="10003"/>
+                  </a:ext>
+                </a:extLst>
               </a:tr>
               <a:tr h="0">
                 <a:tc>
@@ -8499,31 +9314,36 @@
                     <a:bodyPr/>
                     <a:lstStyle/>
                     <a:p>
-                      <a:pPr lvl="0" indent="0" marL="0">
-                        <a:buNone/>
-                      </a:pPr>
-                      <a:r>
-                        <a:rPr/>
+                      <a:pPr marL="0" lvl="0" indent="0">
+                        <a:buNone/>
+                      </a:pPr>
+                      <a:r>
                         <a:t>Договор, закупка, локальный акт</a:t>
                       </a:r>
                     </a:p>
                   </a:txBody>
-                </a:tc>
-                <a:tc>
-                  <a:txBody>
-                    <a:bodyPr/>
-                    <a:lstStyle/>
-                    <a:p>
-                      <a:pPr lvl="0" indent="0" marL="0">
-                        <a:buNone/>
-                      </a:pPr>
-                      <a:r>
-                        <a:rPr/>
+                  <a:tcPr/>
+                </a:tc>
+                <a:tc>
+                  <a:txBody>
+                    <a:bodyPr/>
+                    <a:lstStyle/>
+                    <a:p>
+                      <a:pPr marL="0" lvl="0" indent="0">
+                        <a:buNone/>
+                      </a:pPr>
+                      <a:r>
                         <a:t>задаёт обязательства конкретной организации</a:t>
                       </a:r>
                     </a:p>
                   </a:txBody>
-                </a:tc>
+                  <a:tcPr/>
+                </a:tc>
+                <a:extLst>
+                  <a:ext uri="{0D108BD9-81ED-4DB2-BD59-A6C34878D82A}">
+                    <a16:rowId xmlns:a16="http://schemas.microsoft.com/office/drawing/2014/main" val="10004"/>
+                  </a:ext>
+                </a:extLst>
               </a:tr>
               <a:tr h="0">
                 <a:tc>
@@ -8531,31 +9351,36 @@
                     <a:bodyPr/>
                     <a:lstStyle/>
                     <a:p>
-                      <a:pPr lvl="0" indent="0" marL="0">
-                        <a:buNone/>
-                      </a:pPr>
-                      <a:r>
-                        <a:rPr/>
+                      <a:pPr marL="0" lvl="0" indent="0">
+                        <a:buNone/>
+                      </a:pPr>
+                      <a:r>
                         <a:t>Сертификат, протокол, журнал</a:t>
                       </a:r>
                     </a:p>
                   </a:txBody>
-                </a:tc>
-                <a:tc>
-                  <a:txBody>
-                    <a:bodyPr/>
-                    <a:lstStyle/>
-                    <a:p>
-                      <a:pPr lvl="0" indent="0" marL="0">
-                        <a:buNone/>
-                      </a:pPr>
-                      <a:r>
-                        <a:rPr/>
+                  <a:tcPr/>
+                </a:tc>
+                <a:tc>
+                  <a:txBody>
+                    <a:bodyPr/>
+                    <a:lstStyle/>
+                    <a:p>
+                      <a:pPr marL="0" lvl="0" indent="0">
+                        <a:buNone/>
+                      </a:pPr>
+                      <a:r>
                         <a:t>служит доказательством в своей области действия</a:t>
                       </a:r>
                     </a:p>
                   </a:txBody>
-                </a:tc>
+                  <a:tcPr/>
+                </a:tc>
+                <a:extLst>
+                  <a:ext uri="{0D108BD9-81ED-4DB2-BD59-A6C34878D82A}">
+                    <a16:rowId xmlns:a16="http://schemas.microsoft.com/office/drawing/2014/main" val="10005"/>
+                  </a:ext>
+                </a:extLst>
               </a:tr>
             </a:tbl>
           </a:graphicData>
@@ -8563,6 +9388,9 @@
       </p:graphicFrame>
     </p:spTree>
   </p:cSld>
+  <p:clrMapOvr>
+    <a:masterClrMapping/>
+  </p:clrMapOvr>
 </p:sld>
 </file>
 
@@ -8598,11 +9426,10 @@
           <a:bodyPr/>
           <a:lstStyle/>
           <a:p>
-            <a:pPr lvl="0" indent="0" marL="0">
-              <a:buNone/>
-            </a:pPr>
-            <a:r>
-              <a:rPr/>
+            <a:pPr marL="0" lvl="0" indent="0">
+              <a:buNone/>
+            </a:pPr>
+            <a:r>
               <a:t>Лестница актов</a:t>
             </a:r>
           </a:p>
@@ -8623,7 +9450,7 @@
           <a:bodyPr/>
           <a:lstStyle/>
           <a:p>
-            <a:pPr lvl="0" indent="0" marL="0">
+            <a:pPr marL="0" lvl="0" indent="0">
               <a:buNone/>
             </a:pPr>
             <a:r>
@@ -8632,65 +9459,58 @@
             </a:r>
           </a:p>
           <a:p>
-            <a:pPr lvl="0" indent="-342900" marL="342900">
+            <a:pPr marL="342900" lvl="0" indent="-342900">
               <a:buAutoNum type="arabicPeriod"/>
             </a:pPr>
             <a:r>
-              <a:rPr/>
               <a:t>Конституция РФ</a:t>
             </a:r>
           </a:p>
           <a:p>
-            <a:pPr lvl="0" indent="-342900" marL="342900">
+            <a:pPr marL="342900" lvl="0" indent="-342900">
               <a:buAutoNum type="arabicPeriod"/>
             </a:pPr>
             <a:r>
-              <a:rPr/>
               <a:t>Международные договоры</a:t>
             </a:r>
           </a:p>
           <a:p>
-            <a:pPr lvl="0" indent="-342900" marL="342900">
+            <a:pPr marL="342900" lvl="0" indent="-342900">
               <a:buAutoNum type="arabicPeriod"/>
             </a:pPr>
             <a:r>
-              <a:rPr/>
               <a:t>Федеральные конституционные законы и федеральные законы</a:t>
             </a:r>
           </a:p>
           <a:p>
-            <a:pPr lvl="0" indent="-342900" marL="342900">
+            <a:pPr marL="342900" lvl="0" indent="-342900">
               <a:buAutoNum type="arabicPeriod"/>
             </a:pPr>
             <a:r>
-              <a:rPr/>
               <a:t>Указы Президента РФ</a:t>
             </a:r>
           </a:p>
           <a:p>
-            <a:pPr lvl="0" indent="-342900" marL="342900">
+            <a:pPr marL="342900" lvl="0" indent="-342900">
               <a:buAutoNum type="arabicPeriod"/>
             </a:pPr>
             <a:r>
-              <a:rPr/>
               <a:t>Постановления Правительства РФ</a:t>
             </a:r>
           </a:p>
           <a:p>
-            <a:pPr lvl="0" indent="-342900" marL="342900">
+            <a:pPr marL="342900" lvl="0" indent="-342900">
               <a:buAutoNum type="arabicPeriod"/>
             </a:pPr>
             <a:r>
-              <a:rPr/>
               <a:t>Акты федеральных органов исполнительной власти</a:t>
             </a:r>
           </a:p>
           <a:p>
-            <a:pPr lvl="0" indent="-342900" marL="342900">
+            <a:pPr marL="342900" lvl="0" indent="-342900">
               <a:buAutoNum type="arabicPeriod"/>
             </a:pPr>
             <a:r>
-              <a:rPr/>
               <a:t>Договоры и локальные документы (обязательны для участников, но не НПА)</a:t>
             </a:r>
           </a:p>
@@ -8698,6 +9518,9 @@
       </p:sp>
     </p:spTree>
   </p:cSld>
+  <p:clrMapOvr>
+    <a:masterClrMapping/>
+  </p:clrMapOvr>
 </p:sld>
 </file>
 
@@ -8733,11 +9556,10 @@
           <a:bodyPr/>
           <a:lstStyle/>
           <a:p>
-            <a:pPr lvl="0" indent="0" marL="0">
-              <a:buNone/>
-            </a:pPr>
-            <a:r>
-              <a:rPr/>
+            <a:pPr marL="0" lvl="0" indent="0">
+              <a:buNone/>
+            </a:pPr>
+            <a:r>
               <a:t>Вопрос 2</a:t>
             </a:r>
           </a:p>
@@ -8758,7 +9580,7 @@
           <a:bodyPr/>
           <a:lstStyle/>
           <a:p>
-            <a:pPr lvl="0" indent="0" marL="0">
+            <a:pPr marL="0" lvl="0" indent="0">
               <a:buNone/>
             </a:pPr>
             <a:r>
@@ -8769,21 +9591,18 @@
           <a:p>
             <a:pPr lvl="0"/>
             <a:r>
-              <a:rPr/>
               <a:t>Назовите по одному примеру документа для каждого уровня лестницы.</a:t>
             </a:r>
           </a:p>
           <a:p>
             <a:pPr lvl="0"/>
             <a:r>
-              <a:rPr/>
               <a:t>Назовите документ, который в лестницу не входит.</a:t>
             </a:r>
           </a:p>
           <a:p>
             <a:pPr lvl="0"/>
             <a:r>
-              <a:rPr/>
               <a:t>Проверьте: не попали ли стандарты и методические рекомендации на один уровень с приказами?</a:t>
             </a:r>
           </a:p>
@@ -8791,6 +9610,9 @@
       </p:sp>
     </p:spTree>
   </p:cSld>
+  <p:clrMapOvr>
+    <a:masterClrMapping/>
+  </p:clrMapOvr>
 </p:sld>
 </file>
 
@@ -8826,11 +9648,10 @@
           <a:bodyPr/>
           <a:lstStyle/>
           <a:p>
-            <a:pPr lvl="0" indent="0" marL="0">
-              <a:buNone/>
-            </a:pPr>
-            <a:r>
-              <a:rPr/>
+            <a:pPr marL="0" lvl="0" indent="0">
+              <a:buNone/>
+            </a:pPr>
+            <a:r>
               <a:t>Три коллизии</a:t>
             </a:r>
           </a:p>
@@ -8851,7 +9672,7 @@
           <a:bodyPr/>
           <a:lstStyle/>
           <a:p>
-            <a:pPr lvl="0" indent="0" marL="0">
+            <a:pPr marL="0" lvl="0" indent="0">
               <a:buNone/>
             </a:pPr>
             <a:r>
@@ -8862,30 +9683,26 @@
           <a:p>
             <a:pPr lvl="0"/>
             <a:r>
-              <a:rPr/>
               <a:t>Общее и специальное: общие положения о стандартизации не отменяют специальные требования к значимым объектам КИИ.</a:t>
             </a:r>
           </a:p>
           <a:p>
             <a:pPr lvl="0"/>
             <a:r>
-              <a:rPr/>
               <a:t>Разные редакции во времени: фиксируем редакцию и дату.</a:t>
             </a:r>
           </a:p>
           <a:p>
             <a:pPr lvl="0"/>
             <a:r>
-              <a:rPr/>
               <a:t>Формально не противоречит, но не применим: акт для других адресатов или предмета нельзя применять «по аналогии».</a:t>
             </a:r>
           </a:p>
           <a:p>
-            <a:pPr lvl="0" indent="0" marL="0">
-              <a:buNone/>
-            </a:pPr>
-            <a:r>
-              <a:rPr/>
+            <a:pPr marL="0" lvl="0" indent="0">
+              <a:buNone/>
+            </a:pPr>
+            <a:r>
               <a:t>Два вопроса: не противоречит ли акту большей силы? применим ли к объекту и ситуации?</a:t>
             </a:r>
           </a:p>
@@ -8893,6 +9710,9 @@
       </p:sp>
     </p:spTree>
   </p:cSld>
+  <p:clrMapOvr>
+    <a:masterClrMapping/>
+  </p:clrMapOvr>
 </p:sld>
 </file>
 
@@ -8928,11 +9748,10 @@
           <a:bodyPr/>
           <a:lstStyle/>
           <a:p>
-            <a:pPr lvl="0" indent="0" marL="0">
-              <a:buNone/>
-            </a:pPr>
-            <a:r>
-              <a:rPr/>
+            <a:pPr marL="0" lvl="0" indent="0">
+              <a:buNone/>
+            </a:pPr>
+            <a:r>
               <a:t>Пять проверок применимости</a:t>
             </a:r>
           </a:p>
@@ -8953,7 +9772,7 @@
           <a:bodyPr/>
           <a:lstStyle/>
           <a:p>
-            <a:pPr lvl="0" indent="0" marL="0">
+            <a:pPr marL="0" lvl="0" indent="0">
               <a:buNone/>
             </a:pPr>
             <a:r>
@@ -8962,56 +9781,50 @@
             </a:r>
           </a:p>
           <a:p>
-            <a:pPr lvl="0" indent="-342900" marL="342900">
+            <a:pPr marL="342900" lvl="0" indent="-342900">
               <a:buAutoNum type="arabicPeriod"/>
             </a:pPr>
             <a:r>
-              <a:rPr/>
               <a:t>Кто адресат?</a:t>
             </a:r>
           </a:p>
           <a:p>
-            <a:pPr lvl="0" indent="-342900" marL="342900">
+            <a:pPr marL="342900" lvl="0" indent="-342900">
               <a:buAutoNum type="arabicPeriod"/>
             </a:pPr>
             <a:r>
-              <a:rPr/>
               <a:t>Какой предмет?</a:t>
             </a:r>
           </a:p>
           <a:p>
-            <a:pPr lvl="0" indent="-342900" marL="342900">
+            <a:pPr marL="342900" lvl="0" indent="-342900">
               <a:buAutoNum type="arabicPeriod"/>
             </a:pPr>
             <a:r>
-              <a:rPr/>
               <a:t>Какая редакция и дата?</a:t>
             </a:r>
           </a:p>
           <a:p>
-            <a:pPr lvl="0" indent="-342900" marL="342900">
+            <a:pPr marL="342900" lvl="0" indent="-342900">
               <a:buAutoNum type="arabicPeriod"/>
             </a:pPr>
             <a:r>
-              <a:rPr/>
               <a:t>Какова сфера и условие (исключения, переходные положения)?</a:t>
             </a:r>
           </a:p>
           <a:p>
-            <a:pPr lvl="0" indent="-342900" marL="342900">
+            <a:pPr marL="342900" lvl="0" indent="-342900">
               <a:buAutoNum type="arabicPeriod"/>
             </a:pPr>
             <a:r>
-              <a:rPr/>
               <a:t>Какова связь с договором — не расширяет ли он обязательность?</a:t>
             </a:r>
           </a:p>
           <a:p>
-            <a:pPr lvl="0" indent="0" marL="0">
-              <a:buNone/>
-            </a:pPr>
-            <a:r>
-              <a:rPr/>
+            <a:pPr marL="0" lvl="0" indent="0">
+              <a:buNone/>
+            </a:pPr>
+            <a:r>
               <a:t>Ошибиться можно в обе стороны: недооценить требование или применить его к объекту, который не является значимым объектом КИИ.</a:t>
             </a:r>
           </a:p>
@@ -9019,6 +9832,9 @@
       </p:sp>
     </p:spTree>
   </p:cSld>
+  <p:clrMapOvr>
+    <a:masterClrMapping/>
+  </p:clrMapOvr>
 </p:sld>
 </file>
 
@@ -9340,265 +10156,4 @@
   </a:objectDefaults>
   <a:extraClrSchemeLst/>
 </a:theme>
-</file>
-
-<file path=ppt/theme/theme2.xml><?xml version="1.0" encoding="utf-8"?>
-<a:theme xmlns:a="http://schemas.openxmlformats.org/drawingml/2006/main" name="Office Theme">
-  <a:themeElements>
-    <a:clrScheme name="Office">
-      <a:dk1>
-        <a:sysClr val="windowText" lastClr="000000"/>
-      </a:dk1>
-      <a:lt1>
-        <a:sysClr val="window" lastClr="FFFFFF"/>
-      </a:lt1>
-      <a:dk2>
-        <a:srgbClr val="44546A"/>
-      </a:dk2>
-      <a:lt2>
-        <a:srgbClr val="E7E6E6"/>
-      </a:lt2>
-      <a:accent1>
-        <a:srgbClr val="5B9BD5"/>
-      </a:accent1>
-      <a:accent2>
-        <a:srgbClr val="ED7D31"/>
-      </a:accent2>
-      <a:accent3>
-        <a:srgbClr val="A5A5A5"/>
-      </a:accent3>
-      <a:accent4>
-        <a:srgbClr val="FFC000"/>
-      </a:accent4>
-      <a:accent5>
-        <a:srgbClr val="4472C4"/>
-      </a:accent5>
-      <a:accent6>
-        <a:srgbClr val="70AD47"/>
-      </a:accent6>
-      <a:hlink>
-        <a:srgbClr val="0563C1"/>
-      </a:hlink>
-      <a:folHlink>
-        <a:srgbClr val="954F72"/>
-      </a:folHlink>
-    </a:clrScheme>
-    <a:fontScheme name="Office">
-      <a:majorFont>
-        <a:latin typeface="Calibri Light" panose="020F0302020204030204"/>
-        <a:ea typeface=""/>
-        <a:cs typeface=""/>
-        <a:font script="Jpan" typeface="ＭＳ Ｐゴシック"/>
-        <a:font script="Hang" typeface="맑은 고딕"/>
-        <a:font script="Hans" typeface="宋体"/>
-        <a:font script="Hant" typeface="新細明體"/>
-        <a:font script="Arab" typeface="Times New Roman"/>
-        <a:font script="Hebr" typeface="Times New Roman"/>
-        <a:font script="Thai" typeface="Angsana New"/>
-        <a:font script="Ethi" typeface="Nyala"/>
-        <a:font script="Beng" typeface="Vrinda"/>
-        <a:font script="Gujr" typeface="Shruti"/>
-        <a:font script="Khmr" typeface="MoolBoran"/>
-        <a:font script="Knda" typeface="Tunga"/>
-        <a:font script="Guru" typeface="Raavi"/>
-        <a:font script="Cans" typeface="Euphemia"/>
-        <a:font script="Cher" typeface="Plantagenet Cherokee"/>
-        <a:font script="Yiii" typeface="Microsoft Yi Baiti"/>
-        <a:font script="Tibt" typeface="Microsoft Himalaya"/>
-        <a:font script="Thaa" typeface="MV Boli"/>
-        <a:font script="Deva" typeface="Mangal"/>
-        <a:font script="Telu" typeface="Gautami"/>
-        <a:font script="Taml" typeface="Latha"/>
-        <a:font script="Syrc" typeface="Estrangelo Edessa"/>
-        <a:font script="Orya" typeface="Kalinga"/>
-        <a:font script="Mlym" typeface="Kartika"/>
-        <a:font script="Laoo" typeface="DokChampa"/>
-        <a:font script="Sinh" typeface="Iskoola Pota"/>
-        <a:font script="Mong" typeface="Mongolian Baiti"/>
-        <a:font script="Viet" typeface="Times New Roman"/>
-        <a:font script="Uigh" typeface="Microsoft Uighur"/>
-        <a:font script="Geor" typeface="Sylfaen"/>
-      </a:majorFont>
-      <a:minorFont>
-        <a:latin typeface="Calibri" panose="020F0502020204030204"/>
-        <a:ea typeface=""/>
-        <a:cs typeface=""/>
-        <a:font script="Jpan" typeface="ＭＳ Ｐゴシック"/>
-        <a:font script="Hang" typeface="맑은 고딕"/>
-        <a:font script="Hans" typeface="宋体"/>
-        <a:font script="Hant" typeface="新細明體"/>
-        <a:font script="Arab" typeface="Arial"/>
-        <a:font script="Hebr" typeface="Arial"/>
-        <a:font script="Thai" typeface="Cordia New"/>
-        <a:font script="Ethi" typeface="Nyala"/>
-        <a:font script="Beng" typeface="Vrinda"/>
-        <a:font script="Gujr" typeface="Shruti"/>
-        <a:font script="Khmr" typeface="DaunPenh"/>
-        <a:font script="Knda" typeface="Tunga"/>
-        <a:font script="Guru" typeface="Raavi"/>
-        <a:font script="Cans" typeface="Euphemia"/>
-        <a:font script="Cher" typeface="Plantagenet Cherokee"/>
-        <a:font script="Yiii" typeface="Microsoft Yi Baiti"/>
-        <a:font script="Tibt" typeface="Microsoft Himalaya"/>
-        <a:font script="Thaa" typeface="MV Boli"/>
-        <a:font script="Deva" typeface="Mangal"/>
-        <a:font script="Telu" typeface="Gautami"/>
-        <a:font script="Taml" typeface="Latha"/>
-        <a:font script="Syrc" typeface="Estrangelo Edessa"/>
-        <a:font script="Orya" typeface="Kalinga"/>
-        <a:font script="Mlym" typeface="Kartika"/>
-        <a:font script="Laoo" typeface="DokChampa"/>
-        <a:font script="Sinh" typeface="Iskoola Pota"/>
-        <a:font script="Mong" typeface="Mongolian Baiti"/>
-        <a:font script="Viet" typeface="Arial"/>
-        <a:font script="Uigh" typeface="Microsoft Uighur"/>
-        <a:font script="Geor" typeface="Sylfaen"/>
-      </a:minorFont>
-    </a:fontScheme>
-    <a:fmtScheme name="Office">
-      <a:fillStyleLst>
-        <a:solidFill>
-          <a:schemeClr val="phClr"/>
-        </a:solidFill>
-        <a:gradFill rotWithShape="1">
-          <a:gsLst>
-            <a:gs pos="0">
-              <a:schemeClr val="phClr">
-                <a:lumMod val="110000"/>
-                <a:satMod val="105000"/>
-                <a:tint val="67000"/>
-              </a:schemeClr>
-            </a:gs>
-            <a:gs pos="50000">
-              <a:schemeClr val="phClr">
-                <a:lumMod val="105000"/>
-                <a:satMod val="103000"/>
-                <a:tint val="73000"/>
-              </a:schemeClr>
-            </a:gs>
-            <a:gs pos="100000">
-              <a:schemeClr val="phClr">
-                <a:lumMod val="105000"/>
-                <a:satMod val="109000"/>
-                <a:tint val="81000"/>
-              </a:schemeClr>
-            </a:gs>
-          </a:gsLst>
-          <a:lin ang="5400000" scaled="0"/>
-        </a:gradFill>
-        <a:gradFill rotWithShape="1">
-          <a:gsLst>
-            <a:gs pos="0">
-              <a:schemeClr val="phClr">
-                <a:satMod val="103000"/>
-                <a:lumMod val="102000"/>
-                <a:tint val="94000"/>
-              </a:schemeClr>
-            </a:gs>
-            <a:gs pos="50000">
-              <a:schemeClr val="phClr">
-                <a:satMod val="110000"/>
-                <a:lumMod val="100000"/>
-                <a:shade val="100000"/>
-              </a:schemeClr>
-            </a:gs>
-            <a:gs pos="100000">
-              <a:schemeClr val="phClr">
-                <a:lumMod val="99000"/>
-                <a:satMod val="120000"/>
-                <a:shade val="78000"/>
-              </a:schemeClr>
-            </a:gs>
-          </a:gsLst>
-          <a:lin ang="5400000" scaled="0"/>
-        </a:gradFill>
-      </a:fillStyleLst>
-      <a:lnStyleLst>
-        <a:ln w="6350" cap="flat" cmpd="sng" algn="ctr">
-          <a:solidFill>
-            <a:schemeClr val="phClr"/>
-          </a:solidFill>
-          <a:prstDash val="solid"/>
-          <a:miter lim="800000"/>
-        </a:ln>
-        <a:ln w="12700" cap="flat" cmpd="sng" algn="ctr">
-          <a:solidFill>
-            <a:schemeClr val="phClr"/>
-          </a:solidFill>
-          <a:prstDash val="solid"/>
-          <a:miter lim="800000"/>
-        </a:ln>
-        <a:ln w="19050" cap="flat" cmpd="sng" algn="ctr">
-          <a:solidFill>
-            <a:schemeClr val="phClr"/>
-          </a:solidFill>
-          <a:prstDash val="solid"/>
-          <a:miter lim="800000"/>
-        </a:ln>
-      </a:lnStyleLst>
-      <a:effectStyleLst>
-        <a:effectStyle>
-          <a:effectLst/>
-        </a:effectStyle>
-        <a:effectStyle>
-          <a:effectLst/>
-        </a:effectStyle>
-        <a:effectStyle>
-          <a:effectLst>
-            <a:outerShdw blurRad="57150" dist="19050" dir="5400000" algn="ctr" rotWithShape="0">
-              <a:srgbClr val="000000">
-                <a:alpha val="63000"/>
-              </a:srgbClr>
-            </a:outerShdw>
-          </a:effectLst>
-        </a:effectStyle>
-      </a:effectStyleLst>
-      <a:bgFillStyleLst>
-        <a:solidFill>
-          <a:schemeClr val="phClr"/>
-        </a:solidFill>
-        <a:solidFill>
-          <a:schemeClr val="phClr">
-            <a:tint val="95000"/>
-            <a:satMod val="170000"/>
-          </a:schemeClr>
-        </a:solidFill>
-        <a:gradFill rotWithShape="1">
-          <a:gsLst>
-            <a:gs pos="0">
-              <a:schemeClr val="phClr">
-                <a:tint val="93000"/>
-                <a:satMod val="150000"/>
-                <a:shade val="98000"/>
-                <a:lumMod val="102000"/>
-              </a:schemeClr>
-            </a:gs>
-            <a:gs pos="50000">
-              <a:schemeClr val="phClr">
-                <a:tint val="98000"/>
-                <a:satMod val="130000"/>
-                <a:shade val="90000"/>
-                <a:lumMod val="103000"/>
-              </a:schemeClr>
-            </a:gs>
-            <a:gs pos="100000">
-              <a:schemeClr val="phClr">
-                <a:shade val="63000"/>
-                <a:satMod val="120000"/>
-              </a:schemeClr>
-            </a:gs>
-          </a:gsLst>
-          <a:lin ang="5400000" scaled="0"/>
-        </a:gradFill>
-      </a:bgFillStyleLst>
-    </a:fmtScheme>
-  </a:themeElements>
-  <a:objectDefaults/>
-  <a:extraClrSchemeLst/>
-  <a:extLst>
-    <a:ext uri="{05A4C25C-085E-4340-85A3-A5531E510DB2}">
-      <thm15:themeFamily xmlns:thm15="http://schemas.microsoft.com/office/thememl/2012/main" name="Office Theme" id="{62F939B6-93AF-4DB8-9C6B-D6C7DFDC589F}" vid="{4A3C46E8-61CC-4603-A589-7422A47A8E4A}"/>
-    </a:ext>
-  </a:extLst>
-</a:theme>
 </file>